--- a/presentation/QuantumHeadache_AntennaTilt.pptx
+++ b/presentation/QuantumHeadache_AntennaTilt.pptx
@@ -6645,6 +6645,101 @@
         </p:nvSpPr>
         <p:spPr>
           <a:xfrm>
+            <a:off x="548640" y="5074920"/>
+            <a:ext cx="11247120" cy="365760"/>
+          </a:xfrm>
+          <a:prstGeom prst="rect">
+            <a:avLst/>
+          </a:prstGeom>
+          <a:noFill/>
+          <a:ln/>
+        </p:spPr>
+        <p:txBody>
+          <a:bodyPr wrap="square" lIns="0" tIns="0" rIns="0" bIns="0" rtlCol="0" anchor="ctr"/>
+          <a:lstStyle/>
+          <a:p>
+            <a:pPr indent="0" marL="0">
+              <a:buNone/>
+            </a:pPr>
+            <a:r>
+              <a:rPr lang="en-US" sz="1600" dirty="0">
+                <a:solidFill>
+                  <a:srgbClr val="A9B4D0"/>
+                </a:solidFill>
+                <a:latin typeface="Calibri" pitchFamily="34" charset="0"/>
+                <a:ea typeface="Calibri" pitchFamily="34" charset="-122"/>
+                <a:cs typeface="Calibri" pitchFamily="34" charset="-120"/>
+              </a:rPr>
+              <a:t>Demo video: </a:t>
+            </a:r>
+            <a:pPr indent="0" marL="0">
+              <a:buNone/>
+            </a:pPr>
+            <a:r>
+              <a:rPr lang="en-US" sz="1600" u="sng" dirty="0">
+                <a:solidFill>
+                  <a:srgbClr val="2BD4C2"/>
+                </a:solidFill>
+                <a:latin typeface="Calibri" pitchFamily="34" charset="0"/>
+                <a:ea typeface="Calibri" pitchFamily="34" charset="-122"/>
+                <a:cs typeface="Calibri" pitchFamily="34" charset="-120"/>
+                <a:hlinkClick r:id="rId1" invalidUrl="" action="" tgtFrame="" tooltip="" history="1" highlightClick="0" endSnd="0">
+                  <a:extLst>
+                    <a:ext uri="{A12FA001-AC4F-418D-AE19-62706E023703}">
+                      <ahyp:hlinkClr xmlns:ahyp="http://schemas.microsoft.com/office/drawing/2018/hyperlinkcolor" val="tx"/>
+                    </a:ext>
+                  </a:extLst>
+                </a:hlinkClick>
+              </a:rPr>
+              <a:t>youtu.be/OSEtTWnRQhc</a:t>
+            </a:r>
+            <a:pPr indent="0" marL="0">
+              <a:buNone/>
+            </a:pPr>
+            <a:r>
+              <a:rPr lang="en-US" sz="1600" dirty="0">
+                <a:solidFill>
+                  <a:srgbClr val="A9B4D0"/>
+                </a:solidFill>
+                <a:latin typeface="Calibri" pitchFamily="34" charset="0"/>
+                <a:ea typeface="Calibri" pitchFamily="34" charset="-122"/>
+                <a:cs typeface="Calibri" pitchFamily="34" charset="-120"/>
+              </a:rPr>
+              <a:t>     Code: </a:t>
+            </a:r>
+            <a:pPr indent="0" marL="0">
+              <a:buNone/>
+            </a:pPr>
+            <a:r>
+              <a:rPr lang="en-US" sz="1600" u="sng" dirty="0">
+                <a:solidFill>
+                  <a:srgbClr val="2BD4C2"/>
+                </a:solidFill>
+                <a:latin typeface="Calibri" pitchFamily="34" charset="0"/>
+                <a:ea typeface="Calibri" pitchFamily="34" charset="-122"/>
+                <a:cs typeface="Calibri" pitchFamily="34" charset="-120"/>
+                <a:hlinkClick r:id="rId2" invalidUrl="" action="" tgtFrame="" tooltip="" history="1" highlightClick="0" endSnd="0">
+                  <a:extLst>
+                    <a:ext uri="{A12FA001-AC4F-418D-AE19-62706E023703}">
+                      <ahyp:hlinkClr xmlns:ahyp="http://schemas.microsoft.com/office/drawing/2018/hyperlinkcolor" val="tx"/>
+                    </a:ext>
+                  </a:extLst>
+                </a:hlinkClick>
+              </a:rPr>
+              <a:t>github.com/zuwasi/quantum-headache-antenna-tilt</a:t>
+            </a:r>
+            <a:endParaRPr lang="en-US" sz="1600" dirty="0"/>
+          </a:p>
+        </p:txBody>
+      </p:sp>
+      <p:sp>
+        <p:nvSpPr>
+          <p:cNvPr id="10" name="Text 7"/>
+          <p:cNvSpPr/>
+          <p:nvPr/>
+        </p:nvSpPr>
+        <p:spPr>
+          <a:xfrm>
             <a:off x="548640" y="5669280"/>
             <a:ext cx="11247120" cy="457200"/>
           </a:xfrm>

--- a/presentation/QuantumHeadache_AntennaTilt.pptx
+++ b/presentation/QuantumHeadache_AntennaTilt.pptx
@@ -602,7 +602,7 @@
           <a:p>
             <a:r>
               <a:rPr lang="en-US" dirty="0"/>
-              <a:t>4:30–4:40. Judges asked for trust: the classical optimum, its uniqueness and the bit encoding are theorems in Lean 4 with Mathlib, checked by kernel decision procedures over all 4096 cases. No sorry.</a:t>
+              <a:t>4:10–4:30. Optimising angles on the sampler alone is hard: a random start sits on the plateau and COBYLA cannot see a gradient through shot noise. Warm-starting from the Wolfram angles gives the best result immediately. That is our practical recipe.</a:t>
             </a:r>
             <a:endParaRPr lang="en-US" dirty="0"/>
           </a:p>
@@ -690,7 +690,7 @@
           <a:p>
             <a:r>
               <a:rPr lang="en-US" dirty="0"/>
-              <a:t>4:40–4:47. Scaling story: binary encoding grows with log of the level count; the Hamiltonian stays quadratic so the circuit stays shallow. Grover is the long-term alternative but needs error correction.</a:t>
+              <a:t>4:30–4:40. Judges asked for trust: the classical optimum, its uniqueness and the bit encoding are theorems in Lean 4 with Mathlib, checked by kernel decision procedures over all 4096 cases. No sorry.</a:t>
             </a:r>
             <a:endParaRPr lang="en-US" dirty="0"/>
           </a:p>
@@ -778,7 +778,7 @@
           <a:p>
             <a:r>
               <a:rPr lang="en-US" dirty="0"/>
-              <a:t>4:47–4:55. Whole-network story: cluster regions by a classical feature vector, k=5; each group is one QAOA job optimising its antennas jointly, 2 qubits per antenna; refine only where utility still improves. Our 12-qubit real-data run is one leaf. Two assumptions stated: shared plan within a group, no cross-group interference at a level.</a:t>
+              <a:t>Both encodings were tried by the team. The 5-qubit pack of 27 configurations leaves 5 invalid states; QAOA learns to avoid them but gives no amplification of the optimum (0.5 to 1.2 times uniform). Two qubits per sector has no invalid states, a 2-local Hamiltonian, 27 times amplification at p = 1, and extends to 10 levels with 4 qubits per sector.</a:t>
             </a:r>
             <a:endParaRPr lang="en-US" dirty="0"/>
           </a:p>
@@ -866,7 +866,7 @@
           <a:p>
             <a:r>
               <a:rPr lang="en-US" dirty="0"/>
-              <a:t>4:55–5:00. Close: everything is reproducible from the group folder with wolframscript, python and lake. Thank you.</a:t>
+              <a:t>Close with the group benchmark: one shared plan scores 1.379, per-region exact search 1.838 with 48 jobs, the hierarchy with QAOA 1.547 with 10 jobs; cycle 3 reaches 95 percent of the ceiling. Everything is reproducible from the GitHub repo; the demo video is on YouTube.</a:t>
             </a:r>
             <a:endParaRPr lang="en-US" dirty="0"/>
           </a:p>
@@ -954,7 +954,7 @@
           <a:p>
             <a:r>
               <a:rPr lang="en-US" dirty="0"/>
-              <a:t>0:20–1:00. Data: opencellid_il2.csv, two 3-sector sites, interference matrix from geometry. 4096 plans is small on purpose: it lets us check the quantum answer exactly. The real operator problem (hundreds of antennas, 10 levels) has no exact classical check — that is where QAOA is meant to go.</a:t>
+              <a:t>Motivation from the group deck: customers, hexagonal cells with three 120-degree sectors, the interaction region R where three sectors overlap, and the demand-weighted utility U. Our real-data cost function is the same form with fixed weights.</a:t>
             </a:r>
             <a:endParaRPr lang="en-US" dirty="0"/>
           </a:p>
@@ -1042,7 +1042,7 @@
           <a:p>
             <a:r>
               <a:rPr lang="en-US" dirty="0"/>
-              <a:t>1:00–1:40. Each antenna is a 2-bit number. Substituting q=(1−Z)/2 into the quadratic cost gives a Hamiltonian with only Z and ZZ terms — 73 in total, computed by gates/pauli_decomposition.py and checked against the full cost table. 2-local means the phase layer is 72 RZ rotations and CX ladders; no expensive multi-controlled gates.</a:t>
+              <a:t>The whole-network architecture from the group: cluster regions by a classical feature vector, one QAOA job per group, assign the plan to all regions in the group, evaluate global utility, then re-cluster only the group with the most variation. Our 12-qubit real-data run is the leaf solver in step 4. Two assumptions are stated explicitly.</a:t>
             </a:r>
             <a:endParaRPr lang="en-US" dirty="0"/>
           </a:p>
@@ -1130,7 +1130,7 @@
           <a:p>
             <a:r>
               <a:rPr lang="en-US" dirty="0"/>
-              <a:t>1:40–2:10. The Qmod program uses Classiq's phase() on a QNum arithmetic expression, so the compiler builds the ZZ ladder for us. Transpiled: 12 qubits, depth 59 for one layer. We exported QASM3 and cross-checked a hand-written QASM2 of the same layer with Qiskit — three engines, same expectation value.</a:t>
+              <a:t>0:20–1:00. Data: opencellid_il2.csv, two 3-sector sites, interference matrix from geometry. 4096 plans is small on purpose: it lets us check the quantum answer exactly. The real operator problem (hundreds of antennas, 10 levels) has no exact classical check — that is where QAOA is meant to go.</a:t>
             </a:r>
             <a:endParaRPr lang="en-US" dirty="0"/>
           </a:p>
@@ -1218,7 +1218,7 @@
           <a:p>
             <a:r>
               <a:rPr lang="en-US" dirty="0"/>
-              <a:t>2:10–2:50. Wolfram lets us do the full 4096-dimensional statevector and scan the whole (γ,β) plane. The optimum is a narrow valley; most of the plane is a plateau — that will matter on Classiq. These optimal angles are exported to JSON and used as warm start in the Classiq run.</a:t>
+              <a:t>1:00–1:40. Each antenna is a 2-bit number. Substituting q=(1−Z)/2 into the quadratic cost gives a Hamiltonian with only Z and ZZ terms — 73 in total, computed by gates/pauli_decomposition.py and checked against the full cost table. 2-local means the phase layer is 72 RZ rotations and CX ladders; no expensive multi-controlled gates.</a:t>
             </a:r>
             <a:endParaRPr lang="en-US" dirty="0"/>
           </a:p>
@@ -1306,7 +1306,7 @@
           <a:p>
             <a:r>
               <a:rPr lang="en-US" dirty="0"/>
-              <a:t>2:50–3:20. The headline: a random plan is better than baseline 2.4% of the time; after one QAOA layer 53%; after two, 67%. The expected number of shots to see the exact optimum drops from over 12 000 to about 340. That is the gain, measured on the exact statevector and reproduced in shots on Classiq.</a:t>
+              <a:t>1:40–2:10. The Qmod program uses Classiq's phase() on a QNum arithmetic expression, so the compiler builds the ZZ ladder for us. Transpiled: 12 qubits, depth 59 for one layer. We exported QASM3 and cross-checked a hand-written QASM2 of the same layer with Qiskit — three engines, same expectation value.</a:t>
             </a:r>
             <a:endParaRPr lang="en-US" dirty="0"/>
           </a:p>
@@ -1394,7 +1394,7 @@
           <a:p>
             <a:r>
               <a:rPr lang="en-US" dirty="0"/>
-              <a:t>3:20–3:50. Switch to the live Classiq IDE / recorded screen here. Show the synthesised circuit and the histogram. The sampled expectation on the Classiq simulator agrees with Wolfram within shot noise and the most frequent low-cost sample is exactly the optimum.</a:t>
+              <a:t>2:10–2:50. Wolfram lets us do the full 4096-dimensional statevector and scan the whole (γ,β) plane. The optimum is a narrow valley; most of the plane is a plateau — that will matter on Classiq. These optimal angles are exported to JSON and used as warm start in the Classiq run.</a:t>
             </a:r>
             <a:endParaRPr lang="en-US" dirty="0"/>
           </a:p>
@@ -1482,7 +1482,7 @@
           <a:p>
             <a:r>
               <a:rPr lang="en-US" dirty="0"/>
-              <a:t>3:50–4:10. Play the clip (about 5 s). If the video does not play in the imported Canva/Google Slides deck, use the MP4 directly from the group folder.</a:t>
+              <a:t>Headline: a random plan beats the baseline 2.4 percent of the time; after one QAOA layer 53 percent; after two, 67 percent. Shots to see the exact optimum drop from over 12 000 to about 340. The Classiq simulator reproduces the exact Wolfram numbers within shot noise, and the most frequent low-cost sample is exactly the optimum.</a:t>
             </a:r>
             <a:endParaRPr lang="en-US" dirty="0"/>
           </a:p>
@@ -1570,7 +1570,7 @@
           <a:p>
             <a:r>
               <a:rPr lang="en-US" dirty="0"/>
-              <a:t>4:10–4:30. Optimising angles on the sampler alone is hard: a random start sits on the plateau and COBYLA cannot see a gradient through shot noise. Warm-starting from the Wolfram angles gives the best result immediately. That is our practical recipe.</a:t>
+              <a:t>3:50–4:10. Play the clip (about 5 s). If the video does not play in the imported Canva/Google Slides deck, use the MP4 directly from the group folder.</a:t>
             </a:r>
             <a:endParaRPr lang="en-US" dirty="0"/>
           </a:p>
@@ -2101,7 +2101,7 @@
                 <a:ea typeface="Calibri" pitchFamily="34" charset="-122"/>
                 <a:cs typeface="Calibri" pitchFamily="34" charset="-120"/>
               </a:rPr>
-              <a:t>Tilting 6 Tel Aviv antennas</a:t>
+              <a:t>Tilting a city's antennas:</a:t>
             </a:r>
             <a:endParaRPr lang="en-US" sz="4800" dirty="0"/>
           </a:p>
@@ -2118,7 +2118,7 @@
                 <a:ea typeface="Calibri" pitchFamily="34" charset="-122"/>
                 <a:cs typeface="Calibri" pitchFamily="34" charset="-120"/>
               </a:rPr>
-              <a:t>with a 12-qubit QAOA</a:t>
+              <a:t>k-means groups + a 12-qubit QAOA leaf</a:t>
             </a:r>
             <a:endParaRPr lang="en-US" sz="4800" dirty="0"/>
           </a:p>
@@ -2392,7 +2392,7 @@
                 <a:ea typeface="Calibri" pitchFamily="34" charset="-122"/>
                 <a:cs typeface="Calibri" pitchFamily="34" charset="-120"/>
               </a:rPr>
-              <a:t>SLIDE 10 / 13   |   PROOF</a:t>
+              <a:t>SLIDE 10 / 13   |   CLASSIQ</a:t>
             </a:r>
             <a:endParaRPr lang="en-US" sz="1100" dirty="0"/>
           </a:p>
@@ -2431,7 +2431,7 @@
                 <a:ea typeface="Calibri" pitchFamily="34" charset="-122"/>
                 <a:cs typeface="Calibri" pitchFamily="34" charset="-120"/>
               </a:rPr>
-              <a:t>Lean 4 certificates: the classical facts are machine-checked</a:t>
+              <a:t>Optimising on Classiq: warm start beats blind search</a:t>
             </a:r>
             <a:endParaRPr lang="en-US" sz="3200" dirty="0"/>
           </a:p>
@@ -2476,249 +2476,65 @@
           </a:p>
         </p:txBody>
       </p:sp>
-      <p:sp>
-        <p:nvSpPr>
-          <p:cNvPr id="8" name="Shape 6"/>
-          <p:cNvSpPr/>
-          <p:nvPr/>
-        </p:nvSpPr>
-        <p:spPr>
-          <a:xfrm>
-            <a:off x="548640" y="1463040"/>
-            <a:ext cx="11247120" cy="2743200"/>
-          </a:xfrm>
-          <a:prstGeom prst="roundRect">
-            <a:avLst>
-              <a:gd name="adj" fmla="val 2667"/>
-            </a:avLst>
-          </a:prstGeom>
-          <a:solidFill>
-            <a:srgbClr val="141B33"/>
-          </a:solidFill>
-          <a:ln w="12700">
-            <a:solidFill>
-              <a:srgbClr val="141B33"/>
-            </a:solidFill>
-            <a:prstDash val="solid"/>
-          </a:ln>
-        </p:spPr>
-      </p:sp>
-      <p:sp>
-        <p:nvSpPr>
-          <p:cNvPr id="9" name="Text 7"/>
-          <p:cNvSpPr/>
-          <p:nvPr/>
-        </p:nvSpPr>
-        <p:spPr>
-          <a:xfrm>
-            <a:off x="731520" y="1554480"/>
-            <a:ext cx="10881360" cy="2560320"/>
-          </a:xfrm>
-          <a:prstGeom prst="rect">
-            <a:avLst/>
-          </a:prstGeom>
-          <a:noFill/>
-          <a:ln/>
-        </p:spPr>
-        <p:txBody>
-          <a:bodyPr wrap="square" lIns="635" tIns="635" rIns="635" bIns="635" rtlCol="0" anchor="ctr"/>
+      <p:pic>
+        <p:nvPicPr>
+          <p:cNvPr id="3" name="Media 0">
+            <a:hlinkClick r:id="" action="ppaction://media"/>
+          </p:cNvPr>
+          <p:cNvPicPr>
+            <a:picLocks noChangeAspect="1"/>
+          </p:cNvPicPr>
+          <p:nvPr>
+            <a:videoFile r:link="rId1"/>
+            <p:extLst>
+              <p:ext uri="{DAA4B4D4-6D71-4841-9C94-3DE7FCFB9230}">
+                <p14:media xmlns:p14="http://schemas.microsoft.com/office/powerpoint/2010/main" r:embed="rId2"/>
+              </p:ext>
+            </p:extLst>
+          </p:nvPr>
+        </p:nvPicPr>
+        <p:blipFill>
+          <a:blip r:embed="rId3"/>
+          <a:stretch>
+            <a:fillRect/>
+          </a:stretch>
+        </p:blipFill>
+        <p:spPr>
+          <a:xfrm>
+            <a:off x="548640" y="1417320"/>
+            <a:ext cx="7315200" cy="3904488"/>
+          </a:xfrm>
+          <a:prstGeom prst="rect">
+            <a:avLst/>
+          </a:prstGeom>
+        </p:spPr>
+      </p:pic>
+      <p:sp>
+        <p:nvSpPr>
+          <p:cNvPr id="9" name="Text 6"/>
+          <p:cNvSpPr/>
+          <p:nvPr/>
+        </p:nvSpPr>
+        <p:spPr>
+          <a:xfrm>
+            <a:off x="548640" y="5349240"/>
+            <a:ext cx="7315200" cy="320040"/>
+          </a:xfrm>
+          <a:prstGeom prst="rect">
+            <a:avLst/>
+          </a:prstGeom>
+          <a:noFill/>
+          <a:ln/>
+        </p:spPr>
+        <p:txBody>
+          <a:bodyPr wrap="square" lIns="0" tIns="0" rIns="0" bIns="0" rtlCol="0" anchor="ctr"/>
           <a:lstStyle/>
           <a:p>
             <a:pPr indent="0" marL="0">
               <a:buNone/>
             </a:pPr>
             <a:r>
-              <a:rPr lang="en-US" sz="1250" dirty="0">
-                <a:solidFill>
-                  <a:srgbClr val="2BD4C2"/>
-                </a:solidFill>
-                <a:latin typeface="Consolas" pitchFamily="34" charset="0"/>
-                <a:ea typeface="Consolas" pitchFamily="34" charset="-122"/>
-                <a:cs typeface="Consolas" pitchFamily="34" charset="-120"/>
-              </a:rPr>
-              <a:t>theorem decodeTilt_bijective : Function.Bijective (fun q : Fin 2 × Fin 2 =&gt; decodeTilt q.1 q.2)   -- 2 qubits ↔ 4 tilts</a:t>
-            </a:r>
-            <a:endParaRPr lang="en-US" sz="1250" dirty="0"/>
-          </a:p>
-          <a:p>
-            <a:pPr indent="0" marL="0">
-              <a:buNone/>
-            </a:pPr>
-            <a:r>
-              <a:rPr lang="en-US" sz="1250" dirty="0">
-                <a:solidFill>
-                  <a:srgbClr val="2BD4C2"/>
-                </a:solidFill>
-                <a:latin typeface="Consolas" pitchFamily="34" charset="0"/>
-                <a:ea typeface="Consolas" pitchFamily="34" charset="-122"/>
-                <a:cs typeface="Consolas" pitchFamily="34" charset="-120"/>
-              </a:rPr>
-              <a:t>theorem costS_optTilt      : costS optTilt = -28440                                   -- cost ×10⁴ (decide)</a:t>
-            </a:r>
-            <a:endParaRPr lang="en-US" sz="1250" dirty="0"/>
-          </a:p>
-          <a:p>
-            <a:pPr indent="0" marL="0">
-              <a:buNone/>
-            </a:pPr>
-            <a:r>
-              <a:rPr lang="en-US" sz="1250" dirty="0">
-                <a:solidFill>
-                  <a:srgbClr val="2BD4C2"/>
-                </a:solidFill>
-                <a:latin typeface="Consolas" pitchFamily="34" charset="0"/>
-                <a:ea typeface="Consolas" pitchFamily="34" charset="-122"/>
-                <a:cs typeface="Consolas" pitchFamily="34" charset="-120"/>
-              </a:rPr>
-              <a:t>theorem costS_lower_bound  : ∀ t : Fin 6 → Fin 4, -28440 ≤ costS t                       -- 4096 cases (native_decide)</a:t>
-            </a:r>
-            <a:endParaRPr lang="en-US" sz="1250" dirty="0"/>
-          </a:p>
-          <a:p>
-            <a:pPr indent="0" marL="0">
-              <a:buNone/>
-            </a:pPr>
-            <a:r>
-              <a:rPr lang="en-US" sz="1250" dirty="0">
-                <a:solidFill>
-                  <a:srgbClr val="2BD4C2"/>
-                </a:solidFill>
-                <a:latin typeface="Consolas" pitchFamily="34" charset="0"/>
-                <a:ea typeface="Consolas" pitchFamily="34" charset="-122"/>
-                <a:cs typeface="Consolas" pitchFamily="34" charset="-120"/>
-              </a:rPr>
-              <a:t>theorem costS_unique       : ∀ t : Fin 6 → Fin 4, costS t = -28440 → t = optTilt          -- optimum is unique</a:t>
-            </a:r>
-            <a:endParaRPr lang="en-US" sz="1250" dirty="0"/>
-          </a:p>
-          <a:p>
-            <a:pPr indent="0" marL="0">
-              <a:buNone/>
-            </a:pPr>
-            <a:r>
-              <a:rPr lang="en-US" sz="1250" dirty="0">
-                <a:solidFill>
-                  <a:srgbClr val="2BD4C2"/>
-                </a:solidFill>
-                <a:latin typeface="Consolas" pitchFamily="34" charset="0"/>
-                <a:ea typeface="Consolas" pitchFamily="34" charset="-122"/>
-                <a:cs typeface="Consolas" pitchFamily="34" charset="-120"/>
-              </a:rPr>
-              <a:t>theorem cost_phase_preserves_probability : ∀ γ c a, ‖exp(γ c i) · a‖² = ‖a‖²             -- phase layer keeps P</a:t>
-            </a:r>
-            <a:endParaRPr lang="en-US" sz="1250" dirty="0"/>
-          </a:p>
-          <a:p>
-            <a:pPr indent="0" marL="0">
-              <a:buNone/>
-            </a:pPr>
-            <a:r>
-              <a:rPr lang="en-US" sz="1250" dirty="0">
-                <a:solidFill>
-                  <a:srgbClr val="2BD4C2"/>
-                </a:solidFill>
-                <a:latin typeface="Consolas" pitchFamily="34" charset="0"/>
-                <a:ea typeface="Consolas" pitchFamily="34" charset="-122"/>
-                <a:cs typeface="Consolas" pitchFamily="34" charset="-120"/>
-              </a:rPr>
-              <a:t>theorem two_smul_P0 / two_smul_P1 : 2•P0 = 1 + Z,  2•P1 = 1 − Z                        -- qubit → Pauli-Z</a:t>
-            </a:r>
-            <a:endParaRPr lang="en-US" sz="1250" dirty="0"/>
-          </a:p>
-        </p:txBody>
-      </p:sp>
-      <p:sp>
-        <p:nvSpPr>
-          <p:cNvPr id="10" name="Shape 8"/>
-          <p:cNvSpPr/>
-          <p:nvPr/>
-        </p:nvSpPr>
-        <p:spPr>
-          <a:xfrm>
-            <a:off x="548640" y="4434840"/>
-            <a:ext cx="2651760" cy="1234440"/>
-          </a:xfrm>
-          <a:prstGeom prst="roundRect">
-            <a:avLst>
-              <a:gd name="adj" fmla="val 5926"/>
-            </a:avLst>
-          </a:prstGeom>
-          <a:solidFill>
-            <a:srgbClr val="141B33"/>
-          </a:solidFill>
-          <a:ln w="12700">
-            <a:solidFill>
-              <a:srgbClr val="141B33"/>
-            </a:solidFill>
-            <a:prstDash val="solid"/>
-          </a:ln>
-        </p:spPr>
-      </p:sp>
-      <p:sp>
-        <p:nvSpPr>
-          <p:cNvPr id="11" name="Text 9"/>
-          <p:cNvSpPr/>
-          <p:nvPr/>
-        </p:nvSpPr>
-        <p:spPr>
-          <a:xfrm>
-            <a:off x="548640" y="4544568"/>
-            <a:ext cx="2651760" cy="640080"/>
-          </a:xfrm>
-          <a:prstGeom prst="rect">
-            <a:avLst/>
-          </a:prstGeom>
-          <a:noFill/>
-          <a:ln/>
-        </p:spPr>
-        <p:txBody>
-          <a:bodyPr wrap="square" lIns="0" tIns="0" rIns="0" bIns="0" rtlCol="0" anchor="ctr"/>
-          <a:lstStyle/>
-          <a:p>
-            <a:pPr algn="ctr" indent="0" marL="0">
-              <a:buNone/>
-            </a:pPr>
-            <a:r>
-              <a:rPr lang="en-US" sz="3000" b="1" dirty="0">
-                <a:solidFill>
-                  <a:srgbClr val="2BD4C2"/>
-                </a:solidFill>
-                <a:latin typeface="Calibri" pitchFamily="34" charset="0"/>
-                <a:ea typeface="Calibri" pitchFamily="34" charset="-122"/>
-                <a:cs typeface="Calibri" pitchFamily="34" charset="-120"/>
-              </a:rPr>
-              <a:t>0 sorry</a:t>
-            </a:r>
-            <a:endParaRPr lang="en-US" sz="3000" dirty="0"/>
-          </a:p>
-        </p:txBody>
-      </p:sp>
-      <p:sp>
-        <p:nvSpPr>
-          <p:cNvPr id="12" name="Text 10"/>
-          <p:cNvSpPr/>
-          <p:nvPr/>
-        </p:nvSpPr>
-        <p:spPr>
-          <a:xfrm>
-            <a:off x="640080" y="5166360"/>
-            <a:ext cx="2468880" cy="457200"/>
-          </a:xfrm>
-          <a:prstGeom prst="rect">
-            <a:avLst/>
-          </a:prstGeom>
-          <a:noFill/>
-          <a:ln/>
-        </p:spPr>
-        <p:txBody>
-          <a:bodyPr wrap="square" lIns="0" tIns="0" rIns="0" bIns="0" rtlCol="0" anchor="ctr"/>
-          <a:lstStyle/>
-          <a:p>
-            <a:pPr algn="ctr" indent="0" marL="0">
-              <a:buNone/>
-            </a:pPr>
-            <a:r>
-              <a:rPr lang="en-US" sz="1100" dirty="0">
+              <a:rPr lang="en-US" sz="1050" i="1" dirty="0">
                 <a:solidFill>
                   <a:srgbClr val="A9B4D0"/>
                 </a:solidFill>
@@ -2726,127 +2542,22 @@
                 <a:ea typeface="Calibri" pitchFamily="34" charset="-122"/>
                 <a:cs typeface="Calibri" pitchFamily="34" charset="-120"/>
               </a:rPr>
-              <a:t>lake build succeeded</a:t>
-            </a:r>
-            <a:endParaRPr lang="en-US" sz="1100" dirty="0"/>
-          </a:p>
-        </p:txBody>
-      </p:sp>
-      <p:sp>
-        <p:nvSpPr>
-          <p:cNvPr id="13" name="Shape 11"/>
-          <p:cNvSpPr/>
-          <p:nvPr/>
-        </p:nvSpPr>
-        <p:spPr>
-          <a:xfrm>
-            <a:off x="3337560" y="4434840"/>
-            <a:ext cx="2651760" cy="1234440"/>
-          </a:xfrm>
-          <a:prstGeom prst="roundRect">
-            <a:avLst>
-              <a:gd name="adj" fmla="val 5926"/>
-            </a:avLst>
-          </a:prstGeom>
-          <a:solidFill>
-            <a:srgbClr val="141B33"/>
-          </a:solidFill>
-          <a:ln w="12700">
-            <a:solidFill>
-              <a:srgbClr val="141B33"/>
-            </a:solidFill>
-            <a:prstDash val="solid"/>
-          </a:ln>
-        </p:spPr>
-      </p:sp>
-      <p:sp>
-        <p:nvSpPr>
-          <p:cNvPr id="14" name="Text 12"/>
-          <p:cNvSpPr/>
-          <p:nvPr/>
-        </p:nvSpPr>
-        <p:spPr>
-          <a:xfrm>
-            <a:off x="3337560" y="4544568"/>
-            <a:ext cx="2651760" cy="640080"/>
-          </a:xfrm>
-          <a:prstGeom prst="rect">
-            <a:avLst/>
-          </a:prstGeom>
-          <a:noFill/>
-          <a:ln/>
-        </p:spPr>
-        <p:txBody>
-          <a:bodyPr wrap="square" lIns="0" tIns="0" rIns="0" bIns="0" rtlCol="0" anchor="ctr"/>
-          <a:lstStyle/>
-          <a:p>
-            <a:pPr algn="ctr" indent="0" marL="0">
-              <a:buNone/>
-            </a:pPr>
-            <a:r>
-              <a:rPr lang="en-US" sz="3000" b="1" dirty="0">
-                <a:solidFill>
-                  <a:srgbClr val="2BD4C2"/>
-                </a:solidFill>
-                <a:latin typeface="Calibri" pitchFamily="34" charset="0"/>
-                <a:ea typeface="Calibri" pitchFamily="34" charset="-122"/>
-                <a:cs typeface="Calibri" pitchFamily="34" charset="-120"/>
-              </a:rPr>
-              <a:t>Mathlib</a:t>
-            </a:r>
-            <a:endParaRPr lang="en-US" sz="3000" dirty="0"/>
-          </a:p>
-        </p:txBody>
-      </p:sp>
-      <p:sp>
-        <p:nvSpPr>
-          <p:cNvPr id="15" name="Text 13"/>
-          <p:cNvSpPr/>
-          <p:nvPr/>
-        </p:nvSpPr>
-        <p:spPr>
-          <a:xfrm>
-            <a:off x="3429000" y="5166360"/>
-            <a:ext cx="2468880" cy="457200"/>
-          </a:xfrm>
-          <a:prstGeom prst="rect">
-            <a:avLst/>
-          </a:prstGeom>
-          <a:noFill/>
-          <a:ln/>
-        </p:spPr>
-        <p:txBody>
-          <a:bodyPr wrap="square" lIns="0" tIns="0" rIns="0" bIns="0" rtlCol="0" anchor="ctr"/>
-          <a:lstStyle/>
-          <a:p>
-            <a:pPr algn="ctr" indent="0" marL="0">
-              <a:buNone/>
-            </a:pPr>
-            <a:r>
-              <a:rPr lang="en-US" sz="1100" dirty="0">
-                <a:solidFill>
-                  <a:srgbClr val="A9B4D0"/>
-                </a:solidFill>
-                <a:latin typeface="Calibri" pitchFamily="34" charset="0"/>
-                <a:ea typeface="Calibri" pitchFamily="34" charset="-122"/>
-                <a:cs typeface="Calibri" pitchFamily="34" charset="-120"/>
-              </a:rPr>
-              <a:t>Lean 4.33.1</a:t>
-            </a:r>
-            <a:endParaRPr lang="en-US" sz="1100" dirty="0"/>
-          </a:p>
-        </p:txBody>
-      </p:sp>
-      <p:sp>
-        <p:nvSpPr>
-          <p:cNvPr id="16" name="Text 14"/>
-          <p:cNvSpPr/>
-          <p:nvPr/>
-        </p:nvSpPr>
-        <p:spPr>
-          <a:xfrm>
-            <a:off x="6309360" y="4434840"/>
-            <a:ext cx="5486400" cy="1645920"/>
+              <a:t>Click to play: 20 COBYLA iterations on the Classiq simulator, one 4096-shot job each (11 s).</a:t>
+            </a:r>
+            <a:endParaRPr lang="en-US" sz="1050" dirty="0"/>
+          </a:p>
+        </p:txBody>
+      </p:sp>
+      <p:sp>
+        <p:nvSpPr>
+          <p:cNvPr id="10" name="Text 7"/>
+          <p:cNvSpPr/>
+          <p:nvPr/>
+        </p:nvSpPr>
+        <p:spPr>
+          <a:xfrm>
+            <a:off x="8138160" y="1463040"/>
+            <a:ext cx="3657600" cy="4206240"/>
           </a:xfrm>
           <a:prstGeom prst="rect">
             <a:avLst/>
@@ -2874,7 +2585,7 @@
                 <a:ea typeface="Calibri" pitchFamily="34" charset="-122"/>
                 <a:cs typeface="Calibri" pitchFamily="34" charset="-120"/>
               </a:rPr>
-              <a:t>group/lean/TiltQAOA.lean + build log</a:t>
+              <a:t>Start (0.20, 0.50): COBYLA stuck at ⟨C⟩ ≈ 35.5 — the plateau Wolfram predicted</a:t>
             </a:r>
             <a:endParaRPr lang="en-US" sz="1300" dirty="0"/>
           </a:p>
@@ -2895,7 +2606,7 @@
                 <a:ea typeface="Calibri" pitchFamily="34" charset="-122"/>
                 <a:cs typeface="Calibri" pitchFamily="34" charset="-120"/>
               </a:rPr>
-              <a:t>Proves the optimum, its uniqueness and the encoding are exactly what the quantum runs report</a:t>
+              <a:t>Start (0.02, 0.60): 20 Classiq jobs, ⟨C⟩ 21.6 → 7.0, still above warm start 2.0</a:t>
             </a:r>
             <a:endParaRPr lang="en-US" sz="1300" dirty="0"/>
           </a:p>
@@ -2916,7 +2627,28 @@
                 <a:ea typeface="Calibri" pitchFamily="34" charset="-122"/>
                 <a:cs typeface="Calibri" pitchFamily="34" charset="-120"/>
               </a:rPr>
-              <a:t>Quantum layer: unitarity of the phase operator, so QAOA never destroys probability mass</a:t>
+              <a:t>Shot noise (4096 shots) hides gradients; 15 parallel jobs let us sweep starts instead</a:t>
+            </a:r>
+            <a:endParaRPr lang="en-US" sz="1300" dirty="0"/>
+          </a:p>
+          <a:p>
+            <a:pPr marL="342900" indent="-342900">
+              <a:spcAft>
+                <a:spcPts val="600"/>
+              </a:spcAft>
+              <a:buSzPct val="100000"/>
+              <a:buChar char="▸"/>
+            </a:pPr>
+            <a:r>
+              <a:rPr lang="en-US" sz="1300" dirty="0">
+                <a:solidFill>
+                  <a:srgbClr val="F5F7FF"/>
+                </a:solidFill>
+                <a:latin typeface="Calibri" pitchFamily="34" charset="0"/>
+                <a:ea typeface="Calibri" pitchFamily="34" charset="-122"/>
+                <a:cs typeface="Calibri" pitchFamily="34" charset="-120"/>
+              </a:rPr>
+              <a:t>Takeaway: exact classical pre-simulation of small instances gives angles that transfer</a:t>
             </a:r>
             <a:endParaRPr lang="en-US" sz="1300" dirty="0"/>
           </a:p>
@@ -3073,7 +2805,7 @@
                 <a:ea typeface="Calibri" pitchFamily="34" charset="-122"/>
                 <a:cs typeface="Calibri" pitchFamily="34" charset="-120"/>
               </a:rPr>
-              <a:t>SLIDE 11 / 13   |   SCALE</a:t>
+              <a:t>SLIDE 11 / 13   |   PROOF</a:t>
             </a:r>
             <a:endParaRPr lang="en-US" sz="1100" dirty="0"/>
           </a:p>
@@ -3112,7 +2844,7 @@
                 <a:ea typeface="Calibri" pitchFamily="34" charset="-122"/>
                 <a:cs typeface="Calibri" pitchFamily="34" charset="-120"/>
               </a:rPr>
-              <a:t>From 4 tilt levels to the operator's 10 — and beyond</a:t>
+              <a:t>Lean 4 certificates: the classical facts are machine-checked</a:t>
             </a:r>
             <a:endParaRPr lang="en-US" sz="3200" dirty="0"/>
           </a:p>
@@ -3157,40 +2889,377 @@
           </a:p>
         </p:txBody>
       </p:sp>
-      <p:pic>
-        <p:nvPicPr>
-          <p:cNvPr id="8" name="Image 0" descr="C:\Projects\Hackton\group\wolfram\img\levels.png">    </p:cNvPr>
-          <p:cNvPicPr>
-            <a:picLocks noChangeAspect="1"/>
-          </p:cNvPicPr>
-          <p:nvPr/>
-        </p:nvPicPr>
-        <p:blipFill>
-          <a:blip r:embed="rId1"/>
-          <a:stretch>
-            <a:fillRect/>
-          </a:stretch>
-        </p:blipFill>
-        <p:spPr>
-          <a:xfrm>
-            <a:off x="548640" y="1417320"/>
-            <a:ext cx="6035040" cy="4096512"/>
-          </a:xfrm>
-          <a:prstGeom prst="rect">
-            <a:avLst/>
-          </a:prstGeom>
-        </p:spPr>
-      </p:pic>
-      <p:sp>
-        <p:nvSpPr>
-          <p:cNvPr id="9" name="Text 6"/>
-          <p:cNvSpPr/>
-          <p:nvPr/>
-        </p:nvSpPr>
-        <p:spPr>
-          <a:xfrm>
-            <a:off x="6858000" y="1463040"/>
-            <a:ext cx="4937760" cy="4206240"/>
+      <p:sp>
+        <p:nvSpPr>
+          <p:cNvPr id="8" name="Shape 6"/>
+          <p:cNvSpPr/>
+          <p:nvPr/>
+        </p:nvSpPr>
+        <p:spPr>
+          <a:xfrm>
+            <a:off x="548640" y="1463040"/>
+            <a:ext cx="11247120" cy="2743200"/>
+          </a:xfrm>
+          <a:prstGeom prst="roundRect">
+            <a:avLst>
+              <a:gd name="adj" fmla="val 2667"/>
+            </a:avLst>
+          </a:prstGeom>
+          <a:solidFill>
+            <a:srgbClr val="141B33"/>
+          </a:solidFill>
+          <a:ln w="12700">
+            <a:solidFill>
+              <a:srgbClr val="141B33"/>
+            </a:solidFill>
+            <a:prstDash val="solid"/>
+          </a:ln>
+        </p:spPr>
+      </p:sp>
+      <p:sp>
+        <p:nvSpPr>
+          <p:cNvPr id="9" name="Text 7"/>
+          <p:cNvSpPr/>
+          <p:nvPr/>
+        </p:nvSpPr>
+        <p:spPr>
+          <a:xfrm>
+            <a:off x="731520" y="1554480"/>
+            <a:ext cx="10881360" cy="2560320"/>
+          </a:xfrm>
+          <a:prstGeom prst="rect">
+            <a:avLst/>
+          </a:prstGeom>
+          <a:noFill/>
+          <a:ln/>
+        </p:spPr>
+        <p:txBody>
+          <a:bodyPr wrap="square" lIns="635" tIns="635" rIns="635" bIns="635" rtlCol="0" anchor="ctr"/>
+          <a:lstStyle/>
+          <a:p>
+            <a:pPr indent="0" marL="0">
+              <a:buNone/>
+            </a:pPr>
+            <a:r>
+              <a:rPr lang="en-US" sz="1250" dirty="0">
+                <a:solidFill>
+                  <a:srgbClr val="2BD4C2"/>
+                </a:solidFill>
+                <a:latin typeface="Consolas" pitchFamily="34" charset="0"/>
+                <a:ea typeface="Consolas" pitchFamily="34" charset="-122"/>
+                <a:cs typeface="Consolas" pitchFamily="34" charset="-120"/>
+              </a:rPr>
+              <a:t>theorem decodeTilt_bijective : Function.Bijective (fun q : Fin 2 × Fin 2 =&gt; decodeTilt q.1 q.2)   -- 2 qubits ↔ 4 tilts</a:t>
+            </a:r>
+            <a:endParaRPr lang="en-US" sz="1250" dirty="0"/>
+          </a:p>
+          <a:p>
+            <a:pPr indent="0" marL="0">
+              <a:buNone/>
+            </a:pPr>
+            <a:r>
+              <a:rPr lang="en-US" sz="1250" dirty="0">
+                <a:solidFill>
+                  <a:srgbClr val="2BD4C2"/>
+                </a:solidFill>
+                <a:latin typeface="Consolas" pitchFamily="34" charset="0"/>
+                <a:ea typeface="Consolas" pitchFamily="34" charset="-122"/>
+                <a:cs typeface="Consolas" pitchFamily="34" charset="-120"/>
+              </a:rPr>
+              <a:t>theorem costS_optTilt      : costS optTilt = -28440                                   -- cost ×10⁴ (decide)</a:t>
+            </a:r>
+            <a:endParaRPr lang="en-US" sz="1250" dirty="0"/>
+          </a:p>
+          <a:p>
+            <a:pPr indent="0" marL="0">
+              <a:buNone/>
+            </a:pPr>
+            <a:r>
+              <a:rPr lang="en-US" sz="1250" dirty="0">
+                <a:solidFill>
+                  <a:srgbClr val="2BD4C2"/>
+                </a:solidFill>
+                <a:latin typeface="Consolas" pitchFamily="34" charset="0"/>
+                <a:ea typeface="Consolas" pitchFamily="34" charset="-122"/>
+                <a:cs typeface="Consolas" pitchFamily="34" charset="-120"/>
+              </a:rPr>
+              <a:t>theorem costS_lower_bound  : ∀ t : Fin 6 → Fin 4, -28440 ≤ costS t                       -- 4096 cases (native_decide)</a:t>
+            </a:r>
+            <a:endParaRPr lang="en-US" sz="1250" dirty="0"/>
+          </a:p>
+          <a:p>
+            <a:pPr indent="0" marL="0">
+              <a:buNone/>
+            </a:pPr>
+            <a:r>
+              <a:rPr lang="en-US" sz="1250" dirty="0">
+                <a:solidFill>
+                  <a:srgbClr val="2BD4C2"/>
+                </a:solidFill>
+                <a:latin typeface="Consolas" pitchFamily="34" charset="0"/>
+                <a:ea typeface="Consolas" pitchFamily="34" charset="-122"/>
+                <a:cs typeface="Consolas" pitchFamily="34" charset="-120"/>
+              </a:rPr>
+              <a:t>theorem costS_unique       : ∀ t : Fin 6 → Fin 4, costS t = -28440 → t = optTilt          -- optimum is unique</a:t>
+            </a:r>
+            <a:endParaRPr lang="en-US" sz="1250" dirty="0"/>
+          </a:p>
+          <a:p>
+            <a:pPr indent="0" marL="0">
+              <a:buNone/>
+            </a:pPr>
+            <a:r>
+              <a:rPr lang="en-US" sz="1250" dirty="0">
+                <a:solidFill>
+                  <a:srgbClr val="2BD4C2"/>
+                </a:solidFill>
+                <a:latin typeface="Consolas" pitchFamily="34" charset="0"/>
+                <a:ea typeface="Consolas" pitchFamily="34" charset="-122"/>
+                <a:cs typeface="Consolas" pitchFamily="34" charset="-120"/>
+              </a:rPr>
+              <a:t>theorem cost_phase_preserves_probability : ∀ γ c a, ‖exp(γ c i) · a‖² = ‖a‖²             -- phase layer keeps P</a:t>
+            </a:r>
+            <a:endParaRPr lang="en-US" sz="1250" dirty="0"/>
+          </a:p>
+          <a:p>
+            <a:pPr indent="0" marL="0">
+              <a:buNone/>
+            </a:pPr>
+            <a:r>
+              <a:rPr lang="en-US" sz="1250" dirty="0">
+                <a:solidFill>
+                  <a:srgbClr val="2BD4C2"/>
+                </a:solidFill>
+                <a:latin typeface="Consolas" pitchFamily="34" charset="0"/>
+                <a:ea typeface="Consolas" pitchFamily="34" charset="-122"/>
+                <a:cs typeface="Consolas" pitchFamily="34" charset="-120"/>
+              </a:rPr>
+              <a:t>theorem two_smul_P0 / two_smul_P1 : 2•P0 = 1 + Z,  2•P1 = 1 − Z                        -- qubit → Pauli-Z</a:t>
+            </a:r>
+            <a:endParaRPr lang="en-US" sz="1250" dirty="0"/>
+          </a:p>
+        </p:txBody>
+      </p:sp>
+      <p:sp>
+        <p:nvSpPr>
+          <p:cNvPr id="10" name="Shape 8"/>
+          <p:cNvSpPr/>
+          <p:nvPr/>
+        </p:nvSpPr>
+        <p:spPr>
+          <a:xfrm>
+            <a:off x="548640" y="4434840"/>
+            <a:ext cx="2651760" cy="1234440"/>
+          </a:xfrm>
+          <a:prstGeom prst="roundRect">
+            <a:avLst>
+              <a:gd name="adj" fmla="val 5926"/>
+            </a:avLst>
+          </a:prstGeom>
+          <a:solidFill>
+            <a:srgbClr val="141B33"/>
+          </a:solidFill>
+          <a:ln w="12700">
+            <a:solidFill>
+              <a:srgbClr val="141B33"/>
+            </a:solidFill>
+            <a:prstDash val="solid"/>
+          </a:ln>
+        </p:spPr>
+      </p:sp>
+      <p:sp>
+        <p:nvSpPr>
+          <p:cNvPr id="11" name="Text 9"/>
+          <p:cNvSpPr/>
+          <p:nvPr/>
+        </p:nvSpPr>
+        <p:spPr>
+          <a:xfrm>
+            <a:off x="548640" y="4544568"/>
+            <a:ext cx="2651760" cy="640080"/>
+          </a:xfrm>
+          <a:prstGeom prst="rect">
+            <a:avLst/>
+          </a:prstGeom>
+          <a:noFill/>
+          <a:ln/>
+        </p:spPr>
+        <p:txBody>
+          <a:bodyPr wrap="square" lIns="0" tIns="0" rIns="0" bIns="0" rtlCol="0" anchor="ctr"/>
+          <a:lstStyle/>
+          <a:p>
+            <a:pPr algn="ctr" indent="0" marL="0">
+              <a:buNone/>
+            </a:pPr>
+            <a:r>
+              <a:rPr lang="en-US" sz="3000" b="1" dirty="0">
+                <a:solidFill>
+                  <a:srgbClr val="2BD4C2"/>
+                </a:solidFill>
+                <a:latin typeface="Calibri" pitchFamily="34" charset="0"/>
+                <a:ea typeface="Calibri" pitchFamily="34" charset="-122"/>
+                <a:cs typeface="Calibri" pitchFamily="34" charset="-120"/>
+              </a:rPr>
+              <a:t>0 sorry</a:t>
+            </a:r>
+            <a:endParaRPr lang="en-US" sz="3000" dirty="0"/>
+          </a:p>
+        </p:txBody>
+      </p:sp>
+      <p:sp>
+        <p:nvSpPr>
+          <p:cNvPr id="12" name="Text 10"/>
+          <p:cNvSpPr/>
+          <p:nvPr/>
+        </p:nvSpPr>
+        <p:spPr>
+          <a:xfrm>
+            <a:off x="640080" y="5166360"/>
+            <a:ext cx="2468880" cy="457200"/>
+          </a:xfrm>
+          <a:prstGeom prst="rect">
+            <a:avLst/>
+          </a:prstGeom>
+          <a:noFill/>
+          <a:ln/>
+        </p:spPr>
+        <p:txBody>
+          <a:bodyPr wrap="square" lIns="0" tIns="0" rIns="0" bIns="0" rtlCol="0" anchor="ctr"/>
+          <a:lstStyle/>
+          <a:p>
+            <a:pPr algn="ctr" indent="0" marL="0">
+              <a:buNone/>
+            </a:pPr>
+            <a:r>
+              <a:rPr lang="en-US" sz="1100" dirty="0">
+                <a:solidFill>
+                  <a:srgbClr val="A9B4D0"/>
+                </a:solidFill>
+                <a:latin typeface="Calibri" pitchFamily="34" charset="0"/>
+                <a:ea typeface="Calibri" pitchFamily="34" charset="-122"/>
+                <a:cs typeface="Calibri" pitchFamily="34" charset="-120"/>
+              </a:rPr>
+              <a:t>lake build succeeded</a:t>
+            </a:r>
+            <a:endParaRPr lang="en-US" sz="1100" dirty="0"/>
+          </a:p>
+        </p:txBody>
+      </p:sp>
+      <p:sp>
+        <p:nvSpPr>
+          <p:cNvPr id="13" name="Shape 11"/>
+          <p:cNvSpPr/>
+          <p:nvPr/>
+        </p:nvSpPr>
+        <p:spPr>
+          <a:xfrm>
+            <a:off x="3337560" y="4434840"/>
+            <a:ext cx="2651760" cy="1234440"/>
+          </a:xfrm>
+          <a:prstGeom prst="roundRect">
+            <a:avLst>
+              <a:gd name="adj" fmla="val 5926"/>
+            </a:avLst>
+          </a:prstGeom>
+          <a:solidFill>
+            <a:srgbClr val="141B33"/>
+          </a:solidFill>
+          <a:ln w="12700">
+            <a:solidFill>
+              <a:srgbClr val="141B33"/>
+            </a:solidFill>
+            <a:prstDash val="solid"/>
+          </a:ln>
+        </p:spPr>
+      </p:sp>
+      <p:sp>
+        <p:nvSpPr>
+          <p:cNvPr id="14" name="Text 12"/>
+          <p:cNvSpPr/>
+          <p:nvPr/>
+        </p:nvSpPr>
+        <p:spPr>
+          <a:xfrm>
+            <a:off x="3337560" y="4544568"/>
+            <a:ext cx="2651760" cy="640080"/>
+          </a:xfrm>
+          <a:prstGeom prst="rect">
+            <a:avLst/>
+          </a:prstGeom>
+          <a:noFill/>
+          <a:ln/>
+        </p:spPr>
+        <p:txBody>
+          <a:bodyPr wrap="square" lIns="0" tIns="0" rIns="0" bIns="0" rtlCol="0" anchor="ctr"/>
+          <a:lstStyle/>
+          <a:p>
+            <a:pPr algn="ctr" indent="0" marL="0">
+              <a:buNone/>
+            </a:pPr>
+            <a:r>
+              <a:rPr lang="en-US" sz="3000" b="1" dirty="0">
+                <a:solidFill>
+                  <a:srgbClr val="2BD4C2"/>
+                </a:solidFill>
+                <a:latin typeface="Calibri" pitchFamily="34" charset="0"/>
+                <a:ea typeface="Calibri" pitchFamily="34" charset="-122"/>
+                <a:cs typeface="Calibri" pitchFamily="34" charset="-120"/>
+              </a:rPr>
+              <a:t>Mathlib</a:t>
+            </a:r>
+            <a:endParaRPr lang="en-US" sz="3000" dirty="0"/>
+          </a:p>
+        </p:txBody>
+      </p:sp>
+      <p:sp>
+        <p:nvSpPr>
+          <p:cNvPr id="15" name="Text 13"/>
+          <p:cNvSpPr/>
+          <p:nvPr/>
+        </p:nvSpPr>
+        <p:spPr>
+          <a:xfrm>
+            <a:off x="3429000" y="5166360"/>
+            <a:ext cx="2468880" cy="457200"/>
+          </a:xfrm>
+          <a:prstGeom prst="rect">
+            <a:avLst/>
+          </a:prstGeom>
+          <a:noFill/>
+          <a:ln/>
+        </p:spPr>
+        <p:txBody>
+          <a:bodyPr wrap="square" lIns="0" tIns="0" rIns="0" bIns="0" rtlCol="0" anchor="ctr"/>
+          <a:lstStyle/>
+          <a:p>
+            <a:pPr algn="ctr" indent="0" marL="0">
+              <a:buNone/>
+            </a:pPr>
+            <a:r>
+              <a:rPr lang="en-US" sz="1100" dirty="0">
+                <a:solidFill>
+                  <a:srgbClr val="A9B4D0"/>
+                </a:solidFill>
+                <a:latin typeface="Calibri" pitchFamily="34" charset="0"/>
+                <a:ea typeface="Calibri" pitchFamily="34" charset="-122"/>
+                <a:cs typeface="Calibri" pitchFamily="34" charset="-120"/>
+              </a:rPr>
+              <a:t>Lean 4.33.1</a:t>
+            </a:r>
+            <a:endParaRPr lang="en-US" sz="1100" dirty="0"/>
+          </a:p>
+        </p:txBody>
+      </p:sp>
+      <p:sp>
+        <p:nvSpPr>
+          <p:cNvPr id="16" name="Text 14"/>
+          <p:cNvSpPr/>
+          <p:nvPr/>
+        </p:nvSpPr>
+        <p:spPr>
+          <a:xfrm>
+            <a:off x="6309360" y="4434840"/>
+            <a:ext cx="5486400" cy="1645920"/>
           </a:xfrm>
           <a:prstGeom prst="rect">
             <a:avLst/>
@@ -3218,7 +3287,7 @@
                 <a:ea typeface="Calibri" pitchFamily="34" charset="-122"/>
                 <a:cs typeface="Calibri" pitchFamily="34" charset="-120"/>
               </a:rPr>
-              <a:t>10 levels → 4 qubits per antenna → 24 qubits for the same 6 antennas</a:t>
+              <a:t>group/lean/TiltQAOA.lean + build log</a:t>
             </a:r>
             <a:endParaRPr lang="en-US" sz="1300" dirty="0"/>
           </a:p>
@@ -3239,7 +3308,7 @@
                 <a:ea typeface="Calibri" pitchFamily="34" charset="-122"/>
                 <a:cs typeface="Calibri" pitchFamily="34" charset="-120"/>
               </a:rPr>
-              <a:t>Hamiltonian stays 2-local: gate count grows quadratically, not exponentially</a:t>
+              <a:t>Proves the optimum, its uniqueness and the encoding are exactly what the quantum runs report</a:t>
             </a:r>
             <a:endParaRPr lang="en-US" sz="1300" dirty="0"/>
           </a:p>
@@ -3260,49 +3329,7 @@
                 <a:ea typeface="Calibri" pitchFamily="34" charset="-122"/>
                 <a:cs typeface="Calibri" pitchFamily="34" charset="-120"/>
               </a:rPr>
-              <a:t>100 antennas × 10 levels ≈ 400 qubits — QAOA depth stays p·O(n²)</a:t>
-            </a:r>
-            <a:endParaRPr lang="en-US" sz="1300" dirty="0"/>
-          </a:p>
-          <a:p>
-            <a:pPr marL="342900" indent="-342900">
-              <a:spcAft>
-                <a:spcPts val="600"/>
-              </a:spcAft>
-              <a:buSzPct val="100000"/>
-              <a:buChar char="▸"/>
-            </a:pPr>
-            <a:r>
-              <a:rPr lang="en-US" sz="1300" dirty="0">
-                <a:solidFill>
-                  <a:srgbClr val="F5F7FF"/>
-                </a:solidFill>
-                <a:latin typeface="Calibri" pitchFamily="34" charset="0"/>
-                <a:ea typeface="Calibri" pitchFamily="34" charset="-122"/>
-                <a:cs typeface="Calibri" pitchFamily="34" charset="-120"/>
-              </a:rPr>
-              <a:t>Grover alternative: quadratic speed-up, needs a fault-tolerant machine and an oracle for “cost &lt; threshold”; shown on a 16-state slice in the notebook</a:t>
-            </a:r>
-            <a:endParaRPr lang="en-US" sz="1300" dirty="0"/>
-          </a:p>
-          <a:p>
-            <a:pPr marL="342900" indent="-342900">
-              <a:spcAft>
-                <a:spcPts val="600"/>
-              </a:spcAft>
-              <a:buSzPct val="100000"/>
-              <a:buChar char="▸"/>
-            </a:pPr>
-            <a:r>
-              <a:rPr lang="en-US" sz="1300" dirty="0">
-                <a:solidFill>
-                  <a:srgbClr val="F5F7FF"/>
-                </a:solidFill>
-                <a:latin typeface="Calibri" pitchFamily="34" charset="0"/>
-                <a:ea typeface="Calibri" pitchFamily="34" charset="-122"/>
-                <a:cs typeface="Calibri" pitchFamily="34" charset="-120"/>
-              </a:rPr>
-              <a:t>Next: run p = 1 on IonQ simulator backend via Classiq, then hardware</a:t>
+              <a:t>Quantum layer: unitarity of the phase operator, so QAOA never destroys probability mass</a:t>
             </a:r>
             <a:endParaRPr lang="en-US" sz="1300" dirty="0"/>
           </a:p>
@@ -3459,7 +3486,7 @@
                 <a:ea typeface="Calibri" pitchFamily="34" charset="-122"/>
                 <a:cs typeface="Calibri" pitchFamily="34" charset="-120"/>
               </a:rPr>
-              <a:t>SLIDE 12 / 13   |   ARCHITECTURE</a:t>
+              <a:t>SLIDE 12 / 13   |   DESIGN CHOICE</a:t>
             </a:r>
             <a:endParaRPr lang="en-US" sz="1100" dirty="0"/>
           </a:p>
@@ -3498,7 +3525,7 @@
                 <a:ea typeface="Calibri" pitchFamily="34" charset="-122"/>
                 <a:cs typeface="Calibri" pitchFamily="34" charset="-120"/>
               </a:rPr>
-              <a:t>Whole network: coarse-to-fine k-means, one QAOA job per group</a:t>
+              <a:t>Why 2 qubits per sector, not a 5-qubit pack of 27 configurations</a:t>
             </a:r>
             <a:endParaRPr lang="en-US" sz="3200" dirty="0"/>
           </a:p>
@@ -3543,20 +3570,83 @@
           </a:p>
         </p:txBody>
       </p:sp>
-      <p:sp>
-        <p:nvSpPr>
-          <p:cNvPr id="8" name="Shape 6"/>
-          <p:cNvSpPr/>
-          <p:nvPr/>
-        </p:nvSpPr>
-        <p:spPr>
-          <a:xfrm>
-            <a:off x="2103120" y="1463040"/>
-            <a:ext cx="3108960" cy="548640"/>
+      <p:pic>
+        <p:nvPicPr>
+          <p:cNvPr id="8" name="Image 0" descr="C:\Projects\Hackton\group\charts\group_qaoa5_convergence.png">    </p:cNvPr>
+          <p:cNvPicPr>
+            <a:picLocks noChangeAspect="1"/>
+          </p:cNvPicPr>
+          <p:nvPr/>
+        </p:nvPicPr>
+        <p:blipFill>
+          <a:blip r:embed="rId1"/>
+          <a:stretch>
+            <a:fillRect/>
+          </a:stretch>
+        </p:blipFill>
+        <p:spPr>
+          <a:xfrm>
+            <a:off x="548640" y="1417320"/>
+            <a:ext cx="5120640" cy="3127248"/>
+          </a:xfrm>
+          <a:prstGeom prst="rect">
+            <a:avLst/>
+          </a:prstGeom>
+        </p:spPr>
+      </p:pic>
+      <p:sp>
+        <p:nvSpPr>
+          <p:cNvPr id="9" name="Text 6"/>
+          <p:cNvSpPr/>
+          <p:nvPr/>
+        </p:nvSpPr>
+        <p:spPr>
+          <a:xfrm>
+            <a:off x="548640" y="4572000"/>
+            <a:ext cx="5120640" cy="320040"/>
+          </a:xfrm>
+          <a:prstGeom prst="rect">
+            <a:avLst/>
+          </a:prstGeom>
+          <a:noFill/>
+          <a:ln/>
+        </p:spPr>
+        <p:txBody>
+          <a:bodyPr wrap="square" lIns="0" tIns="0" rIns="0" bIns="0" rtlCol="0" anchor="ctr"/>
+          <a:lstStyle/>
+          <a:p>
+            <a:pPr indent="0" marL="0">
+              <a:buNone/>
+            </a:pPr>
+            <a:r>
+              <a:rPr lang="en-US" sz="1050" i="1" dirty="0">
+                <a:solidFill>
+                  <a:srgbClr val="A9B4D0"/>
+                </a:solidFill>
+                <a:latin typeface="Calibri" pitchFamily="34" charset="0"/>
+                <a:ea typeface="Calibri" pitchFamily="34" charset="-122"/>
+                <a:cs typeface="Calibri" pitchFamily="34" charset="-120"/>
+              </a:rPr>
+              <a:t>Group run, 5-qubit encoding (27 of 32 states valid): ⟨H_C⟩ converges in all 10 groups, but the sampled optimum is no more likely than uniform.</a:t>
+            </a:r>
+            <a:endParaRPr lang="en-US" sz="1050" dirty="0"/>
+          </a:p>
+        </p:txBody>
+      </p:sp>
+      <p:sp>
+        <p:nvSpPr>
+          <p:cNvPr id="10" name="Shape 7"/>
+          <p:cNvSpPr/>
+          <p:nvPr/>
+        </p:nvSpPr>
+        <p:spPr>
+          <a:xfrm>
+            <a:off x="548640" y="5029200"/>
+            <a:ext cx="5120640" cy="868680"/>
           </a:xfrm>
           <a:prstGeom prst="roundRect">
             <a:avLst>
-              <a:gd name="adj" fmla="val 10000"/>
+              <a:gd name="adj" fmla="val 8421"/>
             </a:avLst>
           </a:prstGeom>
           <a:solidFill>
@@ -3572,30 +3662,30 @@
       </p:sp>
       <p:sp>
         <p:nvSpPr>
-          <p:cNvPr id="9" name="Text 7"/>
-          <p:cNvSpPr/>
-          <p:nvPr/>
-        </p:nvSpPr>
-        <p:spPr>
-          <a:xfrm>
-            <a:off x="2103120" y="1463040"/>
-            <a:ext cx="3108960" cy="548640"/>
-          </a:xfrm>
-          <a:prstGeom prst="rect">
-            <a:avLst/>
-          </a:prstGeom>
-          <a:noFill/>
-          <a:ln/>
-        </p:spPr>
-        <p:txBody>
-          <a:bodyPr wrap="square" lIns="254" tIns="254" rIns="254" bIns="254" rtlCol="0" anchor="ctr"/>
-          <a:lstStyle/>
-          <a:p>
-            <a:pPr algn="ctr" indent="0" marL="0">
-              <a:buNone/>
-            </a:pPr>
-            <a:r>
-              <a:rPr lang="en-US" sz="1200" dirty="0">
+          <p:cNvPr id="11" name="Text 8"/>
+          <p:cNvSpPr/>
+          <p:nvPr/>
+        </p:nvSpPr>
+        <p:spPr>
+          <a:xfrm>
+            <a:off x="640080" y="5029200"/>
+            <a:ext cx="4937760" cy="868680"/>
+          </a:xfrm>
+          <a:prstGeom prst="rect">
+            <a:avLst/>
+          </a:prstGeom>
+          <a:noFill/>
+          <a:ln/>
+        </p:spPr>
+        <p:txBody>
+          <a:bodyPr wrap="square" lIns="381" tIns="381" rIns="381" bIns="381" rtlCol="0" anchor="ctr"/>
+          <a:lstStyle/>
+          <a:p>
+            <a:pPr indent="0" marL="0">
+              <a:buNone/>
+            </a:pPr>
+            <a:r>
+              <a:rPr lang="en-US" sz="1150" dirty="0">
                 <a:solidFill>
                   <a:srgbClr val="F5F7FF"/>
                 </a:solidFill>
@@ -3603,177 +3693,26 @@
                 <a:ea typeface="Calibri" pitchFamily="34" charset="-122"/>
                 <a:cs typeface="Calibri" pitchFamily="34" charset="-120"/>
               </a:rPr>
-              <a:t>Whole network — feature vector x_r per region</a:t>
-            </a:r>
-            <a:endParaRPr lang="en-US" sz="1200" dirty="0"/>
-          </a:p>
-        </p:txBody>
-      </p:sp>
-      <p:sp>
-        <p:nvSpPr>
-          <p:cNvPr id="10" name="Text 8"/>
-          <p:cNvSpPr/>
-          <p:nvPr/>
-        </p:nvSpPr>
-        <p:spPr>
-          <a:xfrm>
-            <a:off x="5303520" y="1600200"/>
-            <a:ext cx="1463040" cy="274320"/>
-          </a:xfrm>
-          <a:prstGeom prst="rect">
-            <a:avLst/>
-          </a:prstGeom>
-          <a:noFill/>
-          <a:ln/>
-        </p:spPr>
-        <p:txBody>
-          <a:bodyPr wrap="square" lIns="0" tIns="0" rIns="0" bIns="0" rtlCol="0" anchor="ctr"/>
-          <a:lstStyle/>
-          <a:p>
-            <a:pPr indent="0" marL="0">
-              <a:buNone/>
-            </a:pPr>
-            <a:r>
-              <a:rPr lang="en-US" sz="1000" dirty="0">
-                <a:solidFill>
-                  <a:srgbClr val="2BD4C2"/>
-                </a:solidFill>
-                <a:latin typeface="Calibri" pitchFamily="34" charset="0"/>
-                <a:ea typeface="Calibri" pitchFamily="34" charset="-122"/>
-                <a:cs typeface="Calibri" pitchFamily="34" charset="-120"/>
-              </a:rPr>
-              <a:t>k-means, k = 5</a:t>
-            </a:r>
-            <a:endParaRPr lang="en-US" sz="1000" dirty="0"/>
-          </a:p>
-        </p:txBody>
-      </p:sp>
-      <p:sp>
-        <p:nvSpPr>
-          <p:cNvPr id="11" name="Shape 9"/>
-          <p:cNvSpPr/>
-          <p:nvPr/>
-        </p:nvSpPr>
-        <p:spPr>
-          <a:xfrm flipH="1">
-            <a:off x="1005840" y="2011680"/>
-            <a:ext cx="2651760" cy="594360"/>
-          </a:xfrm>
-          <a:prstGeom prst="line">
-            <a:avLst/>
-          </a:prstGeom>
-          <a:noFill/>
-          <a:ln w="12700">
-            <a:solidFill>
-              <a:srgbClr val="A9B4D0"/>
-            </a:solidFill>
-            <a:prstDash val="solid"/>
-          </a:ln>
-        </p:spPr>
-      </p:sp>
-      <p:sp>
-        <p:nvSpPr>
-          <p:cNvPr id="12" name="Shape 10"/>
-          <p:cNvSpPr/>
-          <p:nvPr/>
-        </p:nvSpPr>
-        <p:spPr>
-          <a:xfrm>
-            <a:off x="548640" y="2606040"/>
-            <a:ext cx="914400" cy="457200"/>
+              <a:t>The hierarchy is encoding-agnostic: keep k-means + refinement, swap the leaf solver. The group's own next step ("6-qubit encoding, constrained mixer") is this binary encoding — already run on Classiq and proven in Lean.</a:t>
+            </a:r>
+            <a:endParaRPr lang="en-US" sz="1150" dirty="0"/>
+          </a:p>
+        </p:txBody>
+      </p:sp>
+      <p:sp>
+        <p:nvSpPr>
+          <p:cNvPr id="12" name="Shape 9"/>
+          <p:cNvSpPr/>
+          <p:nvPr/>
+        </p:nvSpPr>
+        <p:spPr>
+          <a:xfrm>
+            <a:off x="5943600" y="1463040"/>
+            <a:ext cx="2834640" cy="1234440"/>
           </a:xfrm>
           <a:prstGeom prst="roundRect">
             <a:avLst>
-              <a:gd name="adj" fmla="val 12000"/>
-            </a:avLst>
-          </a:prstGeom>
-          <a:solidFill>
-            <a:srgbClr val="7C5CFF"/>
-          </a:solidFill>
-          <a:ln w="12700">
-            <a:solidFill>
-              <a:srgbClr val="7C5CFF"/>
-            </a:solidFill>
-            <a:prstDash val="solid"/>
-          </a:ln>
-        </p:spPr>
-      </p:sp>
-      <p:sp>
-        <p:nvSpPr>
-          <p:cNvPr id="13" name="Text 11"/>
-          <p:cNvSpPr/>
-          <p:nvPr/>
-        </p:nvSpPr>
-        <p:spPr>
-          <a:xfrm>
-            <a:off x="548640" y="2606040"/>
-            <a:ext cx="914400" cy="457200"/>
-          </a:xfrm>
-          <a:prstGeom prst="rect">
-            <a:avLst/>
-          </a:prstGeom>
-          <a:noFill/>
-          <a:ln/>
-        </p:spPr>
-        <p:txBody>
-          <a:bodyPr wrap="square" lIns="254" tIns="254" rIns="254" bIns="254" rtlCol="0" anchor="ctr"/>
-          <a:lstStyle/>
-          <a:p>
-            <a:pPr algn="ctr" indent="0" marL="0">
-              <a:buNone/>
-            </a:pPr>
-            <a:r>
-              <a:rPr lang="en-US" sz="1300" dirty="0">
-                <a:solidFill>
-                  <a:srgbClr val="F5F7FF"/>
-                </a:solidFill>
-                <a:latin typeface="Calibri" pitchFamily="34" charset="0"/>
-                <a:ea typeface="Calibri" pitchFamily="34" charset="-122"/>
-                <a:cs typeface="Calibri" pitchFamily="34" charset="-120"/>
-              </a:rPr>
-              <a:t>G1</a:t>
-            </a:r>
-            <a:endParaRPr lang="en-US" sz="1300" dirty="0"/>
-          </a:p>
-        </p:txBody>
-      </p:sp>
-      <p:sp>
-        <p:nvSpPr>
-          <p:cNvPr id="14" name="Shape 12"/>
-          <p:cNvSpPr/>
-          <p:nvPr/>
-        </p:nvSpPr>
-        <p:spPr>
-          <a:xfrm flipH="1">
-            <a:off x="2331720" y="2011680"/>
-            <a:ext cx="1325880" cy="594360"/>
-          </a:xfrm>
-          <a:prstGeom prst="line">
-            <a:avLst/>
-          </a:prstGeom>
-          <a:noFill/>
-          <a:ln w="12700">
-            <a:solidFill>
-              <a:srgbClr val="A9B4D0"/>
-            </a:solidFill>
-            <a:prstDash val="solid"/>
-          </a:ln>
-        </p:spPr>
-      </p:sp>
-      <p:sp>
-        <p:nvSpPr>
-          <p:cNvPr id="15" name="Shape 13"/>
-          <p:cNvSpPr/>
-          <p:nvPr/>
-        </p:nvSpPr>
-        <p:spPr>
-          <a:xfrm>
-            <a:off x="1874520" y="2606040"/>
-            <a:ext cx="914400" cy="457200"/>
-          </a:xfrm>
-          <a:prstGeom prst="roundRect">
-            <a:avLst>
-              <a:gd name="adj" fmla="val 12000"/>
+              <a:gd name="adj" fmla="val 5926"/>
             </a:avLst>
           </a:prstGeom>
           <a:solidFill>
@@ -3789,80 +3728,96 @@
       </p:sp>
       <p:sp>
         <p:nvSpPr>
-          <p:cNvPr id="16" name="Text 14"/>
-          <p:cNvSpPr/>
-          <p:nvPr/>
-        </p:nvSpPr>
-        <p:spPr>
-          <a:xfrm>
-            <a:off x="1874520" y="2606040"/>
-            <a:ext cx="914400" cy="457200"/>
-          </a:xfrm>
-          <a:prstGeom prst="rect">
-            <a:avLst/>
-          </a:prstGeom>
-          <a:noFill/>
-          <a:ln/>
-        </p:spPr>
-        <p:txBody>
-          <a:bodyPr wrap="square" lIns="254" tIns="254" rIns="254" bIns="254" rtlCol="0" anchor="ctr"/>
+          <p:cNvPr id="13" name="Text 10"/>
+          <p:cNvSpPr/>
+          <p:nvPr/>
+        </p:nvSpPr>
+        <p:spPr>
+          <a:xfrm>
+            <a:off x="5943600" y="1572768"/>
+            <a:ext cx="2834640" cy="640080"/>
+          </a:xfrm>
+          <a:prstGeom prst="rect">
+            <a:avLst/>
+          </a:prstGeom>
+          <a:noFill/>
+          <a:ln/>
+        </p:spPr>
+        <p:txBody>
+          <a:bodyPr wrap="square" lIns="0" tIns="0" rIns="0" bIns="0" rtlCol="0" anchor="ctr"/>
           <a:lstStyle/>
           <a:p>
             <a:pPr algn="ctr" indent="0" marL="0">
               <a:buNone/>
             </a:pPr>
             <a:r>
-              <a:rPr lang="en-US" sz="1300" dirty="0">
-                <a:solidFill>
-                  <a:srgbClr val="F5F7FF"/>
-                </a:solidFill>
-                <a:latin typeface="Calibri" pitchFamily="34" charset="0"/>
-                <a:ea typeface="Calibri" pitchFamily="34" charset="-122"/>
-                <a:cs typeface="Calibri" pitchFamily="34" charset="-120"/>
-              </a:rPr>
-              <a:t>G2</a:t>
-            </a:r>
-            <a:endParaRPr lang="en-US" sz="1300" dirty="0"/>
-          </a:p>
-        </p:txBody>
-      </p:sp>
-      <p:sp>
-        <p:nvSpPr>
-          <p:cNvPr id="17" name="Shape 15"/>
-          <p:cNvSpPr/>
-          <p:nvPr/>
-        </p:nvSpPr>
-        <p:spPr>
-          <a:xfrm>
-            <a:off x="3657600" y="2011680"/>
-            <a:ext cx="0" cy="594360"/>
-          </a:xfrm>
-          <a:prstGeom prst="line">
-            <a:avLst/>
-          </a:prstGeom>
-          <a:noFill/>
-          <a:ln w="12700">
-            <a:solidFill>
-              <a:srgbClr val="A9B4D0"/>
-            </a:solidFill>
-            <a:prstDash val="solid"/>
-          </a:ln>
-        </p:spPr>
-      </p:sp>
-      <p:sp>
-        <p:nvSpPr>
-          <p:cNvPr id="18" name="Shape 16"/>
-          <p:cNvSpPr/>
-          <p:nvPr/>
-        </p:nvSpPr>
-        <p:spPr>
-          <a:xfrm>
-            <a:off x="3200400" y="2606040"/>
-            <a:ext cx="914400" cy="457200"/>
+              <a:rPr lang="en-US" sz="3000" b="1" dirty="0">
+                <a:solidFill>
+                  <a:srgbClr val="FF5C7A"/>
+                </a:solidFill>
+                <a:latin typeface="Calibri" pitchFamily="34" charset="0"/>
+                <a:ea typeface="Calibri" pitchFamily="34" charset="-122"/>
+                <a:cs typeface="Calibri" pitchFamily="34" charset="-120"/>
+              </a:rPr>
+              <a:t>0.5 – 1.2×</a:t>
+            </a:r>
+            <a:endParaRPr lang="en-US" sz="3000" dirty="0"/>
+          </a:p>
+        </p:txBody>
+      </p:sp>
+      <p:sp>
+        <p:nvSpPr>
+          <p:cNvPr id="14" name="Text 11"/>
+          <p:cNvSpPr/>
+          <p:nvPr/>
+        </p:nvSpPr>
+        <p:spPr>
+          <a:xfrm>
+            <a:off x="6035040" y="2194560"/>
+            <a:ext cx="2651760" cy="457200"/>
+          </a:xfrm>
+          <a:prstGeom prst="rect">
+            <a:avLst/>
+          </a:prstGeom>
+          <a:noFill/>
+          <a:ln/>
+        </p:spPr>
+        <p:txBody>
+          <a:bodyPr wrap="square" lIns="0" tIns="0" rIns="0" bIns="0" rtlCol="0" anchor="ctr"/>
+          <a:lstStyle/>
+          <a:p>
+            <a:pPr algn="ctr" indent="0" marL="0">
+              <a:buNone/>
+            </a:pPr>
+            <a:r>
+              <a:rPr lang="en-US" sz="1100" dirty="0">
+                <a:solidFill>
+                  <a:srgbClr val="A9B4D0"/>
+                </a:solidFill>
+                <a:latin typeface="Calibri" pitchFamily="34" charset="0"/>
+                <a:ea typeface="Calibri" pitchFamily="34" charset="-122"/>
+                <a:cs typeface="Calibri" pitchFamily="34" charset="-120"/>
+              </a:rPr>
+              <a:t>P(optimum) / uniform, 5-qubit pack, p = 1, 3, 6</a:t>
+            </a:r>
+            <a:endParaRPr lang="en-US" sz="1100" dirty="0"/>
+          </a:p>
+        </p:txBody>
+      </p:sp>
+      <p:sp>
+        <p:nvSpPr>
+          <p:cNvPr id="15" name="Shape 12"/>
+          <p:cNvSpPr/>
+          <p:nvPr/>
+        </p:nvSpPr>
+        <p:spPr>
+          <a:xfrm>
+            <a:off x="8961120" y="1463040"/>
+            <a:ext cx="2834640" cy="1234440"/>
           </a:xfrm>
           <a:prstGeom prst="roundRect">
             <a:avLst>
-              <a:gd name="adj" fmla="val 12000"/>
+              <a:gd name="adj" fmla="val 5926"/>
             </a:avLst>
           </a:prstGeom>
           <a:solidFill>
@@ -3878,80 +3833,96 @@
       </p:sp>
       <p:sp>
         <p:nvSpPr>
-          <p:cNvPr id="19" name="Text 17"/>
-          <p:cNvSpPr/>
-          <p:nvPr/>
-        </p:nvSpPr>
-        <p:spPr>
-          <a:xfrm>
-            <a:off x="3200400" y="2606040"/>
-            <a:ext cx="914400" cy="457200"/>
-          </a:xfrm>
-          <a:prstGeom prst="rect">
-            <a:avLst/>
-          </a:prstGeom>
-          <a:noFill/>
-          <a:ln/>
-        </p:spPr>
-        <p:txBody>
-          <a:bodyPr wrap="square" lIns="254" tIns="254" rIns="254" bIns="254" rtlCol="0" anchor="ctr"/>
+          <p:cNvPr id="16" name="Text 13"/>
+          <p:cNvSpPr/>
+          <p:nvPr/>
+        </p:nvSpPr>
+        <p:spPr>
+          <a:xfrm>
+            <a:off x="8961120" y="1572768"/>
+            <a:ext cx="2834640" cy="640080"/>
+          </a:xfrm>
+          <a:prstGeom prst="rect">
+            <a:avLst/>
+          </a:prstGeom>
+          <a:noFill/>
+          <a:ln/>
+        </p:spPr>
+        <p:txBody>
+          <a:bodyPr wrap="square" lIns="0" tIns="0" rIns="0" bIns="0" rtlCol="0" anchor="ctr"/>
           <a:lstStyle/>
           <a:p>
             <a:pPr algn="ctr" indent="0" marL="0">
               <a:buNone/>
             </a:pPr>
             <a:r>
-              <a:rPr lang="en-US" sz="1300" dirty="0">
-                <a:solidFill>
-                  <a:srgbClr val="F5F7FF"/>
-                </a:solidFill>
-                <a:latin typeface="Calibri" pitchFamily="34" charset="0"/>
-                <a:ea typeface="Calibri" pitchFamily="34" charset="-122"/>
-                <a:cs typeface="Calibri" pitchFamily="34" charset="-120"/>
-              </a:rPr>
-              <a:t>G3</a:t>
-            </a:r>
-            <a:endParaRPr lang="en-US" sz="1300" dirty="0"/>
-          </a:p>
-        </p:txBody>
-      </p:sp>
-      <p:sp>
-        <p:nvSpPr>
-          <p:cNvPr id="20" name="Shape 18"/>
-          <p:cNvSpPr/>
-          <p:nvPr/>
-        </p:nvSpPr>
-        <p:spPr>
-          <a:xfrm>
-            <a:off x="3657600" y="2011680"/>
-            <a:ext cx="1325880" cy="594360"/>
-          </a:xfrm>
-          <a:prstGeom prst="line">
-            <a:avLst/>
-          </a:prstGeom>
-          <a:noFill/>
-          <a:ln w="12700">
-            <a:solidFill>
-              <a:srgbClr val="A9B4D0"/>
-            </a:solidFill>
-            <a:prstDash val="solid"/>
-          </a:ln>
-        </p:spPr>
-      </p:sp>
-      <p:sp>
-        <p:nvSpPr>
-          <p:cNvPr id="21" name="Shape 19"/>
-          <p:cNvSpPr/>
-          <p:nvPr/>
-        </p:nvSpPr>
-        <p:spPr>
-          <a:xfrm>
-            <a:off x="4526280" y="2606040"/>
-            <a:ext cx="914400" cy="457200"/>
+              <a:rPr lang="en-US" sz="3000" b="1" dirty="0">
+                <a:solidFill>
+                  <a:srgbClr val="2BD4C2"/>
+                </a:solidFill>
+                <a:latin typeface="Calibri" pitchFamily="34" charset="0"/>
+                <a:ea typeface="Calibri" pitchFamily="34" charset="-122"/>
+                <a:cs typeface="Calibri" pitchFamily="34" charset="-120"/>
+              </a:rPr>
+              <a:t>27×</a:t>
+            </a:r>
+            <a:endParaRPr lang="en-US" sz="3000" dirty="0"/>
+          </a:p>
+        </p:txBody>
+      </p:sp>
+      <p:sp>
+        <p:nvSpPr>
+          <p:cNvPr id="17" name="Text 14"/>
+          <p:cNvSpPr/>
+          <p:nvPr/>
+        </p:nvSpPr>
+        <p:spPr>
+          <a:xfrm>
+            <a:off x="9052560" y="2194560"/>
+            <a:ext cx="2651760" cy="457200"/>
+          </a:xfrm>
+          <a:prstGeom prst="rect">
+            <a:avLst/>
+          </a:prstGeom>
+          <a:noFill/>
+          <a:ln/>
+        </p:spPr>
+        <p:txBody>
+          <a:bodyPr wrap="square" lIns="0" tIns="0" rIns="0" bIns="0" rtlCol="0" anchor="ctr"/>
+          <a:lstStyle/>
+          <a:p>
+            <a:pPr algn="ctr" indent="0" marL="0">
+              <a:buNone/>
+            </a:pPr>
+            <a:r>
+              <a:rPr lang="en-US" sz="1100" dirty="0">
+                <a:solidFill>
+                  <a:srgbClr val="A9B4D0"/>
+                </a:solidFill>
+                <a:latin typeface="Calibri" pitchFamily="34" charset="0"/>
+                <a:ea typeface="Calibri" pitchFamily="34" charset="-122"/>
+                <a:cs typeface="Calibri" pitchFamily="34" charset="-120"/>
+              </a:rPr>
+              <a:t>P(optimum) / uniform, 2 qubits per sector, p = 1</a:t>
+            </a:r>
+            <a:endParaRPr lang="en-US" sz="1100" dirty="0"/>
+          </a:p>
+        </p:txBody>
+      </p:sp>
+      <p:sp>
+        <p:nvSpPr>
+          <p:cNvPr id="18" name="Shape 15"/>
+          <p:cNvSpPr/>
+          <p:nvPr/>
+        </p:nvSpPr>
+        <p:spPr>
+          <a:xfrm>
+            <a:off x="5943600" y="2880360"/>
+            <a:ext cx="2834640" cy="1234440"/>
           </a:xfrm>
           <a:prstGeom prst="roundRect">
             <a:avLst>
-              <a:gd name="adj" fmla="val 12000"/>
+              <a:gd name="adj" fmla="val 5926"/>
             </a:avLst>
           </a:prstGeom>
           <a:solidFill>
@@ -3967,80 +3938,96 @@
       </p:sp>
       <p:sp>
         <p:nvSpPr>
-          <p:cNvPr id="22" name="Text 20"/>
-          <p:cNvSpPr/>
-          <p:nvPr/>
-        </p:nvSpPr>
-        <p:spPr>
-          <a:xfrm>
-            <a:off x="4526280" y="2606040"/>
-            <a:ext cx="914400" cy="457200"/>
-          </a:xfrm>
-          <a:prstGeom prst="rect">
-            <a:avLst/>
-          </a:prstGeom>
-          <a:noFill/>
-          <a:ln/>
-        </p:spPr>
-        <p:txBody>
-          <a:bodyPr wrap="square" lIns="254" tIns="254" rIns="254" bIns="254" rtlCol="0" anchor="ctr"/>
+          <p:cNvPr id="19" name="Text 16"/>
+          <p:cNvSpPr/>
+          <p:nvPr/>
+        </p:nvSpPr>
+        <p:spPr>
+          <a:xfrm>
+            <a:off x="5943600" y="2990088"/>
+            <a:ext cx="2834640" cy="640080"/>
+          </a:xfrm>
+          <a:prstGeom prst="rect">
+            <a:avLst/>
+          </a:prstGeom>
+          <a:noFill/>
+          <a:ln/>
+        </p:spPr>
+        <p:txBody>
+          <a:bodyPr wrap="square" lIns="0" tIns="0" rIns="0" bIns="0" rtlCol="0" anchor="ctr"/>
           <a:lstStyle/>
           <a:p>
             <a:pPr algn="ctr" indent="0" marL="0">
               <a:buNone/>
             </a:pPr>
             <a:r>
-              <a:rPr lang="en-US" sz="1300" dirty="0">
-                <a:solidFill>
-                  <a:srgbClr val="F5F7FF"/>
-                </a:solidFill>
-                <a:latin typeface="Calibri" pitchFamily="34" charset="0"/>
-                <a:ea typeface="Calibri" pitchFamily="34" charset="-122"/>
-                <a:cs typeface="Calibri" pitchFamily="34" charset="-120"/>
-              </a:rPr>
-              <a:t>G4</a:t>
-            </a:r>
-            <a:endParaRPr lang="en-US" sz="1300" dirty="0"/>
-          </a:p>
-        </p:txBody>
-      </p:sp>
-      <p:sp>
-        <p:nvSpPr>
-          <p:cNvPr id="23" name="Shape 21"/>
-          <p:cNvSpPr/>
-          <p:nvPr/>
-        </p:nvSpPr>
-        <p:spPr>
-          <a:xfrm>
-            <a:off x="3657600" y="2011680"/>
-            <a:ext cx="2651760" cy="594360"/>
-          </a:xfrm>
-          <a:prstGeom prst="line">
-            <a:avLst/>
-          </a:prstGeom>
-          <a:noFill/>
-          <a:ln w="12700">
-            <a:solidFill>
-              <a:srgbClr val="A9B4D0"/>
-            </a:solidFill>
-            <a:prstDash val="solid"/>
-          </a:ln>
-        </p:spPr>
-      </p:sp>
-      <p:sp>
-        <p:nvSpPr>
-          <p:cNvPr id="24" name="Shape 22"/>
-          <p:cNvSpPr/>
-          <p:nvPr/>
-        </p:nvSpPr>
-        <p:spPr>
-          <a:xfrm>
-            <a:off x="5852160" y="2606040"/>
-            <a:ext cx="914400" cy="457200"/>
+              <a:rPr lang="en-US" sz="3000" b="1" dirty="0">
+                <a:solidFill>
+                  <a:srgbClr val="FFB454"/>
+                </a:solidFill>
+                <a:latin typeface="Calibri" pitchFamily="34" charset="0"/>
+                <a:ea typeface="Calibri" pitchFamily="34" charset="-122"/>
+                <a:cs typeface="Calibri" pitchFamily="34" charset="-120"/>
+              </a:rPr>
+              <a:t>15.6% → 3.0%</a:t>
+            </a:r>
+            <a:endParaRPr lang="en-US" sz="3000" dirty="0"/>
+          </a:p>
+        </p:txBody>
+      </p:sp>
+      <p:sp>
+        <p:nvSpPr>
+          <p:cNvPr id="20" name="Text 17"/>
+          <p:cNvSpPr/>
+          <p:nvPr/>
+        </p:nvSpPr>
+        <p:spPr>
+          <a:xfrm>
+            <a:off x="6035040" y="3611880"/>
+            <a:ext cx="2651760" cy="457200"/>
+          </a:xfrm>
+          <a:prstGeom prst="rect">
+            <a:avLst/>
+          </a:prstGeom>
+          <a:noFill/>
+          <a:ln/>
+        </p:spPr>
+        <p:txBody>
+          <a:bodyPr wrap="square" lIns="0" tIns="0" rIns="0" bIns="0" rtlCol="0" anchor="ctr"/>
+          <a:lstStyle/>
+          <a:p>
+            <a:pPr algn="ctr" indent="0" marL="0">
+              <a:buNone/>
+            </a:pPr>
+            <a:r>
+              <a:rPr lang="en-US" sz="1100" dirty="0">
+                <a:solidFill>
+                  <a:srgbClr val="A9B4D0"/>
+                </a:solidFill>
+                <a:latin typeface="Calibri" pitchFamily="34" charset="0"/>
+                <a:ea typeface="Calibri" pitchFamily="34" charset="-122"/>
+                <a:cs typeface="Calibri" pitchFamily="34" charset="-120"/>
+              </a:rPr>
+              <a:t>invalid states, 5-qubit pack, uniform → p = 3</a:t>
+            </a:r>
+            <a:endParaRPr lang="en-US" sz="1100" dirty="0"/>
+          </a:p>
+        </p:txBody>
+      </p:sp>
+      <p:sp>
+        <p:nvSpPr>
+          <p:cNvPr id="21" name="Shape 18"/>
+          <p:cNvSpPr/>
+          <p:nvPr/>
+        </p:nvSpPr>
+        <p:spPr>
+          <a:xfrm>
+            <a:off x="8961120" y="2880360"/>
+            <a:ext cx="2834640" cy="1234440"/>
           </a:xfrm>
           <a:prstGeom prst="roundRect">
             <a:avLst>
-              <a:gd name="adj" fmla="val 12000"/>
+              <a:gd name="adj" fmla="val 5926"/>
             </a:avLst>
           </a:prstGeom>
           <a:solidFill>
@@ -4056,53 +4043,53 @@
       </p:sp>
       <p:sp>
         <p:nvSpPr>
-          <p:cNvPr id="25" name="Text 23"/>
-          <p:cNvSpPr/>
-          <p:nvPr/>
-        </p:nvSpPr>
-        <p:spPr>
-          <a:xfrm>
-            <a:off x="5852160" y="2606040"/>
-            <a:ext cx="914400" cy="457200"/>
-          </a:xfrm>
-          <a:prstGeom prst="rect">
-            <a:avLst/>
-          </a:prstGeom>
-          <a:noFill/>
-          <a:ln/>
-        </p:spPr>
-        <p:txBody>
-          <a:bodyPr wrap="square" lIns="254" tIns="254" rIns="254" bIns="254" rtlCol="0" anchor="ctr"/>
+          <p:cNvPr id="22" name="Text 19"/>
+          <p:cNvSpPr/>
+          <p:nvPr/>
+        </p:nvSpPr>
+        <p:spPr>
+          <a:xfrm>
+            <a:off x="8961120" y="2990088"/>
+            <a:ext cx="2834640" cy="640080"/>
+          </a:xfrm>
+          <a:prstGeom prst="rect">
+            <a:avLst/>
+          </a:prstGeom>
+          <a:noFill/>
+          <a:ln/>
+        </p:spPr>
+        <p:txBody>
+          <a:bodyPr wrap="square" lIns="0" tIns="0" rIns="0" bIns="0" rtlCol="0" anchor="ctr"/>
           <a:lstStyle/>
           <a:p>
             <a:pPr algn="ctr" indent="0" marL="0">
               <a:buNone/>
             </a:pPr>
             <a:r>
-              <a:rPr lang="en-US" sz="1300" dirty="0">
-                <a:solidFill>
-                  <a:srgbClr val="F5F7FF"/>
-                </a:solidFill>
-                <a:latin typeface="Calibri" pitchFamily="34" charset="0"/>
-                <a:ea typeface="Calibri" pitchFamily="34" charset="-122"/>
-                <a:cs typeface="Calibri" pitchFamily="34" charset="-120"/>
-              </a:rPr>
-              <a:t>G5</a:t>
-            </a:r>
-            <a:endParaRPr lang="en-US" sz="1300" dirty="0"/>
-          </a:p>
-        </p:txBody>
-      </p:sp>
-      <p:sp>
-        <p:nvSpPr>
-          <p:cNvPr id="26" name="Text 24"/>
-          <p:cNvSpPr/>
-          <p:nvPr/>
-        </p:nvSpPr>
-        <p:spPr>
-          <a:xfrm>
-            <a:off x="3931920" y="3154680"/>
-            <a:ext cx="2926080" cy="457200"/>
+              <a:rPr lang="en-US" sz="3000" b="1" dirty="0">
+                <a:solidFill>
+                  <a:srgbClr val="2BD4C2"/>
+                </a:solidFill>
+                <a:latin typeface="Calibri" pitchFamily="34" charset="0"/>
+                <a:ea typeface="Calibri" pitchFamily="34" charset="-122"/>
+                <a:cs typeface="Calibri" pitchFamily="34" charset="-120"/>
+              </a:rPr>
+              <a:t>0%</a:t>
+            </a:r>
+            <a:endParaRPr lang="en-US" sz="3000" dirty="0"/>
+          </a:p>
+        </p:txBody>
+      </p:sp>
+      <p:sp>
+        <p:nvSpPr>
+          <p:cNvPr id="23" name="Text 20"/>
+          <p:cNvSpPr/>
+          <p:nvPr/>
+        </p:nvSpPr>
+        <p:spPr>
+          <a:xfrm>
+            <a:off x="9052560" y="3611880"/>
+            <a:ext cx="2651760" cy="457200"/>
           </a:xfrm>
           <a:prstGeom prst="rect">
             <a:avLst/>
@@ -4114,11 +4101,11 @@
           <a:bodyPr wrap="square" lIns="0" tIns="0" rIns="0" bIns="0" rtlCol="0" anchor="ctr"/>
           <a:lstStyle/>
           <a:p>
-            <a:pPr indent="0" marL="0">
-              <a:buNone/>
-            </a:pPr>
-            <a:r>
-              <a:rPr lang="en-US" sz="1000" dirty="0">
+            <a:pPr algn="ctr" indent="0" marL="0">
+              <a:buNone/>
+            </a:pPr>
+            <a:r>
+              <a:rPr lang="en-US" sz="1100" dirty="0">
                 <a:solidFill>
                   <a:srgbClr val="A9B4D0"/>
                 </a:solidFill>
@@ -4126,135 +4113,7 @@
                 <a:ea typeface="Calibri" pitchFamily="34" charset="-122"/>
                 <a:cs typeface="Calibri" pitchFamily="34" charset="-120"/>
               </a:rPr>
-              <a:t>each group: joint QAOA of its antennas · 2 qubits/antenna · 2-local H_C · one Classiq job (15 in parallel)</a:t>
-            </a:r>
-            <a:endParaRPr lang="en-US" sz="1000" dirty="0"/>
-          </a:p>
-        </p:txBody>
-      </p:sp>
-      <p:sp>
-        <p:nvSpPr>
-          <p:cNvPr id="27" name="Text 25"/>
-          <p:cNvSpPr/>
-          <p:nvPr/>
-        </p:nvSpPr>
-        <p:spPr>
-          <a:xfrm>
-            <a:off x="3931920" y="3840480"/>
-            <a:ext cx="2926080" cy="274320"/>
-          </a:xfrm>
-          <a:prstGeom prst="rect">
-            <a:avLst/>
-          </a:prstGeom>
-          <a:noFill/>
-          <a:ln/>
-        </p:spPr>
-        <p:txBody>
-          <a:bodyPr wrap="square" lIns="0" tIns="0" rIns="0" bIns="0" rtlCol="0" anchor="ctr"/>
-          <a:lstStyle/>
-          <a:p>
-            <a:pPr indent="0" marL="0">
-              <a:buNone/>
-            </a:pPr>
-            <a:r>
-              <a:rPr lang="en-US" sz="1000" dirty="0">
-                <a:solidFill>
-                  <a:srgbClr val="2BD4C2"/>
-                </a:solidFill>
-                <a:latin typeface="Calibri" pitchFamily="34" charset="0"/>
-                <a:ea typeface="Calibri" pitchFamily="34" charset="-122"/>
-                <a:cs typeface="Calibri" pitchFamily="34" charset="-120"/>
-              </a:rPr>
-              <a:t>refine G1 where ΔU is still large</a:t>
-            </a:r>
-            <a:endParaRPr lang="en-US" sz="1000" dirty="0"/>
-          </a:p>
-        </p:txBody>
-      </p:sp>
-      <p:sp>
-        <p:nvSpPr>
-          <p:cNvPr id="28" name="Shape 26"/>
-          <p:cNvSpPr/>
-          <p:nvPr/>
-        </p:nvSpPr>
-        <p:spPr>
-          <a:xfrm flipH="1">
-            <a:off x="822960" y="3063240"/>
-            <a:ext cx="182880" cy="731520"/>
-          </a:xfrm>
-          <a:prstGeom prst="line">
-            <a:avLst/>
-          </a:prstGeom>
-          <a:noFill/>
-          <a:ln w="12700">
-            <a:solidFill>
-              <a:srgbClr val="A9B4D0"/>
-            </a:solidFill>
-            <a:prstDash val="solid"/>
-          </a:ln>
-        </p:spPr>
-      </p:sp>
-      <p:sp>
-        <p:nvSpPr>
-          <p:cNvPr id="29" name="Shape 27"/>
-          <p:cNvSpPr/>
-          <p:nvPr/>
-        </p:nvSpPr>
-        <p:spPr>
-          <a:xfrm>
-            <a:off x="548640" y="3794760"/>
-            <a:ext cx="548640" cy="411480"/>
-          </a:xfrm>
-          <a:prstGeom prst="roundRect">
-            <a:avLst>
-              <a:gd name="adj" fmla="val 13333"/>
-            </a:avLst>
-          </a:prstGeom>
-          <a:solidFill>
-            <a:srgbClr val="141B33"/>
-          </a:solidFill>
-          <a:ln w="12700">
-            <a:solidFill>
-              <a:srgbClr val="141B33"/>
-            </a:solidFill>
-            <a:prstDash val="solid"/>
-          </a:ln>
-        </p:spPr>
-      </p:sp>
-      <p:sp>
-        <p:nvSpPr>
-          <p:cNvPr id="30" name="Text 28"/>
-          <p:cNvSpPr/>
-          <p:nvPr/>
-        </p:nvSpPr>
-        <p:spPr>
-          <a:xfrm>
-            <a:off x="548640" y="3794760"/>
-            <a:ext cx="548640" cy="411480"/>
-          </a:xfrm>
-          <a:prstGeom prst="rect">
-            <a:avLst/>
-          </a:prstGeom>
-          <a:noFill/>
-          <a:ln/>
-        </p:spPr>
-        <p:txBody>
-          <a:bodyPr wrap="square" lIns="254" tIns="254" rIns="254" bIns="254" rtlCol="0" anchor="ctr"/>
-          <a:lstStyle/>
-          <a:p>
-            <a:pPr algn="ctr" indent="0" marL="0">
-              <a:buNone/>
-            </a:pPr>
-            <a:r>
-              <a:rPr lang="en-US" sz="1100" dirty="0">
-                <a:solidFill>
-                  <a:srgbClr val="F5F7FF"/>
-                </a:solidFill>
-                <a:latin typeface="Calibri" pitchFamily="34" charset="0"/>
-                <a:ea typeface="Calibri" pitchFamily="34" charset="-122"/>
-                <a:cs typeface="Calibri" pitchFamily="34" charset="-120"/>
-              </a:rPr>
-              <a:t>G11</a:t>
+              <a:t>invalid states, binary: every bitstring is a plan</a:t>
             </a:r>
             <a:endParaRPr lang="en-US" sz="1100" dirty="0"/>
           </a:p>
@@ -4262,598 +4121,14 @@
       </p:sp>
       <p:sp>
         <p:nvSpPr>
-          <p:cNvPr id="31" name="Shape 29"/>
-          <p:cNvSpPr/>
-          <p:nvPr/>
-        </p:nvSpPr>
-        <p:spPr>
-          <a:xfrm>
-            <a:off x="1005840" y="3063240"/>
-            <a:ext cx="457200" cy="731520"/>
-          </a:xfrm>
-          <a:prstGeom prst="line">
-            <a:avLst/>
-          </a:prstGeom>
-          <a:noFill/>
-          <a:ln w="12700">
-            <a:solidFill>
-              <a:srgbClr val="A9B4D0"/>
-            </a:solidFill>
-            <a:prstDash val="solid"/>
-          </a:ln>
-        </p:spPr>
-      </p:sp>
-      <p:sp>
-        <p:nvSpPr>
-          <p:cNvPr id="32" name="Shape 30"/>
-          <p:cNvSpPr/>
-          <p:nvPr/>
-        </p:nvSpPr>
-        <p:spPr>
-          <a:xfrm>
-            <a:off x="1188720" y="3794760"/>
-            <a:ext cx="548640" cy="411480"/>
-          </a:xfrm>
-          <a:prstGeom prst="roundRect">
-            <a:avLst>
-              <a:gd name="adj" fmla="val 13333"/>
-            </a:avLst>
-          </a:prstGeom>
-          <a:solidFill>
-            <a:srgbClr val="7C5CFF"/>
-          </a:solidFill>
-          <a:ln w="12700">
-            <a:solidFill>
-              <a:srgbClr val="7C5CFF"/>
-            </a:solidFill>
-            <a:prstDash val="solid"/>
-          </a:ln>
-        </p:spPr>
-      </p:sp>
-      <p:sp>
-        <p:nvSpPr>
-          <p:cNvPr id="33" name="Text 31"/>
-          <p:cNvSpPr/>
-          <p:nvPr/>
-        </p:nvSpPr>
-        <p:spPr>
-          <a:xfrm>
-            <a:off x="1188720" y="3794760"/>
-            <a:ext cx="548640" cy="411480"/>
-          </a:xfrm>
-          <a:prstGeom prst="rect">
-            <a:avLst/>
-          </a:prstGeom>
-          <a:noFill/>
-          <a:ln/>
-        </p:spPr>
-        <p:txBody>
-          <a:bodyPr wrap="square" lIns="254" tIns="254" rIns="254" bIns="254" rtlCol="0" anchor="ctr"/>
-          <a:lstStyle/>
-          <a:p>
-            <a:pPr algn="ctr" indent="0" marL="0">
-              <a:buNone/>
-            </a:pPr>
-            <a:r>
-              <a:rPr lang="en-US" sz="1100" dirty="0">
-                <a:solidFill>
-                  <a:srgbClr val="F5F7FF"/>
-                </a:solidFill>
-                <a:latin typeface="Calibri" pitchFamily="34" charset="0"/>
-                <a:ea typeface="Calibri" pitchFamily="34" charset="-122"/>
-                <a:cs typeface="Calibri" pitchFamily="34" charset="-120"/>
-              </a:rPr>
-              <a:t>G12</a:t>
-            </a:r>
-            <a:endParaRPr lang="en-US" sz="1100" dirty="0"/>
-          </a:p>
-        </p:txBody>
-      </p:sp>
-      <p:sp>
-        <p:nvSpPr>
-          <p:cNvPr id="34" name="Shape 32"/>
-          <p:cNvSpPr/>
-          <p:nvPr/>
-        </p:nvSpPr>
-        <p:spPr>
-          <a:xfrm>
-            <a:off x="1005840" y="3063240"/>
-            <a:ext cx="1097280" cy="731520"/>
-          </a:xfrm>
-          <a:prstGeom prst="line">
-            <a:avLst/>
-          </a:prstGeom>
-          <a:noFill/>
-          <a:ln w="12700">
-            <a:solidFill>
-              <a:srgbClr val="A9B4D0"/>
-            </a:solidFill>
-            <a:prstDash val="solid"/>
-          </a:ln>
-        </p:spPr>
-      </p:sp>
-      <p:sp>
-        <p:nvSpPr>
-          <p:cNvPr id="35" name="Shape 33"/>
-          <p:cNvSpPr/>
-          <p:nvPr/>
-        </p:nvSpPr>
-        <p:spPr>
-          <a:xfrm>
-            <a:off x="1828800" y="3794760"/>
-            <a:ext cx="548640" cy="411480"/>
-          </a:xfrm>
-          <a:prstGeom prst="roundRect">
-            <a:avLst>
-              <a:gd name="adj" fmla="val 13333"/>
-            </a:avLst>
-          </a:prstGeom>
-          <a:solidFill>
-            <a:srgbClr val="141B33"/>
-          </a:solidFill>
-          <a:ln w="12700">
-            <a:solidFill>
-              <a:srgbClr val="141B33"/>
-            </a:solidFill>
-            <a:prstDash val="solid"/>
-          </a:ln>
-        </p:spPr>
-      </p:sp>
-      <p:sp>
-        <p:nvSpPr>
-          <p:cNvPr id="36" name="Text 34"/>
-          <p:cNvSpPr/>
-          <p:nvPr/>
-        </p:nvSpPr>
-        <p:spPr>
-          <a:xfrm>
-            <a:off x="1828800" y="3794760"/>
-            <a:ext cx="548640" cy="411480"/>
-          </a:xfrm>
-          <a:prstGeom prst="rect">
-            <a:avLst/>
-          </a:prstGeom>
-          <a:noFill/>
-          <a:ln/>
-        </p:spPr>
-        <p:txBody>
-          <a:bodyPr wrap="square" lIns="254" tIns="254" rIns="254" bIns="254" rtlCol="0" anchor="ctr"/>
-          <a:lstStyle/>
-          <a:p>
-            <a:pPr algn="ctr" indent="0" marL="0">
-              <a:buNone/>
-            </a:pPr>
-            <a:r>
-              <a:rPr lang="en-US" sz="1100" dirty="0">
-                <a:solidFill>
-                  <a:srgbClr val="F5F7FF"/>
-                </a:solidFill>
-                <a:latin typeface="Calibri" pitchFamily="34" charset="0"/>
-                <a:ea typeface="Calibri" pitchFamily="34" charset="-122"/>
-                <a:cs typeface="Calibri" pitchFamily="34" charset="-120"/>
-              </a:rPr>
-              <a:t>G13</a:t>
-            </a:r>
-            <a:endParaRPr lang="en-US" sz="1100" dirty="0"/>
-          </a:p>
-        </p:txBody>
-      </p:sp>
-      <p:sp>
-        <p:nvSpPr>
-          <p:cNvPr id="37" name="Shape 35"/>
-          <p:cNvSpPr/>
-          <p:nvPr/>
-        </p:nvSpPr>
-        <p:spPr>
-          <a:xfrm>
-            <a:off x="1005840" y="3063240"/>
-            <a:ext cx="1737360" cy="731520"/>
-          </a:xfrm>
-          <a:prstGeom prst="line">
-            <a:avLst/>
-          </a:prstGeom>
-          <a:noFill/>
-          <a:ln w="12700">
-            <a:solidFill>
-              <a:srgbClr val="A9B4D0"/>
-            </a:solidFill>
-            <a:prstDash val="solid"/>
-          </a:ln>
-        </p:spPr>
-      </p:sp>
-      <p:sp>
-        <p:nvSpPr>
-          <p:cNvPr id="38" name="Shape 36"/>
-          <p:cNvSpPr/>
-          <p:nvPr/>
-        </p:nvSpPr>
-        <p:spPr>
-          <a:xfrm>
-            <a:off x="2468880" y="3794760"/>
-            <a:ext cx="548640" cy="411480"/>
-          </a:xfrm>
-          <a:prstGeom prst="roundRect">
-            <a:avLst>
-              <a:gd name="adj" fmla="val 13333"/>
-            </a:avLst>
-          </a:prstGeom>
-          <a:solidFill>
-            <a:srgbClr val="141B33"/>
-          </a:solidFill>
-          <a:ln w="12700">
-            <a:solidFill>
-              <a:srgbClr val="141B33"/>
-            </a:solidFill>
-            <a:prstDash val="solid"/>
-          </a:ln>
-        </p:spPr>
-      </p:sp>
-      <p:sp>
-        <p:nvSpPr>
-          <p:cNvPr id="39" name="Text 37"/>
-          <p:cNvSpPr/>
-          <p:nvPr/>
-        </p:nvSpPr>
-        <p:spPr>
-          <a:xfrm>
-            <a:off x="2468880" y="3794760"/>
-            <a:ext cx="548640" cy="411480"/>
-          </a:xfrm>
-          <a:prstGeom prst="rect">
-            <a:avLst/>
-          </a:prstGeom>
-          <a:noFill/>
-          <a:ln/>
-        </p:spPr>
-        <p:txBody>
-          <a:bodyPr wrap="square" lIns="254" tIns="254" rIns="254" bIns="254" rtlCol="0" anchor="ctr"/>
-          <a:lstStyle/>
-          <a:p>
-            <a:pPr algn="ctr" indent="0" marL="0">
-              <a:buNone/>
-            </a:pPr>
-            <a:r>
-              <a:rPr lang="en-US" sz="1100" dirty="0">
-                <a:solidFill>
-                  <a:srgbClr val="F5F7FF"/>
-                </a:solidFill>
-                <a:latin typeface="Calibri" pitchFamily="34" charset="0"/>
-                <a:ea typeface="Calibri" pitchFamily="34" charset="-122"/>
-                <a:cs typeface="Calibri" pitchFamily="34" charset="-120"/>
-              </a:rPr>
-              <a:t>G14</a:t>
-            </a:r>
-            <a:endParaRPr lang="en-US" sz="1100" dirty="0"/>
-          </a:p>
-        </p:txBody>
-      </p:sp>
-      <p:sp>
-        <p:nvSpPr>
-          <p:cNvPr id="40" name="Shape 38"/>
-          <p:cNvSpPr/>
-          <p:nvPr/>
-        </p:nvSpPr>
-        <p:spPr>
-          <a:xfrm>
-            <a:off x="1005840" y="3063240"/>
-            <a:ext cx="2377440" cy="731520"/>
-          </a:xfrm>
-          <a:prstGeom prst="line">
-            <a:avLst/>
-          </a:prstGeom>
-          <a:noFill/>
-          <a:ln w="12700">
-            <a:solidFill>
-              <a:srgbClr val="A9B4D0"/>
-            </a:solidFill>
-            <a:prstDash val="solid"/>
-          </a:ln>
-        </p:spPr>
-      </p:sp>
-      <p:sp>
-        <p:nvSpPr>
-          <p:cNvPr id="41" name="Shape 39"/>
-          <p:cNvSpPr/>
-          <p:nvPr/>
-        </p:nvSpPr>
-        <p:spPr>
-          <a:xfrm>
-            <a:off x="3108960" y="3794760"/>
-            <a:ext cx="548640" cy="411480"/>
-          </a:xfrm>
-          <a:prstGeom prst="roundRect">
-            <a:avLst>
-              <a:gd name="adj" fmla="val 13333"/>
-            </a:avLst>
-          </a:prstGeom>
-          <a:solidFill>
-            <a:srgbClr val="141B33"/>
-          </a:solidFill>
-          <a:ln w="12700">
-            <a:solidFill>
-              <a:srgbClr val="141B33"/>
-            </a:solidFill>
-            <a:prstDash val="solid"/>
-          </a:ln>
-        </p:spPr>
-      </p:sp>
-      <p:sp>
-        <p:nvSpPr>
-          <p:cNvPr id="42" name="Text 40"/>
-          <p:cNvSpPr/>
-          <p:nvPr/>
-        </p:nvSpPr>
-        <p:spPr>
-          <a:xfrm>
-            <a:off x="3108960" y="3794760"/>
-            <a:ext cx="548640" cy="411480"/>
-          </a:xfrm>
-          <a:prstGeom prst="rect">
-            <a:avLst/>
-          </a:prstGeom>
-          <a:noFill/>
-          <a:ln/>
-        </p:spPr>
-        <p:txBody>
-          <a:bodyPr wrap="square" lIns="254" tIns="254" rIns="254" bIns="254" rtlCol="0" anchor="ctr"/>
-          <a:lstStyle/>
-          <a:p>
-            <a:pPr algn="ctr" indent="0" marL="0">
-              <a:buNone/>
-            </a:pPr>
-            <a:r>
-              <a:rPr lang="en-US" sz="1100" dirty="0">
-                <a:solidFill>
-                  <a:srgbClr val="F5F7FF"/>
-                </a:solidFill>
-                <a:latin typeface="Calibri" pitchFamily="34" charset="0"/>
-                <a:ea typeface="Calibri" pitchFamily="34" charset="-122"/>
-                <a:cs typeface="Calibri" pitchFamily="34" charset="-120"/>
-              </a:rPr>
-              <a:t>G15</a:t>
-            </a:r>
-            <a:endParaRPr lang="en-US" sz="1100" dirty="0"/>
-          </a:p>
-        </p:txBody>
-      </p:sp>
-      <p:sp>
-        <p:nvSpPr>
-          <p:cNvPr id="43" name="Shape 41"/>
-          <p:cNvSpPr/>
-          <p:nvPr/>
-        </p:nvSpPr>
-        <p:spPr>
-          <a:xfrm>
-            <a:off x="1463040" y="4206240"/>
-            <a:ext cx="0" cy="365760"/>
-          </a:xfrm>
-          <a:prstGeom prst="line">
-            <a:avLst/>
-          </a:prstGeom>
-          <a:noFill/>
-          <a:ln w="12700">
-            <a:solidFill>
-              <a:srgbClr val="A9B4D0"/>
-            </a:solidFill>
-            <a:prstDash val="solid"/>
-          </a:ln>
-        </p:spPr>
-      </p:sp>
-      <p:sp>
-        <p:nvSpPr>
-          <p:cNvPr id="44" name="Shape 42"/>
-          <p:cNvSpPr/>
-          <p:nvPr/>
-        </p:nvSpPr>
-        <p:spPr>
-          <a:xfrm>
-            <a:off x="548640" y="4572000"/>
-            <a:ext cx="6309360" cy="640080"/>
-          </a:xfrm>
-          <a:prstGeom prst="roundRect">
-            <a:avLst>
-              <a:gd name="adj" fmla="val 8571"/>
-            </a:avLst>
-          </a:prstGeom>
-          <a:solidFill>
-            <a:srgbClr val="7C5CFF"/>
-          </a:solidFill>
-          <a:ln w="12700">
-            <a:solidFill>
-              <a:srgbClr val="7C5CFF"/>
-            </a:solidFill>
-            <a:prstDash val="solid"/>
-          </a:ln>
-        </p:spPr>
-      </p:sp>
-      <p:sp>
-        <p:nvSpPr>
-          <p:cNvPr id="45" name="Text 43"/>
-          <p:cNvSpPr/>
-          <p:nvPr/>
-        </p:nvSpPr>
-        <p:spPr>
-          <a:xfrm>
-            <a:off x="548640" y="4572000"/>
-            <a:ext cx="6309360" cy="640080"/>
-          </a:xfrm>
-          <a:prstGeom prst="rect">
-            <a:avLst/>
-          </a:prstGeom>
-          <a:noFill/>
-          <a:ln/>
-        </p:spPr>
-        <p:txBody>
-          <a:bodyPr wrap="square" lIns="254" tIns="254" rIns="254" bIns="254" rtlCol="0" anchor="ctr"/>
-          <a:lstStyle/>
-          <a:p>
-            <a:pPr algn="ctr" indent="0" marL="0">
-              <a:buNone/>
-            </a:pPr>
-            <a:r>
-              <a:rPr lang="en-US" sz="1200" dirty="0">
-                <a:solidFill>
-                  <a:srgbClr val="F5F7FF"/>
-                </a:solidFill>
-                <a:latin typeface="Calibri" pitchFamily="34" charset="0"/>
-                <a:ea typeface="Calibri" pitchFamily="34" charset="-122"/>
-                <a:cs typeface="Calibri" pitchFamily="34" charset="-120"/>
-              </a:rPr>
-              <a:t>our run = one leaf: 2 real sites, 6 sectors, 12 qubits, optimum −2.844 found and proven</a:t>
-            </a:r>
-            <a:endParaRPr lang="en-US" sz="1200" dirty="0"/>
-          </a:p>
-        </p:txBody>
-      </p:sp>
-      <p:sp>
-        <p:nvSpPr>
-          <p:cNvPr id="46" name="Text 44"/>
-          <p:cNvSpPr/>
-          <p:nvPr/>
-        </p:nvSpPr>
-        <p:spPr>
-          <a:xfrm>
-            <a:off x="548640" y="5349240"/>
-            <a:ext cx="6309360" cy="274320"/>
-          </a:xfrm>
-          <a:prstGeom prst="rect">
-            <a:avLst/>
-          </a:prstGeom>
-          <a:noFill/>
-          <a:ln/>
-        </p:spPr>
-        <p:txBody>
-          <a:bodyPr wrap="square" lIns="0" tIns="0" rIns="0" bIns="0" rtlCol="0" anchor="ctr"/>
-          <a:lstStyle/>
-          <a:p>
-            <a:pPr indent="0" marL="0">
-              <a:buNone/>
-            </a:pPr>
-            <a:r>
-              <a:rPr lang="en-US" sz="1050" dirty="0">
-                <a:solidFill>
-                  <a:srgbClr val="A9B4D0"/>
-                </a:solidFill>
-                <a:latin typeface="Calibri" pitchFamily="34" charset="0"/>
-                <a:ea typeface="Calibri" pitchFamily="34" charset="-122"/>
-                <a:cs typeface="Calibri" pitchFamily="34" charset="-120"/>
-              </a:rPr>
-              <a:t>5 → 25 → 125 groups: distinct plans grow, jobs per level ≤ 25 → two batches of 15</a:t>
-            </a:r>
-            <a:endParaRPr lang="en-US" sz="1050" dirty="0"/>
-          </a:p>
-        </p:txBody>
-      </p:sp>
-      <p:sp>
-        <p:nvSpPr>
-          <p:cNvPr id="47" name="Shape 45"/>
-          <p:cNvSpPr/>
-          <p:nvPr/>
-        </p:nvSpPr>
-        <p:spPr>
-          <a:xfrm>
-            <a:off x="7223760" y="1463040"/>
-            <a:ext cx="4572000" cy="2148840"/>
-          </a:xfrm>
-          <a:prstGeom prst="roundRect">
-            <a:avLst>
-              <a:gd name="adj" fmla="val 3404"/>
-            </a:avLst>
-          </a:prstGeom>
-          <a:solidFill>
-            <a:srgbClr val="141B33"/>
-          </a:solidFill>
-          <a:ln w="12700">
-            <a:solidFill>
-              <a:srgbClr val="141B33"/>
-            </a:solidFill>
-            <a:prstDash val="solid"/>
-          </a:ln>
-        </p:spPr>
-      </p:sp>
-      <p:sp>
-        <p:nvSpPr>
-          <p:cNvPr id="48" name="Text 46"/>
-          <p:cNvSpPr/>
-          <p:nvPr/>
-        </p:nvSpPr>
-        <p:spPr>
-          <a:xfrm>
-            <a:off x="7360920" y="1554480"/>
-            <a:ext cx="4297680" cy="1965960"/>
-          </a:xfrm>
-          <a:prstGeom prst="rect">
-            <a:avLst/>
-          </a:prstGeom>
-          <a:noFill/>
-          <a:ln/>
-        </p:spPr>
-        <p:txBody>
-          <a:bodyPr wrap="square" lIns="635" tIns="635" rIns="635" bIns="635" rtlCol="0" anchor="t"/>
-          <a:lstStyle/>
-          <a:p>
-            <a:pPr indent="0" marL="0">
-              <a:buNone/>
-            </a:pPr>
-            <a:r>
-              <a:rPr lang="en-US" sz="1400" b="1" dirty="0">
-                <a:solidFill>
-                  <a:srgbClr val="2BD4C2"/>
-                </a:solidFill>
-                <a:latin typeface="Calibri" pitchFamily="34" charset="0"/>
-                <a:ea typeface="Calibri" pitchFamily="34" charset="-122"/>
-                <a:cs typeface="Calibri" pitchFamily="34" charset="-120"/>
-              </a:rPr>
-              <a:t>Two stated assumptions</a:t>
-            </a:r>
-            <a:endParaRPr lang="en-US" sz="1400" dirty="0"/>
-          </a:p>
-          <a:p>
-            <a:pPr indent="0" marL="0">
-              <a:buNone/>
-            </a:pPr>
-            <a:r>
-              <a:rPr lang="en-US" sz="1200" dirty="0">
-                <a:solidFill>
-                  <a:srgbClr val="F5F7FF"/>
-                </a:solidFill>
-                <a:latin typeface="Calibri" pitchFamily="34" charset="0"/>
-                <a:ea typeface="Calibri" pitchFamily="34" charset="-122"/>
-                <a:cs typeface="Calibri" pitchFamily="34" charset="-120"/>
-              </a:rPr>
-              <a:t>1. Regions in one group are similar enough to share the coarse tilt plan — refinement relaxes this level by level.</a:t>
-            </a:r>
-            <a:endParaRPr lang="en-US" sz="1400" dirty="0"/>
-          </a:p>
-          <a:p>
-            <a:pPr indent="0" marL="0">
-              <a:buNone/>
-            </a:pPr>
-            <a:r>
-              <a:rPr lang="en-US" sz="1200" dirty="0">
-                <a:solidFill>
-                  <a:srgbClr val="F5F7FF"/>
-                </a:solidFill>
-                <a:latin typeface="Calibri" pitchFamily="34" charset="0"/>
-                <a:ea typeface="Calibri" pitchFamily="34" charset="-122"/>
-                <a:cs typeface="Calibri" pitchFamily="34" charset="-120"/>
-              </a:rPr>
-              <a:t>2. Interference between groups is ignored at each level — fixed by re-optimising boundary antennas with neighbours held fixed.</a:t>
-            </a:r>
-            <a:endParaRPr lang="en-US" sz="1400" dirty="0"/>
-          </a:p>
-        </p:txBody>
-      </p:sp>
-      <p:sp>
-        <p:nvSpPr>
-          <p:cNvPr id="49" name="Text 47"/>
-          <p:cNvSpPr/>
-          <p:nvPr/>
-        </p:nvSpPr>
-        <p:spPr>
-          <a:xfrm>
-            <a:off x="7223760" y="3794760"/>
-            <a:ext cx="4572000" cy="2194560"/>
+          <p:cNvPr id="24" name="Text 21"/>
+          <p:cNvSpPr/>
+          <p:nvPr/>
+        </p:nvSpPr>
+        <p:spPr>
+          <a:xfrm>
+            <a:off x="5943600" y="4297680"/>
+            <a:ext cx="5852160" cy="1737360"/>
           </a:xfrm>
           <a:prstGeom prst="rect">
             <a:avLst/>
@@ -4881,7 +4156,7 @@
                 <a:ea typeface="Calibri" pitchFamily="34" charset="-122"/>
                 <a:cs typeface="Calibri" pitchFamily="34" charset="-120"/>
               </a:rPr>
-              <a:t>Group = antennas optimised jointly (the coupled ZZ problem) — that is where QAOA does work; a single shared 27-way choice would be brute-forced classically</a:t>
+              <a:t>Dense pack: 5 penalised states out of 32, so the QAOA layers go into learning the penalty, not the utility</a:t>
             </a:r>
             <a:endParaRPr lang="en-US" sz="1200" dirty="0"/>
           </a:p>
@@ -4902,7 +4177,7 @@
                 <a:ea typeface="Calibri" pitchFamily="34" charset="-122"/>
                 <a:cs typeface="Calibri" pitchFamily="34" charset="-120"/>
               </a:rPr>
-              <a:t>Quantum budget per job stays what we ran today: 12 qubits = 6 antennas; 24 qubits = 6 antennas × 10 tilt levels</a:t>
+              <a:t>Circuit cost is not the issue: depth 56 on 5 qubits vs 59 on 12 qubits, RZ + CX in both</a:t>
             </a:r>
             <a:endParaRPr lang="en-US" sz="1200" dirty="0"/>
           </a:p>
@@ -4923,7 +4198,28 @@
                 <a:ea typeface="Calibri" pitchFamily="34" charset="-122"/>
                 <a:cs typeface="Calibri" pitchFamily="34" charset="-120"/>
               </a:rPr>
-              <a:t>Classical: k-means + utility aggregation; quantum: one warm-started QAOA per group</a:t>
+              <a:t>Binary per sector keeps H_C 2-local; P(cost &lt; 0) climbs 53% → 67% from p = 1 to 2</a:t>
+            </a:r>
+            <a:endParaRPr lang="en-US" sz="1200" dirty="0"/>
+          </a:p>
+          <a:p>
+            <a:pPr marL="342900" indent="-342900">
+              <a:spcAft>
+                <a:spcPts val="600"/>
+              </a:spcAft>
+              <a:buSzPct val="100000"/>
+              <a:buChar char="▸"/>
+            </a:pPr>
+            <a:r>
+              <a:rPr lang="en-US" sz="1200" dirty="0">
+                <a:solidFill>
+                  <a:srgbClr val="F5F7FF"/>
+                </a:solidFill>
+                <a:latin typeface="Calibri" pitchFamily="34" charset="0"/>
+                <a:ea typeface="Calibri" pitchFamily="34" charset="-122"/>
+                <a:cs typeface="Calibri" pitchFamily="34" charset="-120"/>
+              </a:rPr>
+              <a:t>And it scales: 10 tilt levels = 4 qubits per sector, 24 qubits for 6 sectors, gate count grows quadratically</a:t>
             </a:r>
             <a:endParaRPr lang="en-US" sz="1200" dirty="0"/>
           </a:p>
@@ -5080,7 +4376,7 @@
                 <a:ea typeface="Calibri" pitchFamily="34" charset="-122"/>
                 <a:cs typeface="Calibri" pitchFamily="34" charset="-120"/>
               </a:rPr>
-              <a:t>SLIDE 13 / 13   |   SUMMARY</a:t>
+              <a:t>SLIDE 13 / 13   |   BENCHMARK</a:t>
             </a:r>
             <a:endParaRPr lang="en-US" sz="1100" dirty="0"/>
           </a:p>
@@ -5119,7 +4415,7 @@
                 <a:ea typeface="Calibri" pitchFamily="34" charset="-122"/>
                 <a:cs typeface="Calibri" pitchFamily="34" charset="-120"/>
               </a:rPr>
-              <a:t>Everything is in the group folder — reproducible end to end</a:t>
+              <a:t>Benchmark: 84% of the ceiling with 4.8× fewer quantum jobs</a:t>
             </a:r>
             <a:endParaRPr lang="en-US" sz="3200" dirty="0"/>
           </a:p>
@@ -5164,1489 +4460,64 @@
           </a:p>
         </p:txBody>
       </p:sp>
-      <p:graphicFrame>
-        <p:nvGraphicFramePr>
-          <p:cNvPr id="14" name="Table 0"/>
-          <p:cNvGraphicFramePr>
-            <a:graphicFrameLocks noGrp="1"/>
-          </p:cNvGraphicFramePr>
-          <p:nvPr>
-            <p:extLst>
-              <p:ext uri="{D42A27DB-BD31-4B8C-83A1-F6EECF244321}">
-                <p14:modId xmlns:p14="http://schemas.microsoft.com/office/powerpoint/2010/main" val="1579011935"/>
-              </p:ext>
-            </p:extLst>
-          </p:nvPr>
-        </p:nvGraphicFramePr>
-        <p:xfrm>
-          <a:off x="548640" y="1463040"/>
-          <a:ext cx="11247120" cy="914400"/>
-        </p:xfrm>
-        <a:graphic>
-          <a:graphicData uri="http://schemas.openxmlformats.org/drawingml/2006/table">
-            <a:tbl>
-              <a:tblPr/>
-              <a:tblGrid>
-                <a:gridCol w="3017520"/>
-                <a:gridCol w="5486400"/>
-                <a:gridCol w="2743200"/>
-              </a:tblGrid>
-              <a:tr h="0">
-                <a:tc>
-                  <a:txBody>
-                    <a:bodyPr/>
-                    <a:lstStyle/>
-                    <a:p>
-                      <a:pPr indent="0" marL="0">
-                        <a:buNone/>
-                      </a:pPr>
-                      <a:r>
-                        <a:rPr lang="en-US" sz="1200" b="1" dirty="0">
-                          <a:solidFill>
-                            <a:srgbClr val="2BD4C2"/>
-                          </a:solidFill>
-                          <a:latin typeface="Calibri" pitchFamily="34" charset="0"/>
-                          <a:ea typeface="Calibri" pitchFamily="34" charset="-122"/>
-                          <a:cs typeface="Calibri" pitchFamily="34" charset="-120"/>
-                        </a:rPr>
-                        <a:t>Artifact</a:t>
-                      </a:r>
-                      <a:endParaRPr lang="en-US" sz="1200" dirty="0">
-                        <a:latin typeface="Calibri" charset="0"/>
-                        <a:ea typeface="Calibri" charset="0"/>
-                        <a:cs typeface="Calibri" charset="0"/>
-                      </a:endParaRPr>
-                    </a:p>
-                  </a:txBody>
-                  <a:tcPr marL="54864" marR="54864" marT="54864" marB="54864">
-                    <a:lnL w="6350" cap="flat" cmpd="sng" algn="ctr">
-                      <a:solidFill>
-                        <a:srgbClr val="2A3358"/>
-                      </a:solidFill>
-                      <a:prstDash val="solid"/>
-                      <a:round/>
-                      <a:headEnd type="none" w="med" len="med"/>
-                      <a:tailEnd type="none" w="med" len="med"/>
-                    </a:lnL>
-                    <a:lnR w="6350" cap="flat" cmpd="sng" algn="ctr">
-                      <a:solidFill>
-                        <a:srgbClr val="2A3358"/>
-                      </a:solidFill>
-                      <a:prstDash val="solid"/>
-                      <a:round/>
-                      <a:headEnd type="none" w="med" len="med"/>
-                      <a:tailEnd type="none" w="med" len="med"/>
-                    </a:lnR>
-                    <a:lnT w="6350" cap="flat" cmpd="sng" algn="ctr">
-                      <a:solidFill>
-                        <a:srgbClr val="2A3358"/>
-                      </a:solidFill>
-                      <a:prstDash val="solid"/>
-                      <a:round/>
-                      <a:headEnd type="none" w="med" len="med"/>
-                      <a:tailEnd type="none" w="med" len="med"/>
-                    </a:lnT>
-                    <a:lnB w="6350" cap="flat" cmpd="sng" algn="ctr">
-                      <a:solidFill>
-                        <a:srgbClr val="2A3358"/>
-                      </a:solidFill>
-                      <a:prstDash val="solid"/>
-                      <a:round/>
-                      <a:headEnd type="none" w="med" len="med"/>
-                      <a:tailEnd type="none" w="med" len="med"/>
-                    </a:lnB>
-                    <a:solidFill>
-                      <a:srgbClr val="141B33"/>
-                    </a:solidFill>
-                  </a:tcPr>
-                </a:tc>
-                <a:tc>
-                  <a:txBody>
-                    <a:bodyPr/>
-                    <a:lstStyle/>
-                    <a:p>
-                      <a:pPr indent="0" marL="0">
-                        <a:buNone/>
-                      </a:pPr>
-                      <a:r>
-                        <a:rPr lang="en-US" sz="1200" b="1" dirty="0">
-                          <a:solidFill>
-                            <a:srgbClr val="2BD4C2"/>
-                          </a:solidFill>
-                          <a:latin typeface="Calibri" pitchFamily="34" charset="0"/>
-                          <a:ea typeface="Calibri" pitchFamily="34" charset="-122"/>
-                          <a:cs typeface="Calibri" pitchFamily="34" charset="-120"/>
-                        </a:rPr>
-                        <a:t>Path (C:\Projects\Hackton\group\…)</a:t>
-                      </a:r>
-                      <a:endParaRPr lang="en-US" sz="1200" dirty="0">
-                        <a:latin typeface="Calibri" charset="0"/>
-                        <a:ea typeface="Calibri" charset="0"/>
-                        <a:cs typeface="Calibri" charset="0"/>
-                      </a:endParaRPr>
-                    </a:p>
-                  </a:txBody>
-                  <a:tcPr marL="54864" marR="54864" marT="54864" marB="54864">
-                    <a:lnL w="6350" cap="flat" cmpd="sng" algn="ctr">
-                      <a:solidFill>
-                        <a:srgbClr val="2A3358"/>
-                      </a:solidFill>
-                      <a:prstDash val="solid"/>
-                      <a:round/>
-                      <a:headEnd type="none" w="med" len="med"/>
-                      <a:tailEnd type="none" w="med" len="med"/>
-                    </a:lnL>
-                    <a:lnR w="6350" cap="flat" cmpd="sng" algn="ctr">
-                      <a:solidFill>
-                        <a:srgbClr val="2A3358"/>
-                      </a:solidFill>
-                      <a:prstDash val="solid"/>
-                      <a:round/>
-                      <a:headEnd type="none" w="med" len="med"/>
-                      <a:tailEnd type="none" w="med" len="med"/>
-                    </a:lnR>
-                    <a:lnT w="6350" cap="flat" cmpd="sng" algn="ctr">
-                      <a:solidFill>
-                        <a:srgbClr val="2A3358"/>
-                      </a:solidFill>
-                      <a:prstDash val="solid"/>
-                      <a:round/>
-                      <a:headEnd type="none" w="med" len="med"/>
-                      <a:tailEnd type="none" w="med" len="med"/>
-                    </a:lnT>
-                    <a:lnB w="6350" cap="flat" cmpd="sng" algn="ctr">
-                      <a:solidFill>
-                        <a:srgbClr val="2A3358"/>
-                      </a:solidFill>
-                      <a:prstDash val="solid"/>
-                      <a:round/>
-                      <a:headEnd type="none" w="med" len="med"/>
-                      <a:tailEnd type="none" w="med" len="med"/>
-                    </a:lnB>
-                    <a:solidFill>
-                      <a:srgbClr val="141B33"/>
-                    </a:solidFill>
-                  </a:tcPr>
-                </a:tc>
-                <a:tc>
-                  <a:txBody>
-                    <a:bodyPr/>
-                    <a:lstStyle/>
-                    <a:p>
-                      <a:pPr indent="0" marL="0">
-                        <a:buNone/>
-                      </a:pPr>
-                      <a:r>
-                        <a:rPr lang="en-US" sz="1200" b="1" dirty="0">
-                          <a:solidFill>
-                            <a:srgbClr val="2BD4C2"/>
-                          </a:solidFill>
-                          <a:latin typeface="Calibri" pitchFamily="34" charset="0"/>
-                          <a:ea typeface="Calibri" pitchFamily="34" charset="-122"/>
-                          <a:cs typeface="Calibri" pitchFamily="34" charset="-120"/>
-                        </a:rPr>
-                        <a:t>Key number</a:t>
-                      </a:r>
-                      <a:endParaRPr lang="en-US" sz="1200" dirty="0">
-                        <a:latin typeface="Calibri" charset="0"/>
-                        <a:ea typeface="Calibri" charset="0"/>
-                        <a:cs typeface="Calibri" charset="0"/>
-                      </a:endParaRPr>
-                    </a:p>
-                  </a:txBody>
-                  <a:tcPr marL="54864" marR="54864" marT="54864" marB="54864">
-                    <a:lnL w="6350" cap="flat" cmpd="sng" algn="ctr">
-                      <a:solidFill>
-                        <a:srgbClr val="2A3358"/>
-                      </a:solidFill>
-                      <a:prstDash val="solid"/>
-                      <a:round/>
-                      <a:headEnd type="none" w="med" len="med"/>
-                      <a:tailEnd type="none" w="med" len="med"/>
-                    </a:lnL>
-                    <a:lnR w="6350" cap="flat" cmpd="sng" algn="ctr">
-                      <a:solidFill>
-                        <a:srgbClr val="2A3358"/>
-                      </a:solidFill>
-                      <a:prstDash val="solid"/>
-                      <a:round/>
-                      <a:headEnd type="none" w="med" len="med"/>
-                      <a:tailEnd type="none" w="med" len="med"/>
-                    </a:lnR>
-                    <a:lnT w="6350" cap="flat" cmpd="sng" algn="ctr">
-                      <a:solidFill>
-                        <a:srgbClr val="2A3358"/>
-                      </a:solidFill>
-                      <a:prstDash val="solid"/>
-                      <a:round/>
-                      <a:headEnd type="none" w="med" len="med"/>
-                      <a:tailEnd type="none" w="med" len="med"/>
-                    </a:lnT>
-                    <a:lnB w="6350" cap="flat" cmpd="sng" algn="ctr">
-                      <a:solidFill>
-                        <a:srgbClr val="2A3358"/>
-                      </a:solidFill>
-                      <a:prstDash val="solid"/>
-                      <a:round/>
-                      <a:headEnd type="none" w="med" len="med"/>
-                      <a:tailEnd type="none" w="med" len="med"/>
-                    </a:lnB>
-                    <a:solidFill>
-                      <a:srgbClr val="141B33"/>
-                    </a:solidFill>
-                  </a:tcPr>
-                </a:tc>
-              </a:tr>
-              <a:tr h="0">
-                <a:tc>
-                  <a:txBody>
-                    <a:bodyPr/>
-                    <a:lstStyle/>
-                    <a:p>
-                      <a:pPr indent="0" marL="0">
-                        <a:buNone/>
-                      </a:pPr>
-                      <a:r>
-                        <a:rPr lang="en-US" sz="1100" dirty="0">
-                          <a:solidFill>
-                            <a:srgbClr val="F5F7FF"/>
-                          </a:solidFill>
-                          <a:latin typeface="Consolas" pitchFamily="34" charset="0"/>
-                          <a:ea typeface="Consolas" pitchFamily="34" charset="-122"/>
-                          <a:cs typeface="Consolas" pitchFamily="34" charset="-120"/>
-                        </a:rPr>
-                        <a:t>Classiq QAOA program + results</a:t>
-                      </a:r>
-                      <a:endParaRPr lang="en-US" sz="1100" dirty="0">
-                        <a:latin typeface="Consolas" charset="0"/>
-                        <a:ea typeface="Consolas" charset="0"/>
-                        <a:cs typeface="Consolas" charset="0"/>
-                      </a:endParaRPr>
-                    </a:p>
-                  </a:txBody>
-                  <a:tcPr marL="54864" marR="54864" marT="54864" marB="54864">
-                    <a:lnL w="6350" cap="flat" cmpd="sng" algn="ctr">
-                      <a:solidFill>
-                        <a:srgbClr val="2A3358"/>
-                      </a:solidFill>
-                      <a:prstDash val="solid"/>
-                      <a:round/>
-                      <a:headEnd type="none" w="med" len="med"/>
-                      <a:tailEnd type="none" w="med" len="med"/>
-                    </a:lnL>
-                    <a:lnR w="6350" cap="flat" cmpd="sng" algn="ctr">
-                      <a:solidFill>
-                        <a:srgbClr val="2A3358"/>
-                      </a:solidFill>
-                      <a:prstDash val="solid"/>
-                      <a:round/>
-                      <a:headEnd type="none" w="med" len="med"/>
-                      <a:tailEnd type="none" w="med" len="med"/>
-                    </a:lnR>
-                    <a:lnT w="6350" cap="flat" cmpd="sng" algn="ctr">
-                      <a:solidFill>
-                        <a:srgbClr val="2A3358"/>
-                      </a:solidFill>
-                      <a:prstDash val="solid"/>
-                      <a:round/>
-                      <a:headEnd type="none" w="med" len="med"/>
-                      <a:tailEnd type="none" w="med" len="med"/>
-                    </a:lnT>
-                    <a:lnB w="6350" cap="flat" cmpd="sng" algn="ctr">
-                      <a:solidFill>
-                        <a:srgbClr val="2A3358"/>
-                      </a:solidFill>
-                      <a:prstDash val="solid"/>
-                      <a:round/>
-                      <a:headEnd type="none" w="med" len="med"/>
-                      <a:tailEnd type="none" w="med" len="med"/>
-                    </a:lnB>
-                    <a:solidFill>
-                      <a:srgbClr val="0B1020"/>
-                    </a:solidFill>
-                  </a:tcPr>
-                </a:tc>
-                <a:tc>
-                  <a:txBody>
-                    <a:bodyPr/>
-                    <a:lstStyle/>
-                    <a:p>
-                      <a:pPr indent="0" marL="0">
-                        <a:buNone/>
-                      </a:pPr>
-                      <a:r>
-                        <a:rPr lang="en-US" sz="1100" dirty="0">
-                          <a:solidFill>
-                            <a:srgbClr val="F5F7FF"/>
-                          </a:solidFill>
-                          <a:latin typeface="Consolas" pitchFamily="34" charset="0"/>
-                          <a:ea typeface="Consolas" pitchFamily="34" charset="-122"/>
-                          <a:cs typeface="Consolas" pitchFamily="34" charset="-120"/>
-                        </a:rPr>
-                        <a:t>classiq\qaoa_tilt_classiq.py, classiq\results\*.json/*.qasm</a:t>
-                      </a:r>
-                      <a:endParaRPr lang="en-US" sz="1100" dirty="0">
-                        <a:latin typeface="Consolas" charset="0"/>
-                        <a:ea typeface="Consolas" charset="0"/>
-                        <a:cs typeface="Consolas" charset="0"/>
-                      </a:endParaRPr>
-                    </a:p>
-                  </a:txBody>
-                  <a:tcPr marL="54864" marR="54864" marT="54864" marB="54864">
-                    <a:lnL w="6350" cap="flat" cmpd="sng" algn="ctr">
-                      <a:solidFill>
-                        <a:srgbClr val="2A3358"/>
-                      </a:solidFill>
-                      <a:prstDash val="solid"/>
-                      <a:round/>
-                      <a:headEnd type="none" w="med" len="med"/>
-                      <a:tailEnd type="none" w="med" len="med"/>
-                    </a:lnL>
-                    <a:lnR w="6350" cap="flat" cmpd="sng" algn="ctr">
-                      <a:solidFill>
-                        <a:srgbClr val="2A3358"/>
-                      </a:solidFill>
-                      <a:prstDash val="solid"/>
-                      <a:round/>
-                      <a:headEnd type="none" w="med" len="med"/>
-                      <a:tailEnd type="none" w="med" len="med"/>
-                    </a:lnR>
-                    <a:lnT w="6350" cap="flat" cmpd="sng" algn="ctr">
-                      <a:solidFill>
-                        <a:srgbClr val="2A3358"/>
-                      </a:solidFill>
-                      <a:prstDash val="solid"/>
-                      <a:round/>
-                      <a:headEnd type="none" w="med" len="med"/>
-                      <a:tailEnd type="none" w="med" len="med"/>
-                    </a:lnT>
-                    <a:lnB w="6350" cap="flat" cmpd="sng" algn="ctr">
-                      <a:solidFill>
-                        <a:srgbClr val="2A3358"/>
-                      </a:solidFill>
-                      <a:prstDash val="solid"/>
-                      <a:round/>
-                      <a:headEnd type="none" w="med" len="med"/>
-                      <a:tailEnd type="none" w="med" len="med"/>
-                    </a:lnB>
-                    <a:solidFill>
-                      <a:srgbClr val="0B1020"/>
-                    </a:solidFill>
-                  </a:tcPr>
-                </a:tc>
-                <a:tc>
-                  <a:txBody>
-                    <a:bodyPr/>
-                    <a:lstStyle/>
-                    <a:p>
-                      <a:pPr indent="0" marL="0">
-                        <a:buNone/>
-                      </a:pPr>
-                      <a:r>
-                        <a:rPr lang="en-US" sz="1100" dirty="0">
-                          <a:solidFill>
-                            <a:srgbClr val="F5F7FF"/>
-                          </a:solidFill>
-                          <a:latin typeface="Consolas" pitchFamily="34" charset="0"/>
-                          <a:ea typeface="Consolas" pitchFamily="34" charset="-122"/>
-                          <a:cs typeface="Consolas" pitchFamily="34" charset="-120"/>
-                        </a:rPr>
-                        <a:t>⟨C⟩ 2.020 (p1), −0.466 (p2)</a:t>
-                      </a:r>
-                      <a:endParaRPr lang="en-US" sz="1100" dirty="0">
-                        <a:latin typeface="Consolas" charset="0"/>
-                        <a:ea typeface="Consolas" charset="0"/>
-                        <a:cs typeface="Consolas" charset="0"/>
-                      </a:endParaRPr>
-                    </a:p>
-                  </a:txBody>
-                  <a:tcPr marL="54864" marR="54864" marT="54864" marB="54864">
-                    <a:lnL w="6350" cap="flat" cmpd="sng" algn="ctr">
-                      <a:solidFill>
-                        <a:srgbClr val="2A3358"/>
-                      </a:solidFill>
-                      <a:prstDash val="solid"/>
-                      <a:round/>
-                      <a:headEnd type="none" w="med" len="med"/>
-                      <a:tailEnd type="none" w="med" len="med"/>
-                    </a:lnL>
-                    <a:lnR w="6350" cap="flat" cmpd="sng" algn="ctr">
-                      <a:solidFill>
-                        <a:srgbClr val="2A3358"/>
-                      </a:solidFill>
-                      <a:prstDash val="solid"/>
-                      <a:round/>
-                      <a:headEnd type="none" w="med" len="med"/>
-                      <a:tailEnd type="none" w="med" len="med"/>
-                    </a:lnR>
-                    <a:lnT w="6350" cap="flat" cmpd="sng" algn="ctr">
-                      <a:solidFill>
-                        <a:srgbClr val="2A3358"/>
-                      </a:solidFill>
-                      <a:prstDash val="solid"/>
-                      <a:round/>
-                      <a:headEnd type="none" w="med" len="med"/>
-                      <a:tailEnd type="none" w="med" len="med"/>
-                    </a:lnT>
-                    <a:lnB w="6350" cap="flat" cmpd="sng" algn="ctr">
-                      <a:solidFill>
-                        <a:srgbClr val="2A3358"/>
-                      </a:solidFill>
-                      <a:prstDash val="solid"/>
-                      <a:round/>
-                      <a:headEnd type="none" w="med" len="med"/>
-                      <a:tailEnd type="none" w="med" len="med"/>
-                    </a:lnB>
-                    <a:solidFill>
-                      <a:srgbClr val="0B1020"/>
-                    </a:solidFill>
-                  </a:tcPr>
-                </a:tc>
-              </a:tr>
-              <a:tr h="0">
-                <a:tc>
-                  <a:txBody>
-                    <a:bodyPr/>
-                    <a:lstStyle/>
-                    <a:p>
-                      <a:pPr indent="0" marL="0">
-                        <a:buNone/>
-                      </a:pPr>
-                      <a:r>
-                        <a:rPr lang="en-US" sz="1100" dirty="0">
-                          <a:solidFill>
-                            <a:srgbClr val="F5F7FF"/>
-                          </a:solidFill>
-                          <a:latin typeface="Consolas" pitchFamily="34" charset="0"/>
-                          <a:ea typeface="Consolas" pitchFamily="34" charset="-122"/>
-                          <a:cs typeface="Consolas" pitchFamily="34" charset="-120"/>
-                        </a:rPr>
-                        <a:t>Pauli decomposition + QASM layer</a:t>
-                      </a:r>
-                      <a:endParaRPr lang="en-US" sz="1100" dirty="0">
-                        <a:latin typeface="Consolas" charset="0"/>
-                        <a:ea typeface="Consolas" charset="0"/>
-                        <a:cs typeface="Consolas" charset="0"/>
-                      </a:endParaRPr>
-                    </a:p>
-                  </a:txBody>
-                  <a:tcPr marL="54864" marR="54864" marT="54864" marB="54864">
-                    <a:lnL w="6350" cap="flat" cmpd="sng" algn="ctr">
-                      <a:solidFill>
-                        <a:srgbClr val="2A3358"/>
-                      </a:solidFill>
-                      <a:prstDash val="solid"/>
-                      <a:round/>
-                      <a:headEnd type="none" w="med" len="med"/>
-                      <a:tailEnd type="none" w="med" len="med"/>
-                    </a:lnL>
-                    <a:lnR w="6350" cap="flat" cmpd="sng" algn="ctr">
-                      <a:solidFill>
-                        <a:srgbClr val="2A3358"/>
-                      </a:solidFill>
-                      <a:prstDash val="solid"/>
-                      <a:round/>
-                      <a:headEnd type="none" w="med" len="med"/>
-                      <a:tailEnd type="none" w="med" len="med"/>
-                    </a:lnR>
-                    <a:lnT w="6350" cap="flat" cmpd="sng" algn="ctr">
-                      <a:solidFill>
-                        <a:srgbClr val="2A3358"/>
-                      </a:solidFill>
-                      <a:prstDash val="solid"/>
-                      <a:round/>
-                      <a:headEnd type="none" w="med" len="med"/>
-                      <a:tailEnd type="none" w="med" len="med"/>
-                    </a:lnT>
-                    <a:lnB w="6350" cap="flat" cmpd="sng" algn="ctr">
-                      <a:solidFill>
-                        <a:srgbClr val="2A3358"/>
-                      </a:solidFill>
-                      <a:prstDash val="solid"/>
-                      <a:round/>
-                      <a:headEnd type="none" w="med" len="med"/>
-                      <a:tailEnd type="none" w="med" len="med"/>
-                    </a:lnB>
-                    <a:solidFill>
-                      <a:srgbClr val="0B1020"/>
-                    </a:solidFill>
-                  </a:tcPr>
-                </a:tc>
-                <a:tc>
-                  <a:txBody>
-                    <a:bodyPr/>
-                    <a:lstStyle/>
-                    <a:p>
-                      <a:pPr indent="0" marL="0">
-                        <a:buNone/>
-                      </a:pPr>
-                      <a:r>
-                        <a:rPr lang="en-US" sz="1100" dirty="0">
-                          <a:solidFill>
-                            <a:srgbClr val="F5F7FF"/>
-                          </a:solidFill>
-                          <a:latin typeface="Consolas" pitchFamily="34" charset="0"/>
-                          <a:ea typeface="Consolas" pitchFamily="34" charset="-122"/>
-                          <a:cs typeface="Consolas" pitchFamily="34" charset="-120"/>
-                        </a:rPr>
-                        <a:t>gates\pauli_terms.json, gates\qaoa_layer_schedule.qasm</a:t>
-                      </a:r>
-                      <a:endParaRPr lang="en-US" sz="1100" dirty="0">
-                        <a:latin typeface="Consolas" charset="0"/>
-                        <a:ea typeface="Consolas" charset="0"/>
-                        <a:cs typeface="Consolas" charset="0"/>
-                      </a:endParaRPr>
-                    </a:p>
-                  </a:txBody>
-                  <a:tcPr marL="54864" marR="54864" marT="54864" marB="54864">
-                    <a:lnL w="6350" cap="flat" cmpd="sng" algn="ctr">
-                      <a:solidFill>
-                        <a:srgbClr val="2A3358"/>
-                      </a:solidFill>
-                      <a:prstDash val="solid"/>
-                      <a:round/>
-                      <a:headEnd type="none" w="med" len="med"/>
-                      <a:tailEnd type="none" w="med" len="med"/>
-                    </a:lnL>
-                    <a:lnR w="6350" cap="flat" cmpd="sng" algn="ctr">
-                      <a:solidFill>
-                        <a:srgbClr val="2A3358"/>
-                      </a:solidFill>
-                      <a:prstDash val="solid"/>
-                      <a:round/>
-                      <a:headEnd type="none" w="med" len="med"/>
-                      <a:tailEnd type="none" w="med" len="med"/>
-                    </a:lnR>
-                    <a:lnT w="6350" cap="flat" cmpd="sng" algn="ctr">
-                      <a:solidFill>
-                        <a:srgbClr val="2A3358"/>
-                      </a:solidFill>
-                      <a:prstDash val="solid"/>
-                      <a:round/>
-                      <a:headEnd type="none" w="med" len="med"/>
-                      <a:tailEnd type="none" w="med" len="med"/>
-                    </a:lnT>
-                    <a:lnB w="6350" cap="flat" cmpd="sng" algn="ctr">
-                      <a:solidFill>
-                        <a:srgbClr val="2A3358"/>
-                      </a:solidFill>
-                      <a:prstDash val="solid"/>
-                      <a:round/>
-                      <a:headEnd type="none" w="med" len="med"/>
-                      <a:tailEnd type="none" w="med" len="med"/>
-                    </a:lnB>
-                    <a:solidFill>
-                      <a:srgbClr val="0B1020"/>
-                    </a:solidFill>
-                  </a:tcPr>
-                </a:tc>
-                <a:tc>
-                  <a:txBody>
-                    <a:bodyPr/>
-                    <a:lstStyle/>
-                    <a:p>
-                      <a:pPr indent="0" marL="0">
-                        <a:buNone/>
-                      </a:pPr>
-                      <a:r>
-                        <a:rPr lang="en-US" sz="1100" dirty="0">
-                          <a:solidFill>
-                            <a:srgbClr val="F5F7FF"/>
-                          </a:solidFill>
-                          <a:latin typeface="Consolas" pitchFamily="34" charset="0"/>
-                          <a:ea typeface="Consolas" pitchFamily="34" charset="-122"/>
-                          <a:cs typeface="Consolas" pitchFamily="34" charset="-120"/>
-                        </a:rPr>
-                        <a:t>73 terms, 2-local</a:t>
-                      </a:r>
-                      <a:endParaRPr lang="en-US" sz="1100" dirty="0">
-                        <a:latin typeface="Consolas" charset="0"/>
-                        <a:ea typeface="Consolas" charset="0"/>
-                        <a:cs typeface="Consolas" charset="0"/>
-                      </a:endParaRPr>
-                    </a:p>
-                  </a:txBody>
-                  <a:tcPr marL="54864" marR="54864" marT="54864" marB="54864">
-                    <a:lnL w="6350" cap="flat" cmpd="sng" algn="ctr">
-                      <a:solidFill>
-                        <a:srgbClr val="2A3358"/>
-                      </a:solidFill>
-                      <a:prstDash val="solid"/>
-                      <a:round/>
-                      <a:headEnd type="none" w="med" len="med"/>
-                      <a:tailEnd type="none" w="med" len="med"/>
-                    </a:lnL>
-                    <a:lnR w="6350" cap="flat" cmpd="sng" algn="ctr">
-                      <a:solidFill>
-                        <a:srgbClr val="2A3358"/>
-                      </a:solidFill>
-                      <a:prstDash val="solid"/>
-                      <a:round/>
-                      <a:headEnd type="none" w="med" len="med"/>
-                      <a:tailEnd type="none" w="med" len="med"/>
-                    </a:lnR>
-                    <a:lnT w="6350" cap="flat" cmpd="sng" algn="ctr">
-                      <a:solidFill>
-                        <a:srgbClr val="2A3358"/>
-                      </a:solidFill>
-                      <a:prstDash val="solid"/>
-                      <a:round/>
-                      <a:headEnd type="none" w="med" len="med"/>
-                      <a:tailEnd type="none" w="med" len="med"/>
-                    </a:lnT>
-                    <a:lnB w="6350" cap="flat" cmpd="sng" algn="ctr">
-                      <a:solidFill>
-                        <a:srgbClr val="2A3358"/>
-                      </a:solidFill>
-                      <a:prstDash val="solid"/>
-                      <a:round/>
-                      <a:headEnd type="none" w="med" len="med"/>
-                      <a:tailEnd type="none" w="med" len="med"/>
-                    </a:lnB>
-                    <a:solidFill>
-                      <a:srgbClr val="0B1020"/>
-                    </a:solidFill>
-                  </a:tcPr>
-                </a:tc>
-              </a:tr>
-              <a:tr h="0">
-                <a:tc>
-                  <a:txBody>
-                    <a:bodyPr/>
-                    <a:lstStyle/>
-                    <a:p>
-                      <a:pPr indent="0" marL="0">
-                        <a:buNone/>
-                      </a:pPr>
-                      <a:r>
-                        <a:rPr lang="en-US" sz="1100" dirty="0">
-                          <a:solidFill>
-                            <a:srgbClr val="F5F7FF"/>
-                          </a:solidFill>
-                          <a:latin typeface="Consolas" pitchFamily="34" charset="0"/>
-                          <a:ea typeface="Consolas" pitchFamily="34" charset="-122"/>
-                          <a:cs typeface="Consolas" pitchFamily="34" charset="-120"/>
-                        </a:rPr>
-                        <a:t>Wolfram notebook, PDF, CDF, MD</a:t>
-                      </a:r>
-                      <a:endParaRPr lang="en-US" sz="1100" dirty="0">
-                        <a:latin typeface="Consolas" charset="0"/>
-                        <a:ea typeface="Consolas" charset="0"/>
-                        <a:cs typeface="Consolas" charset="0"/>
-                      </a:endParaRPr>
-                    </a:p>
-                  </a:txBody>
-                  <a:tcPr marL="54864" marR="54864" marT="54864" marB="54864">
-                    <a:lnL w="6350" cap="flat" cmpd="sng" algn="ctr">
-                      <a:solidFill>
-                        <a:srgbClr val="2A3358"/>
-                      </a:solidFill>
-                      <a:prstDash val="solid"/>
-                      <a:round/>
-                      <a:headEnd type="none" w="med" len="med"/>
-                      <a:tailEnd type="none" w="med" len="med"/>
-                    </a:lnL>
-                    <a:lnR w="6350" cap="flat" cmpd="sng" algn="ctr">
-                      <a:solidFill>
-                        <a:srgbClr val="2A3358"/>
-                      </a:solidFill>
-                      <a:prstDash val="solid"/>
-                      <a:round/>
-                      <a:headEnd type="none" w="med" len="med"/>
-                      <a:tailEnd type="none" w="med" len="med"/>
-                    </a:lnR>
-                    <a:lnT w="6350" cap="flat" cmpd="sng" algn="ctr">
-                      <a:solidFill>
-                        <a:srgbClr val="2A3358"/>
-                      </a:solidFill>
-                      <a:prstDash val="solid"/>
-                      <a:round/>
-                      <a:headEnd type="none" w="med" len="med"/>
-                      <a:tailEnd type="none" w="med" len="med"/>
-                    </a:lnT>
-                    <a:lnB w="6350" cap="flat" cmpd="sng" algn="ctr">
-                      <a:solidFill>
-                        <a:srgbClr val="2A3358"/>
-                      </a:solidFill>
-                      <a:prstDash val="solid"/>
-                      <a:round/>
-                      <a:headEnd type="none" w="med" len="med"/>
-                      <a:tailEnd type="none" w="med" len="med"/>
-                    </a:lnB>
-                    <a:solidFill>
-                      <a:srgbClr val="0B1020"/>
-                    </a:solidFill>
-                  </a:tcPr>
-                </a:tc>
-                <a:tc>
-                  <a:txBody>
-                    <a:bodyPr/>
-                    <a:lstStyle/>
-                    <a:p>
-                      <a:pPr indent="0" marL="0">
-                        <a:buNone/>
-                      </a:pPr>
-                      <a:r>
-                        <a:rPr lang="en-US" sz="1100" dirty="0">
-                          <a:solidFill>
-                            <a:srgbClr val="F5F7FF"/>
-                          </a:solidFill>
-                          <a:latin typeface="Consolas" pitchFamily="34" charset="0"/>
-                          <a:ea typeface="Consolas" pitchFamily="34" charset="-122"/>
-                          <a:cs typeface="Consolas" pitchFamily="34" charset="-120"/>
-                        </a:rPr>
-                        <a:t>wolfram\wolfram_realdataset_algorithms.*</a:t>
-                      </a:r>
-                      <a:endParaRPr lang="en-US" sz="1100" dirty="0">
-                        <a:latin typeface="Consolas" charset="0"/>
-                        <a:ea typeface="Consolas" charset="0"/>
-                        <a:cs typeface="Consolas" charset="0"/>
-                      </a:endParaRPr>
-                    </a:p>
-                  </a:txBody>
-                  <a:tcPr marL="54864" marR="54864" marT="54864" marB="54864">
-                    <a:lnL w="6350" cap="flat" cmpd="sng" algn="ctr">
-                      <a:solidFill>
-                        <a:srgbClr val="2A3358"/>
-                      </a:solidFill>
-                      <a:prstDash val="solid"/>
-                      <a:round/>
-                      <a:headEnd type="none" w="med" len="med"/>
-                      <a:tailEnd type="none" w="med" len="med"/>
-                    </a:lnL>
-                    <a:lnR w="6350" cap="flat" cmpd="sng" algn="ctr">
-                      <a:solidFill>
-                        <a:srgbClr val="2A3358"/>
-                      </a:solidFill>
-                      <a:prstDash val="solid"/>
-                      <a:round/>
-                      <a:headEnd type="none" w="med" len="med"/>
-                      <a:tailEnd type="none" w="med" len="med"/>
-                    </a:lnR>
-                    <a:lnT w="6350" cap="flat" cmpd="sng" algn="ctr">
-                      <a:solidFill>
-                        <a:srgbClr val="2A3358"/>
-                      </a:solidFill>
-                      <a:prstDash val="solid"/>
-                      <a:round/>
-                      <a:headEnd type="none" w="med" len="med"/>
-                      <a:tailEnd type="none" w="med" len="med"/>
-                    </a:lnT>
-                    <a:lnB w="6350" cap="flat" cmpd="sng" algn="ctr">
-                      <a:solidFill>
-                        <a:srgbClr val="2A3358"/>
-                      </a:solidFill>
-                      <a:prstDash val="solid"/>
-                      <a:round/>
-                      <a:headEnd type="none" w="med" len="med"/>
-                      <a:tailEnd type="none" w="med" len="med"/>
-                    </a:lnB>
-                    <a:solidFill>
-                      <a:srgbClr val="0B1020"/>
-                    </a:solidFill>
-                  </a:tcPr>
-                </a:tc>
-                <a:tc>
-                  <a:txBody>
-                    <a:bodyPr/>
-                    <a:lstStyle/>
-                    <a:p>
-                      <a:pPr indent="0" marL="0">
-                        <a:buNone/>
-                      </a:pPr>
-                      <a:r>
-                        <a:rPr lang="en-US" sz="1100" dirty="0">
-                          <a:solidFill>
-                            <a:srgbClr val="F5F7FF"/>
-                          </a:solidFill>
-                          <a:latin typeface="Consolas" pitchFamily="34" charset="0"/>
-                          <a:ea typeface="Consolas" pitchFamily="34" charset="-122"/>
-                          <a:cs typeface="Consolas" pitchFamily="34" charset="-120"/>
-                        </a:rPr>
-                        <a:t>P(cost&lt;0) 0.024→0.53→0.67</a:t>
-                      </a:r>
-                      <a:endParaRPr lang="en-US" sz="1100" dirty="0">
-                        <a:latin typeface="Consolas" charset="0"/>
-                        <a:ea typeface="Consolas" charset="0"/>
-                        <a:cs typeface="Consolas" charset="0"/>
-                      </a:endParaRPr>
-                    </a:p>
-                  </a:txBody>
-                  <a:tcPr marL="54864" marR="54864" marT="54864" marB="54864">
-                    <a:lnL w="6350" cap="flat" cmpd="sng" algn="ctr">
-                      <a:solidFill>
-                        <a:srgbClr val="2A3358"/>
-                      </a:solidFill>
-                      <a:prstDash val="solid"/>
-                      <a:round/>
-                      <a:headEnd type="none" w="med" len="med"/>
-                      <a:tailEnd type="none" w="med" len="med"/>
-                    </a:lnL>
-                    <a:lnR w="6350" cap="flat" cmpd="sng" algn="ctr">
-                      <a:solidFill>
-                        <a:srgbClr val="2A3358"/>
-                      </a:solidFill>
-                      <a:prstDash val="solid"/>
-                      <a:round/>
-                      <a:headEnd type="none" w="med" len="med"/>
-                      <a:tailEnd type="none" w="med" len="med"/>
-                    </a:lnR>
-                    <a:lnT w="6350" cap="flat" cmpd="sng" algn="ctr">
-                      <a:solidFill>
-                        <a:srgbClr val="2A3358"/>
-                      </a:solidFill>
-                      <a:prstDash val="solid"/>
-                      <a:round/>
-                      <a:headEnd type="none" w="med" len="med"/>
-                      <a:tailEnd type="none" w="med" len="med"/>
-                    </a:lnT>
-                    <a:lnB w="6350" cap="flat" cmpd="sng" algn="ctr">
-                      <a:solidFill>
-                        <a:srgbClr val="2A3358"/>
-                      </a:solidFill>
-                      <a:prstDash val="solid"/>
-                      <a:round/>
-                      <a:headEnd type="none" w="med" len="med"/>
-                      <a:tailEnd type="none" w="med" len="med"/>
-                    </a:lnB>
-                    <a:solidFill>
-                      <a:srgbClr val="0B1020"/>
-                    </a:solidFill>
-                  </a:tcPr>
-                </a:tc>
-              </a:tr>
-              <a:tr h="0">
-                <a:tc>
-                  <a:txBody>
-                    <a:bodyPr/>
-                    <a:lstStyle/>
-                    <a:p>
-                      <a:pPr indent="0" marL="0">
-                        <a:buNone/>
-                      </a:pPr>
-                      <a:r>
-                        <a:rPr lang="en-US" sz="1100" dirty="0">
-                          <a:solidFill>
-                            <a:srgbClr val="F5F7FF"/>
-                          </a:solidFill>
-                          <a:latin typeface="Consolas" pitchFamily="34" charset="0"/>
-                          <a:ea typeface="Consolas" pitchFamily="34" charset="-122"/>
-                          <a:cs typeface="Consolas" pitchFamily="34" charset="-120"/>
-                        </a:rPr>
-                        <a:t>Lean 4 proof + build log</a:t>
-                      </a:r>
-                      <a:endParaRPr lang="en-US" sz="1100" dirty="0">
-                        <a:latin typeface="Consolas" charset="0"/>
-                        <a:ea typeface="Consolas" charset="0"/>
-                        <a:cs typeface="Consolas" charset="0"/>
-                      </a:endParaRPr>
-                    </a:p>
-                  </a:txBody>
-                  <a:tcPr marL="54864" marR="54864" marT="54864" marB="54864">
-                    <a:lnL w="6350" cap="flat" cmpd="sng" algn="ctr">
-                      <a:solidFill>
-                        <a:srgbClr val="2A3358"/>
-                      </a:solidFill>
-                      <a:prstDash val="solid"/>
-                      <a:round/>
-                      <a:headEnd type="none" w="med" len="med"/>
-                      <a:tailEnd type="none" w="med" len="med"/>
-                    </a:lnL>
-                    <a:lnR w="6350" cap="flat" cmpd="sng" algn="ctr">
-                      <a:solidFill>
-                        <a:srgbClr val="2A3358"/>
-                      </a:solidFill>
-                      <a:prstDash val="solid"/>
-                      <a:round/>
-                      <a:headEnd type="none" w="med" len="med"/>
-                      <a:tailEnd type="none" w="med" len="med"/>
-                    </a:lnR>
-                    <a:lnT w="6350" cap="flat" cmpd="sng" algn="ctr">
-                      <a:solidFill>
-                        <a:srgbClr val="2A3358"/>
-                      </a:solidFill>
-                      <a:prstDash val="solid"/>
-                      <a:round/>
-                      <a:headEnd type="none" w="med" len="med"/>
-                      <a:tailEnd type="none" w="med" len="med"/>
-                    </a:lnT>
-                    <a:lnB w="6350" cap="flat" cmpd="sng" algn="ctr">
-                      <a:solidFill>
-                        <a:srgbClr val="2A3358"/>
-                      </a:solidFill>
-                      <a:prstDash val="solid"/>
-                      <a:round/>
-                      <a:headEnd type="none" w="med" len="med"/>
-                      <a:tailEnd type="none" w="med" len="med"/>
-                    </a:lnB>
-                    <a:solidFill>
-                      <a:srgbClr val="0B1020"/>
-                    </a:solidFill>
-                  </a:tcPr>
-                </a:tc>
-                <a:tc>
-                  <a:txBody>
-                    <a:bodyPr/>
-                    <a:lstStyle/>
-                    <a:p>
-                      <a:pPr indent="0" marL="0">
-                        <a:buNone/>
-                      </a:pPr>
-                      <a:r>
-                        <a:rPr lang="en-US" sz="1100" dirty="0">
-                          <a:solidFill>
-                            <a:srgbClr val="F5F7FF"/>
-                          </a:solidFill>
-                          <a:latin typeface="Consolas" pitchFamily="34" charset="0"/>
-                          <a:ea typeface="Consolas" pitchFamily="34" charset="-122"/>
-                          <a:cs typeface="Consolas" pitchFamily="34" charset="-120"/>
-                        </a:rPr>
-                        <a:t>lean\TiltQAOA.lean</a:t>
-                      </a:r>
-                      <a:endParaRPr lang="en-US" sz="1100" dirty="0">
-                        <a:latin typeface="Consolas" charset="0"/>
-                        <a:ea typeface="Consolas" charset="0"/>
-                        <a:cs typeface="Consolas" charset="0"/>
-                      </a:endParaRPr>
-                    </a:p>
-                  </a:txBody>
-                  <a:tcPr marL="54864" marR="54864" marT="54864" marB="54864">
-                    <a:lnL w="6350" cap="flat" cmpd="sng" algn="ctr">
-                      <a:solidFill>
-                        <a:srgbClr val="2A3358"/>
-                      </a:solidFill>
-                      <a:prstDash val="solid"/>
-                      <a:round/>
-                      <a:headEnd type="none" w="med" len="med"/>
-                      <a:tailEnd type="none" w="med" len="med"/>
-                    </a:lnL>
-                    <a:lnR w="6350" cap="flat" cmpd="sng" algn="ctr">
-                      <a:solidFill>
-                        <a:srgbClr val="2A3358"/>
-                      </a:solidFill>
-                      <a:prstDash val="solid"/>
-                      <a:round/>
-                      <a:headEnd type="none" w="med" len="med"/>
-                      <a:tailEnd type="none" w="med" len="med"/>
-                    </a:lnR>
-                    <a:lnT w="6350" cap="flat" cmpd="sng" algn="ctr">
-                      <a:solidFill>
-                        <a:srgbClr val="2A3358"/>
-                      </a:solidFill>
-                      <a:prstDash val="solid"/>
-                      <a:round/>
-                      <a:headEnd type="none" w="med" len="med"/>
-                      <a:tailEnd type="none" w="med" len="med"/>
-                    </a:lnT>
-                    <a:lnB w="6350" cap="flat" cmpd="sng" algn="ctr">
-                      <a:solidFill>
-                        <a:srgbClr val="2A3358"/>
-                      </a:solidFill>
-                      <a:prstDash val="solid"/>
-                      <a:round/>
-                      <a:headEnd type="none" w="med" len="med"/>
-                      <a:tailEnd type="none" w="med" len="med"/>
-                    </a:lnB>
-                    <a:solidFill>
-                      <a:srgbClr val="0B1020"/>
-                    </a:solidFill>
-                  </a:tcPr>
-                </a:tc>
-                <a:tc>
-                  <a:txBody>
-                    <a:bodyPr/>
-                    <a:lstStyle/>
-                    <a:p>
-                      <a:pPr indent="0" marL="0">
-                        <a:buNone/>
-                      </a:pPr>
-                      <a:r>
-                        <a:rPr lang="en-US" sz="1100" dirty="0">
-                          <a:solidFill>
-                            <a:srgbClr val="F5F7FF"/>
-                          </a:solidFill>
-                          <a:latin typeface="Consolas" pitchFamily="34" charset="0"/>
-                          <a:ea typeface="Consolas" pitchFamily="34" charset="-122"/>
-                          <a:cs typeface="Consolas" pitchFamily="34" charset="-120"/>
-                        </a:rPr>
-                        <a:t>optimum −2.844 unique, 0 sorry</a:t>
-                      </a:r>
-                      <a:endParaRPr lang="en-US" sz="1100" dirty="0">
-                        <a:latin typeface="Consolas" charset="0"/>
-                        <a:ea typeface="Consolas" charset="0"/>
-                        <a:cs typeface="Consolas" charset="0"/>
-                      </a:endParaRPr>
-                    </a:p>
-                  </a:txBody>
-                  <a:tcPr marL="54864" marR="54864" marT="54864" marB="54864">
-                    <a:lnL w="6350" cap="flat" cmpd="sng" algn="ctr">
-                      <a:solidFill>
-                        <a:srgbClr val="2A3358"/>
-                      </a:solidFill>
-                      <a:prstDash val="solid"/>
-                      <a:round/>
-                      <a:headEnd type="none" w="med" len="med"/>
-                      <a:tailEnd type="none" w="med" len="med"/>
-                    </a:lnL>
-                    <a:lnR w="6350" cap="flat" cmpd="sng" algn="ctr">
-                      <a:solidFill>
-                        <a:srgbClr val="2A3358"/>
-                      </a:solidFill>
-                      <a:prstDash val="solid"/>
-                      <a:round/>
-                      <a:headEnd type="none" w="med" len="med"/>
-                      <a:tailEnd type="none" w="med" len="med"/>
-                    </a:lnR>
-                    <a:lnT w="6350" cap="flat" cmpd="sng" algn="ctr">
-                      <a:solidFill>
-                        <a:srgbClr val="2A3358"/>
-                      </a:solidFill>
-                      <a:prstDash val="solid"/>
-                      <a:round/>
-                      <a:headEnd type="none" w="med" len="med"/>
-                      <a:tailEnd type="none" w="med" len="med"/>
-                    </a:lnT>
-                    <a:lnB w="6350" cap="flat" cmpd="sng" algn="ctr">
-                      <a:solidFill>
-                        <a:srgbClr val="2A3358"/>
-                      </a:solidFill>
-                      <a:prstDash val="solid"/>
-                      <a:round/>
-                      <a:headEnd type="none" w="med" len="med"/>
-                      <a:tailEnd type="none" w="med" len="med"/>
-                    </a:lnB>
-                    <a:solidFill>
-                      <a:srgbClr val="0B1020"/>
-                    </a:solidFill>
-                  </a:tcPr>
-                </a:tc>
-              </a:tr>
-              <a:tr h="0">
-                <a:tc>
-                  <a:txBody>
-                    <a:bodyPr/>
-                    <a:lstStyle/>
-                    <a:p>
-                      <a:pPr indent="0" marL="0">
-                        <a:buNone/>
-                      </a:pPr>
-                      <a:r>
-                        <a:rPr lang="en-US" sz="1100" dirty="0">
-                          <a:solidFill>
-                            <a:srgbClr val="F5F7FF"/>
-                          </a:solidFill>
-                          <a:latin typeface="Consolas" pitchFamily="34" charset="0"/>
-                          <a:ea typeface="Consolas" pitchFamily="34" charset="-122"/>
-                          <a:cs typeface="Consolas" pitchFamily="34" charset="-120"/>
-                        </a:rPr>
-                        <a:t>Charts + demo videos</a:t>
-                      </a:r>
-                      <a:endParaRPr lang="en-US" sz="1100" dirty="0">
-                        <a:latin typeface="Consolas" charset="0"/>
-                        <a:ea typeface="Consolas" charset="0"/>
-                        <a:cs typeface="Consolas" charset="0"/>
-                      </a:endParaRPr>
-                    </a:p>
-                  </a:txBody>
-                  <a:tcPr marL="54864" marR="54864" marT="54864" marB="54864">
-                    <a:lnL w="6350" cap="flat" cmpd="sng" algn="ctr">
-                      <a:solidFill>
-                        <a:srgbClr val="2A3358"/>
-                      </a:solidFill>
-                      <a:prstDash val="solid"/>
-                      <a:round/>
-                      <a:headEnd type="none" w="med" len="med"/>
-                      <a:tailEnd type="none" w="med" len="med"/>
-                    </a:lnL>
-                    <a:lnR w="6350" cap="flat" cmpd="sng" algn="ctr">
-                      <a:solidFill>
-                        <a:srgbClr val="2A3358"/>
-                      </a:solidFill>
-                      <a:prstDash val="solid"/>
-                      <a:round/>
-                      <a:headEnd type="none" w="med" len="med"/>
-                      <a:tailEnd type="none" w="med" len="med"/>
-                    </a:lnR>
-                    <a:lnT w="6350" cap="flat" cmpd="sng" algn="ctr">
-                      <a:solidFill>
-                        <a:srgbClr val="2A3358"/>
-                      </a:solidFill>
-                      <a:prstDash val="solid"/>
-                      <a:round/>
-                      <a:headEnd type="none" w="med" len="med"/>
-                      <a:tailEnd type="none" w="med" len="med"/>
-                    </a:lnT>
-                    <a:lnB w="6350" cap="flat" cmpd="sng" algn="ctr">
-                      <a:solidFill>
-                        <a:srgbClr val="2A3358"/>
-                      </a:solidFill>
-                      <a:prstDash val="solid"/>
-                      <a:round/>
-                      <a:headEnd type="none" w="med" len="med"/>
-                      <a:tailEnd type="none" w="med" len="med"/>
-                    </a:lnB>
-                    <a:solidFill>
-                      <a:srgbClr val="0B1020"/>
-                    </a:solidFill>
-                  </a:tcPr>
-                </a:tc>
-                <a:tc>
-                  <a:txBody>
-                    <a:bodyPr/>
-                    <a:lstStyle/>
-                    <a:p>
-                      <a:pPr indent="0" marL="0">
-                        <a:buNone/>
-                      </a:pPr>
-                      <a:r>
-                        <a:rPr lang="en-US" sz="1100" dirty="0">
-                          <a:solidFill>
-                            <a:srgbClr val="F5F7FF"/>
-                          </a:solidFill>
-                          <a:latin typeface="Consolas" pitchFamily="34" charset="0"/>
-                          <a:ea typeface="Consolas" pitchFamily="34" charset="-122"/>
-                          <a:cs typeface="Consolas" pitchFamily="34" charset="-120"/>
-                        </a:rPr>
-                        <a:t>charts\*.png, video\*.mp4</a:t>
-                      </a:r>
-                      <a:endParaRPr lang="en-US" sz="1100" dirty="0">
-                        <a:latin typeface="Consolas" charset="0"/>
-                        <a:ea typeface="Consolas" charset="0"/>
-                        <a:cs typeface="Consolas" charset="0"/>
-                      </a:endParaRPr>
-                    </a:p>
-                  </a:txBody>
-                  <a:tcPr marL="54864" marR="54864" marT="54864" marB="54864">
-                    <a:lnL w="6350" cap="flat" cmpd="sng" algn="ctr">
-                      <a:solidFill>
-                        <a:srgbClr val="2A3358"/>
-                      </a:solidFill>
-                      <a:prstDash val="solid"/>
-                      <a:round/>
-                      <a:headEnd type="none" w="med" len="med"/>
-                      <a:tailEnd type="none" w="med" len="med"/>
-                    </a:lnL>
-                    <a:lnR w="6350" cap="flat" cmpd="sng" algn="ctr">
-                      <a:solidFill>
-                        <a:srgbClr val="2A3358"/>
-                      </a:solidFill>
-                      <a:prstDash val="solid"/>
-                      <a:round/>
-                      <a:headEnd type="none" w="med" len="med"/>
-                      <a:tailEnd type="none" w="med" len="med"/>
-                    </a:lnR>
-                    <a:lnT w="6350" cap="flat" cmpd="sng" algn="ctr">
-                      <a:solidFill>
-                        <a:srgbClr val="2A3358"/>
-                      </a:solidFill>
-                      <a:prstDash val="solid"/>
-                      <a:round/>
-                      <a:headEnd type="none" w="med" len="med"/>
-                      <a:tailEnd type="none" w="med" len="med"/>
-                    </a:lnT>
-                    <a:lnB w="6350" cap="flat" cmpd="sng" algn="ctr">
-                      <a:solidFill>
-                        <a:srgbClr val="2A3358"/>
-                      </a:solidFill>
-                      <a:prstDash val="solid"/>
-                      <a:round/>
-                      <a:headEnd type="none" w="med" len="med"/>
-                      <a:tailEnd type="none" w="med" len="med"/>
-                    </a:lnB>
-                    <a:solidFill>
-                      <a:srgbClr val="0B1020"/>
-                    </a:solidFill>
-                  </a:tcPr>
-                </a:tc>
-                <a:tc>
-                  <a:txBody>
-                    <a:bodyPr/>
-                    <a:lstStyle/>
-                    <a:p>
-                      <a:pPr indent="0" marL="0">
-                        <a:buNone/>
-                      </a:pPr>
-                      <a:r>
-                        <a:rPr lang="en-US" sz="1100" dirty="0">
-                          <a:solidFill>
-                            <a:srgbClr val="F5F7FF"/>
-                          </a:solidFill>
-                          <a:latin typeface="Consolas" pitchFamily="34" charset="0"/>
-                          <a:ea typeface="Consolas" pitchFamily="34" charset="-122"/>
-                          <a:cs typeface="Consolas" pitchFamily="34" charset="-120"/>
-                        </a:rPr>
-                        <a:t>120 + 22 frames</a:t>
-                      </a:r>
-                      <a:endParaRPr lang="en-US" sz="1100" dirty="0">
-                        <a:latin typeface="Consolas" charset="0"/>
-                        <a:ea typeface="Consolas" charset="0"/>
-                        <a:cs typeface="Consolas" charset="0"/>
-                      </a:endParaRPr>
-                    </a:p>
-                  </a:txBody>
-                  <a:tcPr marL="54864" marR="54864" marT="54864" marB="54864">
-                    <a:lnL w="6350" cap="flat" cmpd="sng" algn="ctr">
-                      <a:solidFill>
-                        <a:srgbClr val="2A3358"/>
-                      </a:solidFill>
-                      <a:prstDash val="solid"/>
-                      <a:round/>
-                      <a:headEnd type="none" w="med" len="med"/>
-                      <a:tailEnd type="none" w="med" len="med"/>
-                    </a:lnL>
-                    <a:lnR w="6350" cap="flat" cmpd="sng" algn="ctr">
-                      <a:solidFill>
-                        <a:srgbClr val="2A3358"/>
-                      </a:solidFill>
-                      <a:prstDash val="solid"/>
-                      <a:round/>
-                      <a:headEnd type="none" w="med" len="med"/>
-                      <a:tailEnd type="none" w="med" len="med"/>
-                    </a:lnR>
-                    <a:lnT w="6350" cap="flat" cmpd="sng" algn="ctr">
-                      <a:solidFill>
-                        <a:srgbClr val="2A3358"/>
-                      </a:solidFill>
-                      <a:prstDash val="solid"/>
-                      <a:round/>
-                      <a:headEnd type="none" w="med" len="med"/>
-                      <a:tailEnd type="none" w="med" len="med"/>
-                    </a:lnT>
-                    <a:lnB w="6350" cap="flat" cmpd="sng" algn="ctr">
-                      <a:solidFill>
-                        <a:srgbClr val="2A3358"/>
-                      </a:solidFill>
-                      <a:prstDash val="solid"/>
-                      <a:round/>
-                      <a:headEnd type="none" w="med" len="med"/>
-                      <a:tailEnd type="none" w="med" len="med"/>
-                    </a:lnB>
-                    <a:solidFill>
-                      <a:srgbClr val="0B1020"/>
-                    </a:solidFill>
-                  </a:tcPr>
-                </a:tc>
-              </a:tr>
-              <a:tr h="0">
-                <a:tc>
-                  <a:txBody>
-                    <a:bodyPr/>
-                    <a:lstStyle/>
-                    <a:p>
-                      <a:pPr indent="0" marL="0">
-                        <a:buNone/>
-                      </a:pPr>
-                      <a:r>
-                        <a:rPr lang="en-US" sz="1100" dirty="0">
-                          <a:solidFill>
-                            <a:srgbClr val="F5F7FF"/>
-                          </a:solidFill>
-                          <a:latin typeface="Consolas" pitchFamily="34" charset="0"/>
-                          <a:ea typeface="Consolas" pitchFamily="34" charset="-122"/>
-                          <a:cs typeface="Consolas" pitchFamily="34" charset="-120"/>
-                        </a:rPr>
-                        <a:t>Hamiltonian write-up</a:t>
-                      </a:r>
-                      <a:endParaRPr lang="en-US" sz="1100" dirty="0">
-                        <a:latin typeface="Consolas" charset="0"/>
-                        <a:ea typeface="Consolas" charset="0"/>
-                        <a:cs typeface="Consolas" charset="0"/>
-                      </a:endParaRPr>
-                    </a:p>
-                  </a:txBody>
-                  <a:tcPr marL="54864" marR="54864" marT="54864" marB="54864">
-                    <a:lnL w="6350" cap="flat" cmpd="sng" algn="ctr">
-                      <a:solidFill>
-                        <a:srgbClr val="2A3358"/>
-                      </a:solidFill>
-                      <a:prstDash val="solid"/>
-                      <a:round/>
-                      <a:headEnd type="none" w="med" len="med"/>
-                      <a:tailEnd type="none" w="med" len="med"/>
-                    </a:lnL>
-                    <a:lnR w="6350" cap="flat" cmpd="sng" algn="ctr">
-                      <a:solidFill>
-                        <a:srgbClr val="2A3358"/>
-                      </a:solidFill>
-                      <a:prstDash val="solid"/>
-                      <a:round/>
-                      <a:headEnd type="none" w="med" len="med"/>
-                      <a:tailEnd type="none" w="med" len="med"/>
-                    </a:lnR>
-                    <a:lnT w="6350" cap="flat" cmpd="sng" algn="ctr">
-                      <a:solidFill>
-                        <a:srgbClr val="2A3358"/>
-                      </a:solidFill>
-                      <a:prstDash val="solid"/>
-                      <a:round/>
-                      <a:headEnd type="none" w="med" len="med"/>
-                      <a:tailEnd type="none" w="med" len="med"/>
-                    </a:lnT>
-                    <a:lnB w="6350" cap="flat" cmpd="sng" algn="ctr">
-                      <a:solidFill>
-                        <a:srgbClr val="2A3358"/>
-                      </a:solidFill>
-                      <a:prstDash val="solid"/>
-                      <a:round/>
-                      <a:headEnd type="none" w="med" len="med"/>
-                      <a:tailEnd type="none" w="med" len="med"/>
-                    </a:lnB>
-                    <a:solidFill>
-                      <a:srgbClr val="0B1020"/>
-                    </a:solidFill>
-                  </a:tcPr>
-                </a:tc>
-                <a:tc>
-                  <a:txBody>
-                    <a:bodyPr/>
-                    <a:lstStyle/>
-                    <a:p>
-                      <a:pPr indent="0" marL="0">
-                        <a:buNone/>
-                      </a:pPr>
-                      <a:r>
-                        <a:rPr lang="en-US" sz="1100" dirty="0">
-                          <a:solidFill>
-                            <a:srgbClr val="F5F7FF"/>
-                          </a:solidFill>
-                          <a:latin typeface="Consolas" pitchFamily="34" charset="0"/>
-                          <a:ea typeface="Consolas" pitchFamily="34" charset="-122"/>
-                          <a:cs typeface="Consolas" pitchFamily="34" charset="-120"/>
-                        </a:rPr>
-                        <a:t>qaoa_antenna_hamiltonian_explanation.md</a:t>
-                      </a:r>
-                      <a:endParaRPr lang="en-US" sz="1100" dirty="0">
-                        <a:latin typeface="Consolas" charset="0"/>
-                        <a:ea typeface="Consolas" charset="0"/>
-                        <a:cs typeface="Consolas" charset="0"/>
-                      </a:endParaRPr>
-                    </a:p>
-                  </a:txBody>
-                  <a:tcPr marL="54864" marR="54864" marT="54864" marB="54864">
-                    <a:lnL w="6350" cap="flat" cmpd="sng" algn="ctr">
-                      <a:solidFill>
-                        <a:srgbClr val="2A3358"/>
-                      </a:solidFill>
-                      <a:prstDash val="solid"/>
-                      <a:round/>
-                      <a:headEnd type="none" w="med" len="med"/>
-                      <a:tailEnd type="none" w="med" len="med"/>
-                    </a:lnL>
-                    <a:lnR w="6350" cap="flat" cmpd="sng" algn="ctr">
-                      <a:solidFill>
-                        <a:srgbClr val="2A3358"/>
-                      </a:solidFill>
-                      <a:prstDash val="solid"/>
-                      <a:round/>
-                      <a:headEnd type="none" w="med" len="med"/>
-                      <a:tailEnd type="none" w="med" len="med"/>
-                    </a:lnR>
-                    <a:lnT w="6350" cap="flat" cmpd="sng" algn="ctr">
-                      <a:solidFill>
-                        <a:srgbClr val="2A3358"/>
-                      </a:solidFill>
-                      <a:prstDash val="solid"/>
-                      <a:round/>
-                      <a:headEnd type="none" w="med" len="med"/>
-                      <a:tailEnd type="none" w="med" len="med"/>
-                    </a:lnT>
-                    <a:lnB w="6350" cap="flat" cmpd="sng" algn="ctr">
-                      <a:solidFill>
-                        <a:srgbClr val="2A3358"/>
-                      </a:solidFill>
-                      <a:prstDash val="solid"/>
-                      <a:round/>
-                      <a:headEnd type="none" w="med" len="med"/>
-                      <a:tailEnd type="none" w="med" len="med"/>
-                    </a:lnB>
-                    <a:solidFill>
-                      <a:srgbClr val="0B1020"/>
-                    </a:solidFill>
-                  </a:tcPr>
-                </a:tc>
-                <a:tc>
-                  <a:txBody>
-                    <a:bodyPr/>
-                    <a:lstStyle/>
-                    <a:p>
-                      <a:pPr indent="0" marL="0">
-                        <a:buNone/>
-                      </a:pPr>
-                      <a:r>
-                        <a:rPr lang="en-US" sz="1100" dirty="0">
-                          <a:solidFill>
-                            <a:srgbClr val="F5F7FF"/>
-                          </a:solidFill>
-                          <a:latin typeface="Consolas" pitchFamily="34" charset="0"/>
-                          <a:ea typeface="Consolas" pitchFamily="34" charset="-122"/>
-                          <a:cs typeface="Consolas" pitchFamily="34" charset="-120"/>
-                        </a:rPr>
-                        <a:t>—</a:t>
-                      </a:r>
-                      <a:endParaRPr lang="en-US" sz="1100" dirty="0">
-                        <a:latin typeface="Consolas" charset="0"/>
-                        <a:ea typeface="Consolas" charset="0"/>
-                        <a:cs typeface="Consolas" charset="0"/>
-                      </a:endParaRPr>
-                    </a:p>
-                  </a:txBody>
-                  <a:tcPr marL="54864" marR="54864" marT="54864" marB="54864">
-                    <a:lnL w="6350" cap="flat" cmpd="sng" algn="ctr">
-                      <a:solidFill>
-                        <a:srgbClr val="2A3358"/>
-                      </a:solidFill>
-                      <a:prstDash val="solid"/>
-                      <a:round/>
-                      <a:headEnd type="none" w="med" len="med"/>
-                      <a:tailEnd type="none" w="med" len="med"/>
-                    </a:lnL>
-                    <a:lnR w="6350" cap="flat" cmpd="sng" algn="ctr">
-                      <a:solidFill>
-                        <a:srgbClr val="2A3358"/>
-                      </a:solidFill>
-                      <a:prstDash val="solid"/>
-                      <a:round/>
-                      <a:headEnd type="none" w="med" len="med"/>
-                      <a:tailEnd type="none" w="med" len="med"/>
-                    </a:lnR>
-                    <a:lnT w="6350" cap="flat" cmpd="sng" algn="ctr">
-                      <a:solidFill>
-                        <a:srgbClr val="2A3358"/>
-                      </a:solidFill>
-                      <a:prstDash val="solid"/>
-                      <a:round/>
-                      <a:headEnd type="none" w="med" len="med"/>
-                      <a:tailEnd type="none" w="med" len="med"/>
-                    </a:lnT>
-                    <a:lnB w="6350" cap="flat" cmpd="sng" algn="ctr">
-                      <a:solidFill>
-                        <a:srgbClr val="2A3358"/>
-                      </a:solidFill>
-                      <a:prstDash val="solid"/>
-                      <a:round/>
-                      <a:headEnd type="none" w="med" len="med"/>
-                      <a:tailEnd type="none" w="med" len="med"/>
-                    </a:lnB>
-                    <a:solidFill>
-                      <a:srgbClr val="0B1020"/>
-                    </a:solidFill>
-                  </a:tcPr>
-                </a:tc>
-              </a:tr>
-            </a:tbl>
-          </a:graphicData>
-        </a:graphic>
-      </p:graphicFrame>
-      <p:sp>
-        <p:nvSpPr>
-          <p:cNvPr id="9" name="Text 6"/>
-          <p:cNvSpPr/>
-          <p:nvPr/>
-        </p:nvSpPr>
-        <p:spPr>
-          <a:xfrm>
-            <a:off x="548640" y="5074920"/>
-            <a:ext cx="11247120" cy="365760"/>
+      <p:pic>
+        <p:nvPicPr>
+          <p:cNvPr id="8" name="Image 0" descr="C:\Projects\Hackton\group\charts\group_benchmark_bars.png">    </p:cNvPr>
+          <p:cNvPicPr>
+            <a:picLocks noChangeAspect="1"/>
+          </p:cNvPicPr>
+          <p:nvPr/>
+        </p:nvPicPr>
+        <p:blipFill>
+          <a:blip r:embed="rId1"/>
+          <a:stretch>
+            <a:fillRect/>
+          </a:stretch>
+        </p:blipFill>
+        <p:spPr>
+          <a:xfrm>
+            <a:off x="548640" y="1417320"/>
+            <a:ext cx="5486400" cy="2715768"/>
+          </a:xfrm>
+          <a:prstGeom prst="rect">
+            <a:avLst/>
+          </a:prstGeom>
+        </p:spPr>
+      </p:pic>
+      <p:pic>
+        <p:nvPicPr>
+          <p:cNvPr id="9" name="Image 1" descr="C:\Projects\Hackton\group\charts\group_benchmark_depth.png">    </p:cNvPr>
+          <p:cNvPicPr>
+            <a:picLocks noChangeAspect="1"/>
+          </p:cNvPicPr>
+          <p:nvPr/>
+        </p:nvPicPr>
+        <p:blipFill>
+          <a:blip r:embed="rId2"/>
+          <a:stretch>
+            <a:fillRect/>
+          </a:stretch>
+        </p:blipFill>
+        <p:spPr>
+          <a:xfrm>
+            <a:off x="6309360" y="1417320"/>
+            <a:ext cx="5486400" cy="3154680"/>
+          </a:xfrm>
+          <a:prstGeom prst="rect">
+            <a:avLst/>
+          </a:prstGeom>
+        </p:spPr>
+      </p:pic>
+      <p:sp>
+        <p:nvSpPr>
+          <p:cNvPr id="10" name="Text 6"/>
+          <p:cNvSpPr/>
+          <p:nvPr/>
+        </p:nvSpPr>
+        <p:spPr>
+          <a:xfrm>
+            <a:off x="548640" y="4160520"/>
+            <a:ext cx="5486400" cy="320040"/>
           </a:xfrm>
           <a:prstGeom prst="rect">
             <a:avLst/>
@@ -6662,7 +4533,7 @@
               <a:buNone/>
             </a:pPr>
             <a:r>
-              <a:rPr lang="en-US" sz="1600" dirty="0">
+              <a:rPr lang="en-US" sz="1050" i="1" dirty="0">
                 <a:solidFill>
                   <a:srgbClr val="A9B4D0"/>
                 </a:solidFill>
@@ -6670,20 +4541,413 @@
                 <a:ea typeface="Calibri" pitchFamily="34" charset="-122"/>
                 <a:cs typeface="Calibri" pitchFamily="34" charset="-120"/>
               </a:rPr>
-              <a:t>Demo video: </a:t>
-            </a:r>
+              <a:t>Hierarchy + QAOA equals exact-27 and annealing on every group (10 / 10 optimal).</a:t>
+            </a:r>
+            <a:endParaRPr lang="en-US" sz="1050" dirty="0"/>
+          </a:p>
+        </p:txBody>
+      </p:sp>
+      <p:sp>
+        <p:nvSpPr>
+          <p:cNvPr id="11" name="Text 7"/>
+          <p:cNvSpPr/>
+          <p:nvPr/>
+        </p:nvSpPr>
+        <p:spPr>
+          <a:xfrm>
+            <a:off x="6309360" y="4590288"/>
+            <a:ext cx="5486400" cy="320040"/>
+          </a:xfrm>
+          <a:prstGeom prst="rect">
+            <a:avLst/>
+          </a:prstGeom>
+          <a:noFill/>
+          <a:ln/>
+        </p:spPr>
+        <p:txBody>
+          <a:bodyPr wrap="square" lIns="0" tIns="0" rIns="0" bIns="0" rtlCol="0" anchor="ctr"/>
+          <a:lstStyle/>
+          <a:p>
             <a:pPr indent="0" marL="0">
               <a:buNone/>
             </a:pPr>
             <a:r>
-              <a:rPr lang="en-US" sz="1600" u="sng" dirty="0">
+              <a:rPr lang="en-US" sz="1050" i="1" dirty="0">
+                <a:solidFill>
+                  <a:srgbClr val="A9B4D0"/>
+                </a:solidFill>
+                <a:latin typeface="Calibri" pitchFamily="34" charset="0"/>
+                <a:ea typeface="Calibri" pitchFamily="34" charset="-122"/>
+                <a:cs typeface="Calibri" pitchFamily="34" charset="-120"/>
+              </a:rPr>
+              <a:t>Refinement 5 → 21 groups; cycle 3 (13 groups) already reaches 1.75 = 95% of the ceiling.</a:t>
+            </a:r>
+            <a:endParaRPr lang="en-US" sz="1050" dirty="0"/>
+          </a:p>
+        </p:txBody>
+      </p:sp>
+      <p:sp>
+        <p:nvSpPr>
+          <p:cNvPr id="12" name="Shape 8"/>
+          <p:cNvSpPr/>
+          <p:nvPr/>
+        </p:nvSpPr>
+        <p:spPr>
+          <a:xfrm>
+            <a:off x="548640" y="4937760"/>
+            <a:ext cx="2377440" cy="1234440"/>
+          </a:xfrm>
+          <a:prstGeom prst="roundRect">
+            <a:avLst>
+              <a:gd name="adj" fmla="val 5926"/>
+            </a:avLst>
+          </a:prstGeom>
+          <a:solidFill>
+            <a:srgbClr val="141B33"/>
+          </a:solidFill>
+          <a:ln w="12700">
+            <a:solidFill>
+              <a:srgbClr val="141B33"/>
+            </a:solidFill>
+            <a:prstDash val="solid"/>
+          </a:ln>
+        </p:spPr>
+      </p:sp>
+      <p:sp>
+        <p:nvSpPr>
+          <p:cNvPr id="13" name="Text 9"/>
+          <p:cNvSpPr/>
+          <p:nvPr/>
+        </p:nvSpPr>
+        <p:spPr>
+          <a:xfrm>
+            <a:off x="548640" y="5047488"/>
+            <a:ext cx="2377440" cy="640080"/>
+          </a:xfrm>
+          <a:prstGeom prst="rect">
+            <a:avLst/>
+          </a:prstGeom>
+          <a:noFill/>
+          <a:ln/>
+        </p:spPr>
+        <p:txBody>
+          <a:bodyPr wrap="square" lIns="0" tIns="0" rIns="0" bIns="0" rtlCol="0" anchor="ctr"/>
+          <a:lstStyle/>
+          <a:p>
+            <a:pPr algn="ctr" indent="0" marL="0">
+              <a:buNone/>
+            </a:pPr>
+            <a:r>
+              <a:rPr lang="en-US" sz="3000" b="1" dirty="0">
+                <a:solidFill>
+                  <a:srgbClr val="A9B4D0"/>
+                </a:solidFill>
+                <a:latin typeface="Calibri" pitchFamily="34" charset="0"/>
+                <a:ea typeface="Calibri" pitchFamily="34" charset="-122"/>
+                <a:cs typeface="Calibri" pitchFamily="34" charset="-120"/>
+              </a:rPr>
+              <a:t>1.379</a:t>
+            </a:r>
+            <a:endParaRPr lang="en-US" sz="3000" dirty="0"/>
+          </a:p>
+        </p:txBody>
+      </p:sp>
+      <p:sp>
+        <p:nvSpPr>
+          <p:cNvPr id="14" name="Text 10"/>
+          <p:cNvSpPr/>
+          <p:nvPr/>
+        </p:nvSpPr>
+        <p:spPr>
+          <a:xfrm>
+            <a:off x="640080" y="5669280"/>
+            <a:ext cx="2194560" cy="457200"/>
+          </a:xfrm>
+          <a:prstGeom prst="rect">
+            <a:avLst/>
+          </a:prstGeom>
+          <a:noFill/>
+          <a:ln/>
+        </p:spPr>
+        <p:txBody>
+          <a:bodyPr wrap="square" lIns="0" tIns="0" rIns="0" bIns="0" rtlCol="0" anchor="ctr"/>
+          <a:lstStyle/>
+          <a:p>
+            <a:pPr algn="ctr" indent="0" marL="0">
+              <a:buNone/>
+            </a:pPr>
+            <a:r>
+              <a:rPr lang="en-US" sz="1100" dirty="0">
+                <a:solidFill>
+                  <a:srgbClr val="A9B4D0"/>
+                </a:solidFill>
+                <a:latin typeface="Calibri" pitchFamily="34" charset="0"/>
+                <a:ea typeface="Calibri" pitchFamily="34" charset="-122"/>
+                <a:cs typeface="Calibri" pitchFamily="34" charset="-120"/>
+              </a:rPr>
+              <a:t>one config for all · 1 job</a:t>
+            </a:r>
+            <a:endParaRPr lang="en-US" sz="1100" dirty="0"/>
+          </a:p>
+        </p:txBody>
+      </p:sp>
+      <p:sp>
+        <p:nvSpPr>
+          <p:cNvPr id="15" name="Shape 11"/>
+          <p:cNvSpPr/>
+          <p:nvPr/>
+        </p:nvSpPr>
+        <p:spPr>
+          <a:xfrm>
+            <a:off x="3063240" y="4937760"/>
+            <a:ext cx="2377440" cy="1234440"/>
+          </a:xfrm>
+          <a:prstGeom prst="roundRect">
+            <a:avLst>
+              <a:gd name="adj" fmla="val 5926"/>
+            </a:avLst>
+          </a:prstGeom>
+          <a:solidFill>
+            <a:srgbClr val="141B33"/>
+          </a:solidFill>
+          <a:ln w="12700">
+            <a:solidFill>
+              <a:srgbClr val="141B33"/>
+            </a:solidFill>
+            <a:prstDash val="solid"/>
+          </a:ln>
+        </p:spPr>
+      </p:sp>
+      <p:sp>
+        <p:nvSpPr>
+          <p:cNvPr id="16" name="Text 12"/>
+          <p:cNvSpPr/>
+          <p:nvPr/>
+        </p:nvSpPr>
+        <p:spPr>
+          <a:xfrm>
+            <a:off x="3063240" y="5047488"/>
+            <a:ext cx="2377440" cy="640080"/>
+          </a:xfrm>
+          <a:prstGeom prst="rect">
+            <a:avLst/>
+          </a:prstGeom>
+          <a:noFill/>
+          <a:ln/>
+        </p:spPr>
+        <p:txBody>
+          <a:bodyPr wrap="square" lIns="0" tIns="0" rIns="0" bIns="0" rtlCol="0" anchor="ctr"/>
+          <a:lstStyle/>
+          <a:p>
+            <a:pPr algn="ctr" indent="0" marL="0">
+              <a:buNone/>
+            </a:pPr>
+            <a:r>
+              <a:rPr lang="en-US" sz="3000" b="1" dirty="0">
                 <a:solidFill>
                   <a:srgbClr val="2BD4C2"/>
                 </a:solidFill>
                 <a:latin typeface="Calibri" pitchFamily="34" charset="0"/>
                 <a:ea typeface="Calibri" pitchFamily="34" charset="-122"/>
                 <a:cs typeface="Calibri" pitchFamily="34" charset="-120"/>
-                <a:hlinkClick r:id="rId1" invalidUrl="" action="" tgtFrame="" tooltip="" history="1" highlightClick="0" endSnd="0">
+              </a:rPr>
+              <a:t>1.547</a:t>
+            </a:r>
+            <a:endParaRPr lang="en-US" sz="3000" dirty="0"/>
+          </a:p>
+        </p:txBody>
+      </p:sp>
+      <p:sp>
+        <p:nvSpPr>
+          <p:cNvPr id="17" name="Text 13"/>
+          <p:cNvSpPr/>
+          <p:nvPr/>
+        </p:nvSpPr>
+        <p:spPr>
+          <a:xfrm>
+            <a:off x="3154680" y="5669280"/>
+            <a:ext cx="2194560" cy="457200"/>
+          </a:xfrm>
+          <a:prstGeom prst="rect">
+            <a:avLst/>
+          </a:prstGeom>
+          <a:noFill/>
+          <a:ln/>
+        </p:spPr>
+        <p:txBody>
+          <a:bodyPr wrap="square" lIns="0" tIns="0" rIns="0" bIns="0" rtlCol="0" anchor="ctr"/>
+          <a:lstStyle/>
+          <a:p>
+            <a:pPr algn="ctr" indent="0" marL="0">
+              <a:buNone/>
+            </a:pPr>
+            <a:r>
+              <a:rPr lang="en-US" sz="1100" dirty="0">
+                <a:solidFill>
+                  <a:srgbClr val="A9B4D0"/>
+                </a:solidFill>
+                <a:latin typeface="Calibri" pitchFamily="34" charset="0"/>
+                <a:ea typeface="Calibri" pitchFamily="34" charset="-122"/>
+                <a:cs typeface="Calibri" pitchFamily="34" charset="-120"/>
+              </a:rPr>
+              <a:t>hierarchy + QAOA · 10 jobs</a:t>
+            </a:r>
+            <a:endParaRPr lang="en-US" sz="1100" dirty="0"/>
+          </a:p>
+        </p:txBody>
+      </p:sp>
+      <p:sp>
+        <p:nvSpPr>
+          <p:cNvPr id="18" name="Shape 14"/>
+          <p:cNvSpPr/>
+          <p:nvPr/>
+        </p:nvSpPr>
+        <p:spPr>
+          <a:xfrm>
+            <a:off x="5577840" y="4937760"/>
+            <a:ext cx="2377440" cy="1234440"/>
+          </a:xfrm>
+          <a:prstGeom prst="roundRect">
+            <a:avLst>
+              <a:gd name="adj" fmla="val 5926"/>
+            </a:avLst>
+          </a:prstGeom>
+          <a:solidFill>
+            <a:srgbClr val="141B33"/>
+          </a:solidFill>
+          <a:ln w="12700">
+            <a:solidFill>
+              <a:srgbClr val="141B33"/>
+            </a:solidFill>
+            <a:prstDash val="solid"/>
+          </a:ln>
+        </p:spPr>
+      </p:sp>
+      <p:sp>
+        <p:nvSpPr>
+          <p:cNvPr id="19" name="Text 15"/>
+          <p:cNvSpPr/>
+          <p:nvPr/>
+        </p:nvSpPr>
+        <p:spPr>
+          <a:xfrm>
+            <a:off x="5577840" y="5047488"/>
+            <a:ext cx="2377440" cy="640080"/>
+          </a:xfrm>
+          <a:prstGeom prst="rect">
+            <a:avLst/>
+          </a:prstGeom>
+          <a:noFill/>
+          <a:ln/>
+        </p:spPr>
+        <p:txBody>
+          <a:bodyPr wrap="square" lIns="0" tIns="0" rIns="0" bIns="0" rtlCol="0" anchor="ctr"/>
+          <a:lstStyle/>
+          <a:p>
+            <a:pPr algn="ctr" indent="0" marL="0">
+              <a:buNone/>
+            </a:pPr>
+            <a:r>
+              <a:rPr lang="en-US" sz="3000" b="1" dirty="0">
+                <a:solidFill>
+                  <a:srgbClr val="FFB454"/>
+                </a:solidFill>
+                <a:latin typeface="Calibri" pitchFamily="34" charset="0"/>
+                <a:ea typeface="Calibri" pitchFamily="34" charset="-122"/>
+                <a:cs typeface="Calibri" pitchFamily="34" charset="-120"/>
+              </a:rPr>
+              <a:t>1.838</a:t>
+            </a:r>
+            <a:endParaRPr lang="en-US" sz="3000" dirty="0"/>
+          </a:p>
+        </p:txBody>
+      </p:sp>
+      <p:sp>
+        <p:nvSpPr>
+          <p:cNvPr id="20" name="Text 16"/>
+          <p:cNvSpPr/>
+          <p:nvPr/>
+        </p:nvSpPr>
+        <p:spPr>
+          <a:xfrm>
+            <a:off x="5669280" y="5669280"/>
+            <a:ext cx="2194560" cy="457200"/>
+          </a:xfrm>
+          <a:prstGeom prst="rect">
+            <a:avLst/>
+          </a:prstGeom>
+          <a:noFill/>
+          <a:ln/>
+        </p:spPr>
+        <p:txBody>
+          <a:bodyPr wrap="square" lIns="0" tIns="0" rIns="0" bIns="0" rtlCol="0" anchor="ctr"/>
+          <a:lstStyle/>
+          <a:p>
+            <a:pPr algn="ctr" indent="0" marL="0">
+              <a:buNone/>
+            </a:pPr>
+            <a:r>
+              <a:rPr lang="en-US" sz="1100" dirty="0">
+                <a:solidFill>
+                  <a:srgbClr val="A9B4D0"/>
+                </a:solidFill>
+                <a:latin typeface="Calibri" pitchFamily="34" charset="0"/>
+                <a:ea typeface="Calibri" pitchFamily="34" charset="-122"/>
+                <a:cs typeface="Calibri" pitchFamily="34" charset="-120"/>
+              </a:rPr>
+              <a:t>per-region ceiling · 48 jobs</a:t>
+            </a:r>
+            <a:endParaRPr lang="en-US" sz="1100" dirty="0"/>
+          </a:p>
+        </p:txBody>
+      </p:sp>
+      <p:sp>
+        <p:nvSpPr>
+          <p:cNvPr id="21" name="Text 17"/>
+          <p:cNvSpPr/>
+          <p:nvPr/>
+        </p:nvSpPr>
+        <p:spPr>
+          <a:xfrm>
+            <a:off x="8183880" y="4846320"/>
+            <a:ext cx="3611880" cy="1188720"/>
+          </a:xfrm>
+          <a:prstGeom prst="rect">
+            <a:avLst/>
+          </a:prstGeom>
+          <a:noFill/>
+          <a:ln/>
+        </p:spPr>
+        <p:txBody>
+          <a:bodyPr wrap="square" lIns="381" tIns="381" rIns="381" bIns="381" rtlCol="0" anchor="ctr"/>
+          <a:lstStyle/>
+          <a:p>
+            <a:pPr indent="0" marL="0">
+              <a:buNone/>
+            </a:pPr>
+            <a:r>
+              <a:rPr lang="en-US" sz="1150" dirty="0">
+                <a:solidFill>
+                  <a:srgbClr val="A9B4D0"/>
+                </a:solidFill>
+                <a:latin typeface="Calibri" pitchFamily="34" charset="0"/>
+                <a:ea typeface="Calibri" pitchFamily="34" charset="-122"/>
+                <a:cs typeface="Calibri" pitchFamily="34" charset="-120"/>
+              </a:rPr>
+              <a:t>Video: </a:t>
+            </a:r>
+            <a:pPr indent="0" marL="0">
+              <a:buNone/>
+            </a:pPr>
+            <a:r>
+              <a:rPr lang="en-US" sz="1150" u="sng" dirty="0">
+                <a:solidFill>
+                  <a:srgbClr val="2BD4C2"/>
+                </a:solidFill>
+                <a:latin typeface="Calibri" pitchFamily="34" charset="0"/>
+                <a:ea typeface="Calibri" pitchFamily="34" charset="-122"/>
+                <a:cs typeface="Calibri" pitchFamily="34" charset="-120"/>
+                <a:hlinkClick r:id="rId3" invalidUrl="" action="" tgtFrame="" tooltip="" history="1" highlightClick="0" endSnd="0">
                   <a:extLst>
                     <a:ext uri="{A12FA001-AC4F-418D-AE19-62706E023703}">
                       <ahyp:hlinkClr xmlns:ahyp="http://schemas.microsoft.com/office/drawing/2018/hyperlinkcolor" val="tx"/>
@@ -6696,8 +4960,14 @@
             <a:pPr indent="0" marL="0">
               <a:buNone/>
             </a:pPr>
-            <a:r>
-              <a:rPr lang="en-US" sz="1600" dirty="0">
+            <a:endParaRPr lang="en-US" sz="1150" dirty="0"/>
+          </a:p>
+          <a:p>
+            <a:pPr indent="0" marL="0">
+              <a:buNone/>
+            </a:pPr>
+            <a:r>
+              <a:rPr lang="en-US" sz="1150" dirty="0">
                 <a:solidFill>
                   <a:srgbClr val="A9B4D0"/>
                 </a:solidFill>
@@ -6705,20 +4975,23 @@
                 <a:ea typeface="Calibri" pitchFamily="34" charset="-122"/>
                 <a:cs typeface="Calibri" pitchFamily="34" charset="-120"/>
               </a:rPr>
-              <a:t>     Code: </a:t>
-            </a:r>
+              <a:t>Code: </a:t>
+            </a:r>
+            <a:endParaRPr lang="en-US" sz="1150" dirty="0"/>
+          </a:p>
+          <a:p>
             <a:pPr indent="0" marL="0">
               <a:buNone/>
             </a:pPr>
             <a:r>
-              <a:rPr lang="en-US" sz="1600" u="sng" dirty="0">
+              <a:rPr lang="en-US" sz="1150" u="sng" dirty="0">
                 <a:solidFill>
                   <a:srgbClr val="2BD4C2"/>
                 </a:solidFill>
                 <a:latin typeface="Calibri" pitchFamily="34" charset="0"/>
                 <a:ea typeface="Calibri" pitchFamily="34" charset="-122"/>
                 <a:cs typeface="Calibri" pitchFamily="34" charset="-120"/>
-                <a:hlinkClick r:id="rId2" invalidUrl="" action="" tgtFrame="" tooltip="" history="1" highlightClick="0" endSnd="0">
+                <a:hlinkClick r:id="rId4" invalidUrl="" action="" tgtFrame="" tooltip="" history="1" highlightClick="0" endSnd="0">
                   <a:extLst>
                     <a:ext uri="{A12FA001-AC4F-418D-AE19-62706E023703}">
                       <ahyp:hlinkClr xmlns:ahyp="http://schemas.microsoft.com/office/drawing/2018/hyperlinkcolor" val="tx"/>
@@ -6728,36 +5001,17 @@
               </a:rPr>
               <a:t>github.com/zuwasi/quantum-headache-antenna-tilt</a:t>
             </a:r>
-            <a:endParaRPr lang="en-US" sz="1600" dirty="0"/>
-          </a:p>
-        </p:txBody>
-      </p:sp>
-      <p:sp>
-        <p:nvSpPr>
-          <p:cNvPr id="10" name="Text 7"/>
-          <p:cNvSpPr/>
-          <p:nvPr/>
-        </p:nvSpPr>
-        <p:spPr>
-          <a:xfrm>
-            <a:off x="548640" y="5669280"/>
-            <a:ext cx="11247120" cy="457200"/>
-          </a:xfrm>
-          <a:prstGeom prst="rect">
-            <a:avLst/>
-          </a:prstGeom>
-          <a:noFill/>
-          <a:ln/>
-        </p:spPr>
-        <p:txBody>
-          <a:bodyPr wrap="square" lIns="0" tIns="0" rIns="0" bIns="0" rtlCol="0" anchor="ctr"/>
-          <a:lstStyle/>
-          <a:p>
             <a:pPr indent="0" marL="0">
               <a:buNone/>
             </a:pPr>
-            <a:r>
-              <a:rPr lang="en-US" sz="2200" b="1" dirty="0">
+            <a:endParaRPr lang="en-US" sz="1150" dirty="0"/>
+          </a:p>
+          <a:p>
+            <a:pPr indent="0" marL="0">
+              <a:buNone/>
+            </a:pPr>
+            <a:r>
+              <a:rPr lang="en-US" sz="1150" b="1" dirty="0">
                 <a:solidFill>
                   <a:srgbClr val="F5F7FF"/>
                 </a:solidFill>
@@ -6767,7 +5021,7 @@
               </a:rPr>
               <a:t>Team Quantum Headache — thank you. Questions?</a:t>
             </a:r>
-            <a:endParaRPr lang="en-US" sz="2200" dirty="0"/>
+            <a:endParaRPr lang="en-US" sz="1150" dirty="0"/>
           </a:p>
         </p:txBody>
       </p:sp>
@@ -6922,7 +5176,7 @@
                 <a:ea typeface="Calibri" pitchFamily="34" charset="-122"/>
                 <a:cs typeface="Calibri" pitchFamily="34" charset="-120"/>
               </a:rPr>
-              <a:t>SLIDE 2 / 13   |   PROBLEM</a:t>
+              <a:t>SLIDE 2 / 13   |   MOTIVATION</a:t>
             </a:r>
             <a:endParaRPr lang="en-US" sz="1100" dirty="0"/>
           </a:p>
@@ -6961,7 +5215,7 @@
                 <a:ea typeface="Calibri" pitchFamily="34" charset="-122"/>
                 <a:cs typeface="Calibri" pitchFamily="34" charset="-120"/>
               </a:rPr>
-              <a:t>The problem: pick one down-tilt per antenna</a:t>
+              <a:t>From a city of users to interaction regions and one utility U</a:t>
             </a:r>
             <a:endParaRPr lang="en-US" sz="3200" dirty="0"/>
           </a:p>
@@ -7008,7 +5262,7 @@
       </p:sp>
       <p:pic>
         <p:nvPicPr>
-          <p:cNvPr id="8" name="Image 0" descr="C:\Projects\Hackton\group\charts\map_small.jpg">    </p:cNvPr>
+          <p:cNvPr id="8" name="Image 0" descr="C:\Projects\Hackton\group\charts\group_interaction_region.png">    </p:cNvPr>
           <p:cNvPicPr>
             <a:picLocks noChangeAspect="1"/>
           </p:cNvPicPr>
@@ -7023,7 +5277,7 @@
         <p:spPr>
           <a:xfrm>
             <a:off x="548640" y="1417320"/>
-            <a:ext cx="6949440" cy="3502152"/>
+            <a:ext cx="4297680" cy="4434840"/>
           </a:xfrm>
           <a:prstGeom prst="rect">
             <a:avLst/>
@@ -7038,8 +5292,8 @@
         </p:nvSpPr>
         <p:spPr>
           <a:xfrm>
-            <a:off x="548640" y="4956048"/>
-            <a:ext cx="6949440" cy="320040"/>
+            <a:off x="548640" y="5897880"/>
+            <a:ext cx="4480560" cy="320040"/>
           </a:xfrm>
           <a:prstGeom prst="rect">
             <a:avLst/>
@@ -7063,7 +5317,7 @@
                 <a:ea typeface="Calibri" pitchFamily="34" charset="-122"/>
                 <a:cs typeface="Calibri" pitchFamily="34" charset="-120"/>
               </a:rPr>
-              <a:t>Two real 3-sector sites from OpenCelliD (Ayalon, Tel Aviv). Left: all tilts 0. Right: optimum plan — only A1 tilts to level 3.</a:t>
+              <a:t>Toy model: hexagonal cells, 120° sectors. The green hexagon is one interaction region R: three sectors from three sites that overlap.</a:t>
             </a:r>
             <a:endParaRPr lang="en-US" sz="1050" dirty="0"/>
           </a:p>
@@ -7071,14 +5325,114 @@
       </p:sp>
       <p:sp>
         <p:nvSpPr>
-          <p:cNvPr id="10" name="Text 7"/>
-          <p:cNvSpPr/>
-          <p:nvPr/>
-        </p:nvSpPr>
-        <p:spPr>
-          <a:xfrm>
-            <a:off x="7772400" y="1463040"/>
-            <a:ext cx="4023360" cy="4206240"/>
+          <p:cNvPr id="10" name="Shape 7"/>
+          <p:cNvSpPr/>
+          <p:nvPr/>
+        </p:nvSpPr>
+        <p:spPr>
+          <a:xfrm>
+            <a:off x="5212080" y="1463040"/>
+            <a:ext cx="6583680" cy="1783080"/>
+          </a:xfrm>
+          <a:prstGeom prst="roundRect">
+            <a:avLst>
+              <a:gd name="adj" fmla="val 4103"/>
+            </a:avLst>
+          </a:prstGeom>
+          <a:solidFill>
+            <a:srgbClr val="141B33"/>
+          </a:solidFill>
+          <a:ln w="12700">
+            <a:solidFill>
+              <a:srgbClr val="141B33"/>
+            </a:solidFill>
+            <a:prstDash val="solid"/>
+          </a:ln>
+        </p:spPr>
+      </p:sp>
+      <p:sp>
+        <p:nvSpPr>
+          <p:cNvPr id="11" name="Text 8"/>
+          <p:cNvSpPr/>
+          <p:nvPr/>
+        </p:nvSpPr>
+        <p:spPr>
+          <a:xfrm>
+            <a:off x="5394960" y="1554480"/>
+            <a:ext cx="6217920" cy="1600200"/>
+          </a:xfrm>
+          <a:prstGeom prst="rect">
+            <a:avLst/>
+          </a:prstGeom>
+          <a:noFill/>
+          <a:ln/>
+        </p:spPr>
+        <p:txBody>
+          <a:bodyPr wrap="square" lIns="635" tIns="635" rIns="635" bIns="635" rtlCol="0" anchor="ctr"/>
+          <a:lstStyle/>
+          <a:p>
+            <a:pPr indent="0" marL="0">
+              <a:buNone/>
+            </a:pPr>
+            <a:r>
+              <a:rPr lang="en-US" sz="2200" b="1" dirty="0">
+                <a:solidFill>
+                  <a:srgbClr val="2BD4C2"/>
+                </a:solidFill>
+                <a:latin typeface="Calibri" pitchFamily="34" charset="0"/>
+                <a:ea typeface="Calibri" pitchFamily="34" charset="-122"/>
+                <a:cs typeface="Calibri" pitchFamily="34" charset="-120"/>
+              </a:rPr>
+              <a:t>U(t) = α·Q(t) − β·I(t) − γ·D(t)</a:t>
+            </a:r>
+            <a:endParaRPr lang="en-US" sz="2200" dirty="0"/>
+          </a:p>
+          <a:p>
+            <a:pPr indent="0" marL="0">
+              <a:buNone/>
+            </a:pPr>
+            <a:r>
+              <a:rPr lang="en-US" sz="1300" dirty="0">
+                <a:solidFill>
+                  <a:srgbClr val="F5F7FF"/>
+                </a:solidFill>
+                <a:latin typeface="Calibri" pitchFamily="34" charset="0"/>
+                <a:ea typeface="Calibri" pitchFamily="34" charset="-122"/>
+                <a:cs typeface="Calibri" pitchFamily="34" charset="-120"/>
+              </a:rPr>
+              <a:t>Q reception quality · I interference · D unmet demand (dead zones) — each summed over users, weighted by demand w_p</a:t>
+            </a:r>
+            <a:endParaRPr lang="en-US" sz="2200" dirty="0"/>
+          </a:p>
+          <a:p>
+            <a:pPr indent="0" marL="0">
+              <a:buNone/>
+            </a:pPr>
+            <a:r>
+              <a:rPr lang="en-US" sz="1300" dirty="0">
+                <a:solidFill>
+                  <a:srgbClr val="A9B4D0"/>
+                </a:solidFill>
+                <a:latin typeface="Calibri" pitchFamily="34" charset="0"/>
+                <a:ea typeface="Calibri" pitchFamily="34" charset="-122"/>
+                <a:cs typeface="Calibri" pitchFamily="34" charset="-120"/>
+              </a:rPr>
+              <a:t>Our leaf cost is −U with α = 1.5 (coverage c·t), β = 1 (tᵀ I t), γ = 0.3 (tilt penalty Σt)</a:t>
+            </a:r>
+            <a:endParaRPr lang="en-US" sz="2200" dirty="0"/>
+          </a:p>
+        </p:txBody>
+      </p:sp>
+      <p:sp>
+        <p:nvSpPr>
+          <p:cNvPr id="12" name="Text 9"/>
+          <p:cNvSpPr/>
+          <p:nvPr/>
+        </p:nvSpPr>
+        <p:spPr>
+          <a:xfrm>
+            <a:off x="5212080" y="3429000"/>
+            <a:ext cx="6583680" cy="2468880"/>
           </a:xfrm>
           <a:prstGeom prst="rect">
             <a:avLst/>
@@ -7106,7 +5460,7 @@
                 <a:ea typeface="Calibri" pitchFamily="34" charset="-122"/>
                 <a:cs typeface="Calibri" pitchFamily="34" charset="-120"/>
               </a:rPr>
-              <a:t>6 sector antennas A0…A5, 4 tilt levels each → 4⁶ = 4096 plans</a:t>
+              <a:t>The operator has spatial demand data: where the users are, where the dead zones are</a:t>
             </a:r>
             <a:endParaRPr lang="en-US" sz="1400" dirty="0"/>
           </a:p>
@@ -7127,7 +5481,7 @@
                 <a:ea typeface="Calibri" pitchFamily="34" charset="-122"/>
                 <a:cs typeface="Calibri" pitchFamily="34" charset="-120"/>
               </a:rPr>
-              <a:t>Tilting down: less interference on neighbours, less coverage</a:t>
+              <a:t>Each sector antenna gets one down-tilt; tilting down cuts interference on neighbours but shrinks coverage</a:t>
             </a:r>
             <a:endParaRPr lang="en-US" sz="1400" dirty="0"/>
           </a:p>
@@ -7148,7 +5502,7 @@
                 <a:ea typeface="Calibri" pitchFamily="34" charset="-122"/>
                 <a:cs typeface="Calibri" pitchFamily="34" charset="-120"/>
               </a:rPr>
-              <a:t>Cost(t) = tᵀ I t − 1.5 · c·t + 0.3 · Σt   (interference − coverage + penalty)</a:t>
+              <a:t>Every interaction region has its own optimum, and a city has thousands of regions</a:t>
             </a:r>
             <a:endParaRPr lang="en-US" sz="1400" dirty="0"/>
           </a:p>
@@ -7169,28 +5523,7 @@
                 <a:ea typeface="Calibri" pitchFamily="34" charset="-122"/>
                 <a:cs typeface="Calibri" pitchFamily="34" charset="-120"/>
               </a:rPr>
-              <a:t>Classical brute force: unique optimum −2.844 at (0,3,0,0,0,0)</a:t>
-            </a:r>
-            <a:endParaRPr lang="en-US" sz="1400" dirty="0"/>
-          </a:p>
-          <a:p>
-            <a:pPr marL="342900" indent="-342900">
-              <a:spcAft>
-                <a:spcPts val="600"/>
-              </a:spcAft>
-              <a:buSzPct val="100000"/>
-              <a:buChar char="▸"/>
-            </a:pPr>
-            <a:r>
-              <a:rPr lang="en-US" sz="1400" dirty="0">
-                <a:solidFill>
-                  <a:srgbClr val="F5F7FF"/>
-                </a:solidFill>
-                <a:latin typeface="Calibri" pitchFamily="34" charset="0"/>
-                <a:ea typeface="Calibri" pitchFamily="34" charset="-122"/>
-                <a:cs typeface="Calibri" pitchFamily="34" charset="-120"/>
-              </a:rPr>
-              <a:t>Real networks: 100s of antennas × 10 levels → intractable → quantum</a:t>
+              <a:t>Two ways to fail: one plan for the whole network (too coarse) or one job per region (too many jobs) → the hierarchy on the next slide</a:t>
             </a:r>
             <a:endParaRPr lang="en-US" sz="1400" dirty="0"/>
           </a:p>
@@ -7347,7 +5680,7 @@
                 <a:ea typeface="Calibri" pitchFamily="34" charset="-122"/>
                 <a:cs typeface="Calibri" pitchFamily="34" charset="-120"/>
               </a:rPr>
-              <a:t>SLIDE 3 / 13   |   MODEL</a:t>
+              <a:t>SLIDE 3 / 13   |   ARCHITECTURE</a:t>
             </a:r>
             <a:endParaRPr lang="en-US" sz="1100" dirty="0"/>
           </a:p>
@@ -7386,7 +5719,7 @@
                 <a:ea typeface="Calibri" pitchFamily="34" charset="-122"/>
                 <a:cs typeface="Calibri" pitchFamily="34" charset="-120"/>
               </a:rPr>
-              <a:t>Encoding: 2 qubits per antenna, 12 qubits total</a:t>
+              <a:t>Whole network: k-means groups, one QAOA job per group</a:t>
             </a:r>
             <a:endParaRPr lang="en-US" sz="3200" dirty="0"/>
           </a:p>
@@ -7431,20 +5764,83 @@
           </a:p>
         </p:txBody>
       </p:sp>
-      <p:sp>
-        <p:nvSpPr>
-          <p:cNvPr id="8" name="Shape 6"/>
-          <p:cNvSpPr/>
-          <p:nvPr/>
-        </p:nvSpPr>
-        <p:spPr>
-          <a:xfrm>
-            <a:off x="548640" y="1463040"/>
-            <a:ext cx="5486400" cy="2148840"/>
+      <p:pic>
+        <p:nvPicPr>
+          <p:cNvPr id="8" name="Image 0" descr="C:\Projects\Hackton\group\charts\group_kmeans_grid.png">    </p:cNvPr>
+          <p:cNvPicPr>
+            <a:picLocks noChangeAspect="1"/>
+          </p:cNvPicPr>
+          <p:nvPr/>
+        </p:nvPicPr>
+        <p:blipFill>
+          <a:blip r:embed="rId1"/>
+          <a:stretch>
+            <a:fillRect/>
+          </a:stretch>
+        </p:blipFill>
+        <p:spPr>
+          <a:xfrm>
+            <a:off x="548640" y="1417320"/>
+            <a:ext cx="3931920" cy="3566160"/>
+          </a:xfrm>
+          <a:prstGeom prst="rect">
+            <a:avLst/>
+          </a:prstGeom>
+        </p:spPr>
+      </p:pic>
+      <p:sp>
+        <p:nvSpPr>
+          <p:cNvPr id="9" name="Text 6"/>
+          <p:cNvSpPr/>
+          <p:nvPr/>
+        </p:nvSpPr>
+        <p:spPr>
+          <a:xfrm>
+            <a:off x="548640" y="5029200"/>
+            <a:ext cx="4023360" cy="320040"/>
+          </a:xfrm>
+          <a:prstGeom prst="rect">
+            <a:avLst/>
+          </a:prstGeom>
+          <a:noFill/>
+          <a:ln/>
+        </p:spPr>
+        <p:txBody>
+          <a:bodyPr wrap="square" lIns="0" tIns="0" rIns="0" bIns="0" rtlCol="0" anchor="ctr"/>
+          <a:lstStyle/>
+          <a:p>
+            <a:pPr indent="0" marL="0">
+              <a:buNone/>
+            </a:pPr>
+            <a:r>
+              <a:rPr lang="en-US" sz="1050" i="1" dirty="0">
+                <a:solidFill>
+                  <a:srgbClr val="A9B4D0"/>
+                </a:solidFill>
+                <a:latin typeface="Calibri" pitchFamily="34" charset="0"/>
+                <a:ea typeface="Calibri" pitchFamily="34" charset="-122"/>
+                <a:cs typeface="Calibri" pitchFamily="34" charset="-120"/>
+              </a:rPr>
+              <a:t>k-means (k = 5) on the toy network: 48 regions, 5 colours = 5 groups = 5 QAOA jobs.</a:t>
+            </a:r>
+            <a:endParaRPr lang="en-US" sz="1050" dirty="0"/>
+          </a:p>
+        </p:txBody>
+      </p:sp>
+      <p:sp>
+        <p:nvSpPr>
+          <p:cNvPr id="10" name="Shape 7"/>
+          <p:cNvSpPr/>
+          <p:nvPr/>
+        </p:nvSpPr>
+        <p:spPr>
+          <a:xfrm>
+            <a:off x="4846320" y="1463040"/>
+            <a:ext cx="2103120" cy="1051560"/>
           </a:xfrm>
           <a:prstGeom prst="roundRect">
             <a:avLst>
-              <a:gd name="adj" fmla="val 3404"/>
+              <a:gd name="adj" fmla="val 5217"/>
             </a:avLst>
           </a:prstGeom>
           <a:solidFill>
@@ -7460,30 +5856,30 @@
       </p:sp>
       <p:sp>
         <p:nvSpPr>
-          <p:cNvPr id="9" name="Text 7"/>
-          <p:cNvSpPr/>
-          <p:nvPr/>
-        </p:nvSpPr>
-        <p:spPr>
-          <a:xfrm>
-            <a:off x="731520" y="1554480"/>
-            <a:ext cx="5120640" cy="1965960"/>
-          </a:xfrm>
-          <a:prstGeom prst="rect">
-            <a:avLst/>
-          </a:prstGeom>
-          <a:noFill/>
-          <a:ln/>
-        </p:spPr>
-        <p:txBody>
-          <a:bodyPr wrap="square" lIns="635" tIns="635" rIns="635" bIns="635" rtlCol="0" anchor="ctr"/>
+          <p:cNvPr id="11" name="Text 8"/>
+          <p:cNvSpPr/>
+          <p:nvPr/>
+        </p:nvSpPr>
+        <p:spPr>
+          <a:xfrm>
+            <a:off x="4919472" y="1463040"/>
+            <a:ext cx="1956816" cy="1051560"/>
+          </a:xfrm>
+          <a:prstGeom prst="rect">
+            <a:avLst/>
+          </a:prstGeom>
+          <a:noFill/>
+          <a:ln/>
+        </p:spPr>
+        <p:txBody>
+          <a:bodyPr wrap="square" lIns="381" tIns="381" rIns="381" bIns="381" rtlCol="0" anchor="ctr"/>
           <a:lstStyle/>
           <a:p>
             <a:pPr indent="0" marL="0">
               <a:buNone/>
             </a:pPr>
             <a:r>
-              <a:rPr lang="en-US" sz="2000" b="1" dirty="0">
+              <a:rPr lang="en-US" sz="1200" b="1" dirty="0">
                 <a:solidFill>
                   <a:srgbClr val="2BD4C2"/>
                 </a:solidFill>
@@ -7491,16 +5887,16 @@
                 <a:ea typeface="Calibri" pitchFamily="34" charset="-122"/>
                 <a:cs typeface="Calibri" pitchFamily="34" charset="-120"/>
               </a:rPr>
-              <a:t>tiltᵢ = q₂ᵢ + 2·q₂ᵢ₊₁ ∈ {0,1,2,3}</a:t>
-            </a:r>
-            <a:endParaRPr lang="en-US" sz="2000" dirty="0"/>
+              <a:t>1  Network data</a:t>
+            </a:r>
+            <a:endParaRPr lang="en-US" sz="1200" dirty="0"/>
           </a:p>
           <a:p>
             <a:pPr indent="0" marL="0">
               <a:buNone/>
             </a:pPr>
             <a:r>
-              <a:rPr lang="en-US" sz="1400" dirty="0">
+              <a:rPr lang="en-US" sz="1050" dirty="0">
                 <a:solidFill>
                   <a:srgbClr val="F5F7FF"/>
                 </a:solidFill>
@@ -7508,60 +5904,26 @@
                 <a:ea typeface="Calibri" pitchFamily="34" charset="-122"/>
                 <a:cs typeface="Calibri" pitchFamily="34" charset="-120"/>
               </a:rPr>
-              <a:t>qᵢ = (1 − Zᵢ)/2  →  Cost becomes a Pauli-Z polynomial</a:t>
-            </a:r>
-            <a:endParaRPr lang="en-US" sz="2000" dirty="0"/>
-          </a:p>
-          <a:p>
-            <a:pPr indent="0" marL="0">
-              <a:buNone/>
-            </a:pPr>
-            <a:r>
-              <a:rPr lang="en-US" sz="1800" b="1" dirty="0">
-                <a:solidFill>
-                  <a:srgbClr val="F5F7FF"/>
-                </a:solidFill>
-                <a:latin typeface="Calibri" pitchFamily="34" charset="0"/>
-                <a:ea typeface="Calibri" pitchFamily="34" charset="-122"/>
-                <a:cs typeface="Calibri" pitchFamily="34" charset="-120"/>
-              </a:rPr>
-              <a:t>H_C = c₀·I + Σ hᵢ Zᵢ + Σ Jᵢⱼ ZᵢZⱼ</a:t>
-            </a:r>
-            <a:endParaRPr lang="en-US" sz="2000" dirty="0"/>
-          </a:p>
-          <a:p>
-            <a:pPr indent="0" marL="0">
-              <a:buNone/>
-            </a:pPr>
-            <a:r>
-              <a:rPr lang="en-US" sz="1400" dirty="0">
-                <a:solidFill>
-                  <a:srgbClr val="A9B4D0"/>
-                </a:solidFill>
-                <a:latin typeface="Calibri" pitchFamily="34" charset="0"/>
-                <a:ea typeface="Calibri" pitchFamily="34" charset="-122"/>
-                <a:cs typeface="Calibri" pitchFamily="34" charset="-120"/>
-              </a:rPr>
-              <a:t>73 terms: 1 identity + 12 Z + 60 ZZ — strictly 2-local, no ZZZ</a:t>
-            </a:r>
-            <a:endParaRPr lang="en-US" sz="2000" dirty="0"/>
-          </a:p>
-        </p:txBody>
-      </p:sp>
-      <p:sp>
-        <p:nvSpPr>
-          <p:cNvPr id="10" name="Shape 8"/>
-          <p:cNvSpPr/>
-          <p:nvPr/>
-        </p:nvSpPr>
-        <p:spPr>
-          <a:xfrm>
-            <a:off x="548640" y="3840480"/>
-            <a:ext cx="1737360" cy="1234440"/>
+              <a:t>users, demand, dead zones → feature vector x_r per region</a:t>
+            </a:r>
+            <a:endParaRPr lang="en-US" sz="1200" dirty="0"/>
+          </a:p>
+        </p:txBody>
+      </p:sp>
+      <p:sp>
+        <p:nvSpPr>
+          <p:cNvPr id="12" name="Shape 9"/>
+          <p:cNvSpPr/>
+          <p:nvPr/>
+        </p:nvSpPr>
+        <p:spPr>
+          <a:xfrm>
+            <a:off x="7269480" y="1463040"/>
+            <a:ext cx="2103120" cy="1051560"/>
           </a:xfrm>
           <a:prstGeom prst="roundRect">
             <a:avLst>
-              <a:gd name="adj" fmla="val 5926"/>
+              <a:gd name="adj" fmla="val 5217"/>
             </a:avLst>
           </a:prstGeom>
           <a:solidFill>
@@ -7577,30 +5939,30 @@
       </p:sp>
       <p:sp>
         <p:nvSpPr>
-          <p:cNvPr id="11" name="Text 9"/>
-          <p:cNvSpPr/>
-          <p:nvPr/>
-        </p:nvSpPr>
-        <p:spPr>
-          <a:xfrm>
-            <a:off x="548640" y="3950208"/>
-            <a:ext cx="1737360" cy="640080"/>
-          </a:xfrm>
-          <a:prstGeom prst="rect">
-            <a:avLst/>
-          </a:prstGeom>
-          <a:noFill/>
-          <a:ln/>
-        </p:spPr>
-        <p:txBody>
-          <a:bodyPr wrap="square" lIns="0" tIns="0" rIns="0" bIns="0" rtlCol="0" anchor="ctr"/>
-          <a:lstStyle/>
-          <a:p>
-            <a:pPr algn="ctr" indent="0" marL="0">
-              <a:buNone/>
-            </a:pPr>
-            <a:r>
-              <a:rPr lang="en-US" sz="3000" b="1" dirty="0">
+          <p:cNvPr id="13" name="Text 10"/>
+          <p:cNvSpPr/>
+          <p:nvPr/>
+        </p:nvSpPr>
+        <p:spPr>
+          <a:xfrm>
+            <a:off x="7342632" y="1463040"/>
+            <a:ext cx="1956816" cy="1051560"/>
+          </a:xfrm>
+          <a:prstGeom prst="rect">
+            <a:avLst/>
+          </a:prstGeom>
+          <a:noFill/>
+          <a:ln/>
+        </p:spPr>
+        <p:txBody>
+          <a:bodyPr wrap="square" lIns="381" tIns="381" rIns="381" bIns="381" rtlCol="0" anchor="ctr"/>
+          <a:lstStyle/>
+          <a:p>
+            <a:pPr indent="0" marL="0">
+              <a:buNone/>
+            </a:pPr>
+            <a:r>
+              <a:rPr lang="en-US" sz="1200" b="1" dirty="0">
                 <a:solidFill>
                   <a:srgbClr val="2BD4C2"/>
                 </a:solidFill>
@@ -7608,65 +5970,43 @@
                 <a:ea typeface="Calibri" pitchFamily="34" charset="-122"/>
                 <a:cs typeface="Calibri" pitchFamily="34" charset="-120"/>
               </a:rPr>
-              <a:t>12</a:t>
-            </a:r>
-            <a:endParaRPr lang="en-US" sz="3000" dirty="0"/>
-          </a:p>
-        </p:txBody>
-      </p:sp>
-      <p:sp>
-        <p:nvSpPr>
-          <p:cNvPr id="12" name="Text 10"/>
-          <p:cNvSpPr/>
-          <p:nvPr/>
-        </p:nvSpPr>
-        <p:spPr>
-          <a:xfrm>
-            <a:off x="640080" y="4572000"/>
-            <a:ext cx="1554480" cy="457200"/>
-          </a:xfrm>
-          <a:prstGeom prst="rect">
-            <a:avLst/>
-          </a:prstGeom>
-          <a:noFill/>
-          <a:ln/>
-        </p:spPr>
-        <p:txBody>
-          <a:bodyPr wrap="square" lIns="0" tIns="0" rIns="0" bIns="0" rtlCol="0" anchor="ctr"/>
-          <a:lstStyle/>
-          <a:p>
-            <a:pPr algn="ctr" indent="0" marL="0">
-              <a:buNone/>
-            </a:pPr>
-            <a:r>
-              <a:rPr lang="en-US" sz="1100" dirty="0">
-                <a:solidFill>
-                  <a:srgbClr val="A9B4D0"/>
-                </a:solidFill>
-                <a:latin typeface="Calibri" pitchFamily="34" charset="0"/>
-                <a:ea typeface="Calibri" pitchFamily="34" charset="-122"/>
-                <a:cs typeface="Calibri" pitchFamily="34" charset="-120"/>
-              </a:rPr>
-              <a:t>qubits</a:t>
-            </a:r>
-            <a:endParaRPr lang="en-US" sz="1100" dirty="0"/>
-          </a:p>
-        </p:txBody>
-      </p:sp>
-      <p:sp>
-        <p:nvSpPr>
-          <p:cNvPr id="13" name="Shape 11"/>
-          <p:cNvSpPr/>
-          <p:nvPr/>
-        </p:nvSpPr>
-        <p:spPr>
-          <a:xfrm>
-            <a:off x="2423160" y="3840480"/>
-            <a:ext cx="1737360" cy="1234440"/>
+              <a:t>2  k-means, k = 5</a:t>
+            </a:r>
+            <a:endParaRPr lang="en-US" sz="1200" dirty="0"/>
+          </a:p>
+          <a:p>
+            <a:pPr indent="0" marL="0">
+              <a:buNone/>
+            </a:pPr>
+            <a:r>
+              <a:rPr lang="en-US" sz="1050" dirty="0">
+                <a:solidFill>
+                  <a:srgbClr val="F5F7FF"/>
+                </a:solidFill>
+                <a:latin typeface="Calibri" pitchFamily="34" charset="0"/>
+                <a:ea typeface="Calibri" pitchFamily="34" charset="-122"/>
+                <a:cs typeface="Calibri" pitchFamily="34" charset="-120"/>
+              </a:rPr>
+              <a:t>regions with similar x_r share one group G_1 … G_5</a:t>
+            </a:r>
+            <a:endParaRPr lang="en-US" sz="1200" dirty="0"/>
+          </a:p>
+        </p:txBody>
+      </p:sp>
+      <p:sp>
+        <p:nvSpPr>
+          <p:cNvPr id="14" name="Shape 11"/>
+          <p:cNvSpPr/>
+          <p:nvPr/>
+        </p:nvSpPr>
+        <p:spPr>
+          <a:xfrm>
+            <a:off x="9692640" y="1463040"/>
+            <a:ext cx="2103120" cy="1051560"/>
           </a:xfrm>
           <a:prstGeom prst="roundRect">
             <a:avLst>
-              <a:gd name="adj" fmla="val 5926"/>
+              <a:gd name="adj" fmla="val 5217"/>
             </a:avLst>
           </a:prstGeom>
           <a:solidFill>
@@ -7682,30 +6022,30 @@
       </p:sp>
       <p:sp>
         <p:nvSpPr>
-          <p:cNvPr id="14" name="Text 12"/>
-          <p:cNvSpPr/>
-          <p:nvPr/>
-        </p:nvSpPr>
-        <p:spPr>
-          <a:xfrm>
-            <a:off x="2423160" y="3950208"/>
-            <a:ext cx="1737360" cy="640080"/>
-          </a:xfrm>
-          <a:prstGeom prst="rect">
-            <a:avLst/>
-          </a:prstGeom>
-          <a:noFill/>
-          <a:ln/>
-        </p:spPr>
-        <p:txBody>
-          <a:bodyPr wrap="square" lIns="0" tIns="0" rIns="0" bIns="0" rtlCol="0" anchor="ctr"/>
-          <a:lstStyle/>
-          <a:p>
-            <a:pPr algn="ctr" indent="0" marL="0">
-              <a:buNone/>
-            </a:pPr>
-            <a:r>
-              <a:rPr lang="en-US" sz="3000" b="1" dirty="0">
+          <p:cNvPr id="15" name="Text 12"/>
+          <p:cNvSpPr/>
+          <p:nvPr/>
+        </p:nvSpPr>
+        <p:spPr>
+          <a:xfrm>
+            <a:off x="9765792" y="1463040"/>
+            <a:ext cx="1956816" cy="1051560"/>
+          </a:xfrm>
+          <a:prstGeom prst="rect">
+            <a:avLst/>
+          </a:prstGeom>
+          <a:noFill/>
+          <a:ln/>
+        </p:spPr>
+        <p:txBody>
+          <a:bodyPr wrap="square" lIns="381" tIns="381" rIns="381" bIns="381" rtlCol="0" anchor="ctr"/>
+          <a:lstStyle/>
+          <a:p>
+            <a:pPr indent="0" marL="0">
+              <a:buNone/>
+            </a:pPr>
+            <a:r>
+              <a:rPr lang="en-US" sz="1200" b="1" dirty="0">
                 <a:solidFill>
                   <a:srgbClr val="2BD4C2"/>
                 </a:solidFill>
@@ -7713,65 +6053,43 @@
                 <a:ea typeface="Calibri" pitchFamily="34" charset="-122"/>
                 <a:cs typeface="Calibri" pitchFamily="34" charset="-120"/>
               </a:rPr>
-              <a:t>73</a:t>
-            </a:r>
-            <a:endParaRPr lang="en-US" sz="3000" dirty="0"/>
-          </a:p>
-        </p:txBody>
-      </p:sp>
-      <p:sp>
-        <p:nvSpPr>
-          <p:cNvPr id="15" name="Text 13"/>
-          <p:cNvSpPr/>
-          <p:nvPr/>
-        </p:nvSpPr>
-        <p:spPr>
-          <a:xfrm>
-            <a:off x="2514600" y="4572000"/>
-            <a:ext cx="1554480" cy="457200"/>
-          </a:xfrm>
-          <a:prstGeom prst="rect">
-            <a:avLst/>
-          </a:prstGeom>
-          <a:noFill/>
-          <a:ln/>
-        </p:spPr>
-        <p:txBody>
-          <a:bodyPr wrap="square" lIns="0" tIns="0" rIns="0" bIns="0" rtlCol="0" anchor="ctr"/>
-          <a:lstStyle/>
-          <a:p>
-            <a:pPr algn="ctr" indent="0" marL="0">
-              <a:buNone/>
-            </a:pPr>
-            <a:r>
-              <a:rPr lang="en-US" sz="1100" dirty="0">
-                <a:solidFill>
-                  <a:srgbClr val="A9B4D0"/>
-                </a:solidFill>
-                <a:latin typeface="Calibri" pitchFamily="34" charset="0"/>
-                <a:ea typeface="Calibri" pitchFamily="34" charset="-122"/>
-                <a:cs typeface="Calibri" pitchFamily="34" charset="-120"/>
-              </a:rPr>
-              <a:t>Pauli terms</a:t>
-            </a:r>
-            <a:endParaRPr lang="en-US" sz="1100" dirty="0"/>
-          </a:p>
-        </p:txBody>
-      </p:sp>
-      <p:sp>
-        <p:nvSpPr>
-          <p:cNvPr id="16" name="Shape 14"/>
-          <p:cNvSpPr/>
-          <p:nvPr/>
-        </p:nvSpPr>
-        <p:spPr>
-          <a:xfrm>
-            <a:off x="4297680" y="3840480"/>
-            <a:ext cx="1737360" cy="1234440"/>
+              <a:t>3  Group utility U_j</a:t>
+            </a:r>
+            <a:endParaRPr lang="en-US" sz="1200" dirty="0"/>
+          </a:p>
+          <a:p>
+            <a:pPr indent="0" marL="0">
+              <a:buNone/>
+            </a:pPr>
+            <a:r>
+              <a:rPr lang="en-US" sz="1050" dirty="0">
+                <a:solidFill>
+                  <a:srgbClr val="F5F7FF"/>
+                </a:solidFill>
+                <a:latin typeface="Calibri" pitchFamily="34" charset="0"/>
+                <a:ea typeface="Calibri" pitchFamily="34" charset="-122"/>
+                <a:cs typeface="Calibri" pitchFamily="34" charset="-120"/>
+              </a:rPr>
+              <a:t>aggregate demand per group → one cost Hamiltonian H_C per group</a:t>
+            </a:r>
+            <a:endParaRPr lang="en-US" sz="1200" dirty="0"/>
+          </a:p>
+        </p:txBody>
+      </p:sp>
+      <p:sp>
+        <p:nvSpPr>
+          <p:cNvPr id="16" name="Shape 13"/>
+          <p:cNvSpPr/>
+          <p:nvPr/>
+        </p:nvSpPr>
+        <p:spPr>
+          <a:xfrm>
+            <a:off x="9692640" y="2834640"/>
+            <a:ext cx="2103120" cy="1051560"/>
           </a:xfrm>
           <a:prstGeom prst="roundRect">
             <a:avLst>
-              <a:gd name="adj" fmla="val 5926"/>
+              <a:gd name="adj" fmla="val 5217"/>
             </a:avLst>
           </a:prstGeom>
           <a:solidFill>
@@ -7787,30 +6105,30 @@
       </p:sp>
       <p:sp>
         <p:nvSpPr>
-          <p:cNvPr id="17" name="Text 15"/>
-          <p:cNvSpPr/>
-          <p:nvPr/>
-        </p:nvSpPr>
-        <p:spPr>
-          <a:xfrm>
-            <a:off x="4297680" y="3950208"/>
-            <a:ext cx="1737360" cy="640080"/>
-          </a:xfrm>
-          <a:prstGeom prst="rect">
-            <a:avLst/>
-          </a:prstGeom>
-          <a:noFill/>
-          <a:ln/>
-        </p:spPr>
-        <p:txBody>
-          <a:bodyPr wrap="square" lIns="0" tIns="0" rIns="0" bIns="0" rtlCol="0" anchor="ctr"/>
-          <a:lstStyle/>
-          <a:p>
-            <a:pPr algn="ctr" indent="0" marL="0">
-              <a:buNone/>
-            </a:pPr>
-            <a:r>
-              <a:rPr lang="en-US" sz="3000" b="1" dirty="0">
+          <p:cNvPr id="17" name="Text 14"/>
+          <p:cNvSpPr/>
+          <p:nvPr/>
+        </p:nvSpPr>
+        <p:spPr>
+          <a:xfrm>
+            <a:off x="9765792" y="2834640"/>
+            <a:ext cx="1956816" cy="1051560"/>
+          </a:xfrm>
+          <a:prstGeom prst="rect">
+            <a:avLst/>
+          </a:prstGeom>
+          <a:noFill/>
+          <a:ln/>
+        </p:spPr>
+        <p:txBody>
+          <a:bodyPr wrap="square" lIns="381" tIns="381" rIns="381" bIns="381" rtlCol="0" anchor="ctr"/>
+          <a:lstStyle/>
+          <a:p>
+            <a:pPr indent="0" marL="0">
+              <a:buNone/>
+            </a:pPr>
+            <a:r>
+              <a:rPr lang="en-US" sz="1200" b="1" dirty="0">
                 <a:solidFill>
                   <a:srgbClr val="2BD4C2"/>
                 </a:solidFill>
@@ -7818,61 +6136,376 @@
                 <a:ea typeface="Calibri" pitchFamily="34" charset="-122"/>
                 <a:cs typeface="Calibri" pitchFamily="34" charset="-120"/>
               </a:rPr>
-              <a:t>2-local</a:t>
-            </a:r>
-            <a:endParaRPr lang="en-US" sz="3000" dirty="0"/>
-          </a:p>
-        </p:txBody>
-      </p:sp>
-      <p:sp>
-        <p:nvSpPr>
-          <p:cNvPr id="18" name="Text 16"/>
-          <p:cNvSpPr/>
-          <p:nvPr/>
-        </p:nvSpPr>
-        <p:spPr>
-          <a:xfrm>
-            <a:off x="4389120" y="4572000"/>
-            <a:ext cx="1554480" cy="457200"/>
-          </a:xfrm>
-          <a:prstGeom prst="rect">
-            <a:avLst/>
-          </a:prstGeom>
-          <a:noFill/>
-          <a:ln/>
-        </p:spPr>
-        <p:txBody>
-          <a:bodyPr wrap="square" lIns="0" tIns="0" rIns="0" bIns="0" rtlCol="0" anchor="ctr"/>
-          <a:lstStyle/>
-          <a:p>
-            <a:pPr algn="ctr" indent="0" marL="0">
-              <a:buNone/>
-            </a:pPr>
-            <a:r>
-              <a:rPr lang="en-US" sz="1100" dirty="0">
-                <a:solidFill>
-                  <a:srgbClr val="A9B4D0"/>
-                </a:solidFill>
-                <a:latin typeface="Calibri" pitchFamily="34" charset="0"/>
-                <a:ea typeface="Calibri" pitchFamily="34" charset="-122"/>
-                <a:cs typeface="Calibri" pitchFamily="34" charset="-120"/>
-              </a:rPr>
-              <a:t>ZZ max weight</a:t>
-            </a:r>
-            <a:endParaRPr lang="en-US" sz="1100" dirty="0"/>
-          </a:p>
-        </p:txBody>
-      </p:sp>
-      <p:sp>
-        <p:nvSpPr>
-          <p:cNvPr id="19" name="Text 17"/>
-          <p:cNvSpPr/>
-          <p:nvPr/>
-        </p:nvSpPr>
-        <p:spPr>
-          <a:xfrm>
-            <a:off x="6309360" y="1463040"/>
-            <a:ext cx="5486400" cy="3840480"/>
+              <a:t>4  QAOA on Classiq</a:t>
+            </a:r>
+            <a:endParaRPr lang="en-US" sz="1200" dirty="0"/>
+          </a:p>
+          <a:p>
+            <a:pPr indent="0" marL="0">
+              <a:buNone/>
+            </a:pPr>
+            <a:r>
+              <a:rPr lang="en-US" sz="1050" dirty="0">
+                <a:solidFill>
+                  <a:srgbClr val="F5F7FF"/>
+                </a:solidFill>
+                <a:latin typeface="Calibri" pitchFamily="34" charset="0"/>
+                <a:ea typeface="Calibri" pitchFamily="34" charset="-122"/>
+                <a:cs typeface="Calibri" pitchFamily="34" charset="-120"/>
+              </a:rPr>
+              <a:t>2 qubits per sector, angles warm-started from Wolfram (our leaf, next slides)</a:t>
+            </a:r>
+            <a:endParaRPr lang="en-US" sz="1200" dirty="0"/>
+          </a:p>
+        </p:txBody>
+      </p:sp>
+      <p:sp>
+        <p:nvSpPr>
+          <p:cNvPr id="18" name="Shape 15"/>
+          <p:cNvSpPr/>
+          <p:nvPr/>
+        </p:nvSpPr>
+        <p:spPr>
+          <a:xfrm>
+            <a:off x="7269480" y="2834640"/>
+            <a:ext cx="2103120" cy="1051560"/>
+          </a:xfrm>
+          <a:prstGeom prst="roundRect">
+            <a:avLst>
+              <a:gd name="adj" fmla="val 5217"/>
+            </a:avLst>
+          </a:prstGeom>
+          <a:solidFill>
+            <a:srgbClr val="141B33"/>
+          </a:solidFill>
+          <a:ln w="12700">
+            <a:solidFill>
+              <a:srgbClr val="141B33"/>
+            </a:solidFill>
+            <a:prstDash val="solid"/>
+          </a:ln>
+        </p:spPr>
+      </p:sp>
+      <p:sp>
+        <p:nvSpPr>
+          <p:cNvPr id="19" name="Text 16"/>
+          <p:cNvSpPr/>
+          <p:nvPr/>
+        </p:nvSpPr>
+        <p:spPr>
+          <a:xfrm>
+            <a:off x="7342632" y="2834640"/>
+            <a:ext cx="1956816" cy="1051560"/>
+          </a:xfrm>
+          <a:prstGeom prst="rect">
+            <a:avLst/>
+          </a:prstGeom>
+          <a:noFill/>
+          <a:ln/>
+        </p:spPr>
+        <p:txBody>
+          <a:bodyPr wrap="square" lIns="381" tIns="381" rIns="381" bIns="381" rtlCol="0" anchor="ctr"/>
+          <a:lstStyle/>
+          <a:p>
+            <a:pPr indent="0" marL="0">
+              <a:buNone/>
+            </a:pPr>
+            <a:r>
+              <a:rPr lang="en-US" sz="1200" b="1" dirty="0">
+                <a:solidFill>
+                  <a:srgbClr val="2BD4C2"/>
+                </a:solidFill>
+                <a:latin typeface="Calibri" pitchFamily="34" charset="0"/>
+                <a:ea typeface="Calibri" pitchFamily="34" charset="-122"/>
+                <a:cs typeface="Calibri" pitchFamily="34" charset="-120"/>
+              </a:rPr>
+              <a:t>5  Assign + evaluate</a:t>
+            </a:r>
+            <a:endParaRPr lang="en-US" sz="1200" dirty="0"/>
+          </a:p>
+          <a:p>
+            <a:pPr indent="0" marL="0">
+              <a:buNone/>
+            </a:pPr>
+            <a:r>
+              <a:rPr lang="en-US" sz="1050" dirty="0">
+                <a:solidFill>
+                  <a:srgbClr val="F5F7FF"/>
+                </a:solidFill>
+                <a:latin typeface="Calibri" pitchFamily="34" charset="0"/>
+                <a:ea typeface="Calibri" pitchFamily="34" charset="-122"/>
+                <a:cs typeface="Calibri" pitchFamily="34" charset="-120"/>
+              </a:rPr>
+              <a:t>argmin plan to every region of the group; compute global U</a:t>
+            </a:r>
+            <a:endParaRPr lang="en-US" sz="1200" dirty="0"/>
+          </a:p>
+        </p:txBody>
+      </p:sp>
+      <p:sp>
+        <p:nvSpPr>
+          <p:cNvPr id="20" name="Shape 17"/>
+          <p:cNvSpPr/>
+          <p:nvPr/>
+        </p:nvSpPr>
+        <p:spPr>
+          <a:xfrm>
+            <a:off x="4846320" y="2834640"/>
+            <a:ext cx="2103120" cy="1051560"/>
+          </a:xfrm>
+          <a:prstGeom prst="roundRect">
+            <a:avLst>
+              <a:gd name="adj" fmla="val 5217"/>
+            </a:avLst>
+          </a:prstGeom>
+          <a:solidFill>
+            <a:srgbClr val="141B33"/>
+          </a:solidFill>
+          <a:ln w="12700">
+            <a:solidFill>
+              <a:srgbClr val="141B33"/>
+            </a:solidFill>
+            <a:prstDash val="solid"/>
+          </a:ln>
+        </p:spPr>
+      </p:sp>
+      <p:sp>
+        <p:nvSpPr>
+          <p:cNvPr id="21" name="Text 18"/>
+          <p:cNvSpPr/>
+          <p:nvPr/>
+        </p:nvSpPr>
+        <p:spPr>
+          <a:xfrm>
+            <a:off x="4919472" y="2834640"/>
+            <a:ext cx="1956816" cy="1051560"/>
+          </a:xfrm>
+          <a:prstGeom prst="rect">
+            <a:avLst/>
+          </a:prstGeom>
+          <a:noFill/>
+          <a:ln/>
+        </p:spPr>
+        <p:txBody>
+          <a:bodyPr wrap="square" lIns="381" tIns="381" rIns="381" bIns="381" rtlCol="0" anchor="ctr"/>
+          <a:lstStyle/>
+          <a:p>
+            <a:pPr indent="0" marL="0">
+              <a:buNone/>
+            </a:pPr>
+            <a:r>
+              <a:rPr lang="en-US" sz="1200" b="1" dirty="0">
+                <a:solidFill>
+                  <a:srgbClr val="2BD4C2"/>
+                </a:solidFill>
+                <a:latin typeface="Calibri" pitchFamily="34" charset="0"/>
+                <a:ea typeface="Calibri" pitchFamily="34" charset="-122"/>
+                <a:cs typeface="Calibri" pitchFamily="34" charset="-120"/>
+              </a:rPr>
+              <a:t>6  Refine</a:t>
+            </a:r>
+            <a:endParaRPr lang="en-US" sz="1200" dirty="0"/>
+          </a:p>
+          <a:p>
+            <a:pPr indent="0" marL="0">
+              <a:buNone/>
+            </a:pPr>
+            <a:r>
+              <a:rPr lang="en-US" sz="1050" dirty="0">
+                <a:solidFill>
+                  <a:srgbClr val="F5F7FF"/>
+                </a:solidFill>
+                <a:latin typeface="Calibri" pitchFamily="34" charset="0"/>
+                <a:ea typeface="Calibri" pitchFamily="34" charset="-122"/>
+                <a:cs typeface="Calibri" pitchFamily="34" charset="-120"/>
+              </a:rPr>
+              <a:t>re-cluster the group with the most variation; stop when ΔU ≈ 0</a:t>
+            </a:r>
+            <a:endParaRPr lang="en-US" sz="1200" dirty="0"/>
+          </a:p>
+        </p:txBody>
+      </p:sp>
+      <p:sp>
+        <p:nvSpPr>
+          <p:cNvPr id="22" name="Shape 19"/>
+          <p:cNvSpPr/>
+          <p:nvPr/>
+        </p:nvSpPr>
+        <p:spPr>
+          <a:xfrm>
+            <a:off x="6949440" y="1988820"/>
+            <a:ext cx="320040" cy="914"/>
+          </a:xfrm>
+          <a:prstGeom prst="line">
+            <a:avLst/>
+          </a:prstGeom>
+          <a:noFill/>
+          <a:ln w="19050">
+            <a:solidFill>
+              <a:srgbClr val="2BD4C2"/>
+            </a:solidFill>
+            <a:prstDash val="solid"/>
+            <a:tailEnd type="triangle"/>
+          </a:ln>
+        </p:spPr>
+      </p:sp>
+      <p:sp>
+        <p:nvSpPr>
+          <p:cNvPr id="23" name="Shape 20"/>
+          <p:cNvSpPr/>
+          <p:nvPr/>
+        </p:nvSpPr>
+        <p:spPr>
+          <a:xfrm>
+            <a:off x="9372600" y="1988820"/>
+            <a:ext cx="320040" cy="914"/>
+          </a:xfrm>
+          <a:prstGeom prst="line">
+            <a:avLst/>
+          </a:prstGeom>
+          <a:noFill/>
+          <a:ln w="19050">
+            <a:solidFill>
+              <a:srgbClr val="2BD4C2"/>
+            </a:solidFill>
+            <a:prstDash val="solid"/>
+            <a:tailEnd type="triangle"/>
+          </a:ln>
+        </p:spPr>
+      </p:sp>
+      <p:sp>
+        <p:nvSpPr>
+          <p:cNvPr id="24" name="Shape 21"/>
+          <p:cNvSpPr/>
+          <p:nvPr/>
+        </p:nvSpPr>
+        <p:spPr>
+          <a:xfrm>
+            <a:off x="10744200" y="2514600"/>
+            <a:ext cx="914" cy="320040"/>
+          </a:xfrm>
+          <a:prstGeom prst="line">
+            <a:avLst/>
+          </a:prstGeom>
+          <a:noFill/>
+          <a:ln w="19050">
+            <a:solidFill>
+              <a:srgbClr val="2BD4C2"/>
+            </a:solidFill>
+            <a:prstDash val="solid"/>
+            <a:tailEnd type="triangle"/>
+          </a:ln>
+        </p:spPr>
+      </p:sp>
+      <p:sp>
+        <p:nvSpPr>
+          <p:cNvPr id="25" name="Shape 22"/>
+          <p:cNvSpPr/>
+          <p:nvPr/>
+        </p:nvSpPr>
+        <p:spPr>
+          <a:xfrm>
+            <a:off x="9372600" y="3360420"/>
+            <a:ext cx="320040" cy="914"/>
+          </a:xfrm>
+          <a:prstGeom prst="line">
+            <a:avLst/>
+          </a:prstGeom>
+          <a:noFill/>
+          <a:ln w="19050">
+            <a:solidFill>
+              <a:srgbClr val="2BD4C2"/>
+            </a:solidFill>
+            <a:prstDash val="solid"/>
+            <a:headEnd type="triangle"/>
+          </a:ln>
+        </p:spPr>
+      </p:sp>
+      <p:sp>
+        <p:nvSpPr>
+          <p:cNvPr id="26" name="Shape 23"/>
+          <p:cNvSpPr/>
+          <p:nvPr/>
+        </p:nvSpPr>
+        <p:spPr>
+          <a:xfrm>
+            <a:off x="6949440" y="3360420"/>
+            <a:ext cx="320040" cy="914"/>
+          </a:xfrm>
+          <a:prstGeom prst="line">
+            <a:avLst/>
+          </a:prstGeom>
+          <a:noFill/>
+          <a:ln w="19050">
+            <a:solidFill>
+              <a:srgbClr val="2BD4C2"/>
+            </a:solidFill>
+            <a:prstDash val="solid"/>
+            <a:headEnd type="triangle"/>
+          </a:ln>
+        </p:spPr>
+      </p:sp>
+      <p:sp>
+        <p:nvSpPr>
+          <p:cNvPr id="27" name="Shape 24"/>
+          <p:cNvSpPr/>
+          <p:nvPr/>
+        </p:nvSpPr>
+        <p:spPr>
+          <a:xfrm>
+            <a:off x="5897880" y="2514600"/>
+            <a:ext cx="914" cy="320040"/>
+          </a:xfrm>
+          <a:prstGeom prst="line">
+            <a:avLst/>
+          </a:prstGeom>
+          <a:noFill/>
+          <a:ln w="19050">
+            <a:solidFill>
+              <a:srgbClr val="2BD4C2"/>
+            </a:solidFill>
+            <a:prstDash val="solid"/>
+            <a:headEnd type="triangle"/>
+          </a:ln>
+        </p:spPr>
+      </p:sp>
+      <p:sp>
+        <p:nvSpPr>
+          <p:cNvPr id="28" name="Shape 25"/>
+          <p:cNvSpPr/>
+          <p:nvPr/>
+        </p:nvSpPr>
+        <p:spPr>
+          <a:xfrm>
+            <a:off x="4846320" y="4114800"/>
+            <a:ext cx="6949440" cy="1234440"/>
+          </a:xfrm>
+          <a:prstGeom prst="roundRect">
+            <a:avLst>
+              <a:gd name="adj" fmla="val 5926"/>
+            </a:avLst>
+          </a:prstGeom>
+          <a:solidFill>
+            <a:srgbClr val="141B33"/>
+          </a:solidFill>
+          <a:ln w="12700">
+            <a:solidFill>
+              <a:srgbClr val="141B33"/>
+            </a:solidFill>
+            <a:prstDash val="solid"/>
+          </a:ln>
+        </p:spPr>
+      </p:sp>
+      <p:sp>
+        <p:nvSpPr>
+          <p:cNvPr id="29" name="Text 26"/>
+          <p:cNvSpPr/>
+          <p:nvPr/>
+        </p:nvSpPr>
+        <p:spPr>
+          <a:xfrm>
+            <a:off x="4983480" y="4160520"/>
+            <a:ext cx="6675120" cy="1143000"/>
           </a:xfrm>
           <a:prstGeom prst="rect">
             <a:avLst/>
@@ -7884,15 +6517,28 @@
           <a:bodyPr wrap="square" lIns="635" tIns="635" rIns="635" bIns="635" rtlCol="0" anchor="t"/>
           <a:lstStyle/>
           <a:p>
-            <a:pPr marL="342900" indent="-342900">
-              <a:spcAft>
-                <a:spcPts val="600"/>
-              </a:spcAft>
-              <a:buSzPct val="100000"/>
-              <a:buChar char="▸"/>
-            </a:pPr>
-            <a:r>
-              <a:rPr lang="en-US" sz="1400" dirty="0">
+            <a:pPr indent="0" marL="0">
+              <a:buNone/>
+            </a:pPr>
+            <a:r>
+              <a:rPr lang="en-US" sz="1300" b="1" dirty="0">
+                <a:solidFill>
+                  <a:srgbClr val="2BD4C2"/>
+                </a:solidFill>
+                <a:latin typeface="Calibri" pitchFamily="34" charset="0"/>
+                <a:ea typeface="Calibri" pitchFamily="34" charset="-122"/>
+                <a:cs typeface="Calibri" pitchFamily="34" charset="-120"/>
+              </a:rPr>
+              <a:t>Two stated assumptions</a:t>
+            </a:r>
+            <a:endParaRPr lang="en-US" sz="1300" dirty="0"/>
+          </a:p>
+          <a:p>
+            <a:pPr indent="0" marL="0">
+              <a:buNone/>
+            </a:pPr>
+            <a:r>
+              <a:rPr lang="en-US" sz="1150" dirty="0">
                 <a:solidFill>
                   <a:srgbClr val="F5F7FF"/>
                 </a:solidFill>
@@ -7900,20 +6546,16 @@
                 <a:ea typeface="Calibri" pitchFamily="34" charset="-122"/>
                 <a:cs typeface="Calibri" pitchFamily="34" charset="-120"/>
               </a:rPr>
-              <a:t>Why binary (2 qubits) and not one-hot (4 qubits) or a dense 5-qubit pack?</a:t>
-            </a:r>
-            <a:endParaRPr lang="en-US" sz="1400" dirty="0"/>
-          </a:p>
-          <a:p>
-            <a:pPr marL="342900" indent="-342900">
-              <a:spcAft>
-                <a:spcPts val="600"/>
-              </a:spcAft>
-              <a:buSzPct val="100000"/>
-              <a:buChar char="▸"/>
-            </a:pPr>
-            <a:r>
-              <a:rPr lang="en-US" sz="1400" dirty="0">
+              <a:t>1. Regions in one group are similar enough to share a coarse plan — step 6 relaxes this level by level (5 → 25 → 125 groups).</a:t>
+            </a:r>
+            <a:endParaRPr lang="en-US" sz="1300" dirty="0"/>
+          </a:p>
+          <a:p>
+            <a:pPr indent="0" marL="0">
+              <a:buNone/>
+            </a:pPr>
+            <a:r>
+              <a:rPr lang="en-US" sz="1150" dirty="0">
                 <a:solidFill>
                   <a:srgbClr val="F5F7FF"/>
                 </a:solidFill>
@@ -7921,20 +6563,65 @@
                 <a:ea typeface="Calibri" pitchFamily="34" charset="-122"/>
                 <a:cs typeface="Calibri" pitchFamily="34" charset="-120"/>
               </a:rPr>
-              <a:t>Binary keeps H_C quadratic → only RZ and CX gates after ZZ decomposition</a:t>
-            </a:r>
-            <a:endParaRPr lang="en-US" sz="1400" dirty="0"/>
-          </a:p>
-          <a:p>
-            <a:pPr marL="342900" indent="-342900">
-              <a:spcAft>
-                <a:spcPts val="600"/>
-              </a:spcAft>
-              <a:buSzPct val="100000"/>
-              <a:buChar char="▸"/>
-            </a:pPr>
-            <a:r>
-              <a:rPr lang="en-US" sz="1400" dirty="0">
+              <a:t>2. Interference between groups is ignored at each level — fixed by re-optimising boundary antennas with neighbours held fixed.</a:t>
+            </a:r>
+            <a:endParaRPr lang="en-US" sz="1300" dirty="0"/>
+          </a:p>
+        </p:txBody>
+      </p:sp>
+      <p:sp>
+        <p:nvSpPr>
+          <p:cNvPr id="30" name="Shape 27"/>
+          <p:cNvSpPr/>
+          <p:nvPr/>
+        </p:nvSpPr>
+        <p:spPr>
+          <a:xfrm>
+            <a:off x="548640" y="5486400"/>
+            <a:ext cx="11247120" cy="502920"/>
+          </a:xfrm>
+          <a:prstGeom prst="roundRect">
+            <a:avLst>
+              <a:gd name="adj" fmla="val 10909"/>
+            </a:avLst>
+          </a:prstGeom>
+          <a:solidFill>
+            <a:srgbClr val="7C5CFF"/>
+          </a:solidFill>
+          <a:ln w="12700">
+            <a:solidFill>
+              <a:srgbClr val="7C5CFF"/>
+            </a:solidFill>
+            <a:prstDash val="solid"/>
+          </a:ln>
+        </p:spPr>
+      </p:sp>
+      <p:sp>
+        <p:nvSpPr>
+          <p:cNvPr id="31" name="Text 28"/>
+          <p:cNvSpPr/>
+          <p:nvPr/>
+        </p:nvSpPr>
+        <p:spPr>
+          <a:xfrm>
+            <a:off x="640080" y="5486400"/>
+            <a:ext cx="11064240" cy="502920"/>
+          </a:xfrm>
+          <a:prstGeom prst="rect">
+            <a:avLst/>
+          </a:prstGeom>
+          <a:noFill/>
+          <a:ln/>
+        </p:spPr>
+        <p:txBody>
+          <a:bodyPr wrap="square" lIns="381" tIns="381" rIns="381" bIns="381" rtlCol="0" anchor="ctr"/>
+          <a:lstStyle/>
+          <a:p>
+            <a:pPr indent="0" marL="0">
+              <a:buNone/>
+            </a:pPr>
+            <a:r>
+              <a:rPr lang="en-US" sz="1150" dirty="0">
                 <a:solidFill>
                   <a:srgbClr val="F5F7FF"/>
                 </a:solidFill>
@@ -7942,51 +6629,9 @@
                 <a:ea typeface="Calibri" pitchFamily="34" charset="-122"/>
                 <a:cs typeface="Calibri" pitchFamily="34" charset="-120"/>
               </a:rPr>
-              <a:t>Fits Classiq student edition comfortably; 15 parallel jobs used for sweeps</a:t>
-            </a:r>
-            <a:endParaRPr lang="en-US" sz="1400" dirty="0"/>
-          </a:p>
-          <a:p>
-            <a:pPr marL="342900" indent="-342900">
-              <a:spcAft>
-                <a:spcPts val="600"/>
-              </a:spcAft>
-              <a:buSzPct val="100000"/>
-              <a:buChar char="▸"/>
-            </a:pPr>
-            <a:r>
-              <a:rPr lang="en-US" sz="1400" dirty="0">
-                <a:solidFill>
-                  <a:srgbClr val="F5F7FF"/>
-                </a:solidFill>
-                <a:latin typeface="Calibri" pitchFamily="34" charset="0"/>
-                <a:ea typeface="Calibri" pitchFamily="34" charset="-122"/>
-                <a:cs typeface="Calibri" pitchFamily="34" charset="-120"/>
-              </a:rPr>
-              <a:t>QAOA layer: phase exp(+iγ H_C) then mixer RX(2β) on every qubit</a:t>
-            </a:r>
-            <a:endParaRPr lang="en-US" sz="1400" dirty="0"/>
-          </a:p>
-          <a:p>
-            <a:pPr marL="342900" indent="-342900">
-              <a:spcAft>
-                <a:spcPts val="600"/>
-              </a:spcAft>
-              <a:buSzPct val="100000"/>
-              <a:buChar char="▸"/>
-            </a:pPr>
-            <a:r>
-              <a:rPr lang="en-US" sz="1400" dirty="0">
-                <a:solidFill>
-                  <a:srgbClr val="F5F7FF"/>
-                </a:solidFill>
-                <a:latin typeface="Calibri" pitchFamily="34" charset="0"/>
-                <a:ea typeface="Calibri" pitchFamily="34" charset="-122"/>
-                <a:cs typeface="Calibri" pitchFamily="34" charset="-120"/>
-              </a:rPr>
-              <a:t>Verified by Walsh–Hadamard: Pauli table reproduces all 4096 costs exactly</a:t>
-            </a:r>
-            <a:endParaRPr lang="en-US" sz="1400" dirty="0"/>
+              <a:t>Quantum work only where resolution is needed: ≤ 25 jobs per level = two batches of 15 parallel Classiq jobs. Classical: k-means + aggregation. Quantum: one warm-started QAOA per group.</a:t>
+            </a:r>
+            <a:endParaRPr lang="en-US" sz="1150" dirty="0"/>
           </a:p>
         </p:txBody>
       </p:sp>
@@ -8141,7 +6786,7 @@
                 <a:ea typeface="Calibri" pitchFamily="34" charset="-122"/>
                 <a:cs typeface="Calibri" pitchFamily="34" charset="-120"/>
               </a:rPr>
-              <a:t>SLIDE 4 / 13   |   GATES</a:t>
+              <a:t>SLIDE 4 / 13   |   LEAF PROBLEM</a:t>
             </a:r>
             <a:endParaRPr lang="en-US" sz="1100" dirty="0"/>
           </a:p>
@@ -8180,7 +6825,7 @@
                 <a:ea typeface="Calibri" pitchFamily="34" charset="-122"/>
                 <a:cs typeface="Calibri" pitchFamily="34" charset="-120"/>
               </a:rPr>
-              <a:t>The circuit Classiq synthesised</a:t>
+              <a:t>One leaf of the tree: 6 real Tel Aviv antennas, one down-tilt each</a:t>
             </a:r>
             <a:endParaRPr lang="en-US" sz="3200" dirty="0"/>
           </a:p>
@@ -8227,7 +6872,7 @@
       </p:sp>
       <p:pic>
         <p:nvPicPr>
-          <p:cNvPr id="8" name="Image 0" descr="C:\Projects\Hackton\group\charts\circuit_stats.png">    </p:cNvPr>
+          <p:cNvPr id="8" name="Image 0" descr="C:\Projects\Hackton\group\charts\map_small.jpg">    </p:cNvPr>
           <p:cNvPicPr>
             <a:picLocks noChangeAspect="1"/>
           </p:cNvPicPr>
@@ -8242,7 +6887,7 @@
         <p:spPr>
           <a:xfrm>
             <a:off x="548640" y="1417320"/>
-            <a:ext cx="6766560" cy="3557016"/>
+            <a:ext cx="6949440" cy="3502152"/>
           </a:xfrm>
           <a:prstGeom prst="rect">
             <a:avLst/>
@@ -8251,30 +6896,42 @@
       </p:pic>
       <p:sp>
         <p:nvSpPr>
-          <p:cNvPr id="9" name="Shape 6"/>
-          <p:cNvSpPr/>
-          <p:nvPr/>
-        </p:nvSpPr>
-        <p:spPr>
-          <a:xfrm>
-            <a:off x="7589520" y="1463040"/>
-            <a:ext cx="2011680" cy="1234440"/>
-          </a:xfrm>
-          <a:prstGeom prst="roundRect">
-            <a:avLst>
-              <a:gd name="adj" fmla="val 5926"/>
-            </a:avLst>
-          </a:prstGeom>
-          <a:solidFill>
-            <a:srgbClr val="141B33"/>
-          </a:solidFill>
-          <a:ln w="12700">
-            <a:solidFill>
-              <a:srgbClr val="141B33"/>
-            </a:solidFill>
-            <a:prstDash val="solid"/>
-          </a:ln>
-        </p:spPr>
+          <p:cNvPr id="9" name="Text 6"/>
+          <p:cNvSpPr/>
+          <p:nvPr/>
+        </p:nvSpPr>
+        <p:spPr>
+          <a:xfrm>
+            <a:off x="548640" y="4956048"/>
+            <a:ext cx="6949440" cy="320040"/>
+          </a:xfrm>
+          <a:prstGeom prst="rect">
+            <a:avLst/>
+          </a:prstGeom>
+          <a:noFill/>
+          <a:ln/>
+        </p:spPr>
+        <p:txBody>
+          <a:bodyPr wrap="square" lIns="0" tIns="0" rIns="0" bIns="0" rtlCol="0" anchor="ctr"/>
+          <a:lstStyle/>
+          <a:p>
+            <a:pPr indent="0" marL="0">
+              <a:buNone/>
+            </a:pPr>
+            <a:r>
+              <a:rPr lang="en-US" sz="1050" i="1" dirty="0">
+                <a:solidFill>
+                  <a:srgbClr val="A9B4D0"/>
+                </a:solidFill>
+                <a:latin typeface="Calibri" pitchFamily="34" charset="0"/>
+                <a:ea typeface="Calibri" pitchFamily="34" charset="-122"/>
+                <a:cs typeface="Calibri" pitchFamily="34" charset="-120"/>
+              </a:rPr>
+              <a:t>Two real 3-sector sites from OpenCelliD (Ayalon, Tel Aviv). Left: all tilts 0. Right: optimum plan — only A1 tilts to level 3.</a:t>
+            </a:r>
+            <a:endParaRPr lang="en-US" sz="1050" dirty="0"/>
+          </a:p>
+        </p:txBody>
       </p:sp>
       <p:sp>
         <p:nvSpPr>
@@ -8284,401 +6941,8 @@
         </p:nvSpPr>
         <p:spPr>
           <a:xfrm>
-            <a:off x="7589520" y="1572768"/>
-            <a:ext cx="2011680" cy="640080"/>
-          </a:xfrm>
-          <a:prstGeom prst="rect">
-            <a:avLst/>
-          </a:prstGeom>
-          <a:noFill/>
-          <a:ln/>
-        </p:spPr>
-        <p:txBody>
-          <a:bodyPr wrap="square" lIns="0" tIns="0" rIns="0" bIns="0" rtlCol="0" anchor="ctr"/>
-          <a:lstStyle/>
-          <a:p>
-            <a:pPr algn="ctr" indent="0" marL="0">
-              <a:buNone/>
-            </a:pPr>
-            <a:r>
-              <a:rPr lang="en-US" sz="3000" b="1" dirty="0">
-                <a:solidFill>
-                  <a:srgbClr val="2BD4C2"/>
-                </a:solidFill>
-                <a:latin typeface="Calibri" pitchFamily="34" charset="0"/>
-                <a:ea typeface="Calibri" pitchFamily="34" charset="-122"/>
-                <a:cs typeface="Calibri" pitchFamily="34" charset="-120"/>
-              </a:rPr>
-              <a:t>59</a:t>
-            </a:r>
-            <a:endParaRPr lang="en-US" sz="3000" dirty="0"/>
-          </a:p>
-        </p:txBody>
-      </p:sp>
-      <p:sp>
-        <p:nvSpPr>
-          <p:cNvPr id="11" name="Text 8"/>
-          <p:cNvSpPr/>
-          <p:nvPr/>
-        </p:nvSpPr>
-        <p:spPr>
-          <a:xfrm>
-            <a:off x="7680960" y="2194560"/>
-            <a:ext cx="1828800" cy="457200"/>
-          </a:xfrm>
-          <a:prstGeom prst="rect">
-            <a:avLst/>
-          </a:prstGeom>
-          <a:noFill/>
-          <a:ln/>
-        </p:spPr>
-        <p:txBody>
-          <a:bodyPr wrap="square" lIns="0" tIns="0" rIns="0" bIns="0" rtlCol="0" anchor="ctr"/>
-          <a:lstStyle/>
-          <a:p>
-            <a:pPr algn="ctr" indent="0" marL="0">
-              <a:buNone/>
-            </a:pPr>
-            <a:r>
-              <a:rPr lang="en-US" sz="1100" dirty="0">
-                <a:solidFill>
-                  <a:srgbClr val="A9B4D0"/>
-                </a:solidFill>
-                <a:latin typeface="Calibri" pitchFamily="34" charset="0"/>
-                <a:ea typeface="Calibri" pitchFamily="34" charset="-122"/>
-                <a:cs typeface="Calibri" pitchFamily="34" charset="-120"/>
-              </a:rPr>
-              <a:t>depth, p = 1</a:t>
-            </a:r>
-            <a:endParaRPr lang="en-US" sz="1100" dirty="0"/>
-          </a:p>
-        </p:txBody>
-      </p:sp>
-      <p:sp>
-        <p:nvSpPr>
-          <p:cNvPr id="12" name="Shape 9"/>
-          <p:cNvSpPr/>
-          <p:nvPr/>
-        </p:nvSpPr>
-        <p:spPr>
-          <a:xfrm>
-            <a:off x="9784080" y="1463040"/>
-            <a:ext cx="2011680" cy="1234440"/>
-          </a:xfrm>
-          <a:prstGeom prst="roundRect">
-            <a:avLst>
-              <a:gd name="adj" fmla="val 5926"/>
-            </a:avLst>
-          </a:prstGeom>
-          <a:solidFill>
-            <a:srgbClr val="141B33"/>
-          </a:solidFill>
-          <a:ln w="12700">
-            <a:solidFill>
-              <a:srgbClr val="141B33"/>
-            </a:solidFill>
-            <a:prstDash val="solid"/>
-          </a:ln>
-        </p:spPr>
-      </p:sp>
-      <p:sp>
-        <p:nvSpPr>
-          <p:cNvPr id="13" name="Text 10"/>
-          <p:cNvSpPr/>
-          <p:nvPr/>
-        </p:nvSpPr>
-        <p:spPr>
-          <a:xfrm>
-            <a:off x="9784080" y="1572768"/>
-            <a:ext cx="2011680" cy="640080"/>
-          </a:xfrm>
-          <a:prstGeom prst="rect">
-            <a:avLst/>
-          </a:prstGeom>
-          <a:noFill/>
-          <a:ln/>
-        </p:spPr>
-        <p:txBody>
-          <a:bodyPr wrap="square" lIns="0" tIns="0" rIns="0" bIns="0" rtlCol="0" anchor="ctr"/>
-          <a:lstStyle/>
-          <a:p>
-            <a:pPr algn="ctr" indent="0" marL="0">
-              <a:buNone/>
-            </a:pPr>
-            <a:r>
-              <a:rPr lang="en-US" sz="3000" b="1" dirty="0">
-                <a:solidFill>
-                  <a:srgbClr val="2BD4C2"/>
-                </a:solidFill>
-                <a:latin typeface="Calibri" pitchFamily="34" charset="0"/>
-                <a:ea typeface="Calibri" pitchFamily="34" charset="-122"/>
-                <a:cs typeface="Calibri" pitchFamily="34" charset="-120"/>
-              </a:rPr>
-              <a:t>114</a:t>
-            </a:r>
-            <a:endParaRPr lang="en-US" sz="3000" dirty="0"/>
-          </a:p>
-        </p:txBody>
-      </p:sp>
-      <p:sp>
-        <p:nvSpPr>
-          <p:cNvPr id="14" name="Text 11"/>
-          <p:cNvSpPr/>
-          <p:nvPr/>
-        </p:nvSpPr>
-        <p:spPr>
-          <a:xfrm>
-            <a:off x="9875520" y="2194560"/>
-            <a:ext cx="1828800" cy="457200"/>
-          </a:xfrm>
-          <a:prstGeom prst="rect">
-            <a:avLst/>
-          </a:prstGeom>
-          <a:noFill/>
-          <a:ln/>
-        </p:spPr>
-        <p:txBody>
-          <a:bodyPr wrap="square" lIns="0" tIns="0" rIns="0" bIns="0" rtlCol="0" anchor="ctr"/>
-          <a:lstStyle/>
-          <a:p>
-            <a:pPr algn="ctr" indent="0" marL="0">
-              <a:buNone/>
-            </a:pPr>
-            <a:r>
-              <a:rPr lang="en-US" sz="1100" dirty="0">
-                <a:solidFill>
-                  <a:srgbClr val="A9B4D0"/>
-                </a:solidFill>
-                <a:latin typeface="Calibri" pitchFamily="34" charset="0"/>
-                <a:ea typeface="Calibri" pitchFamily="34" charset="-122"/>
-                <a:cs typeface="Calibri" pitchFamily="34" charset="-120"/>
-              </a:rPr>
-              <a:t>depth, p = 2</a:t>
-            </a:r>
-            <a:endParaRPr lang="en-US" sz="1100" dirty="0"/>
-          </a:p>
-        </p:txBody>
-      </p:sp>
-      <p:sp>
-        <p:nvSpPr>
-          <p:cNvPr id="15" name="Shape 12"/>
-          <p:cNvSpPr/>
-          <p:nvPr/>
-        </p:nvSpPr>
-        <p:spPr>
-          <a:xfrm>
-            <a:off x="7589520" y="2880360"/>
-            <a:ext cx="2011680" cy="1234440"/>
-          </a:xfrm>
-          <a:prstGeom prst="roundRect">
-            <a:avLst>
-              <a:gd name="adj" fmla="val 5926"/>
-            </a:avLst>
-          </a:prstGeom>
-          <a:solidFill>
-            <a:srgbClr val="141B33"/>
-          </a:solidFill>
-          <a:ln w="12700">
-            <a:solidFill>
-              <a:srgbClr val="141B33"/>
-            </a:solidFill>
-            <a:prstDash val="solid"/>
-          </a:ln>
-        </p:spPr>
-      </p:sp>
-      <p:sp>
-        <p:nvSpPr>
-          <p:cNvPr id="16" name="Text 13"/>
-          <p:cNvSpPr/>
-          <p:nvPr/>
-        </p:nvSpPr>
-        <p:spPr>
-          <a:xfrm>
-            <a:off x="7589520" y="2990088"/>
-            <a:ext cx="2011680" cy="640080"/>
-          </a:xfrm>
-          <a:prstGeom prst="rect">
-            <a:avLst/>
-          </a:prstGeom>
-          <a:noFill/>
-          <a:ln/>
-        </p:spPr>
-        <p:txBody>
-          <a:bodyPr wrap="square" lIns="0" tIns="0" rIns="0" bIns="0" rtlCol="0" anchor="ctr"/>
-          <a:lstStyle/>
-          <a:p>
-            <a:pPr algn="ctr" indent="0" marL="0">
-              <a:buNone/>
-            </a:pPr>
-            <a:r>
-              <a:rPr lang="en-US" sz="3000" b="1" dirty="0">
-                <a:solidFill>
-                  <a:srgbClr val="FFB454"/>
-                </a:solidFill>
-                <a:latin typeface="Calibri" pitchFamily="34" charset="0"/>
-                <a:ea typeface="Calibri" pitchFamily="34" charset="-122"/>
-                <a:cs typeface="Calibri" pitchFamily="34" charset="-120"/>
-              </a:rPr>
-              <a:t>92 CX</a:t>
-            </a:r>
-            <a:endParaRPr lang="en-US" sz="3000" dirty="0"/>
-          </a:p>
-        </p:txBody>
-      </p:sp>
-      <p:sp>
-        <p:nvSpPr>
-          <p:cNvPr id="17" name="Text 14"/>
-          <p:cNvSpPr/>
-          <p:nvPr/>
-        </p:nvSpPr>
-        <p:spPr>
-          <a:xfrm>
-            <a:off x="7680960" y="3611880"/>
-            <a:ext cx="1828800" cy="457200"/>
-          </a:xfrm>
-          <a:prstGeom prst="rect">
-            <a:avLst/>
-          </a:prstGeom>
-          <a:noFill/>
-          <a:ln/>
-        </p:spPr>
-        <p:txBody>
-          <a:bodyPr wrap="square" lIns="0" tIns="0" rIns="0" bIns="0" rtlCol="0" anchor="ctr"/>
-          <a:lstStyle/>
-          <a:p>
-            <a:pPr algn="ctr" indent="0" marL="0">
-              <a:buNone/>
-            </a:pPr>
-            <a:r>
-              <a:rPr lang="en-US" sz="1100" dirty="0">
-                <a:solidFill>
-                  <a:srgbClr val="A9B4D0"/>
-                </a:solidFill>
-                <a:latin typeface="Calibri" pitchFamily="34" charset="0"/>
-                <a:ea typeface="Calibri" pitchFamily="34" charset="-122"/>
-                <a:cs typeface="Calibri" pitchFamily="34" charset="-120"/>
-              </a:rPr>
-              <a:t>+ 72 RZ + 12 H + 12 RX</a:t>
-            </a:r>
-            <a:endParaRPr lang="en-US" sz="1100" dirty="0"/>
-          </a:p>
-        </p:txBody>
-      </p:sp>
-      <p:sp>
-        <p:nvSpPr>
-          <p:cNvPr id="18" name="Shape 15"/>
-          <p:cNvSpPr/>
-          <p:nvPr/>
-        </p:nvSpPr>
-        <p:spPr>
-          <a:xfrm>
-            <a:off x="9784080" y="2880360"/>
-            <a:ext cx="2011680" cy="1234440"/>
-          </a:xfrm>
-          <a:prstGeom prst="roundRect">
-            <a:avLst>
-              <a:gd name="adj" fmla="val 5926"/>
-            </a:avLst>
-          </a:prstGeom>
-          <a:solidFill>
-            <a:srgbClr val="141B33"/>
-          </a:solidFill>
-          <a:ln w="12700">
-            <a:solidFill>
-              <a:srgbClr val="141B33"/>
-            </a:solidFill>
-            <a:prstDash val="solid"/>
-          </a:ln>
-        </p:spPr>
-      </p:sp>
-      <p:sp>
-        <p:nvSpPr>
-          <p:cNvPr id="19" name="Text 16"/>
-          <p:cNvSpPr/>
-          <p:nvPr/>
-        </p:nvSpPr>
-        <p:spPr>
-          <a:xfrm>
-            <a:off x="9784080" y="2990088"/>
-            <a:ext cx="2011680" cy="640080"/>
-          </a:xfrm>
-          <a:prstGeom prst="rect">
-            <a:avLst/>
-          </a:prstGeom>
-          <a:noFill/>
-          <a:ln/>
-        </p:spPr>
-        <p:txBody>
-          <a:bodyPr wrap="square" lIns="0" tIns="0" rIns="0" bIns="0" rtlCol="0" anchor="ctr"/>
-          <a:lstStyle/>
-          <a:p>
-            <a:pPr algn="ctr" indent="0" marL="0">
-              <a:buNone/>
-            </a:pPr>
-            <a:r>
-              <a:rPr lang="en-US" sz="3000" b="1" dirty="0">
-                <a:solidFill>
-                  <a:srgbClr val="FFB454"/>
-                </a:solidFill>
-                <a:latin typeface="Calibri" pitchFamily="34" charset="0"/>
-                <a:ea typeface="Calibri" pitchFamily="34" charset="-122"/>
-                <a:cs typeface="Calibri" pitchFamily="34" charset="-120"/>
-              </a:rPr>
-              <a:t>184 CX</a:t>
-            </a:r>
-            <a:endParaRPr lang="en-US" sz="3000" dirty="0"/>
-          </a:p>
-        </p:txBody>
-      </p:sp>
-      <p:sp>
-        <p:nvSpPr>
-          <p:cNvPr id="20" name="Text 17"/>
-          <p:cNvSpPr/>
-          <p:nvPr/>
-        </p:nvSpPr>
-        <p:spPr>
-          <a:xfrm>
-            <a:off x="9875520" y="3611880"/>
-            <a:ext cx="1828800" cy="457200"/>
-          </a:xfrm>
-          <a:prstGeom prst="rect">
-            <a:avLst/>
-          </a:prstGeom>
-          <a:noFill/>
-          <a:ln/>
-        </p:spPr>
-        <p:txBody>
-          <a:bodyPr wrap="square" lIns="0" tIns="0" rIns="0" bIns="0" rtlCol="0" anchor="ctr"/>
-          <a:lstStyle/>
-          <a:p>
-            <a:pPr algn="ctr" indent="0" marL="0">
-              <a:buNone/>
-            </a:pPr>
-            <a:r>
-              <a:rPr lang="en-US" sz="1100" dirty="0">
-                <a:solidFill>
-                  <a:srgbClr val="A9B4D0"/>
-                </a:solidFill>
-                <a:latin typeface="Calibri" pitchFamily="34" charset="0"/>
-                <a:ea typeface="Calibri" pitchFamily="34" charset="-122"/>
-                <a:cs typeface="Calibri" pitchFamily="34" charset="-120"/>
-              </a:rPr>
-              <a:t>+ 144 RZ + 12 H + 24 RX</a:t>
-            </a:r>
-            <a:endParaRPr lang="en-US" sz="1100" dirty="0"/>
-          </a:p>
-        </p:txBody>
-      </p:sp>
-      <p:sp>
-        <p:nvSpPr>
-          <p:cNvPr id="21" name="Text 18"/>
-          <p:cNvSpPr/>
-          <p:nvPr/>
-        </p:nvSpPr>
-        <p:spPr>
-          <a:xfrm>
-            <a:off x="7589520" y="4297680"/>
-            <a:ext cx="4206240" cy="1737360"/>
+            <a:off x="7772400" y="1463040"/>
+            <a:ext cx="4023360" cy="4206240"/>
           </a:xfrm>
           <a:prstGeom prst="rect">
             <a:avLst/>
@@ -8698,7 +6962,7 @@
               <a:buChar char="▸"/>
             </a:pPr>
             <a:r>
-              <a:rPr lang="en-US" sz="1250" dirty="0">
+              <a:rPr lang="en-US" sz="1400" dirty="0">
                 <a:solidFill>
                   <a:srgbClr val="F5F7FF"/>
                 </a:solidFill>
@@ -8706,9 +6970,9 @@
                 <a:ea typeface="Calibri" pitchFamily="34" charset="-122"/>
                 <a:cs typeface="Calibri" pitchFamily="34" charset="-120"/>
               </a:rPr>
-              <a:t>Written in Qmod: QStruct of QArray[QNum[2], 6], phase(cost, γ), RX mixer</a:t>
-            </a:r>
-            <a:endParaRPr lang="en-US" sz="1250" dirty="0"/>
+              <a:t>6 sector antennas A0…A5, 4 tilt levels each → 4⁶ = 4096 plans</a:t>
+            </a:r>
+            <a:endParaRPr lang="en-US" sz="1400" dirty="0"/>
           </a:p>
           <a:p>
             <a:pPr marL="342900" indent="-342900">
@@ -8719,7 +6983,7 @@
               <a:buChar char="▸"/>
             </a:pPr>
             <a:r>
-              <a:rPr lang="en-US" sz="1250" dirty="0">
+              <a:rPr lang="en-US" sz="1400" dirty="0">
                 <a:solidFill>
                   <a:srgbClr val="F5F7FF"/>
                 </a:solidFill>
@@ -8727,9 +6991,9 @@
                 <a:ea typeface="Calibri" pitchFamily="34" charset="-122"/>
                 <a:cs typeface="Calibri" pitchFamily="34" charset="-120"/>
               </a:rPr>
-              <a:t>Exported as OpenQASM 3 (group/classiq/results/*.qasm) + hand-written QASM 2 layer</a:t>
-            </a:r>
-            <a:endParaRPr lang="en-US" sz="1250" dirty="0"/>
+              <a:t>Tilting down: less interference on neighbours, less coverage</a:t>
+            </a:r>
+            <a:endParaRPr lang="en-US" sz="1400" dirty="0"/>
           </a:p>
           <a:p>
             <a:pPr marL="342900" indent="-342900">
@@ -8740,7 +7004,7 @@
               <a:buChar char="▸"/>
             </a:pPr>
             <a:r>
-              <a:rPr lang="en-US" sz="1250" dirty="0">
+              <a:rPr lang="en-US" sz="1400" dirty="0">
                 <a:solidFill>
                   <a:srgbClr val="F5F7FF"/>
                 </a:solidFill>
@@ -8748,9 +7012,51 @@
                 <a:ea typeface="Calibri" pitchFamily="34" charset="-122"/>
                 <a:cs typeface="Calibri" pitchFamily="34" charset="-120"/>
               </a:rPr>
-              <a:t>Same circuit re-simulated in Qiskit statevector: ⟨C⟩ = 1.9985 — identical to Wolfram</a:t>
-            </a:r>
-            <a:endParaRPr lang="en-US" sz="1250" dirty="0"/>
+              <a:t>Cost(t) = tᵀ I t − 1.5 · c·t + 0.3 · Σt   (interference − coverage + penalty)</a:t>
+            </a:r>
+            <a:endParaRPr lang="en-US" sz="1400" dirty="0"/>
+          </a:p>
+          <a:p>
+            <a:pPr marL="342900" indent="-342900">
+              <a:spcAft>
+                <a:spcPts val="600"/>
+              </a:spcAft>
+              <a:buSzPct val="100000"/>
+              <a:buChar char="▸"/>
+            </a:pPr>
+            <a:r>
+              <a:rPr lang="en-US" sz="1400" dirty="0">
+                <a:solidFill>
+                  <a:srgbClr val="F5F7FF"/>
+                </a:solidFill>
+                <a:latin typeface="Calibri" pitchFamily="34" charset="0"/>
+                <a:ea typeface="Calibri" pitchFamily="34" charset="-122"/>
+                <a:cs typeface="Calibri" pitchFamily="34" charset="-120"/>
+              </a:rPr>
+              <a:t>Classical brute force: unique optimum −2.844 at (0,3,0,0,0,0)</a:t>
+            </a:r>
+            <a:endParaRPr lang="en-US" sz="1400" dirty="0"/>
+          </a:p>
+          <a:p>
+            <a:pPr marL="342900" indent="-342900">
+              <a:spcAft>
+                <a:spcPts val="600"/>
+              </a:spcAft>
+              <a:buSzPct val="100000"/>
+              <a:buChar char="▸"/>
+            </a:pPr>
+            <a:r>
+              <a:rPr lang="en-US" sz="1400" dirty="0">
+                <a:solidFill>
+                  <a:srgbClr val="F5F7FF"/>
+                </a:solidFill>
+                <a:latin typeface="Calibri" pitchFamily="34" charset="0"/>
+                <a:ea typeface="Calibri" pitchFamily="34" charset="-122"/>
+                <a:cs typeface="Calibri" pitchFamily="34" charset="-120"/>
+              </a:rPr>
+              <a:t>Real networks: 100s of antennas × 10 levels → intractable → quantum</a:t>
+            </a:r>
+            <a:endParaRPr lang="en-US" sz="1400" dirty="0"/>
           </a:p>
         </p:txBody>
       </p:sp>
@@ -8905,7 +7211,7 @@
                 <a:ea typeface="Calibri" pitchFamily="34" charset="-122"/>
                 <a:cs typeface="Calibri" pitchFamily="34" charset="-120"/>
               </a:rPr>
-              <a:t>SLIDE 5 / 13   |   SIMULATION</a:t>
+              <a:t>SLIDE 5 / 13   |   MODEL</a:t>
             </a:r>
             <a:endParaRPr lang="en-US" sz="1100" dirty="0"/>
           </a:p>
@@ -8944,7 +7250,7 @@
                 <a:ea typeface="Calibri" pitchFamily="34" charset="-122"/>
                 <a:cs typeface="Calibri" pitchFamily="34" charset="-120"/>
               </a:rPr>
-              <a:t>Wolfram exact simulation: where the good angles are</a:t>
+              <a:t>Encoding: 2 qubits per antenna, 12 qubits total</a:t>
             </a:r>
             <a:endParaRPr lang="en-US" sz="3200" dirty="0"/>
           </a:p>
@@ -8989,83 +7295,20 @@
           </a:p>
         </p:txBody>
       </p:sp>
-      <p:pic>
-        <p:nvPicPr>
-          <p:cNvPr id="8" name="Image 0" descr="C:\Projects\Hackton\group\wolfram\img\landscape.png">    </p:cNvPr>
-          <p:cNvPicPr>
-            <a:picLocks noChangeAspect="1"/>
-          </p:cNvPicPr>
-          <p:nvPr/>
-        </p:nvPicPr>
-        <p:blipFill>
-          <a:blip r:embed="rId1"/>
-          <a:stretch>
-            <a:fillRect/>
-          </a:stretch>
-        </p:blipFill>
-        <p:spPr>
-          <a:xfrm>
-            <a:off x="548640" y="1417320"/>
-            <a:ext cx="4846320" cy="4617720"/>
-          </a:xfrm>
-          <a:prstGeom prst="rect">
-            <a:avLst/>
-          </a:prstGeom>
-        </p:spPr>
-      </p:pic>
-      <p:sp>
-        <p:nvSpPr>
-          <p:cNvPr id="9" name="Text 6"/>
-          <p:cNvSpPr/>
-          <p:nvPr/>
-        </p:nvSpPr>
-        <p:spPr>
-          <a:xfrm>
-            <a:off x="548640" y="6053328"/>
-            <a:ext cx="4846320" cy="320040"/>
-          </a:xfrm>
-          <a:prstGeom prst="rect">
-            <a:avLst/>
-          </a:prstGeom>
-          <a:noFill/>
-          <a:ln/>
-        </p:spPr>
-        <p:txBody>
-          <a:bodyPr wrap="square" lIns="0" tIns="0" rIns="0" bIns="0" rtlCol="0" anchor="ctr"/>
-          <a:lstStyle/>
-          <a:p>
-            <a:pPr indent="0" marL="0">
-              <a:buNone/>
-            </a:pPr>
-            <a:r>
-              <a:rPr lang="en-US" sz="1050" i="1" dirty="0">
-                <a:solidFill>
-                  <a:srgbClr val="A9B4D0"/>
-                </a:solidFill>
-                <a:latin typeface="Calibri" pitchFamily="34" charset="0"/>
-                <a:ea typeface="Calibri" pitchFamily="34" charset="-122"/>
-                <a:cs typeface="Calibri" pitchFamily="34" charset="-120"/>
-              </a:rPr>
-              <a:t>⟨C⟩(γ, β) for p = 1 over all 4096 amplitudes (statevector, no shot noise).</a:t>
-            </a:r>
-            <a:endParaRPr lang="en-US" sz="1050" dirty="0"/>
-          </a:p>
-        </p:txBody>
-      </p:sp>
-      <p:sp>
-        <p:nvSpPr>
-          <p:cNvPr id="10" name="Shape 7"/>
-          <p:cNvSpPr/>
-          <p:nvPr/>
-        </p:nvSpPr>
-        <p:spPr>
-          <a:xfrm>
-            <a:off x="5760720" y="1463040"/>
-            <a:ext cx="2926080" cy="1234440"/>
+      <p:sp>
+        <p:nvSpPr>
+          <p:cNvPr id="8" name="Shape 6"/>
+          <p:cNvSpPr/>
+          <p:nvPr/>
+        </p:nvSpPr>
+        <p:spPr>
+          <a:xfrm>
+            <a:off x="548640" y="1463040"/>
+            <a:ext cx="5486400" cy="2148840"/>
           </a:xfrm>
           <a:prstGeom prst="roundRect">
             <a:avLst>
-              <a:gd name="adj" fmla="val 5926"/>
+              <a:gd name="adj" fmla="val 3404"/>
             </a:avLst>
           </a:prstGeom>
           <a:solidFill>
@@ -9081,30 +7324,30 @@
       </p:sp>
       <p:sp>
         <p:nvSpPr>
-          <p:cNvPr id="11" name="Text 8"/>
-          <p:cNvSpPr/>
-          <p:nvPr/>
-        </p:nvSpPr>
-        <p:spPr>
-          <a:xfrm>
-            <a:off x="5760720" y="1572768"/>
-            <a:ext cx="2926080" cy="640080"/>
-          </a:xfrm>
-          <a:prstGeom prst="rect">
-            <a:avLst/>
-          </a:prstGeom>
-          <a:noFill/>
-          <a:ln/>
-        </p:spPr>
-        <p:txBody>
-          <a:bodyPr wrap="square" lIns="0" tIns="0" rIns="0" bIns="0" rtlCol="0" anchor="ctr"/>
-          <a:lstStyle/>
-          <a:p>
-            <a:pPr algn="ctr" indent="0" marL="0">
-              <a:buNone/>
-            </a:pPr>
-            <a:r>
-              <a:rPr lang="en-US" sz="3000" b="1" dirty="0">
+          <p:cNvPr id="9" name="Text 7"/>
+          <p:cNvSpPr/>
+          <p:nvPr/>
+        </p:nvSpPr>
+        <p:spPr>
+          <a:xfrm>
+            <a:off x="731520" y="1554480"/>
+            <a:ext cx="5120640" cy="1965960"/>
+          </a:xfrm>
+          <a:prstGeom prst="rect">
+            <a:avLst/>
+          </a:prstGeom>
+          <a:noFill/>
+          <a:ln/>
+        </p:spPr>
+        <p:txBody>
+          <a:bodyPr wrap="square" lIns="635" tIns="635" rIns="635" bIns="635" rtlCol="0" anchor="ctr"/>
+          <a:lstStyle/>
+          <a:p>
+            <a:pPr indent="0" marL="0">
+              <a:buNone/>
+            </a:pPr>
+            <a:r>
+              <a:rPr lang="en-US" sz="2000" b="1" dirty="0">
                 <a:solidFill>
                   <a:srgbClr val="2BD4C2"/>
                 </a:solidFill>
@@ -9112,38 +7355,50 @@
                 <a:ea typeface="Calibri" pitchFamily="34" charset="-122"/>
                 <a:cs typeface="Calibri" pitchFamily="34" charset="-120"/>
               </a:rPr>
-              <a:t>(0.0654, 1.1293)</a:t>
-            </a:r>
-            <a:endParaRPr lang="en-US" sz="3000" dirty="0"/>
-          </a:p>
-        </p:txBody>
-      </p:sp>
-      <p:sp>
-        <p:nvSpPr>
-          <p:cNvPr id="12" name="Text 9"/>
-          <p:cNvSpPr/>
-          <p:nvPr/>
-        </p:nvSpPr>
-        <p:spPr>
-          <a:xfrm>
-            <a:off x="5852160" y="2194560"/>
-            <a:ext cx="2743200" cy="457200"/>
-          </a:xfrm>
-          <a:prstGeom prst="rect">
-            <a:avLst/>
-          </a:prstGeom>
-          <a:noFill/>
-          <a:ln/>
-        </p:spPr>
-        <p:txBody>
-          <a:bodyPr wrap="square" lIns="0" tIns="0" rIns="0" bIns="0" rtlCol="0" anchor="ctr"/>
-          <a:lstStyle/>
-          <a:p>
-            <a:pPr algn="ctr" indent="0" marL="0">
-              <a:buNone/>
-            </a:pPr>
-            <a:r>
-              <a:rPr lang="en-US" sz="1100" dirty="0">
+              <a:t>tiltᵢ = q₂ᵢ + 2·q₂ᵢ₊₁ ∈ {0,1,2,3}</a:t>
+            </a:r>
+            <a:endParaRPr lang="en-US" sz="2000" dirty="0"/>
+          </a:p>
+          <a:p>
+            <a:pPr indent="0" marL="0">
+              <a:buNone/>
+            </a:pPr>
+            <a:r>
+              <a:rPr lang="en-US" sz="1400" dirty="0">
+                <a:solidFill>
+                  <a:srgbClr val="F5F7FF"/>
+                </a:solidFill>
+                <a:latin typeface="Calibri" pitchFamily="34" charset="0"/>
+                <a:ea typeface="Calibri" pitchFamily="34" charset="-122"/>
+                <a:cs typeface="Calibri" pitchFamily="34" charset="-120"/>
+              </a:rPr>
+              <a:t>qᵢ = (1 − Zᵢ)/2  →  Cost becomes a Pauli-Z polynomial</a:t>
+            </a:r>
+            <a:endParaRPr lang="en-US" sz="2000" dirty="0"/>
+          </a:p>
+          <a:p>
+            <a:pPr indent="0" marL="0">
+              <a:buNone/>
+            </a:pPr>
+            <a:r>
+              <a:rPr lang="en-US" sz="1800" b="1" dirty="0">
+                <a:solidFill>
+                  <a:srgbClr val="F5F7FF"/>
+                </a:solidFill>
+                <a:latin typeface="Calibri" pitchFamily="34" charset="0"/>
+                <a:ea typeface="Calibri" pitchFamily="34" charset="-122"/>
+                <a:cs typeface="Calibri" pitchFamily="34" charset="-120"/>
+              </a:rPr>
+              <a:t>H_C = c₀·I + Σ hᵢ Zᵢ + Σ Jᵢⱼ ZᵢZⱼ</a:t>
+            </a:r>
+            <a:endParaRPr lang="en-US" sz="2000" dirty="0"/>
+          </a:p>
+          <a:p>
+            <a:pPr indent="0" marL="0">
+              <a:buNone/>
+            </a:pPr>
+            <a:r>
+              <a:rPr lang="en-US" sz="1400" dirty="0">
                 <a:solidFill>
                   <a:srgbClr val="A9B4D0"/>
                 </a:solidFill>
@@ -9151,22 +7406,22 @@
                 <a:ea typeface="Calibri" pitchFamily="34" charset="-122"/>
                 <a:cs typeface="Calibri" pitchFamily="34" charset="-120"/>
               </a:rPr>
-              <a:t>optimal (γ, β), p = 1</a:t>
-            </a:r>
-            <a:endParaRPr lang="en-US" sz="1100" dirty="0"/>
-          </a:p>
-        </p:txBody>
-      </p:sp>
-      <p:sp>
-        <p:nvSpPr>
-          <p:cNvPr id="13" name="Shape 10"/>
-          <p:cNvSpPr/>
-          <p:nvPr/>
-        </p:nvSpPr>
-        <p:spPr>
-          <a:xfrm>
-            <a:off x="8869680" y="1463040"/>
-            <a:ext cx="2926080" cy="1234440"/>
+              <a:t>73 terms: 1 identity + 12 Z + 60 ZZ — strictly 2-local, no ZZZ</a:t>
+            </a:r>
+            <a:endParaRPr lang="en-US" sz="2000" dirty="0"/>
+          </a:p>
+        </p:txBody>
+      </p:sp>
+      <p:sp>
+        <p:nvSpPr>
+          <p:cNvPr id="10" name="Shape 8"/>
+          <p:cNvSpPr/>
+          <p:nvPr/>
+        </p:nvSpPr>
+        <p:spPr>
+          <a:xfrm>
+            <a:off x="548640" y="3840480"/>
+            <a:ext cx="1737360" cy="1234440"/>
           </a:xfrm>
           <a:prstGeom prst="roundRect">
             <a:avLst>
@@ -9186,14 +7441,14 @@
       </p:sp>
       <p:sp>
         <p:nvSpPr>
-          <p:cNvPr id="14" name="Text 11"/>
-          <p:cNvSpPr/>
-          <p:nvPr/>
-        </p:nvSpPr>
-        <p:spPr>
-          <a:xfrm>
-            <a:off x="8869680" y="1572768"/>
-            <a:ext cx="2926080" cy="640080"/>
+          <p:cNvPr id="11" name="Text 9"/>
+          <p:cNvSpPr/>
+          <p:nvPr/>
+        </p:nvSpPr>
+        <p:spPr>
+          <a:xfrm>
+            <a:off x="548640" y="3950208"/>
+            <a:ext cx="1737360" cy="640080"/>
           </a:xfrm>
           <a:prstGeom prst="rect">
             <a:avLst/>
@@ -9217,7 +7472,7 @@
                 <a:ea typeface="Calibri" pitchFamily="34" charset="-122"/>
                 <a:cs typeface="Calibri" pitchFamily="34" charset="-120"/>
               </a:rPr>
-              <a:t>⟨C⟩ = 1.9985</a:t>
+              <a:t>12</a:t>
             </a:r>
             <a:endParaRPr lang="en-US" sz="3000" dirty="0"/>
           </a:p>
@@ -9225,14 +7480,14 @@
       </p:sp>
       <p:sp>
         <p:nvSpPr>
-          <p:cNvPr id="15" name="Text 12"/>
-          <p:cNvSpPr/>
-          <p:nvPr/>
-        </p:nvSpPr>
-        <p:spPr>
-          <a:xfrm>
-            <a:off x="8961120" y="2194560"/>
-            <a:ext cx="2743200" cy="457200"/>
+          <p:cNvPr id="12" name="Text 10"/>
+          <p:cNvSpPr/>
+          <p:nvPr/>
+        </p:nvSpPr>
+        <p:spPr>
+          <a:xfrm>
+            <a:off x="640080" y="4572000"/>
+            <a:ext cx="1554480" cy="457200"/>
           </a:xfrm>
           <a:prstGeom prst="rect">
             <a:avLst/>
@@ -9256,7 +7511,7 @@
                 <a:ea typeface="Calibri" pitchFamily="34" charset="-122"/>
                 <a:cs typeface="Calibri" pitchFamily="34" charset="-120"/>
               </a:rPr>
-              <a:t>p = 1 (random: 35.5)</a:t>
+              <a:t>qubits</a:t>
             </a:r>
             <a:endParaRPr lang="en-US" sz="1100" dirty="0"/>
           </a:p>
@@ -9264,14 +7519,14 @@
       </p:sp>
       <p:sp>
         <p:nvSpPr>
-          <p:cNvPr id="16" name="Shape 13"/>
-          <p:cNvSpPr/>
-          <p:nvPr/>
-        </p:nvSpPr>
-        <p:spPr>
-          <a:xfrm>
-            <a:off x="5760720" y="2880360"/>
-            <a:ext cx="2926080" cy="1234440"/>
+          <p:cNvPr id="13" name="Shape 11"/>
+          <p:cNvSpPr/>
+          <p:nvPr/>
+        </p:nvSpPr>
+        <p:spPr>
+          <a:xfrm>
+            <a:off x="2423160" y="3840480"/>
+            <a:ext cx="1737360" cy="1234440"/>
           </a:xfrm>
           <a:prstGeom prst="roundRect">
             <a:avLst>
@@ -9291,14 +7546,14 @@
       </p:sp>
       <p:sp>
         <p:nvSpPr>
-          <p:cNvPr id="17" name="Text 14"/>
-          <p:cNvSpPr/>
-          <p:nvPr/>
-        </p:nvSpPr>
-        <p:spPr>
-          <a:xfrm>
-            <a:off x="5760720" y="2990088"/>
-            <a:ext cx="2926080" cy="640080"/>
+          <p:cNvPr id="14" name="Text 12"/>
+          <p:cNvSpPr/>
+          <p:nvPr/>
+        </p:nvSpPr>
+        <p:spPr>
+          <a:xfrm>
+            <a:off x="2423160" y="3950208"/>
+            <a:ext cx="1737360" cy="640080"/>
           </a:xfrm>
           <a:prstGeom prst="rect">
             <a:avLst/>
@@ -9316,13 +7571,13 @@
             <a:r>
               <a:rPr lang="en-US" sz="3000" b="1" dirty="0">
                 <a:solidFill>
-                  <a:srgbClr val="FFB454"/>
-                </a:solidFill>
-                <a:latin typeface="Calibri" pitchFamily="34" charset="0"/>
-                <a:ea typeface="Calibri" pitchFamily="34" charset="-122"/>
-                <a:cs typeface="Calibri" pitchFamily="34" charset="-120"/>
-              </a:rPr>
-              <a:t>⟨C⟩ = −0.3825</a:t>
+                  <a:srgbClr val="2BD4C2"/>
+                </a:solidFill>
+                <a:latin typeface="Calibri" pitchFamily="34" charset="0"/>
+                <a:ea typeface="Calibri" pitchFamily="34" charset="-122"/>
+                <a:cs typeface="Calibri" pitchFamily="34" charset="-120"/>
+              </a:rPr>
+              <a:t>73</a:t>
             </a:r>
             <a:endParaRPr lang="en-US" sz="3000" dirty="0"/>
           </a:p>
@@ -9330,14 +7585,14 @@
       </p:sp>
       <p:sp>
         <p:nvSpPr>
-          <p:cNvPr id="18" name="Text 15"/>
-          <p:cNvSpPr/>
-          <p:nvPr/>
-        </p:nvSpPr>
-        <p:spPr>
-          <a:xfrm>
-            <a:off x="5852160" y="3611880"/>
-            <a:ext cx="2743200" cy="457200"/>
+          <p:cNvPr id="15" name="Text 13"/>
+          <p:cNvSpPr/>
+          <p:nvPr/>
+        </p:nvSpPr>
+        <p:spPr>
+          <a:xfrm>
+            <a:off x="2514600" y="4572000"/>
+            <a:ext cx="1554480" cy="457200"/>
           </a:xfrm>
           <a:prstGeom prst="rect">
             <a:avLst/>
@@ -9361,7 +7616,7 @@
                 <a:ea typeface="Calibri" pitchFamily="34" charset="-122"/>
                 <a:cs typeface="Calibri" pitchFamily="34" charset="-120"/>
               </a:rPr>
-              <a:t>p = 2, 4 angles</a:t>
+              <a:t>Pauli terms</a:t>
             </a:r>
             <a:endParaRPr lang="en-US" sz="1100" dirty="0"/>
           </a:p>
@@ -9369,14 +7624,14 @@
       </p:sp>
       <p:sp>
         <p:nvSpPr>
-          <p:cNvPr id="19" name="Shape 16"/>
-          <p:cNvSpPr/>
-          <p:nvPr/>
-        </p:nvSpPr>
-        <p:spPr>
-          <a:xfrm>
-            <a:off x="8869680" y="2880360"/>
-            <a:ext cx="2926080" cy="1234440"/>
+          <p:cNvPr id="16" name="Shape 14"/>
+          <p:cNvSpPr/>
+          <p:nvPr/>
+        </p:nvSpPr>
+        <p:spPr>
+          <a:xfrm>
+            <a:off x="4297680" y="3840480"/>
+            <a:ext cx="1737360" cy="1234440"/>
           </a:xfrm>
           <a:prstGeom prst="roundRect">
             <a:avLst>
@@ -9396,14 +7651,14 @@
       </p:sp>
       <p:sp>
         <p:nvSpPr>
-          <p:cNvPr id="20" name="Text 17"/>
-          <p:cNvSpPr/>
-          <p:nvPr/>
-        </p:nvSpPr>
-        <p:spPr>
-          <a:xfrm>
-            <a:off x="8869680" y="2990088"/>
-            <a:ext cx="2926080" cy="640080"/>
+          <p:cNvPr id="17" name="Text 15"/>
+          <p:cNvSpPr/>
+          <p:nvPr/>
+        </p:nvSpPr>
+        <p:spPr>
+          <a:xfrm>
+            <a:off x="4297680" y="3950208"/>
+            <a:ext cx="1737360" cy="640080"/>
           </a:xfrm>
           <a:prstGeom prst="rect">
             <a:avLst/>
@@ -9421,13 +7676,13 @@
             <a:r>
               <a:rPr lang="en-US" sz="3000" b="1" dirty="0">
                 <a:solidFill>
-                  <a:srgbClr val="FFB454"/>
-                </a:solidFill>
-                <a:latin typeface="Calibri" pitchFamily="34" charset="0"/>
-                <a:ea typeface="Calibri" pitchFamily="34" charset="-122"/>
-                <a:cs typeface="Calibri" pitchFamily="34" charset="-120"/>
-              </a:rPr>
-              <a:t>−2.844</a:t>
+                  <a:srgbClr val="2BD4C2"/>
+                </a:solidFill>
+                <a:latin typeface="Calibri" pitchFamily="34" charset="0"/>
+                <a:ea typeface="Calibri" pitchFamily="34" charset="-122"/>
+                <a:cs typeface="Calibri" pitchFamily="34" charset="-120"/>
+              </a:rPr>
+              <a:t>2-local</a:t>
             </a:r>
             <a:endParaRPr lang="en-US" sz="3000" dirty="0"/>
           </a:p>
@@ -9435,14 +7690,14 @@
       </p:sp>
       <p:sp>
         <p:nvSpPr>
-          <p:cNvPr id="21" name="Text 18"/>
-          <p:cNvSpPr/>
-          <p:nvPr/>
-        </p:nvSpPr>
-        <p:spPr>
-          <a:xfrm>
-            <a:off x="8961120" y="3611880"/>
-            <a:ext cx="2743200" cy="457200"/>
+          <p:cNvPr id="18" name="Text 16"/>
+          <p:cNvSpPr/>
+          <p:nvPr/>
+        </p:nvSpPr>
+        <p:spPr>
+          <a:xfrm>
+            <a:off x="4389120" y="4572000"/>
+            <a:ext cx="1554480" cy="457200"/>
           </a:xfrm>
           <a:prstGeom prst="rect">
             <a:avLst/>
@@ -9466,7 +7721,7 @@
                 <a:ea typeface="Calibri" pitchFamily="34" charset="-122"/>
                 <a:cs typeface="Calibri" pitchFamily="34" charset="-120"/>
               </a:rPr>
-              <a:t>ground state = classical optimum</a:t>
+              <a:t>ZZ max weight</a:t>
             </a:r>
             <a:endParaRPr lang="en-US" sz="1100" dirty="0"/>
           </a:p>
@@ -9474,14 +7729,14 @@
       </p:sp>
       <p:sp>
         <p:nvSpPr>
-          <p:cNvPr id="22" name="Text 19"/>
-          <p:cNvSpPr/>
-          <p:nvPr/>
-        </p:nvSpPr>
-        <p:spPr>
-          <a:xfrm>
-            <a:off x="5760720" y="4297680"/>
-            <a:ext cx="6035040" cy="1828800"/>
+          <p:cNvPr id="19" name="Text 17"/>
+          <p:cNvSpPr/>
+          <p:nvPr/>
+        </p:nvSpPr>
+        <p:spPr>
+          <a:xfrm>
+            <a:off x="6309360" y="1463040"/>
+            <a:ext cx="5486400" cy="3840480"/>
           </a:xfrm>
           <a:prstGeom prst="rect">
             <a:avLst/>
@@ -9501,7 +7756,7 @@
               <a:buChar char="▸"/>
             </a:pPr>
             <a:r>
-              <a:rPr lang="en-US" sz="1300" dirty="0">
+              <a:rPr lang="en-US" sz="1400" dirty="0">
                 <a:solidFill>
                   <a:srgbClr val="F5F7FF"/>
                 </a:solidFill>
@@ -9509,9 +7764,9 @@
                 <a:ea typeface="Calibri" pitchFamily="34" charset="-122"/>
                 <a:cs typeface="Calibri" pitchFamily="34" charset="-120"/>
               </a:rPr>
-              <a:t>Notebook + PDF + CDF + Markdown in group/wolfram/ (14 pages, 13 figures)</a:t>
-            </a:r>
-            <a:endParaRPr lang="en-US" sz="1300" dirty="0"/>
+              <a:t>Why binary (2 qubits) and not one-hot (4 qubits) or a dense 5-qubit pack?</a:t>
+            </a:r>
+            <a:endParaRPr lang="en-US" sz="1400" dirty="0"/>
           </a:p>
           <a:p>
             <a:pPr marL="342900" indent="-342900">
@@ -9522,7 +7777,7 @@
               <a:buChar char="▸"/>
             </a:pPr>
             <a:r>
-              <a:rPr lang="en-US" sz="1300" dirty="0">
+              <a:rPr lang="en-US" sz="1400" dirty="0">
                 <a:solidFill>
                   <a:srgbClr val="F5F7FF"/>
                 </a:solidFill>
@@ -9530,9 +7785,9 @@
                 <a:ea typeface="Calibri" pitchFamily="34" charset="-122"/>
                 <a:cs typeface="Calibri" pitchFamily="34" charset="-120"/>
               </a:rPr>
-              <a:t>Landscape is flat almost everywhere — a bad start sits on a plateau at ⟨C⟩ ≈ 35</a:t>
-            </a:r>
-            <a:endParaRPr lang="en-US" sz="1300" dirty="0"/>
+              <a:t>Binary keeps H_C quadratic → only RZ and CX gates after ZZ decomposition</a:t>
+            </a:r>
+            <a:endParaRPr lang="en-US" sz="1400" dirty="0"/>
           </a:p>
           <a:p>
             <a:pPr marL="342900" indent="-342900">
@@ -9543,7 +7798,7 @@
               <a:buChar char="▸"/>
             </a:pPr>
             <a:r>
-              <a:rPr lang="en-US" sz="1300" dirty="0">
+              <a:rPr lang="en-US" sz="1400" dirty="0">
                 <a:solidFill>
                   <a:srgbClr val="F5F7FF"/>
                 </a:solidFill>
@@ -9551,9 +7806,9 @@
                 <a:ea typeface="Calibri" pitchFamily="34" charset="-122"/>
                 <a:cs typeface="Calibri" pitchFamily="34" charset="-120"/>
               </a:rPr>
-              <a:t>Angles found here are the warm start we hand to Classiq</a:t>
-            </a:r>
-            <a:endParaRPr lang="en-US" sz="1300" dirty="0"/>
+              <a:t>Fits Classiq student edition comfortably; 15 parallel jobs used for sweeps</a:t>
+            </a:r>
+            <a:endParaRPr lang="en-US" sz="1400" dirty="0"/>
           </a:p>
           <a:p>
             <a:pPr marL="342900" indent="-342900">
@@ -9564,7 +7819,7 @@
               <a:buChar char="▸"/>
             </a:pPr>
             <a:r>
-              <a:rPr lang="en-US" sz="1300" dirty="0">
+              <a:rPr lang="en-US" sz="1400" dirty="0">
                 <a:solidFill>
                   <a:srgbClr val="F5F7FF"/>
                 </a:solidFill>
@@ -9572,9 +7827,30 @@
                 <a:ea typeface="Calibri" pitchFamily="34" charset="-122"/>
                 <a:cs typeface="Calibri" pitchFamily="34" charset="-120"/>
               </a:rPr>
-              <a:t>Also in the notebook: VQE (RY+CZ), Grover on a 2-antenna slice, 10-level scaling</a:t>
-            </a:r>
-            <a:endParaRPr lang="en-US" sz="1300" dirty="0"/>
+              <a:t>QAOA layer: phase exp(+iγ H_C) then mixer RX(2β) on every qubit</a:t>
+            </a:r>
+            <a:endParaRPr lang="en-US" sz="1400" dirty="0"/>
+          </a:p>
+          <a:p>
+            <a:pPr marL="342900" indent="-342900">
+              <a:spcAft>
+                <a:spcPts val="600"/>
+              </a:spcAft>
+              <a:buSzPct val="100000"/>
+              <a:buChar char="▸"/>
+            </a:pPr>
+            <a:r>
+              <a:rPr lang="en-US" sz="1400" dirty="0">
+                <a:solidFill>
+                  <a:srgbClr val="F5F7FF"/>
+                </a:solidFill>
+                <a:latin typeface="Calibri" pitchFamily="34" charset="0"/>
+                <a:ea typeface="Calibri" pitchFamily="34" charset="-122"/>
+                <a:cs typeface="Calibri" pitchFamily="34" charset="-120"/>
+              </a:rPr>
+              <a:t>Verified by Walsh–Hadamard: Pauli table reproduces all 4096 costs exactly</a:t>
+            </a:r>
+            <a:endParaRPr lang="en-US" sz="1400" dirty="0"/>
           </a:p>
         </p:txBody>
       </p:sp>
@@ -9729,7 +8005,7 @@
                 <a:ea typeface="Calibri" pitchFamily="34" charset="-122"/>
                 <a:cs typeface="Calibri" pitchFamily="34" charset="-120"/>
               </a:rPr>
-              <a:t>SLIDE 6 / 13   |   RESULT</a:t>
+              <a:t>SLIDE 6 / 13   |   GATES</a:t>
             </a:r>
             <a:endParaRPr lang="en-US" sz="1100" dirty="0"/>
           </a:p>
@@ -9768,7 +8044,7 @@
                 <a:ea typeface="Calibri" pitchFamily="34" charset="-122"/>
                 <a:cs typeface="Calibri" pitchFamily="34" charset="-120"/>
               </a:rPr>
-              <a:t>What the quantum sampler buys us</a:t>
+              <a:t>The circuit Classiq synthesised</a:t>
             </a:r>
             <a:endParaRPr lang="en-US" sz="3200" dirty="0"/>
           </a:p>
@@ -9815,7 +8091,7 @@
       </p:sp>
       <p:pic>
         <p:nvPicPr>
-          <p:cNvPr id="8" name="Image 0" descr="C:\Projects\Hackton\group\charts\quantum_gain.png">    </p:cNvPr>
+          <p:cNvPr id="8" name="Image 0" descr="C:\Projects\Hackton\group\charts\circuit_stats.png">    </p:cNvPr>
           <p:cNvPicPr>
             <a:picLocks noChangeAspect="1"/>
           </p:cNvPicPr>
@@ -9830,86 +8106,23 @@
         <p:spPr>
           <a:xfrm>
             <a:off x="548640" y="1417320"/>
-            <a:ext cx="5669280" cy="3191256"/>
+            <a:ext cx="6766560" cy="3557016"/>
           </a:xfrm>
           <a:prstGeom prst="rect">
             <a:avLst/>
           </a:prstGeom>
         </p:spPr>
       </p:pic>
-      <p:pic>
-        <p:nvPicPr>
-          <p:cNvPr id="9" name="Image 1" descr="C:\Projects\Hackton\group\wolfram\img\shots.png">    </p:cNvPr>
-          <p:cNvPicPr>
-            <a:picLocks noChangeAspect="1"/>
-          </p:cNvPicPr>
-          <p:nvPr/>
-        </p:nvPicPr>
-        <p:blipFill>
-          <a:blip r:embed="rId2"/>
-          <a:stretch>
-            <a:fillRect/>
-          </a:stretch>
-        </p:blipFill>
-        <p:spPr>
-          <a:xfrm>
-            <a:off x="6355080" y="1417320"/>
-            <a:ext cx="5440680" cy="2606040"/>
-          </a:xfrm>
-          <a:prstGeom prst="rect">
-            <a:avLst/>
-          </a:prstGeom>
-        </p:spPr>
-      </p:pic>
-      <p:sp>
-        <p:nvSpPr>
-          <p:cNvPr id="10" name="Text 6"/>
-          <p:cNvSpPr/>
-          <p:nvPr/>
-        </p:nvSpPr>
-        <p:spPr>
-          <a:xfrm>
-            <a:off x="6355080" y="4041648"/>
-            <a:ext cx="5440680" cy="320040"/>
-          </a:xfrm>
-          <a:prstGeom prst="rect">
-            <a:avLst/>
-          </a:prstGeom>
-          <a:noFill/>
-          <a:ln/>
-        </p:spPr>
-        <p:txBody>
-          <a:bodyPr wrap="square" lIns="0" tIns="0" rIns="0" bIns="0" rtlCol="0" anchor="ctr"/>
-          <a:lstStyle/>
-          <a:p>
-            <a:pPr indent="0" marL="0">
-              <a:buNone/>
-            </a:pPr>
-            <a:r>
-              <a:rPr lang="en-US" sz="1050" i="1" dirty="0">
-                <a:solidFill>
-                  <a:srgbClr val="A9B4D0"/>
-                </a:solidFill>
-                <a:latin typeface="Calibri" pitchFamily="34" charset="0"/>
-                <a:ea typeface="Calibri" pitchFamily="34" charset="-122"/>
-                <a:cs typeface="Calibri" pitchFamily="34" charset="-120"/>
-              </a:rPr>
-              <a:t>Shots needed for 95% chance of sampling the exact optimum (Wolfram).</a:t>
-            </a:r>
-            <a:endParaRPr lang="en-US" sz="1050" dirty="0"/>
-          </a:p>
-        </p:txBody>
-      </p:sp>
-      <p:sp>
-        <p:nvSpPr>
-          <p:cNvPr id="11" name="Shape 7"/>
-          <p:cNvSpPr/>
-          <p:nvPr/>
-        </p:nvSpPr>
-        <p:spPr>
-          <a:xfrm>
-            <a:off x="548640" y="4754880"/>
-            <a:ext cx="2651760" cy="1234440"/>
+      <p:sp>
+        <p:nvSpPr>
+          <p:cNvPr id="9" name="Shape 6"/>
+          <p:cNvSpPr/>
+          <p:nvPr/>
+        </p:nvSpPr>
+        <p:spPr>
+          <a:xfrm>
+            <a:off x="7589520" y="1463040"/>
+            <a:ext cx="2011680" cy="1234440"/>
           </a:xfrm>
           <a:prstGeom prst="roundRect">
             <a:avLst>
@@ -9929,14 +8142,14 @@
       </p:sp>
       <p:sp>
         <p:nvSpPr>
-          <p:cNvPr id="12" name="Text 8"/>
-          <p:cNvSpPr/>
-          <p:nvPr/>
-        </p:nvSpPr>
-        <p:spPr>
-          <a:xfrm>
-            <a:off x="548640" y="4864608"/>
-            <a:ext cx="2651760" cy="640080"/>
+          <p:cNvPr id="10" name="Text 7"/>
+          <p:cNvSpPr/>
+          <p:nvPr/>
+        </p:nvSpPr>
+        <p:spPr>
+          <a:xfrm>
+            <a:off x="7589520" y="1572768"/>
+            <a:ext cx="2011680" cy="640080"/>
           </a:xfrm>
           <a:prstGeom prst="rect">
             <a:avLst/>
@@ -9960,7 +8173,7 @@
                 <a:ea typeface="Calibri" pitchFamily="34" charset="-122"/>
                 <a:cs typeface="Calibri" pitchFamily="34" charset="-120"/>
               </a:rPr>
-              <a:t>2.4% → 67%</a:t>
+              <a:t>59</a:t>
             </a:r>
             <a:endParaRPr lang="en-US" sz="3000" dirty="0"/>
           </a:p>
@@ -9968,14 +8181,14 @@
       </p:sp>
       <p:sp>
         <p:nvSpPr>
-          <p:cNvPr id="13" name="Text 9"/>
-          <p:cNvSpPr/>
-          <p:nvPr/>
-        </p:nvSpPr>
-        <p:spPr>
-          <a:xfrm>
-            <a:off x="640080" y="5486400"/>
-            <a:ext cx="2468880" cy="457200"/>
+          <p:cNvPr id="11" name="Text 8"/>
+          <p:cNvSpPr/>
+          <p:nvPr/>
+        </p:nvSpPr>
+        <p:spPr>
+          <a:xfrm>
+            <a:off x="7680960" y="2194560"/>
+            <a:ext cx="1828800" cy="457200"/>
           </a:xfrm>
           <a:prstGeom prst="rect">
             <a:avLst/>
@@ -9999,7 +8212,7 @@
                 <a:ea typeface="Calibri" pitchFamily="34" charset="-122"/>
                 <a:cs typeface="Calibri" pitchFamily="34" charset="-120"/>
               </a:rPr>
-              <a:t>P(cost &lt; 0), random → p = 2</a:t>
+              <a:t>depth, p = 1</a:t>
             </a:r>
             <a:endParaRPr lang="en-US" sz="1100" dirty="0"/>
           </a:p>
@@ -10007,14 +8220,14 @@
       </p:sp>
       <p:sp>
         <p:nvSpPr>
-          <p:cNvPr id="14" name="Shape 10"/>
-          <p:cNvSpPr/>
-          <p:nvPr/>
-        </p:nvSpPr>
-        <p:spPr>
-          <a:xfrm>
-            <a:off x="3337560" y="4754880"/>
-            <a:ext cx="2651760" cy="1234440"/>
+          <p:cNvPr id="12" name="Shape 9"/>
+          <p:cNvSpPr/>
+          <p:nvPr/>
+        </p:nvSpPr>
+        <p:spPr>
+          <a:xfrm>
+            <a:off x="9784080" y="1463040"/>
+            <a:ext cx="2011680" cy="1234440"/>
           </a:xfrm>
           <a:prstGeom prst="roundRect">
             <a:avLst>
@@ -10034,14 +8247,14 @@
       </p:sp>
       <p:sp>
         <p:nvSpPr>
-          <p:cNvPr id="15" name="Text 11"/>
-          <p:cNvSpPr/>
-          <p:nvPr/>
-        </p:nvSpPr>
-        <p:spPr>
-          <a:xfrm>
-            <a:off x="3337560" y="4864608"/>
-            <a:ext cx="2651760" cy="640080"/>
+          <p:cNvPr id="13" name="Text 10"/>
+          <p:cNvSpPr/>
+          <p:nvPr/>
+        </p:nvSpPr>
+        <p:spPr>
+          <a:xfrm>
+            <a:off x="9784080" y="1572768"/>
+            <a:ext cx="2011680" cy="640080"/>
           </a:xfrm>
           <a:prstGeom prst="rect">
             <a:avLst/>
@@ -10065,7 +8278,7 @@
                 <a:ea typeface="Calibri" pitchFamily="34" charset="-122"/>
                 <a:cs typeface="Calibri" pitchFamily="34" charset="-120"/>
               </a:rPr>
-              <a:t>12270 → 342</a:t>
+              <a:t>114</a:t>
             </a:r>
             <a:endParaRPr lang="en-US" sz="3000" dirty="0"/>
           </a:p>
@@ -10073,14 +8286,14 @@
       </p:sp>
       <p:sp>
         <p:nvSpPr>
-          <p:cNvPr id="16" name="Text 12"/>
-          <p:cNvSpPr/>
-          <p:nvPr/>
-        </p:nvSpPr>
-        <p:spPr>
-          <a:xfrm>
-            <a:off x="3429000" y="5486400"/>
-            <a:ext cx="2468880" cy="457200"/>
+          <p:cNvPr id="14" name="Text 11"/>
+          <p:cNvSpPr/>
+          <p:nvPr/>
+        </p:nvSpPr>
+        <p:spPr>
+          <a:xfrm>
+            <a:off x="9875520" y="2194560"/>
+            <a:ext cx="1828800" cy="457200"/>
           </a:xfrm>
           <a:prstGeom prst="rect">
             <a:avLst/>
@@ -10104,7 +8317,7 @@
                 <a:ea typeface="Calibri" pitchFamily="34" charset="-122"/>
                 <a:cs typeface="Calibri" pitchFamily="34" charset="-120"/>
               </a:rPr>
-              <a:t>shots to hit optimum (95%)</a:t>
+              <a:t>depth, p = 2</a:t>
             </a:r>
             <a:endParaRPr lang="en-US" sz="1100" dirty="0"/>
           </a:p>
@@ -10112,14 +8325,224 @@
       </p:sp>
       <p:sp>
         <p:nvSpPr>
-          <p:cNvPr id="17" name="Text 13"/>
-          <p:cNvSpPr/>
-          <p:nvPr/>
-        </p:nvSpPr>
-        <p:spPr>
-          <a:xfrm>
-            <a:off x="6355080" y="4754880"/>
-            <a:ext cx="5440680" cy="1280160"/>
+          <p:cNvPr id="15" name="Shape 12"/>
+          <p:cNvSpPr/>
+          <p:nvPr/>
+        </p:nvSpPr>
+        <p:spPr>
+          <a:xfrm>
+            <a:off x="7589520" y="2880360"/>
+            <a:ext cx="2011680" cy="1234440"/>
+          </a:xfrm>
+          <a:prstGeom prst="roundRect">
+            <a:avLst>
+              <a:gd name="adj" fmla="val 5926"/>
+            </a:avLst>
+          </a:prstGeom>
+          <a:solidFill>
+            <a:srgbClr val="141B33"/>
+          </a:solidFill>
+          <a:ln w="12700">
+            <a:solidFill>
+              <a:srgbClr val="141B33"/>
+            </a:solidFill>
+            <a:prstDash val="solid"/>
+          </a:ln>
+        </p:spPr>
+      </p:sp>
+      <p:sp>
+        <p:nvSpPr>
+          <p:cNvPr id="16" name="Text 13"/>
+          <p:cNvSpPr/>
+          <p:nvPr/>
+        </p:nvSpPr>
+        <p:spPr>
+          <a:xfrm>
+            <a:off x="7589520" y="2990088"/>
+            <a:ext cx="2011680" cy="640080"/>
+          </a:xfrm>
+          <a:prstGeom prst="rect">
+            <a:avLst/>
+          </a:prstGeom>
+          <a:noFill/>
+          <a:ln/>
+        </p:spPr>
+        <p:txBody>
+          <a:bodyPr wrap="square" lIns="0" tIns="0" rIns="0" bIns="0" rtlCol="0" anchor="ctr"/>
+          <a:lstStyle/>
+          <a:p>
+            <a:pPr algn="ctr" indent="0" marL="0">
+              <a:buNone/>
+            </a:pPr>
+            <a:r>
+              <a:rPr lang="en-US" sz="3000" b="1" dirty="0">
+                <a:solidFill>
+                  <a:srgbClr val="FFB454"/>
+                </a:solidFill>
+                <a:latin typeface="Calibri" pitchFamily="34" charset="0"/>
+                <a:ea typeface="Calibri" pitchFamily="34" charset="-122"/>
+                <a:cs typeface="Calibri" pitchFamily="34" charset="-120"/>
+              </a:rPr>
+              <a:t>92 CX</a:t>
+            </a:r>
+            <a:endParaRPr lang="en-US" sz="3000" dirty="0"/>
+          </a:p>
+        </p:txBody>
+      </p:sp>
+      <p:sp>
+        <p:nvSpPr>
+          <p:cNvPr id="17" name="Text 14"/>
+          <p:cNvSpPr/>
+          <p:nvPr/>
+        </p:nvSpPr>
+        <p:spPr>
+          <a:xfrm>
+            <a:off x="7680960" y="3611880"/>
+            <a:ext cx="1828800" cy="457200"/>
+          </a:xfrm>
+          <a:prstGeom prst="rect">
+            <a:avLst/>
+          </a:prstGeom>
+          <a:noFill/>
+          <a:ln/>
+        </p:spPr>
+        <p:txBody>
+          <a:bodyPr wrap="square" lIns="0" tIns="0" rIns="0" bIns="0" rtlCol="0" anchor="ctr"/>
+          <a:lstStyle/>
+          <a:p>
+            <a:pPr algn="ctr" indent="0" marL="0">
+              <a:buNone/>
+            </a:pPr>
+            <a:r>
+              <a:rPr lang="en-US" sz="1100" dirty="0">
+                <a:solidFill>
+                  <a:srgbClr val="A9B4D0"/>
+                </a:solidFill>
+                <a:latin typeface="Calibri" pitchFamily="34" charset="0"/>
+                <a:ea typeface="Calibri" pitchFamily="34" charset="-122"/>
+                <a:cs typeface="Calibri" pitchFamily="34" charset="-120"/>
+              </a:rPr>
+              <a:t>+ 72 RZ + 12 H + 12 RX</a:t>
+            </a:r>
+            <a:endParaRPr lang="en-US" sz="1100" dirty="0"/>
+          </a:p>
+        </p:txBody>
+      </p:sp>
+      <p:sp>
+        <p:nvSpPr>
+          <p:cNvPr id="18" name="Shape 15"/>
+          <p:cNvSpPr/>
+          <p:nvPr/>
+        </p:nvSpPr>
+        <p:spPr>
+          <a:xfrm>
+            <a:off x="9784080" y="2880360"/>
+            <a:ext cx="2011680" cy="1234440"/>
+          </a:xfrm>
+          <a:prstGeom prst="roundRect">
+            <a:avLst>
+              <a:gd name="adj" fmla="val 5926"/>
+            </a:avLst>
+          </a:prstGeom>
+          <a:solidFill>
+            <a:srgbClr val="141B33"/>
+          </a:solidFill>
+          <a:ln w="12700">
+            <a:solidFill>
+              <a:srgbClr val="141B33"/>
+            </a:solidFill>
+            <a:prstDash val="solid"/>
+          </a:ln>
+        </p:spPr>
+      </p:sp>
+      <p:sp>
+        <p:nvSpPr>
+          <p:cNvPr id="19" name="Text 16"/>
+          <p:cNvSpPr/>
+          <p:nvPr/>
+        </p:nvSpPr>
+        <p:spPr>
+          <a:xfrm>
+            <a:off x="9784080" y="2990088"/>
+            <a:ext cx="2011680" cy="640080"/>
+          </a:xfrm>
+          <a:prstGeom prst="rect">
+            <a:avLst/>
+          </a:prstGeom>
+          <a:noFill/>
+          <a:ln/>
+        </p:spPr>
+        <p:txBody>
+          <a:bodyPr wrap="square" lIns="0" tIns="0" rIns="0" bIns="0" rtlCol="0" anchor="ctr"/>
+          <a:lstStyle/>
+          <a:p>
+            <a:pPr algn="ctr" indent="0" marL="0">
+              <a:buNone/>
+            </a:pPr>
+            <a:r>
+              <a:rPr lang="en-US" sz="3000" b="1" dirty="0">
+                <a:solidFill>
+                  <a:srgbClr val="FFB454"/>
+                </a:solidFill>
+                <a:latin typeface="Calibri" pitchFamily="34" charset="0"/>
+                <a:ea typeface="Calibri" pitchFamily="34" charset="-122"/>
+                <a:cs typeface="Calibri" pitchFamily="34" charset="-120"/>
+              </a:rPr>
+              <a:t>184 CX</a:t>
+            </a:r>
+            <a:endParaRPr lang="en-US" sz="3000" dirty="0"/>
+          </a:p>
+        </p:txBody>
+      </p:sp>
+      <p:sp>
+        <p:nvSpPr>
+          <p:cNvPr id="20" name="Text 17"/>
+          <p:cNvSpPr/>
+          <p:nvPr/>
+        </p:nvSpPr>
+        <p:spPr>
+          <a:xfrm>
+            <a:off x="9875520" y="3611880"/>
+            <a:ext cx="1828800" cy="457200"/>
+          </a:xfrm>
+          <a:prstGeom prst="rect">
+            <a:avLst/>
+          </a:prstGeom>
+          <a:noFill/>
+          <a:ln/>
+        </p:spPr>
+        <p:txBody>
+          <a:bodyPr wrap="square" lIns="0" tIns="0" rIns="0" bIns="0" rtlCol="0" anchor="ctr"/>
+          <a:lstStyle/>
+          <a:p>
+            <a:pPr algn="ctr" indent="0" marL="0">
+              <a:buNone/>
+            </a:pPr>
+            <a:r>
+              <a:rPr lang="en-US" sz="1100" dirty="0">
+                <a:solidFill>
+                  <a:srgbClr val="A9B4D0"/>
+                </a:solidFill>
+                <a:latin typeface="Calibri" pitchFamily="34" charset="0"/>
+                <a:ea typeface="Calibri" pitchFamily="34" charset="-122"/>
+                <a:cs typeface="Calibri" pitchFamily="34" charset="-120"/>
+              </a:rPr>
+              <a:t>+ 144 RZ + 12 H + 24 RX</a:t>
+            </a:r>
+            <a:endParaRPr lang="en-US" sz="1100" dirty="0"/>
+          </a:p>
+        </p:txBody>
+      </p:sp>
+      <p:sp>
+        <p:nvSpPr>
+          <p:cNvPr id="21" name="Text 18"/>
+          <p:cNvSpPr/>
+          <p:nvPr/>
+        </p:nvSpPr>
+        <p:spPr>
+          <a:xfrm>
+            <a:off x="7589520" y="4297680"/>
+            <a:ext cx="4206240" cy="1737360"/>
           </a:xfrm>
           <a:prstGeom prst="rect">
             <a:avLst/>
@@ -10139,7 +8562,7 @@
               <a:buChar char="▸"/>
             </a:pPr>
             <a:r>
-              <a:rPr lang="en-US" sz="1300" dirty="0">
+              <a:rPr lang="en-US" sz="1250" dirty="0">
                 <a:solidFill>
                   <a:srgbClr val="F5F7FF"/>
                 </a:solidFill>
@@ -10147,9 +8570,9 @@
                 <a:ea typeface="Calibri" pitchFamily="34" charset="-122"/>
                 <a:cs typeface="Calibri" pitchFamily="34" charset="-120"/>
               </a:rPr>
-              <a:t>Half of all samples at p = 1 and two-thirds at p = 2 are already better than the baseline</a:t>
-            </a:r>
-            <a:endParaRPr lang="en-US" sz="1300" dirty="0"/>
+              <a:t>Written in Qmod: QStruct of QArray[QNum[2], 6], phase(cost, γ), RX mixer</a:t>
+            </a:r>
+            <a:endParaRPr lang="en-US" sz="1250" dirty="0"/>
           </a:p>
           <a:p>
             <a:pPr marL="342900" indent="-342900">
@@ -10160,7 +8583,7 @@
               <a:buChar char="▸"/>
             </a:pPr>
             <a:r>
-              <a:rPr lang="en-US" sz="1300" dirty="0">
+              <a:rPr lang="en-US" sz="1250" dirty="0">
                 <a:solidFill>
                   <a:srgbClr val="F5F7FF"/>
                 </a:solidFill>
@@ -10168,9 +8591,30 @@
                 <a:ea typeface="Calibri" pitchFamily="34" charset="-122"/>
                 <a:cs typeface="Calibri" pitchFamily="34" charset="-120"/>
               </a:rPr>
-              <a:t>Only 1–2 QAOA layers; more layers or larger p continue to sharpen the distribution</a:t>
-            </a:r>
-            <a:endParaRPr lang="en-US" sz="1300" dirty="0"/>
+              <a:t>Exported as OpenQASM 3 (group/classiq/results/*.qasm) + hand-written QASM 2 layer</a:t>
+            </a:r>
+            <a:endParaRPr lang="en-US" sz="1250" dirty="0"/>
+          </a:p>
+          <a:p>
+            <a:pPr marL="342900" indent="-342900">
+              <a:spcAft>
+                <a:spcPts val="600"/>
+              </a:spcAft>
+              <a:buSzPct val="100000"/>
+              <a:buChar char="▸"/>
+            </a:pPr>
+            <a:r>
+              <a:rPr lang="en-US" sz="1250" dirty="0">
+                <a:solidFill>
+                  <a:srgbClr val="F5F7FF"/>
+                </a:solidFill>
+                <a:latin typeface="Calibri" pitchFamily="34" charset="0"/>
+                <a:ea typeface="Calibri" pitchFamily="34" charset="-122"/>
+                <a:cs typeface="Calibri" pitchFamily="34" charset="-120"/>
+              </a:rPr>
+              <a:t>Same circuit re-simulated in Qiskit statevector: ⟨C⟩ = 1.9985 — identical to Wolfram</a:t>
+            </a:r>
+            <a:endParaRPr lang="en-US" sz="1250" dirty="0"/>
           </a:p>
         </p:txBody>
       </p:sp>
@@ -10325,7 +8769,7 @@
                 <a:ea typeface="Calibri" pitchFamily="34" charset="-122"/>
                 <a:cs typeface="Calibri" pitchFamily="34" charset="-120"/>
               </a:rPr>
-              <a:t>SLIDE 7 / 13   |   CLASSIQ</a:t>
+              <a:t>SLIDE 7 / 13   |   SIMULATION</a:t>
             </a:r>
             <a:endParaRPr lang="en-US" sz="1100" dirty="0"/>
           </a:p>
@@ -10364,7 +8808,7 @@
                 <a:ea typeface="Calibri" pitchFamily="34" charset="-122"/>
                 <a:cs typeface="Calibri" pitchFamily="34" charset="-120"/>
               </a:rPr>
-              <a:t>Same numbers from the Classiq simulator</a:t>
+              <a:t>Wolfram exact simulation: where the good angles are</a:t>
             </a:r>
             <a:endParaRPr lang="en-US" sz="3200" dirty="0"/>
           </a:p>
@@ -10411,7 +8855,7 @@
       </p:sp>
       <p:pic>
         <p:nvPicPr>
-          <p:cNvPr id="8" name="Image 0" descr="C:\Projects\Hackton\group\charts\wolfram_vs_classiq.png">    </p:cNvPr>
+          <p:cNvPr id="8" name="Image 0" descr="C:\Projects\Hackton\group\wolfram\img\landscape.png">    </p:cNvPr>
           <p:cNvPicPr>
             <a:picLocks noChangeAspect="1"/>
           </p:cNvPicPr>
@@ -10426,7 +8870,7 @@
         <p:spPr>
           <a:xfrm>
             <a:off x="548640" y="1417320"/>
-            <a:ext cx="7315200" cy="2990088"/>
+            <a:ext cx="4846320" cy="4617720"/>
           </a:xfrm>
           <a:prstGeom prst="rect">
             <a:avLst/>
@@ -10435,14 +8879,53 @@
       </p:pic>
       <p:sp>
         <p:nvSpPr>
-          <p:cNvPr id="9" name="Shape 6"/>
-          <p:cNvSpPr/>
-          <p:nvPr/>
-        </p:nvSpPr>
-        <p:spPr>
-          <a:xfrm>
-            <a:off x="8138160" y="1463040"/>
-            <a:ext cx="3657600" cy="1234440"/>
+          <p:cNvPr id="9" name="Text 6"/>
+          <p:cNvSpPr/>
+          <p:nvPr/>
+        </p:nvSpPr>
+        <p:spPr>
+          <a:xfrm>
+            <a:off x="548640" y="6053328"/>
+            <a:ext cx="4846320" cy="320040"/>
+          </a:xfrm>
+          <a:prstGeom prst="rect">
+            <a:avLst/>
+          </a:prstGeom>
+          <a:noFill/>
+          <a:ln/>
+        </p:spPr>
+        <p:txBody>
+          <a:bodyPr wrap="square" lIns="0" tIns="0" rIns="0" bIns="0" rtlCol="0" anchor="ctr"/>
+          <a:lstStyle/>
+          <a:p>
+            <a:pPr indent="0" marL="0">
+              <a:buNone/>
+            </a:pPr>
+            <a:r>
+              <a:rPr lang="en-US" sz="1050" i="1" dirty="0">
+                <a:solidFill>
+                  <a:srgbClr val="A9B4D0"/>
+                </a:solidFill>
+                <a:latin typeface="Calibri" pitchFamily="34" charset="0"/>
+                <a:ea typeface="Calibri" pitchFamily="34" charset="-122"/>
+                <a:cs typeface="Calibri" pitchFamily="34" charset="-120"/>
+              </a:rPr>
+              <a:t>⟨C⟩(γ, β) for p = 1 over all 4096 amplitudes (statevector, no shot noise).</a:t>
+            </a:r>
+            <a:endParaRPr lang="en-US" sz="1050" dirty="0"/>
+          </a:p>
+        </p:txBody>
+      </p:sp>
+      <p:sp>
+        <p:nvSpPr>
+          <p:cNvPr id="10" name="Shape 7"/>
+          <p:cNvSpPr/>
+          <p:nvPr/>
+        </p:nvSpPr>
+        <p:spPr>
+          <a:xfrm>
+            <a:off x="5760720" y="1463040"/>
+            <a:ext cx="2926080" cy="1234440"/>
           </a:xfrm>
           <a:prstGeom prst="roundRect">
             <a:avLst>
@@ -10462,14 +8945,14 @@
       </p:sp>
       <p:sp>
         <p:nvSpPr>
-          <p:cNvPr id="10" name="Text 7"/>
-          <p:cNvSpPr/>
-          <p:nvPr/>
-        </p:nvSpPr>
-        <p:spPr>
-          <a:xfrm>
-            <a:off x="8138160" y="1572768"/>
-            <a:ext cx="3657600" cy="640080"/>
+          <p:cNvPr id="11" name="Text 8"/>
+          <p:cNvSpPr/>
+          <p:nvPr/>
+        </p:nvSpPr>
+        <p:spPr>
+          <a:xfrm>
+            <a:off x="5760720" y="1572768"/>
+            <a:ext cx="2926080" cy="640080"/>
           </a:xfrm>
           <a:prstGeom prst="rect">
             <a:avLst/>
@@ -10493,7 +8976,7 @@
                 <a:ea typeface="Calibri" pitchFamily="34" charset="-122"/>
                 <a:cs typeface="Calibri" pitchFamily="34" charset="-120"/>
               </a:rPr>
-              <a:t>2.0203 vs 1.9985</a:t>
+              <a:t>(0.0654, 1.1293)</a:t>
             </a:r>
             <a:endParaRPr lang="en-US" sz="3000" dirty="0"/>
           </a:p>
@@ -10501,14 +8984,14 @@
       </p:sp>
       <p:sp>
         <p:nvSpPr>
-          <p:cNvPr id="11" name="Text 8"/>
-          <p:cNvSpPr/>
-          <p:nvPr/>
-        </p:nvSpPr>
-        <p:spPr>
-          <a:xfrm>
-            <a:off x="8229600" y="2194560"/>
-            <a:ext cx="3474720" cy="457200"/>
+          <p:cNvPr id="12" name="Text 9"/>
+          <p:cNvSpPr/>
+          <p:nvPr/>
+        </p:nvSpPr>
+        <p:spPr>
+          <a:xfrm>
+            <a:off x="5852160" y="2194560"/>
+            <a:ext cx="2743200" cy="457200"/>
           </a:xfrm>
           <a:prstGeom prst="rect">
             <a:avLst/>
@@ -10532,7 +9015,7 @@
                 <a:ea typeface="Calibri" pitchFamily="34" charset="-122"/>
                 <a:cs typeface="Calibri" pitchFamily="34" charset="-120"/>
               </a:rPr>
-              <a:t>⟨C⟩ p = 1, 4096 shots vs exact</a:t>
+              <a:t>optimal (γ, β), p = 1</a:t>
             </a:r>
             <a:endParaRPr lang="en-US" sz="1100" dirty="0"/>
           </a:p>
@@ -10540,14 +9023,14 @@
       </p:sp>
       <p:sp>
         <p:nvSpPr>
-          <p:cNvPr id="12" name="Shape 9"/>
-          <p:cNvSpPr/>
-          <p:nvPr/>
-        </p:nvSpPr>
-        <p:spPr>
-          <a:xfrm>
-            <a:off x="8138160" y="2880360"/>
-            <a:ext cx="3657600" cy="1234440"/>
+          <p:cNvPr id="13" name="Shape 10"/>
+          <p:cNvSpPr/>
+          <p:nvPr/>
+        </p:nvSpPr>
+        <p:spPr>
+          <a:xfrm>
+            <a:off x="8869680" y="1463040"/>
+            <a:ext cx="2926080" cy="1234440"/>
           </a:xfrm>
           <a:prstGeom prst="roundRect">
             <a:avLst>
@@ -10567,14 +9050,14 @@
       </p:sp>
       <p:sp>
         <p:nvSpPr>
-          <p:cNvPr id="13" name="Text 10"/>
-          <p:cNvSpPr/>
-          <p:nvPr/>
-        </p:nvSpPr>
-        <p:spPr>
-          <a:xfrm>
-            <a:off x="8138160" y="2990088"/>
-            <a:ext cx="3657600" cy="640080"/>
+          <p:cNvPr id="14" name="Text 11"/>
+          <p:cNvSpPr/>
+          <p:nvPr/>
+        </p:nvSpPr>
+        <p:spPr>
+          <a:xfrm>
+            <a:off x="8869680" y="1572768"/>
+            <a:ext cx="2926080" cy="640080"/>
           </a:xfrm>
           <a:prstGeom prst="rect">
             <a:avLst/>
@@ -10598,7 +9081,7 @@
                 <a:ea typeface="Calibri" pitchFamily="34" charset="-122"/>
                 <a:cs typeface="Calibri" pitchFamily="34" charset="-120"/>
               </a:rPr>
-              <a:t>0.529 vs 0.530</a:t>
+              <a:t>⟨C⟩ = 1.9985</a:t>
             </a:r>
             <a:endParaRPr lang="en-US" sz="3000" dirty="0"/>
           </a:p>
@@ -10606,14 +9089,14 @@
       </p:sp>
       <p:sp>
         <p:nvSpPr>
-          <p:cNvPr id="14" name="Text 11"/>
-          <p:cNvSpPr/>
-          <p:nvPr/>
-        </p:nvSpPr>
-        <p:spPr>
-          <a:xfrm>
-            <a:off x="8229600" y="3611880"/>
-            <a:ext cx="3474720" cy="457200"/>
+          <p:cNvPr id="15" name="Text 12"/>
+          <p:cNvSpPr/>
+          <p:nvPr/>
+        </p:nvSpPr>
+        <p:spPr>
+          <a:xfrm>
+            <a:off x="8961120" y="2194560"/>
+            <a:ext cx="2743200" cy="457200"/>
           </a:xfrm>
           <a:prstGeom prst="rect">
             <a:avLst/>
@@ -10637,7 +9120,7 @@
                 <a:ea typeface="Calibri" pitchFamily="34" charset="-122"/>
                 <a:cs typeface="Calibri" pitchFamily="34" charset="-120"/>
               </a:rPr>
-              <a:t>P(cost &lt; 0), p = 1</a:t>
+              <a:t>p = 1 (random: 35.5)</a:t>
             </a:r>
             <a:endParaRPr lang="en-US" sz="1100" dirty="0"/>
           </a:p>
@@ -10645,14 +9128,224 @@
       </p:sp>
       <p:sp>
         <p:nvSpPr>
-          <p:cNvPr id="15" name="Text 12"/>
-          <p:cNvSpPr/>
-          <p:nvPr/>
-        </p:nvSpPr>
-        <p:spPr>
-          <a:xfrm>
-            <a:off x="548640" y="4617720"/>
-            <a:ext cx="11247120" cy="1554480"/>
+          <p:cNvPr id="16" name="Shape 13"/>
+          <p:cNvSpPr/>
+          <p:nvPr/>
+        </p:nvSpPr>
+        <p:spPr>
+          <a:xfrm>
+            <a:off x="5760720" y="2880360"/>
+            <a:ext cx="2926080" cy="1234440"/>
+          </a:xfrm>
+          <a:prstGeom prst="roundRect">
+            <a:avLst>
+              <a:gd name="adj" fmla="val 5926"/>
+            </a:avLst>
+          </a:prstGeom>
+          <a:solidFill>
+            <a:srgbClr val="141B33"/>
+          </a:solidFill>
+          <a:ln w="12700">
+            <a:solidFill>
+              <a:srgbClr val="141B33"/>
+            </a:solidFill>
+            <a:prstDash val="solid"/>
+          </a:ln>
+        </p:spPr>
+      </p:sp>
+      <p:sp>
+        <p:nvSpPr>
+          <p:cNvPr id="17" name="Text 14"/>
+          <p:cNvSpPr/>
+          <p:nvPr/>
+        </p:nvSpPr>
+        <p:spPr>
+          <a:xfrm>
+            <a:off x="5760720" y="2990088"/>
+            <a:ext cx="2926080" cy="640080"/>
+          </a:xfrm>
+          <a:prstGeom prst="rect">
+            <a:avLst/>
+          </a:prstGeom>
+          <a:noFill/>
+          <a:ln/>
+        </p:spPr>
+        <p:txBody>
+          <a:bodyPr wrap="square" lIns="0" tIns="0" rIns="0" bIns="0" rtlCol="0" anchor="ctr"/>
+          <a:lstStyle/>
+          <a:p>
+            <a:pPr algn="ctr" indent="0" marL="0">
+              <a:buNone/>
+            </a:pPr>
+            <a:r>
+              <a:rPr lang="en-US" sz="3000" b="1" dirty="0">
+                <a:solidFill>
+                  <a:srgbClr val="FFB454"/>
+                </a:solidFill>
+                <a:latin typeface="Calibri" pitchFamily="34" charset="0"/>
+                <a:ea typeface="Calibri" pitchFamily="34" charset="-122"/>
+                <a:cs typeface="Calibri" pitchFamily="34" charset="-120"/>
+              </a:rPr>
+              <a:t>⟨C⟩ = −0.3825</a:t>
+            </a:r>
+            <a:endParaRPr lang="en-US" sz="3000" dirty="0"/>
+          </a:p>
+        </p:txBody>
+      </p:sp>
+      <p:sp>
+        <p:nvSpPr>
+          <p:cNvPr id="18" name="Text 15"/>
+          <p:cNvSpPr/>
+          <p:nvPr/>
+        </p:nvSpPr>
+        <p:spPr>
+          <a:xfrm>
+            <a:off x="5852160" y="3611880"/>
+            <a:ext cx="2743200" cy="457200"/>
+          </a:xfrm>
+          <a:prstGeom prst="rect">
+            <a:avLst/>
+          </a:prstGeom>
+          <a:noFill/>
+          <a:ln/>
+        </p:spPr>
+        <p:txBody>
+          <a:bodyPr wrap="square" lIns="0" tIns="0" rIns="0" bIns="0" rtlCol="0" anchor="ctr"/>
+          <a:lstStyle/>
+          <a:p>
+            <a:pPr algn="ctr" indent="0" marL="0">
+              <a:buNone/>
+            </a:pPr>
+            <a:r>
+              <a:rPr lang="en-US" sz="1100" dirty="0">
+                <a:solidFill>
+                  <a:srgbClr val="A9B4D0"/>
+                </a:solidFill>
+                <a:latin typeface="Calibri" pitchFamily="34" charset="0"/>
+                <a:ea typeface="Calibri" pitchFamily="34" charset="-122"/>
+                <a:cs typeface="Calibri" pitchFamily="34" charset="-120"/>
+              </a:rPr>
+              <a:t>p = 2, 4 angles</a:t>
+            </a:r>
+            <a:endParaRPr lang="en-US" sz="1100" dirty="0"/>
+          </a:p>
+        </p:txBody>
+      </p:sp>
+      <p:sp>
+        <p:nvSpPr>
+          <p:cNvPr id="19" name="Shape 16"/>
+          <p:cNvSpPr/>
+          <p:nvPr/>
+        </p:nvSpPr>
+        <p:spPr>
+          <a:xfrm>
+            <a:off x="8869680" y="2880360"/>
+            <a:ext cx="2926080" cy="1234440"/>
+          </a:xfrm>
+          <a:prstGeom prst="roundRect">
+            <a:avLst>
+              <a:gd name="adj" fmla="val 5926"/>
+            </a:avLst>
+          </a:prstGeom>
+          <a:solidFill>
+            <a:srgbClr val="141B33"/>
+          </a:solidFill>
+          <a:ln w="12700">
+            <a:solidFill>
+              <a:srgbClr val="141B33"/>
+            </a:solidFill>
+            <a:prstDash val="solid"/>
+          </a:ln>
+        </p:spPr>
+      </p:sp>
+      <p:sp>
+        <p:nvSpPr>
+          <p:cNvPr id="20" name="Text 17"/>
+          <p:cNvSpPr/>
+          <p:nvPr/>
+        </p:nvSpPr>
+        <p:spPr>
+          <a:xfrm>
+            <a:off x="8869680" y="2990088"/>
+            <a:ext cx="2926080" cy="640080"/>
+          </a:xfrm>
+          <a:prstGeom prst="rect">
+            <a:avLst/>
+          </a:prstGeom>
+          <a:noFill/>
+          <a:ln/>
+        </p:spPr>
+        <p:txBody>
+          <a:bodyPr wrap="square" lIns="0" tIns="0" rIns="0" bIns="0" rtlCol="0" anchor="ctr"/>
+          <a:lstStyle/>
+          <a:p>
+            <a:pPr algn="ctr" indent="0" marL="0">
+              <a:buNone/>
+            </a:pPr>
+            <a:r>
+              <a:rPr lang="en-US" sz="3000" b="1" dirty="0">
+                <a:solidFill>
+                  <a:srgbClr val="FFB454"/>
+                </a:solidFill>
+                <a:latin typeface="Calibri" pitchFamily="34" charset="0"/>
+                <a:ea typeface="Calibri" pitchFamily="34" charset="-122"/>
+                <a:cs typeface="Calibri" pitchFamily="34" charset="-120"/>
+              </a:rPr>
+              <a:t>−2.844</a:t>
+            </a:r>
+            <a:endParaRPr lang="en-US" sz="3000" dirty="0"/>
+          </a:p>
+        </p:txBody>
+      </p:sp>
+      <p:sp>
+        <p:nvSpPr>
+          <p:cNvPr id="21" name="Text 18"/>
+          <p:cNvSpPr/>
+          <p:nvPr/>
+        </p:nvSpPr>
+        <p:spPr>
+          <a:xfrm>
+            <a:off x="8961120" y="3611880"/>
+            <a:ext cx="2743200" cy="457200"/>
+          </a:xfrm>
+          <a:prstGeom prst="rect">
+            <a:avLst/>
+          </a:prstGeom>
+          <a:noFill/>
+          <a:ln/>
+        </p:spPr>
+        <p:txBody>
+          <a:bodyPr wrap="square" lIns="0" tIns="0" rIns="0" bIns="0" rtlCol="0" anchor="ctr"/>
+          <a:lstStyle/>
+          <a:p>
+            <a:pPr algn="ctr" indent="0" marL="0">
+              <a:buNone/>
+            </a:pPr>
+            <a:r>
+              <a:rPr lang="en-US" sz="1100" dirty="0">
+                <a:solidFill>
+                  <a:srgbClr val="A9B4D0"/>
+                </a:solidFill>
+                <a:latin typeface="Calibri" pitchFamily="34" charset="0"/>
+                <a:ea typeface="Calibri" pitchFamily="34" charset="-122"/>
+                <a:cs typeface="Calibri" pitchFamily="34" charset="-120"/>
+              </a:rPr>
+              <a:t>ground state = classical optimum</a:t>
+            </a:r>
+            <a:endParaRPr lang="en-US" sz="1100" dirty="0"/>
+          </a:p>
+        </p:txBody>
+      </p:sp>
+      <p:sp>
+        <p:nvSpPr>
+          <p:cNvPr id="22" name="Text 19"/>
+          <p:cNvSpPr/>
+          <p:nvPr/>
+        </p:nvSpPr>
+        <p:spPr>
+          <a:xfrm>
+            <a:off x="5760720" y="4297680"/>
+            <a:ext cx="6035040" cy="1828800"/>
           </a:xfrm>
           <a:prstGeom prst="rect">
             <a:avLst/>
@@ -10680,7 +9373,7 @@
                 <a:ea typeface="Calibri" pitchFamily="34" charset="-122"/>
                 <a:cs typeface="Calibri" pitchFamily="34" charset="-120"/>
               </a:rPr>
-              <a:t>Best sampled bitstring in every run = the classical optimum (0,3,0,0,0,0)</a:t>
+              <a:t>Notebook + PDF + CDF + Markdown in group/wolfram/ (14 pages, 13 figures)</a:t>
             </a:r>
             <a:endParaRPr lang="en-US" sz="1300" dirty="0"/>
           </a:p>
@@ -10701,7 +9394,7 @@
                 <a:ea typeface="Calibri" pitchFamily="34" charset="-122"/>
                 <a:cs typeface="Calibri" pitchFamily="34" charset="-120"/>
               </a:rPr>
-              <a:t>p = 2: ⟨C⟩ = −0.466 sampled vs −0.383 exact, P(cost&lt;0) = 0.668 vs 0.67</a:t>
+              <a:t>Landscape is flat almost everywhere — a bad start sits on a plateau at ⟨C⟩ ≈ 35</a:t>
             </a:r>
             <a:endParaRPr lang="en-US" sz="1300" dirty="0"/>
           </a:p>
@@ -10722,7 +9415,7 @@
                 <a:ea typeface="Calibri" pitchFamily="34" charset="-122"/>
                 <a:cs typeface="Calibri" pitchFamily="34" charset="-120"/>
               </a:rPr>
-              <a:t>Results, QASM and per-iteration traces saved in group/classiq/results/</a:t>
+              <a:t>Angles found here are the warm start we hand to Classiq</a:t>
             </a:r>
             <a:endParaRPr lang="en-US" sz="1300" dirty="0"/>
           </a:p>
@@ -10743,7 +9436,7 @@
                 <a:ea typeface="Calibri" pitchFamily="34" charset="-122"/>
                 <a:cs typeface="Calibri" pitchFamily="34" charset="-120"/>
               </a:rPr>
-              <a:t>Demo video: group/video/qaoa_distribution.mp4 (distribution sharpening as angles ramp)</a:t>
+              <a:t>Also in the notebook: VQE (RY+CZ), Grover on a 2-antenna slice, 10-level scaling</a:t>
             </a:r>
             <a:endParaRPr lang="en-US" sz="1300" dirty="0"/>
           </a:p>
@@ -10900,7 +9593,7 @@
                 <a:ea typeface="Calibri" pitchFamily="34" charset="-122"/>
                 <a:cs typeface="Calibri" pitchFamily="34" charset="-120"/>
               </a:rPr>
-              <a:t>SLIDE 8 / 13   |   VIDEO</a:t>
+              <a:t>SLIDE 8 / 13   |   RESULT</a:t>
             </a:r>
             <a:endParaRPr lang="en-US" sz="1100" dirty="0"/>
           </a:p>
@@ -10939,7 +9632,7 @@
                 <a:ea typeface="Calibri" pitchFamily="34" charset="-122"/>
                 <a:cs typeface="Calibri" pitchFamily="34" charset="-120"/>
               </a:rPr>
-              <a:t>Demo: the QAOA distribution sharpening</a:t>
+              <a:t>What the quantum sampler buys us, and Classiq reproduces it</a:t>
             </a:r>
             <a:endParaRPr lang="en-US" sz="3200" dirty="0"/>
           </a:p>
@@ -10986,23 +9679,14 @@
       </p:sp>
       <p:pic>
         <p:nvPicPr>
-          <p:cNvPr id="3" name="Media 0">
-            <a:hlinkClick r:id="" action="ppaction://media"/>
-          </p:cNvPr>
+          <p:cNvPr id="8" name="Image 0" descr="C:\Projects\Hackton\group\charts\quantum_gain.png">    </p:cNvPr>
           <p:cNvPicPr>
             <a:picLocks noChangeAspect="1"/>
           </p:cNvPicPr>
-          <p:nvPr>
-            <a:videoFile r:link="rId1"/>
-            <p:extLst>
-              <p:ext uri="{DAA4B4D4-6D71-4841-9C94-3DE7FCFB9230}">
-                <p14:media xmlns:p14="http://schemas.microsoft.com/office/powerpoint/2010/main" r:embed="rId2"/>
-              </p:ext>
-            </p:extLst>
-          </p:nvPr>
+          <p:nvPr/>
         </p:nvPicPr>
         <p:blipFill>
-          <a:blip r:embed="rId3"/>
+          <a:blip r:embed="rId1"/>
           <a:stretch>
             <a:fillRect/>
           </a:stretch>
@@ -11010,23 +9694,47 @@
         <p:spPr>
           <a:xfrm>
             <a:off x="548640" y="1417320"/>
-            <a:ext cx="7680960" cy="4572000"/>
+            <a:ext cx="5486400" cy="3090672"/>
           </a:xfrm>
           <a:prstGeom prst="rect">
             <a:avLst/>
           </a:prstGeom>
         </p:spPr>
       </p:pic>
-      <p:sp>
-        <p:nvSpPr>
-          <p:cNvPr id="9" name="Text 6"/>
-          <p:cNvSpPr/>
-          <p:nvPr/>
-        </p:nvSpPr>
-        <p:spPr>
-          <a:xfrm>
-            <a:off x="8412480" y="1463040"/>
-            <a:ext cx="3383280" cy="4389120"/>
+      <p:pic>
+        <p:nvPicPr>
+          <p:cNvPr id="9" name="Image 1" descr="C:\Projects\Hackton\group\charts\wolfram_vs_classiq.png">    </p:cNvPr>
+          <p:cNvPicPr>
+            <a:picLocks noChangeAspect="1"/>
+          </p:cNvPicPr>
+          <p:nvPr/>
+        </p:nvPicPr>
+        <p:blipFill>
+          <a:blip r:embed="rId2"/>
+          <a:stretch>
+            <a:fillRect/>
+          </a:stretch>
+        </p:blipFill>
+        <p:spPr>
+          <a:xfrm>
+            <a:off x="6309360" y="1417320"/>
+            <a:ext cx="5486400" cy="2240280"/>
+          </a:xfrm>
+          <a:prstGeom prst="rect">
+            <a:avLst/>
+          </a:prstGeom>
+        </p:spPr>
+      </p:pic>
+      <p:sp>
+        <p:nvSpPr>
+          <p:cNvPr id="10" name="Text 6"/>
+          <p:cNvSpPr/>
+          <p:nvPr/>
+        </p:nvSpPr>
+        <p:spPr>
+          <a:xfrm>
+            <a:off x="6309360" y="3749040"/>
+            <a:ext cx="5486400" cy="822960"/>
           </a:xfrm>
           <a:prstGeom prst="rect">
             <a:avLst/>
@@ -11046,7 +9754,7 @@
               <a:buChar char="▸"/>
             </a:pPr>
             <a:r>
-              <a:rPr lang="en-US" sz="1300" dirty="0">
+              <a:rPr lang="en-US" sz="1250" dirty="0">
                 <a:solidFill>
                   <a:srgbClr val="F5F7FF"/>
                 </a:solidFill>
@@ -11054,9 +9762,9 @@
                 <a:ea typeface="Calibri" pitchFamily="34" charset="-122"/>
                 <a:cs typeface="Calibri" pitchFamily="34" charset="-120"/>
               </a:rPr>
-              <a:t>120 frames, angles ramp from 0 to the p = 2 optimum</a:t>
-            </a:r>
-            <a:endParaRPr lang="en-US" sz="1300" dirty="0"/>
+              <a:t>Best sampled bitstring in every Classiq run = the classical optimum (0,3,0,0,0,0)</a:t>
+            </a:r>
+            <a:endParaRPr lang="en-US" sz="1250" dirty="0"/>
           </a:p>
           <a:p>
             <a:pPr marL="342900" indent="-342900">
@@ -11067,7 +9775,7 @@
               <a:buChar char="▸"/>
             </a:pPr>
             <a:r>
-              <a:rPr lang="en-US" sz="1300" dirty="0">
+              <a:rPr lang="en-US" sz="1250" dirty="0">
                 <a:solidFill>
                   <a:srgbClr val="F5F7FF"/>
                 </a:solidFill>
@@ -11075,72 +9783,429 @@
                 <a:ea typeface="Calibri" pitchFamily="34" charset="-122"/>
                 <a:cs typeface="Calibri" pitchFamily="34" charset="-120"/>
               </a:rPr>
-              <a:t>Scatter: probability of each of the 4096 plans vs its cost</a:t>
-            </a:r>
-            <a:endParaRPr lang="en-US" sz="1300" dirty="0"/>
-          </a:p>
-          <a:p>
-            <a:pPr marL="342900" indent="-342900">
-              <a:spcAft>
-                <a:spcPts val="600"/>
-              </a:spcAft>
-              <a:buSzPct val="100000"/>
-              <a:buChar char="▸"/>
-            </a:pPr>
-            <a:r>
-              <a:rPr lang="en-US" sz="1300" dirty="0">
-                <a:solidFill>
-                  <a:srgbClr val="F5F7FF"/>
-                </a:solidFill>
-                <a:latin typeface="Calibri" pitchFamily="34" charset="0"/>
-                <a:ea typeface="Calibri" pitchFamily="34" charset="-122"/>
-                <a:cs typeface="Calibri" pitchFamily="34" charset="-120"/>
-              </a:rPr>
-              <a:t>Bars: P(cost &lt; 0) climbing to 0.67</a:t>
-            </a:r>
-            <a:endParaRPr lang="en-US" sz="1300" dirty="0"/>
-          </a:p>
-          <a:p>
-            <a:pPr marL="342900" indent="-342900">
-              <a:spcAft>
-                <a:spcPts val="600"/>
-              </a:spcAft>
-              <a:buSzPct val="100000"/>
-              <a:buChar char="▸"/>
-            </a:pPr>
-            <a:r>
-              <a:rPr lang="en-US" sz="1300" dirty="0">
-                <a:solidFill>
-                  <a:srgbClr val="F5F7FF"/>
-                </a:solidFill>
-                <a:latin typeface="Calibri" pitchFamily="34" charset="0"/>
-                <a:ea typeface="Calibri" pitchFamily="34" charset="-122"/>
-                <a:cs typeface="Calibri" pitchFamily="34" charset="-120"/>
-              </a:rPr>
-              <a:t>Black line: classical optimum −2.844</a:t>
-            </a:r>
-            <a:endParaRPr lang="en-US" sz="1300" dirty="0"/>
-          </a:p>
-          <a:p>
-            <a:pPr marL="342900" indent="-342900">
-              <a:spcAft>
-                <a:spcPts val="600"/>
-              </a:spcAft>
-              <a:buSzPct val="100000"/>
-              <a:buChar char="▸"/>
-            </a:pPr>
-            <a:r>
-              <a:rPr lang="en-US" sz="1300" dirty="0">
-                <a:solidFill>
-                  <a:srgbClr val="F5F7FF"/>
-                </a:solidFill>
-                <a:latin typeface="Calibri" pitchFamily="34" charset="0"/>
-                <a:ea typeface="Calibri" pitchFamily="34" charset="-122"/>
-                <a:cs typeface="Calibri" pitchFamily="34" charset="-120"/>
-              </a:rPr>
-              <a:t>Second clip: group/video/classiq_convergence.mp4 — COBYLA on Classiq, iteration by iteration</a:t>
-            </a:r>
-            <a:endParaRPr lang="en-US" sz="1300" dirty="0"/>
+              <a:t>p = 2: ⟨C⟩ = −0.466 sampled vs −0.383 exact; 716 distinct plans in 4096 shots</a:t>
+            </a:r>
+            <a:endParaRPr lang="en-US" sz="1250" dirty="0"/>
+          </a:p>
+        </p:txBody>
+      </p:sp>
+      <p:sp>
+        <p:nvSpPr>
+          <p:cNvPr id="11" name="Shape 7"/>
+          <p:cNvSpPr/>
+          <p:nvPr/>
+        </p:nvSpPr>
+        <p:spPr>
+          <a:xfrm>
+            <a:off x="548640" y="4663440"/>
+            <a:ext cx="2697480" cy="1234440"/>
+          </a:xfrm>
+          <a:prstGeom prst="roundRect">
+            <a:avLst>
+              <a:gd name="adj" fmla="val 5926"/>
+            </a:avLst>
+          </a:prstGeom>
+          <a:solidFill>
+            <a:srgbClr val="141B33"/>
+          </a:solidFill>
+          <a:ln w="12700">
+            <a:solidFill>
+              <a:srgbClr val="141B33"/>
+            </a:solidFill>
+            <a:prstDash val="solid"/>
+          </a:ln>
+        </p:spPr>
+      </p:sp>
+      <p:sp>
+        <p:nvSpPr>
+          <p:cNvPr id="12" name="Text 8"/>
+          <p:cNvSpPr/>
+          <p:nvPr/>
+        </p:nvSpPr>
+        <p:spPr>
+          <a:xfrm>
+            <a:off x="548640" y="4773168"/>
+            <a:ext cx="2697480" cy="640080"/>
+          </a:xfrm>
+          <a:prstGeom prst="rect">
+            <a:avLst/>
+          </a:prstGeom>
+          <a:noFill/>
+          <a:ln/>
+        </p:spPr>
+        <p:txBody>
+          <a:bodyPr wrap="square" lIns="0" tIns="0" rIns="0" bIns="0" rtlCol="0" anchor="ctr"/>
+          <a:lstStyle/>
+          <a:p>
+            <a:pPr algn="ctr" indent="0" marL="0">
+              <a:buNone/>
+            </a:pPr>
+            <a:r>
+              <a:rPr lang="en-US" sz="3000" b="1" dirty="0">
+                <a:solidFill>
+                  <a:srgbClr val="2BD4C2"/>
+                </a:solidFill>
+                <a:latin typeface="Calibri" pitchFamily="34" charset="0"/>
+                <a:ea typeface="Calibri" pitchFamily="34" charset="-122"/>
+                <a:cs typeface="Calibri" pitchFamily="34" charset="-120"/>
+              </a:rPr>
+              <a:t>2.4% → 67%</a:t>
+            </a:r>
+            <a:endParaRPr lang="en-US" sz="3000" dirty="0"/>
+          </a:p>
+        </p:txBody>
+      </p:sp>
+      <p:sp>
+        <p:nvSpPr>
+          <p:cNvPr id="13" name="Text 9"/>
+          <p:cNvSpPr/>
+          <p:nvPr/>
+        </p:nvSpPr>
+        <p:spPr>
+          <a:xfrm>
+            <a:off x="640080" y="5394960"/>
+            <a:ext cx="2514600" cy="457200"/>
+          </a:xfrm>
+          <a:prstGeom prst="rect">
+            <a:avLst/>
+          </a:prstGeom>
+          <a:noFill/>
+          <a:ln/>
+        </p:spPr>
+        <p:txBody>
+          <a:bodyPr wrap="square" lIns="0" tIns="0" rIns="0" bIns="0" rtlCol="0" anchor="ctr"/>
+          <a:lstStyle/>
+          <a:p>
+            <a:pPr algn="ctr" indent="0" marL="0">
+              <a:buNone/>
+            </a:pPr>
+            <a:r>
+              <a:rPr lang="en-US" sz="1100" dirty="0">
+                <a:solidFill>
+                  <a:srgbClr val="A9B4D0"/>
+                </a:solidFill>
+                <a:latin typeface="Calibri" pitchFamily="34" charset="0"/>
+                <a:ea typeface="Calibri" pitchFamily="34" charset="-122"/>
+                <a:cs typeface="Calibri" pitchFamily="34" charset="-120"/>
+              </a:rPr>
+              <a:t>P(cost &lt; 0): random → p = 2</a:t>
+            </a:r>
+            <a:endParaRPr lang="en-US" sz="1100" dirty="0"/>
+          </a:p>
+        </p:txBody>
+      </p:sp>
+      <p:sp>
+        <p:nvSpPr>
+          <p:cNvPr id="14" name="Shape 10"/>
+          <p:cNvSpPr/>
+          <p:nvPr/>
+        </p:nvSpPr>
+        <p:spPr>
+          <a:xfrm>
+            <a:off x="3383280" y="4663440"/>
+            <a:ext cx="2697480" cy="1234440"/>
+          </a:xfrm>
+          <a:prstGeom prst="roundRect">
+            <a:avLst>
+              <a:gd name="adj" fmla="val 5926"/>
+            </a:avLst>
+          </a:prstGeom>
+          <a:solidFill>
+            <a:srgbClr val="141B33"/>
+          </a:solidFill>
+          <a:ln w="12700">
+            <a:solidFill>
+              <a:srgbClr val="141B33"/>
+            </a:solidFill>
+            <a:prstDash val="solid"/>
+          </a:ln>
+        </p:spPr>
+      </p:sp>
+      <p:sp>
+        <p:nvSpPr>
+          <p:cNvPr id="15" name="Text 11"/>
+          <p:cNvSpPr/>
+          <p:nvPr/>
+        </p:nvSpPr>
+        <p:spPr>
+          <a:xfrm>
+            <a:off x="3383280" y="4773168"/>
+            <a:ext cx="2697480" cy="640080"/>
+          </a:xfrm>
+          <a:prstGeom prst="rect">
+            <a:avLst/>
+          </a:prstGeom>
+          <a:noFill/>
+          <a:ln/>
+        </p:spPr>
+        <p:txBody>
+          <a:bodyPr wrap="square" lIns="0" tIns="0" rIns="0" bIns="0" rtlCol="0" anchor="ctr"/>
+          <a:lstStyle/>
+          <a:p>
+            <a:pPr algn="ctr" indent="0" marL="0">
+              <a:buNone/>
+            </a:pPr>
+            <a:r>
+              <a:rPr lang="en-US" sz="3000" b="1" dirty="0">
+                <a:solidFill>
+                  <a:srgbClr val="2BD4C2"/>
+                </a:solidFill>
+                <a:latin typeface="Calibri" pitchFamily="34" charset="0"/>
+                <a:ea typeface="Calibri" pitchFamily="34" charset="-122"/>
+                <a:cs typeface="Calibri" pitchFamily="34" charset="-120"/>
+              </a:rPr>
+              <a:t>12270 → 342</a:t>
+            </a:r>
+            <a:endParaRPr lang="en-US" sz="3000" dirty="0"/>
+          </a:p>
+        </p:txBody>
+      </p:sp>
+      <p:sp>
+        <p:nvSpPr>
+          <p:cNvPr id="16" name="Text 12"/>
+          <p:cNvSpPr/>
+          <p:nvPr/>
+        </p:nvSpPr>
+        <p:spPr>
+          <a:xfrm>
+            <a:off x="3474720" y="5394960"/>
+            <a:ext cx="2514600" cy="457200"/>
+          </a:xfrm>
+          <a:prstGeom prst="rect">
+            <a:avLst/>
+          </a:prstGeom>
+          <a:noFill/>
+          <a:ln/>
+        </p:spPr>
+        <p:txBody>
+          <a:bodyPr wrap="square" lIns="0" tIns="0" rIns="0" bIns="0" rtlCol="0" anchor="ctr"/>
+          <a:lstStyle/>
+          <a:p>
+            <a:pPr algn="ctr" indent="0" marL="0">
+              <a:buNone/>
+            </a:pPr>
+            <a:r>
+              <a:rPr lang="en-US" sz="1100" dirty="0">
+                <a:solidFill>
+                  <a:srgbClr val="A9B4D0"/>
+                </a:solidFill>
+                <a:latin typeface="Calibri" pitchFamily="34" charset="0"/>
+                <a:ea typeface="Calibri" pitchFamily="34" charset="-122"/>
+                <a:cs typeface="Calibri" pitchFamily="34" charset="-120"/>
+              </a:rPr>
+              <a:t>shots for 95% chance of the optimum</a:t>
+            </a:r>
+            <a:endParaRPr lang="en-US" sz="1100" dirty="0"/>
+          </a:p>
+        </p:txBody>
+      </p:sp>
+      <p:sp>
+        <p:nvSpPr>
+          <p:cNvPr id="17" name="Shape 13"/>
+          <p:cNvSpPr/>
+          <p:nvPr/>
+        </p:nvSpPr>
+        <p:spPr>
+          <a:xfrm>
+            <a:off x="6217920" y="4663440"/>
+            <a:ext cx="2697480" cy="1234440"/>
+          </a:xfrm>
+          <a:prstGeom prst="roundRect">
+            <a:avLst>
+              <a:gd name="adj" fmla="val 5926"/>
+            </a:avLst>
+          </a:prstGeom>
+          <a:solidFill>
+            <a:srgbClr val="141B33"/>
+          </a:solidFill>
+          <a:ln w="12700">
+            <a:solidFill>
+              <a:srgbClr val="141B33"/>
+            </a:solidFill>
+            <a:prstDash val="solid"/>
+          </a:ln>
+        </p:spPr>
+      </p:sp>
+      <p:sp>
+        <p:nvSpPr>
+          <p:cNvPr id="18" name="Text 14"/>
+          <p:cNvSpPr/>
+          <p:nvPr/>
+        </p:nvSpPr>
+        <p:spPr>
+          <a:xfrm>
+            <a:off x="6217920" y="4773168"/>
+            <a:ext cx="2697480" cy="640080"/>
+          </a:xfrm>
+          <a:prstGeom prst="rect">
+            <a:avLst/>
+          </a:prstGeom>
+          <a:noFill/>
+          <a:ln/>
+        </p:spPr>
+        <p:txBody>
+          <a:bodyPr wrap="square" lIns="0" tIns="0" rIns="0" bIns="0" rtlCol="0" anchor="ctr"/>
+          <a:lstStyle/>
+          <a:p>
+            <a:pPr algn="ctr" indent="0" marL="0">
+              <a:buNone/>
+            </a:pPr>
+            <a:r>
+              <a:rPr lang="en-US" sz="3000" b="1" dirty="0">
+                <a:solidFill>
+                  <a:srgbClr val="FFB454"/>
+                </a:solidFill>
+                <a:latin typeface="Calibri" pitchFamily="34" charset="0"/>
+                <a:ea typeface="Calibri" pitchFamily="34" charset="-122"/>
+                <a:cs typeface="Calibri" pitchFamily="34" charset="-120"/>
+              </a:rPr>
+              <a:t>2.020 vs 1.999</a:t>
+            </a:r>
+            <a:endParaRPr lang="en-US" sz="3000" dirty="0"/>
+          </a:p>
+        </p:txBody>
+      </p:sp>
+      <p:sp>
+        <p:nvSpPr>
+          <p:cNvPr id="19" name="Text 15"/>
+          <p:cNvSpPr/>
+          <p:nvPr/>
+        </p:nvSpPr>
+        <p:spPr>
+          <a:xfrm>
+            <a:off x="6309360" y="5394960"/>
+            <a:ext cx="2514600" cy="457200"/>
+          </a:xfrm>
+          <a:prstGeom prst="rect">
+            <a:avLst/>
+          </a:prstGeom>
+          <a:noFill/>
+          <a:ln/>
+        </p:spPr>
+        <p:txBody>
+          <a:bodyPr wrap="square" lIns="0" tIns="0" rIns="0" bIns="0" rtlCol="0" anchor="ctr"/>
+          <a:lstStyle/>
+          <a:p>
+            <a:pPr algn="ctr" indent="0" marL="0">
+              <a:buNone/>
+            </a:pPr>
+            <a:r>
+              <a:rPr lang="en-US" sz="1100" dirty="0">
+                <a:solidFill>
+                  <a:srgbClr val="A9B4D0"/>
+                </a:solidFill>
+                <a:latin typeface="Calibri" pitchFamily="34" charset="0"/>
+                <a:ea typeface="Calibri" pitchFamily="34" charset="-122"/>
+                <a:cs typeface="Calibri" pitchFamily="34" charset="-120"/>
+              </a:rPr>
+              <a:t>⟨C⟩ p = 1: Classiq 4096 shots vs exact</a:t>
+            </a:r>
+            <a:endParaRPr lang="en-US" sz="1100" dirty="0"/>
+          </a:p>
+        </p:txBody>
+      </p:sp>
+      <p:sp>
+        <p:nvSpPr>
+          <p:cNvPr id="20" name="Shape 16"/>
+          <p:cNvSpPr/>
+          <p:nvPr/>
+        </p:nvSpPr>
+        <p:spPr>
+          <a:xfrm>
+            <a:off x="9052560" y="4663440"/>
+            <a:ext cx="2697480" cy="1234440"/>
+          </a:xfrm>
+          <a:prstGeom prst="roundRect">
+            <a:avLst>
+              <a:gd name="adj" fmla="val 5926"/>
+            </a:avLst>
+          </a:prstGeom>
+          <a:solidFill>
+            <a:srgbClr val="141B33"/>
+          </a:solidFill>
+          <a:ln w="12700">
+            <a:solidFill>
+              <a:srgbClr val="141B33"/>
+            </a:solidFill>
+            <a:prstDash val="solid"/>
+          </a:ln>
+        </p:spPr>
+      </p:sp>
+      <p:sp>
+        <p:nvSpPr>
+          <p:cNvPr id="21" name="Text 17"/>
+          <p:cNvSpPr/>
+          <p:nvPr/>
+        </p:nvSpPr>
+        <p:spPr>
+          <a:xfrm>
+            <a:off x="9052560" y="4773168"/>
+            <a:ext cx="2697480" cy="640080"/>
+          </a:xfrm>
+          <a:prstGeom prst="rect">
+            <a:avLst/>
+          </a:prstGeom>
+          <a:noFill/>
+          <a:ln/>
+        </p:spPr>
+        <p:txBody>
+          <a:bodyPr wrap="square" lIns="0" tIns="0" rIns="0" bIns="0" rtlCol="0" anchor="ctr"/>
+          <a:lstStyle/>
+          <a:p>
+            <a:pPr algn="ctr" indent="0" marL="0">
+              <a:buNone/>
+            </a:pPr>
+            <a:r>
+              <a:rPr lang="en-US" sz="3000" b="1" dirty="0">
+                <a:solidFill>
+                  <a:srgbClr val="FFB454"/>
+                </a:solidFill>
+                <a:latin typeface="Calibri" pitchFamily="34" charset="0"/>
+                <a:ea typeface="Calibri" pitchFamily="34" charset="-122"/>
+                <a:cs typeface="Calibri" pitchFamily="34" charset="-120"/>
+              </a:rPr>
+              <a:t>0.529 vs 0.530</a:t>
+            </a:r>
+            <a:endParaRPr lang="en-US" sz="3000" dirty="0"/>
+          </a:p>
+        </p:txBody>
+      </p:sp>
+      <p:sp>
+        <p:nvSpPr>
+          <p:cNvPr id="22" name="Text 18"/>
+          <p:cNvSpPr/>
+          <p:nvPr/>
+        </p:nvSpPr>
+        <p:spPr>
+          <a:xfrm>
+            <a:off x="9144000" y="5394960"/>
+            <a:ext cx="2514600" cy="457200"/>
+          </a:xfrm>
+          <a:prstGeom prst="rect">
+            <a:avLst/>
+          </a:prstGeom>
+          <a:noFill/>
+          <a:ln/>
+        </p:spPr>
+        <p:txBody>
+          <a:bodyPr wrap="square" lIns="0" tIns="0" rIns="0" bIns="0" rtlCol="0" anchor="ctr"/>
+          <a:lstStyle/>
+          <a:p>
+            <a:pPr algn="ctr" indent="0" marL="0">
+              <a:buNone/>
+            </a:pPr>
+            <a:r>
+              <a:rPr lang="en-US" sz="1100" dirty="0">
+                <a:solidFill>
+                  <a:srgbClr val="A9B4D0"/>
+                </a:solidFill>
+                <a:latin typeface="Calibri" pitchFamily="34" charset="0"/>
+                <a:ea typeface="Calibri" pitchFamily="34" charset="-122"/>
+                <a:cs typeface="Calibri" pitchFamily="34" charset="-120"/>
+              </a:rPr>
+              <a:t>P(cost &lt; 0) p = 1: Classiq vs exact</a:t>
+            </a:r>
+            <a:endParaRPr lang="en-US" sz="1100" dirty="0"/>
           </a:p>
         </p:txBody>
       </p:sp>
@@ -11295,7 +10360,7 @@
                 <a:ea typeface="Calibri" pitchFamily="34" charset="-122"/>
                 <a:cs typeface="Calibri" pitchFamily="34" charset="-120"/>
               </a:rPr>
-              <a:t>SLIDE 9 / 13   |   CLASSIQ</a:t>
+              <a:t>SLIDE 9 / 13   |   VIDEO</a:t>
             </a:r>
             <a:endParaRPr lang="en-US" sz="1100" dirty="0"/>
           </a:p>
@@ -11334,7 +10399,7 @@
                 <a:ea typeface="Calibri" pitchFamily="34" charset="-122"/>
                 <a:cs typeface="Calibri" pitchFamily="34" charset="-120"/>
               </a:rPr>
-              <a:t>Optimising on Classiq: warm start beats blind search</a:t>
+              <a:t>Demo: the QAOA distribution sharpening</a:t>
             </a:r>
             <a:endParaRPr lang="en-US" sz="3200" dirty="0"/>
           </a:p>
@@ -11405,7 +10470,7 @@
         <p:spPr>
           <a:xfrm>
             <a:off x="548640" y="1417320"/>
-            <a:ext cx="7315200" cy="3904488"/>
+            <a:ext cx="7680960" cy="4572000"/>
           </a:xfrm>
           <a:prstGeom prst="rect">
             <a:avLst/>
@@ -11420,47 +10485,8 @@
         </p:nvSpPr>
         <p:spPr>
           <a:xfrm>
-            <a:off x="548640" y="5349240"/>
-            <a:ext cx="7315200" cy="320040"/>
-          </a:xfrm>
-          <a:prstGeom prst="rect">
-            <a:avLst/>
-          </a:prstGeom>
-          <a:noFill/>
-          <a:ln/>
-        </p:spPr>
-        <p:txBody>
-          <a:bodyPr wrap="square" lIns="0" tIns="0" rIns="0" bIns="0" rtlCol="0" anchor="ctr"/>
-          <a:lstStyle/>
-          <a:p>
-            <a:pPr indent="0" marL="0">
-              <a:buNone/>
-            </a:pPr>
-            <a:r>
-              <a:rPr lang="en-US" sz="1050" i="1" dirty="0">
-                <a:solidFill>
-                  <a:srgbClr val="A9B4D0"/>
-                </a:solidFill>
-                <a:latin typeface="Calibri" pitchFamily="34" charset="0"/>
-                <a:ea typeface="Calibri" pitchFamily="34" charset="-122"/>
-                <a:cs typeface="Calibri" pitchFamily="34" charset="-120"/>
-              </a:rPr>
-              <a:t>Click to play: 20 COBYLA iterations on the Classiq simulator, one 4096-shot job each (11 s).</a:t>
-            </a:r>
-            <a:endParaRPr lang="en-US" sz="1050" dirty="0"/>
-          </a:p>
-        </p:txBody>
-      </p:sp>
-      <p:sp>
-        <p:nvSpPr>
-          <p:cNvPr id="10" name="Text 7"/>
-          <p:cNvSpPr/>
-          <p:nvPr/>
-        </p:nvSpPr>
-        <p:spPr>
-          <a:xfrm>
-            <a:off x="8138160" y="1463040"/>
-            <a:ext cx="3657600" cy="4206240"/>
+            <a:off x="8412480" y="1463040"/>
+            <a:ext cx="3383280" cy="4389120"/>
           </a:xfrm>
           <a:prstGeom prst="rect">
             <a:avLst/>
@@ -11488,7 +10514,7 @@
                 <a:ea typeface="Calibri" pitchFamily="34" charset="-122"/>
                 <a:cs typeface="Calibri" pitchFamily="34" charset="-120"/>
               </a:rPr>
-              <a:t>Start (0.20, 0.50): COBYLA stuck at ⟨C⟩ ≈ 35.5 — the plateau Wolfram predicted</a:t>
+              <a:t>120 frames, angles ramp from 0 to the p = 2 optimum</a:t>
             </a:r>
             <a:endParaRPr lang="en-US" sz="1300" dirty="0"/>
           </a:p>
@@ -11509,7 +10535,7 @@
                 <a:ea typeface="Calibri" pitchFamily="34" charset="-122"/>
                 <a:cs typeface="Calibri" pitchFamily="34" charset="-120"/>
               </a:rPr>
-              <a:t>Start (0.02, 0.60): 20 Classiq jobs, ⟨C⟩ 21.6 → 7.0, still above warm start 2.0</a:t>
+              <a:t>Scatter: probability of each of the 4096 plans vs its cost</a:t>
             </a:r>
             <a:endParaRPr lang="en-US" sz="1300" dirty="0"/>
           </a:p>
@@ -11530,7 +10556,7 @@
                 <a:ea typeface="Calibri" pitchFamily="34" charset="-122"/>
                 <a:cs typeface="Calibri" pitchFamily="34" charset="-120"/>
               </a:rPr>
-              <a:t>Shot noise (4096 shots) hides gradients; 15 parallel jobs let us sweep starts instead</a:t>
+              <a:t>Bars: P(cost &lt; 0) climbing to 0.67</a:t>
             </a:r>
             <a:endParaRPr lang="en-US" sz="1300" dirty="0"/>
           </a:p>
@@ -11551,7 +10577,28 @@
                 <a:ea typeface="Calibri" pitchFamily="34" charset="-122"/>
                 <a:cs typeface="Calibri" pitchFamily="34" charset="-120"/>
               </a:rPr>
-              <a:t>Takeaway: exact classical pre-simulation of small instances gives angles that transfer</a:t>
+              <a:t>Black line: classical optimum −2.844</a:t>
+            </a:r>
+            <a:endParaRPr lang="en-US" sz="1300" dirty="0"/>
+          </a:p>
+          <a:p>
+            <a:pPr marL="342900" indent="-342900">
+              <a:spcAft>
+                <a:spcPts val="600"/>
+              </a:spcAft>
+              <a:buSzPct val="100000"/>
+              <a:buChar char="▸"/>
+            </a:pPr>
+            <a:r>
+              <a:rPr lang="en-US" sz="1300" dirty="0">
+                <a:solidFill>
+                  <a:srgbClr val="F5F7FF"/>
+                </a:solidFill>
+                <a:latin typeface="Calibri" pitchFamily="34" charset="0"/>
+                <a:ea typeface="Calibri" pitchFamily="34" charset="-122"/>
+                <a:cs typeface="Calibri" pitchFamily="34" charset="-120"/>
+              </a:rPr>
+              <a:t>Second clip: group/video/classiq_convergence.mp4 — COBYLA on Classiq, iteration by iteration</a:t>
             </a:r>
             <a:endParaRPr lang="en-US" sz="1300" dirty="0"/>
           </a:p>

--- a/presentation/QuantumHeadache_AntennaTilt.pptx
+++ b/presentation/QuantumHeadache_AntennaTilt.pptx
@@ -18,9 +18,10 @@
     <p:sldId id="266" r:id="rId12"/>
     <p:sldId id="267" r:id="rId13"/>
     <p:sldId id="268" r:id="rId14"/>
+    <p:sldId id="269" r:id="rId15"/>
   </p:sldIdLst>
   <p:notesMasterIdLst>
-    <p:notesMasterId r:id="rId15"/>
+    <p:notesMasterId r:id="rId16"/>
   </p:notesMasterIdLst>
   <p:sldSz cx="12192000" cy="6858000"/>
   <p:notesSz cx="6858000" cy="12192000"/>
@@ -866,7 +867,7 @@
           <a:p>
             <a:r>
               <a:rPr lang="en-US" dirty="0"/>
-              <a:t>Close with the group benchmark: one shared plan scores 1.379, per-region exact search 1.838 with 48 jobs, the hierarchy with QAOA 1.547 with 10 jobs; cycle 3 reaches 95 percent of the ceiling. Everything is reproducible from the GitHub repo; the demo video is on YouTube.</a:t>
+              <a:t>Scale slide. 1000 qubits is 500 antennas at 4 tilt levels or 250 at 10 levels. Brute force and exact simulation of the quantum algorithm are impossible past about 45 to 48 qubits; exact QUBO solvers stall; heuristics such as annealing are the real classical competitor and give good but unproven plans. Physical 1000-qubit machines exist today but gate errors mean the 13 000-CX layer needs error correction, so 1000 logical qubits is a 2028 to 2030 machine. Once available, a run is seconds to minutes, and the Qmod program is unchanged apart from the backend.</a:t>
             </a:r>
             <a:endParaRPr lang="en-US" dirty="0"/>
           </a:p>
@@ -890,6 +891,94 @@
             <a:fld id="{F7021451-1387-4CA6-816F-3879F97B5CBC}" type="slidenum">
               <a:rPr lang="en-US"/>
               <a:t>13</a:t>
+            </a:fld>
+            <a:endParaRPr lang="en-US"/>
+          </a:p>
+        </p:txBody>
+      </p:sp>
+    </p:spTree>
+    <p:extLst>
+      <p:ext uri="{BB962C8B-B14F-4D97-AF65-F5344CB8AC3E}">
+        <p14:creationId xmlns:p14="http://schemas.microsoft.com/office/powerpoint/2010/main" val="1024086991"/>
+      </p:ext>
+    </p:extLst>
+  </p:cSld>
+  <p:clrMapOvr>
+    <a:masterClrMapping/>
+  </p:clrMapOvr>
+</p:notes>
+</file>
+
+<file path=ppt/notesSlides/notesSlide14.xml><?xml version="1.0" encoding="utf-8"?>
+<p:notes xmlns:a="http://schemas.openxmlformats.org/drawingml/2006/main" xmlns:r="http://schemas.openxmlformats.org/officeDocument/2006/relationships" xmlns:p="http://schemas.openxmlformats.org/presentationml/2006/main">
+  <p:cSld>
+    <p:spTree>
+      <p:nvGrpSpPr>
+        <p:cNvPr id="1" name=""/>
+        <p:cNvGrpSpPr/>
+        <p:nvPr/>
+      </p:nvGrpSpPr>
+      <p:grpSpPr>
+        <a:xfrm>
+          <a:off x="0" y="0"/>
+          <a:ext cx="0" cy="0"/>
+          <a:chOff x="0" y="0"/>
+          <a:chExt cx="0" cy="0"/>
+        </a:xfrm>
+      </p:grpSpPr>
+      <p:sp>
+        <p:nvSpPr>
+          <p:cNvPr id="2" name="Slide Image Placeholder 1"/>
+          <p:cNvSpPr>
+            <a:spLocks noGrp="1" noRot="1" noChangeAspect="1"/>
+          </p:cNvSpPr>
+          <p:nvPr>
+            <p:ph type="sldImg"/>
+          </p:nvPr>
+        </p:nvSpPr>
+        <p:spPr/>
+      </p:sp>
+      <p:sp>
+        <p:nvSpPr>
+          <p:cNvPr id="3" name="Notes Placeholder 2"/>
+          <p:cNvSpPr>
+            <a:spLocks noGrp="1"/>
+          </p:cNvSpPr>
+          <p:nvPr>
+            <p:ph type="body" idx="1"/>
+          </p:nvPr>
+        </p:nvSpPr>
+        <p:spPr/>
+        <p:txBody>
+          <a:bodyPr/>
+          <a:lstStyle/>
+          <a:p>
+            <a:r>
+              <a:rPr lang="en-US" dirty="0"/>
+              <a:t>Close with the group benchmark: one shared plan scores 1.379, per-region exact search 1.838 with 48 jobs, the hierarchy with QAOA 1.547 with 10 jobs; cycle 3 reaches 95 percent of the ceiling. Everything is reproducible from the GitHub repo; the demo video is on YouTube.</a:t>
+            </a:r>
+            <a:endParaRPr lang="en-US" dirty="0"/>
+          </a:p>
+        </p:txBody>
+      </p:sp>
+      <p:sp>
+        <p:nvSpPr>
+          <p:cNvPr id="4" name="Slide Number Placeholder 3"/>
+          <p:cNvSpPr>
+            <a:spLocks noGrp="1"/>
+          </p:cNvSpPr>
+          <p:nvPr>
+            <p:ph type="sldNum" sz="quarter" idx="10"/>
+          </p:nvPr>
+        </p:nvSpPr>
+        <p:spPr/>
+        <p:txBody>
+          <a:bodyPr/>
+          <a:lstStyle/>
+          <a:p>
+            <a:fld id="{F7021451-1387-4CA6-816F-3879F97B5CBC}" type="slidenum">
+              <a:rPr lang="en-US"/>
+              <a:t>14</a:t>
             </a:fld>
             <a:endParaRPr lang="en-US"/>
           </a:p>
@@ -2003,7 +2092,7 @@
                 <a:ea typeface="Calibri" pitchFamily="34" charset="-122"/>
                 <a:cs typeface="Calibri" pitchFamily="34" charset="-120"/>
               </a:rPr>
-              <a:t>1 / 13</a:t>
+              <a:t>1 / 14</a:t>
             </a:r>
             <a:endParaRPr lang="en-US" sz="2800" dirty="0"/>
           </a:p>
@@ -2333,7 +2422,7 @@
                 <a:ea typeface="Calibri" pitchFamily="34" charset="-122"/>
                 <a:cs typeface="Calibri" pitchFamily="34" charset="-120"/>
               </a:rPr>
-              <a:t>10 / 13</a:t>
+              <a:t>10 / 14</a:t>
             </a:r>
             <a:endParaRPr lang="en-US" sz="2800" dirty="0"/>
           </a:p>
@@ -2392,7 +2481,7 @@
                 <a:ea typeface="Calibri" pitchFamily="34" charset="-122"/>
                 <a:cs typeface="Calibri" pitchFamily="34" charset="-120"/>
               </a:rPr>
-              <a:t>SLIDE 10 / 13   |   CLASSIQ</a:t>
+              <a:t>SLIDE 10 / 14   |   CLASSIQ</a:t>
             </a:r>
             <a:endParaRPr lang="en-US" sz="1100" dirty="0"/>
           </a:p>
@@ -2746,7 +2835,7 @@
                 <a:ea typeface="Calibri" pitchFamily="34" charset="-122"/>
                 <a:cs typeface="Calibri" pitchFamily="34" charset="-120"/>
               </a:rPr>
-              <a:t>11 / 13</a:t>
+              <a:t>11 / 14</a:t>
             </a:r>
             <a:endParaRPr lang="en-US" sz="2800" dirty="0"/>
           </a:p>
@@ -2805,7 +2894,7 @@
                 <a:ea typeface="Calibri" pitchFamily="34" charset="-122"/>
                 <a:cs typeface="Calibri" pitchFamily="34" charset="-120"/>
               </a:rPr>
-              <a:t>SLIDE 11 / 13   |   PROOF</a:t>
+              <a:t>SLIDE 11 / 14   |   PROOF</a:t>
             </a:r>
             <a:endParaRPr lang="en-US" sz="1100" dirty="0"/>
           </a:p>
@@ -3427,7 +3516,7 @@
                 <a:ea typeface="Calibri" pitchFamily="34" charset="-122"/>
                 <a:cs typeface="Calibri" pitchFamily="34" charset="-120"/>
               </a:rPr>
-              <a:t>12 / 13</a:t>
+              <a:t>12 / 14</a:t>
             </a:r>
             <a:endParaRPr lang="en-US" sz="2800" dirty="0"/>
           </a:p>
@@ -3486,7 +3575,7 @@
                 <a:ea typeface="Calibri" pitchFamily="34" charset="-122"/>
                 <a:cs typeface="Calibri" pitchFamily="34" charset="-120"/>
               </a:rPr>
-              <a:t>SLIDE 12 / 13   |   DESIGN CHOICE</a:t>
+              <a:t>SLIDE 12 / 14   |   DESIGN CHOICE</a:t>
             </a:r>
             <a:endParaRPr lang="en-US" sz="1100" dirty="0"/>
           </a:p>
@@ -4317,7 +4406,7 @@
                 <a:ea typeface="Calibri" pitchFamily="34" charset="-122"/>
                 <a:cs typeface="Calibri" pitchFamily="34" charset="-120"/>
               </a:rPr>
-              <a:t>13 / 13</a:t>
+              <a:t>13 / 14</a:t>
             </a:r>
             <a:endParaRPr lang="en-US" sz="2800" dirty="0"/>
           </a:p>
@@ -4376,7 +4465,967 @@
                 <a:ea typeface="Calibri" pitchFamily="34" charset="-122"/>
                 <a:cs typeface="Calibri" pitchFamily="34" charset="-120"/>
               </a:rPr>
-              <a:t>SLIDE 13 / 13   |   BENCHMARK</a:t>
+              <a:t>SLIDE 13 / 14   |   SCALE</a:t>
+            </a:r>
+            <a:endParaRPr lang="en-US" sz="1100" dirty="0"/>
+          </a:p>
+        </p:txBody>
+      </p:sp>
+      <p:sp>
+        <p:nvSpPr>
+          <p:cNvPr id="6" name="Text 4"/>
+          <p:cNvSpPr/>
+          <p:nvPr/>
+        </p:nvSpPr>
+        <p:spPr>
+          <a:xfrm>
+            <a:off x="548640" y="594360"/>
+            <a:ext cx="11064240" cy="685800"/>
+          </a:xfrm>
+          <a:prstGeom prst="rect">
+            <a:avLst/>
+          </a:prstGeom>
+          <a:noFill/>
+          <a:ln/>
+        </p:spPr>
+        <p:txBody>
+          <a:bodyPr wrap="square" lIns="0" tIns="0" rIns="0" bIns="0" rtlCol="0" anchor="ctr"/>
+          <a:lstStyle/>
+          <a:p>
+            <a:pPr indent="0" marL="0">
+              <a:buNone/>
+            </a:pPr>
+            <a:r>
+              <a:rPr lang="en-US" sz="3200" b="1" dirty="0">
+                <a:solidFill>
+                  <a:srgbClr val="F5F7FF"/>
+                </a:solidFill>
+                <a:latin typeface="Calibri" pitchFamily="34" charset="0"/>
+                <a:ea typeface="Calibri" pitchFamily="34" charset="-122"/>
+                <a:cs typeface="Calibri" pitchFamily="34" charset="-120"/>
+              </a:rPr>
+              <a:t>Why quantum: what changes at 1000 qubits (500 antennas)</a:t>
+            </a:r>
+            <a:endParaRPr lang="en-US" sz="3200" dirty="0"/>
+          </a:p>
+        </p:txBody>
+      </p:sp>
+      <p:sp>
+        <p:nvSpPr>
+          <p:cNvPr id="7" name="Text 5"/>
+          <p:cNvSpPr/>
+          <p:nvPr/>
+        </p:nvSpPr>
+        <p:spPr>
+          <a:xfrm>
+            <a:off x="548640" y="6446520"/>
+            <a:ext cx="7315200" cy="274320"/>
+          </a:xfrm>
+          <a:prstGeom prst="rect">
+            <a:avLst/>
+          </a:prstGeom>
+          <a:noFill/>
+          <a:ln/>
+        </p:spPr>
+        <p:txBody>
+          <a:bodyPr wrap="square" lIns="0" tIns="0" rIns="0" bIns="0" rtlCol="0" anchor="ctr"/>
+          <a:lstStyle/>
+          <a:p>
+            <a:pPr indent="0" marL="0">
+              <a:buNone/>
+            </a:pPr>
+            <a:r>
+              <a:rPr lang="en-US" sz="1000" dirty="0">
+                <a:solidFill>
+                  <a:srgbClr val="A9B4D0"/>
+                </a:solidFill>
+                <a:latin typeface="Calibri" pitchFamily="34" charset="0"/>
+                <a:ea typeface="Calibri" pitchFamily="34" charset="-122"/>
+                <a:cs typeface="Calibri" pitchFamily="34" charset="-120"/>
+              </a:rPr>
+              <a:t>Quantum Headache · QUBIT 2026 · Antenna Tilt</a:t>
+            </a:r>
+            <a:endParaRPr lang="en-US" sz="1000" dirty="0"/>
+          </a:p>
+        </p:txBody>
+      </p:sp>
+      <p:sp>
+        <p:nvSpPr>
+          <p:cNvPr id="8" name="Shape 6"/>
+          <p:cNvSpPr/>
+          <p:nvPr/>
+        </p:nvSpPr>
+        <p:spPr>
+          <a:xfrm>
+            <a:off x="548640" y="1463040"/>
+            <a:ext cx="3611880" cy="1234440"/>
+          </a:xfrm>
+          <a:prstGeom prst="roundRect">
+            <a:avLst>
+              <a:gd name="adj" fmla="val 5926"/>
+            </a:avLst>
+          </a:prstGeom>
+          <a:solidFill>
+            <a:srgbClr val="141B33"/>
+          </a:solidFill>
+          <a:ln w="12700">
+            <a:solidFill>
+              <a:srgbClr val="141B33"/>
+            </a:solidFill>
+            <a:prstDash val="solid"/>
+          </a:ln>
+        </p:spPr>
+      </p:sp>
+      <p:sp>
+        <p:nvSpPr>
+          <p:cNvPr id="9" name="Text 7"/>
+          <p:cNvSpPr/>
+          <p:nvPr/>
+        </p:nvSpPr>
+        <p:spPr>
+          <a:xfrm>
+            <a:off x="548640" y="1572768"/>
+            <a:ext cx="3611880" cy="640080"/>
+          </a:xfrm>
+          <a:prstGeom prst="rect">
+            <a:avLst/>
+          </a:prstGeom>
+          <a:noFill/>
+          <a:ln/>
+        </p:spPr>
+        <p:txBody>
+          <a:bodyPr wrap="square" lIns="0" tIns="0" rIns="0" bIns="0" rtlCol="0" anchor="ctr"/>
+          <a:lstStyle/>
+          <a:p>
+            <a:pPr algn="ctr" indent="0" marL="0">
+              <a:buNone/>
+            </a:pPr>
+            <a:r>
+              <a:rPr lang="en-US" sz="3000" b="1" dirty="0">
+                <a:solidFill>
+                  <a:srgbClr val="2BD4C2"/>
+                </a:solidFill>
+                <a:latin typeface="Calibri" pitchFamily="34" charset="0"/>
+                <a:ea typeface="Calibri" pitchFamily="34" charset="-122"/>
+                <a:cs typeface="Calibri" pitchFamily="34" charset="-120"/>
+              </a:rPr>
+              <a:t>2¹⁰⁰⁰ ≈ 10³⁰¹</a:t>
+            </a:r>
+            <a:endParaRPr lang="en-US" sz="3000" dirty="0"/>
+          </a:p>
+        </p:txBody>
+      </p:sp>
+      <p:sp>
+        <p:nvSpPr>
+          <p:cNvPr id="10" name="Text 8"/>
+          <p:cNvSpPr/>
+          <p:nvPr/>
+        </p:nvSpPr>
+        <p:spPr>
+          <a:xfrm>
+            <a:off x="640080" y="2194560"/>
+            <a:ext cx="3429000" cy="457200"/>
+          </a:xfrm>
+          <a:prstGeom prst="rect">
+            <a:avLst/>
+          </a:prstGeom>
+          <a:noFill/>
+          <a:ln/>
+        </p:spPr>
+        <p:txBody>
+          <a:bodyPr wrap="square" lIns="0" tIns="0" rIns="0" bIns="0" rtlCol="0" anchor="ctr"/>
+          <a:lstStyle/>
+          <a:p>
+            <a:pPr algn="ctr" indent="0" marL="0">
+              <a:buNone/>
+            </a:pPr>
+            <a:r>
+              <a:rPr lang="en-US" sz="1100" dirty="0">
+                <a:solidFill>
+                  <a:srgbClr val="A9B4D0"/>
+                </a:solidFill>
+                <a:latin typeface="Calibri" pitchFamily="34" charset="0"/>
+                <a:ea typeface="Calibri" pitchFamily="34" charset="-122"/>
+                <a:cs typeface="Calibri" pitchFamily="34" charset="-120"/>
+              </a:rPr>
+              <a:t>plans for 500 antennas × 4 tilts (today: 4096)</a:t>
+            </a:r>
+            <a:endParaRPr lang="en-US" sz="1100" dirty="0"/>
+          </a:p>
+        </p:txBody>
+      </p:sp>
+      <p:sp>
+        <p:nvSpPr>
+          <p:cNvPr id="11" name="Shape 9"/>
+          <p:cNvSpPr/>
+          <p:nvPr/>
+        </p:nvSpPr>
+        <p:spPr>
+          <a:xfrm>
+            <a:off x="4297680" y="1463040"/>
+            <a:ext cx="3611880" cy="1234440"/>
+          </a:xfrm>
+          <a:prstGeom prst="roundRect">
+            <a:avLst>
+              <a:gd name="adj" fmla="val 5926"/>
+            </a:avLst>
+          </a:prstGeom>
+          <a:solidFill>
+            <a:srgbClr val="141B33"/>
+          </a:solidFill>
+          <a:ln w="12700">
+            <a:solidFill>
+              <a:srgbClr val="141B33"/>
+            </a:solidFill>
+            <a:prstDash val="solid"/>
+          </a:ln>
+        </p:spPr>
+      </p:sp>
+      <p:sp>
+        <p:nvSpPr>
+          <p:cNvPr id="12" name="Text 10"/>
+          <p:cNvSpPr/>
+          <p:nvPr/>
+        </p:nvSpPr>
+        <p:spPr>
+          <a:xfrm>
+            <a:off x="4297680" y="1572768"/>
+            <a:ext cx="3611880" cy="640080"/>
+          </a:xfrm>
+          <a:prstGeom prst="rect">
+            <a:avLst/>
+          </a:prstGeom>
+          <a:noFill/>
+          <a:ln/>
+        </p:spPr>
+        <p:txBody>
+          <a:bodyPr wrap="square" lIns="0" tIns="0" rIns="0" bIns="0" rtlCol="0" anchor="ctr"/>
+          <a:lstStyle/>
+          <a:p>
+            <a:pPr algn="ctr" indent="0" marL="0">
+              <a:buNone/>
+            </a:pPr>
+            <a:r>
+              <a:rPr lang="en-US" sz="3000" b="1" dirty="0">
+                <a:solidFill>
+                  <a:srgbClr val="FFB454"/>
+                </a:solidFill>
+                <a:latin typeface="Calibri" pitchFamily="34" charset="0"/>
+                <a:ea typeface="Calibri" pitchFamily="34" charset="-122"/>
+                <a:cs typeface="Calibri" pitchFamily="34" charset="-120"/>
+              </a:rPr>
+              <a:t>≈ 45 qubits</a:t>
+            </a:r>
+            <a:endParaRPr lang="en-US" sz="3000" dirty="0"/>
+          </a:p>
+        </p:txBody>
+      </p:sp>
+      <p:sp>
+        <p:nvSpPr>
+          <p:cNvPr id="13" name="Text 11"/>
+          <p:cNvSpPr/>
+          <p:nvPr/>
+        </p:nvSpPr>
+        <p:spPr>
+          <a:xfrm>
+            <a:off x="4389120" y="2194560"/>
+            <a:ext cx="3429000" cy="457200"/>
+          </a:xfrm>
+          <a:prstGeom prst="rect">
+            <a:avLst/>
+          </a:prstGeom>
+          <a:noFill/>
+          <a:ln/>
+        </p:spPr>
+        <p:txBody>
+          <a:bodyPr wrap="square" lIns="0" tIns="0" rIns="0" bIns="0" rtlCol="0" anchor="ctr"/>
+          <a:lstStyle/>
+          <a:p>
+            <a:pPr algn="ctr" indent="0" marL="0">
+              <a:buNone/>
+            </a:pPr>
+            <a:r>
+              <a:rPr lang="en-US" sz="1100" dirty="0">
+                <a:solidFill>
+                  <a:srgbClr val="A9B4D0"/>
+                </a:solidFill>
+                <a:latin typeface="Calibri" pitchFamily="34" charset="0"/>
+                <a:ea typeface="Calibri" pitchFamily="34" charset="-122"/>
+                <a:cs typeface="Calibri" pitchFamily="34" charset="-120"/>
+              </a:rPr>
+              <a:t>ceiling of exact statevector simulation: 50 q = 18 PB &gt; Frontier 9 PB</a:t>
+            </a:r>
+            <a:endParaRPr lang="en-US" sz="1100" dirty="0"/>
+          </a:p>
+        </p:txBody>
+      </p:sp>
+      <p:sp>
+        <p:nvSpPr>
+          <p:cNvPr id="14" name="Shape 12"/>
+          <p:cNvSpPr/>
+          <p:nvPr/>
+        </p:nvSpPr>
+        <p:spPr>
+          <a:xfrm>
+            <a:off x="8046720" y="1463040"/>
+            <a:ext cx="3749040" cy="1234440"/>
+          </a:xfrm>
+          <a:prstGeom prst="roundRect">
+            <a:avLst>
+              <a:gd name="adj" fmla="val 5926"/>
+            </a:avLst>
+          </a:prstGeom>
+          <a:solidFill>
+            <a:srgbClr val="141B33"/>
+          </a:solidFill>
+          <a:ln w="12700">
+            <a:solidFill>
+              <a:srgbClr val="141B33"/>
+            </a:solidFill>
+            <a:prstDash val="solid"/>
+          </a:ln>
+        </p:spPr>
+      </p:sp>
+      <p:sp>
+        <p:nvSpPr>
+          <p:cNvPr id="15" name="Text 13"/>
+          <p:cNvSpPr/>
+          <p:nvPr/>
+        </p:nvSpPr>
+        <p:spPr>
+          <a:xfrm>
+            <a:off x="8046720" y="1572768"/>
+            <a:ext cx="3749040" cy="640080"/>
+          </a:xfrm>
+          <a:prstGeom prst="rect">
+            <a:avLst/>
+          </a:prstGeom>
+          <a:noFill/>
+          <a:ln/>
+        </p:spPr>
+        <p:txBody>
+          <a:bodyPr wrap="square" lIns="0" tIns="0" rIns="0" bIns="0" rtlCol="0" anchor="ctr"/>
+          <a:lstStyle/>
+          <a:p>
+            <a:pPr algn="ctr" indent="0" marL="0">
+              <a:buNone/>
+            </a:pPr>
+            <a:r>
+              <a:rPr lang="en-US" sz="3000" b="1" dirty="0">
+                <a:solidFill>
+                  <a:srgbClr val="2BD4C2"/>
+                </a:solidFill>
+                <a:latin typeface="Calibri" pitchFamily="34" charset="0"/>
+                <a:ea typeface="Calibri" pitchFamily="34" charset="-122"/>
+                <a:cs typeface="Calibri" pitchFamily="34" charset="-120"/>
+              </a:rPr>
+              <a:t>≈ 13 000 CX</a:t>
+            </a:r>
+            <a:endParaRPr lang="en-US" sz="3000" dirty="0"/>
+          </a:p>
+        </p:txBody>
+      </p:sp>
+      <p:sp>
+        <p:nvSpPr>
+          <p:cNvPr id="16" name="Text 14"/>
+          <p:cNvSpPr/>
+          <p:nvPr/>
+        </p:nvSpPr>
+        <p:spPr>
+          <a:xfrm>
+            <a:off x="8138160" y="2194560"/>
+            <a:ext cx="3566160" cy="457200"/>
+          </a:xfrm>
+          <a:prstGeom prst="rect">
+            <a:avLst/>
+          </a:prstGeom>
+          <a:noFill/>
+          <a:ln/>
+        </p:spPr>
+        <p:txBody>
+          <a:bodyPr wrap="square" lIns="0" tIns="0" rIns="0" bIns="0" rtlCol="0" anchor="ctr"/>
+          <a:lstStyle/>
+          <a:p>
+            <a:pPr algn="ctr" indent="0" marL="0">
+              <a:buNone/>
+            </a:pPr>
+            <a:r>
+              <a:rPr lang="en-US" sz="1100" dirty="0">
+                <a:solidFill>
+                  <a:srgbClr val="A9B4D0"/>
+                </a:solidFill>
+                <a:latin typeface="Calibri" pitchFamily="34" charset="0"/>
+                <a:ea typeface="Calibri" pitchFamily="34" charset="-122"/>
+                <a:cs typeface="Calibri" pitchFamily="34" charset="-120"/>
+              </a:rPr>
+              <a:t>one QAOA layer at 1000 q: 2-local, local coupling, depth ~10²</a:t>
+            </a:r>
+            <a:endParaRPr lang="en-US" sz="1100" dirty="0"/>
+          </a:p>
+        </p:txBody>
+      </p:sp>
+      <p:sp>
+        <p:nvSpPr>
+          <p:cNvPr id="17" name="Shape 15"/>
+          <p:cNvSpPr/>
+          <p:nvPr/>
+        </p:nvSpPr>
+        <p:spPr>
+          <a:xfrm>
+            <a:off x="548640" y="2834640"/>
+            <a:ext cx="5532120" cy="2697480"/>
+          </a:xfrm>
+          <a:prstGeom prst="roundRect">
+            <a:avLst>
+              <a:gd name="adj" fmla="val 2712"/>
+            </a:avLst>
+          </a:prstGeom>
+          <a:solidFill>
+            <a:srgbClr val="141B33"/>
+          </a:solidFill>
+          <a:ln w="12700">
+            <a:solidFill>
+              <a:srgbClr val="141B33"/>
+            </a:solidFill>
+            <a:prstDash val="solid"/>
+          </a:ln>
+        </p:spPr>
+      </p:sp>
+      <p:sp>
+        <p:nvSpPr>
+          <p:cNvPr id="18" name="Text 16"/>
+          <p:cNvSpPr/>
+          <p:nvPr/>
+        </p:nvSpPr>
+        <p:spPr>
+          <a:xfrm>
+            <a:off x="685800" y="2880360"/>
+            <a:ext cx="5303520" cy="320040"/>
+          </a:xfrm>
+          <a:prstGeom prst="rect">
+            <a:avLst/>
+          </a:prstGeom>
+          <a:noFill/>
+          <a:ln/>
+        </p:spPr>
+        <p:txBody>
+          <a:bodyPr wrap="square" lIns="0" tIns="0" rIns="0" bIns="0" rtlCol="0" anchor="ctr"/>
+          <a:lstStyle/>
+          <a:p>
+            <a:pPr indent="0" marL="0">
+              <a:buNone/>
+            </a:pPr>
+            <a:r>
+              <a:rPr lang="en-US" sz="1400" b="1" dirty="0">
+                <a:solidFill>
+                  <a:srgbClr val="FF5C7A"/>
+                </a:solidFill>
+                <a:latin typeface="Calibri" pitchFamily="34" charset="0"/>
+                <a:ea typeface="Calibri" pitchFamily="34" charset="-122"/>
+                <a:cs typeface="Calibri" pitchFamily="34" charset="-120"/>
+              </a:rPr>
+              <a:t>Best non-quantum tools on this size</a:t>
+            </a:r>
+            <a:endParaRPr lang="en-US" sz="1400" dirty="0"/>
+          </a:p>
+        </p:txBody>
+      </p:sp>
+      <p:sp>
+        <p:nvSpPr>
+          <p:cNvPr id="19" name="Text 17"/>
+          <p:cNvSpPr/>
+          <p:nvPr/>
+        </p:nvSpPr>
+        <p:spPr>
+          <a:xfrm>
+            <a:off x="640080" y="3200400"/>
+            <a:ext cx="5394960" cy="2286000"/>
+          </a:xfrm>
+          <a:prstGeom prst="rect">
+            <a:avLst/>
+          </a:prstGeom>
+          <a:noFill/>
+          <a:ln/>
+        </p:spPr>
+        <p:txBody>
+          <a:bodyPr wrap="square" lIns="635" tIns="635" rIns="635" bIns="635" rtlCol="0" anchor="t"/>
+          <a:lstStyle/>
+          <a:p>
+            <a:pPr marL="342900" indent="-342900">
+              <a:spcAft>
+                <a:spcPts val="600"/>
+              </a:spcAft>
+              <a:buSzPct val="100000"/>
+              <a:buChar char="▸"/>
+            </a:pPr>
+            <a:r>
+              <a:rPr lang="en-US" sz="1100" dirty="0">
+                <a:solidFill>
+                  <a:srgbClr val="F5F7FF"/>
+                </a:solidFill>
+                <a:latin typeface="Calibri" pitchFamily="34" charset="0"/>
+                <a:ea typeface="Calibri" pitchFamily="34" charset="-122"/>
+                <a:cs typeface="Calibri" pitchFamily="34" charset="-120"/>
+              </a:rPr>
+              <a:t>Brute force (our exact check today): 10³⁰¹ plans at 10¹⁸ / s (exascale) = 10²⁸³ s; the universe is 4×10¹⁷ s old</a:t>
+            </a:r>
+            <a:endParaRPr lang="en-US" sz="1100" dirty="0"/>
+          </a:p>
+          <a:p>
+            <a:pPr marL="342900" indent="-342900">
+              <a:spcAft>
+                <a:spcPts val="600"/>
+              </a:spcAft>
+              <a:buSzPct val="100000"/>
+              <a:buChar char="▸"/>
+            </a:pPr>
+            <a:r>
+              <a:rPr lang="en-US" sz="1100" dirty="0">
+                <a:solidFill>
+                  <a:srgbClr val="F5F7FF"/>
+                </a:solidFill>
+                <a:latin typeface="Calibri" pitchFamily="34" charset="0"/>
+                <a:ea typeface="Calibri" pitchFamily="34" charset="-122"/>
+                <a:cs typeface="Calibri" pitchFamily="34" charset="-120"/>
+              </a:rPr>
+              <a:t>Exact simulation of the quantum algorithm (Wolfram / Classiq simulator): memory 2ⁿ × 16 B, 45 q = 0.5 PB, 50 q = 18 PB. Nobody can simulate QAOA past ≈ 48 qubits</a:t>
+            </a:r>
+            <a:endParaRPr lang="en-US" sz="1100" dirty="0"/>
+          </a:p>
+          <a:p>
+            <a:pPr marL="342900" indent="-342900">
+              <a:spcAft>
+                <a:spcPts val="600"/>
+              </a:spcAft>
+              <a:buSzPct val="100000"/>
+              <a:buChar char="▸"/>
+            </a:pPr>
+            <a:r>
+              <a:rPr lang="en-US" sz="1100" dirty="0">
+                <a:solidFill>
+                  <a:srgbClr val="F5F7FF"/>
+                </a:solidFill>
+                <a:latin typeface="Calibri" pitchFamily="34" charset="0"/>
+                <a:ea typeface="Calibri" pitchFamily="34" charset="-122"/>
+                <a:cs typeface="Calibri" pitchFamily="34" charset="-120"/>
+              </a:rPr>
+              <a:t>Exact QUBO solvers (branch &amp; bound, Gurobi): sparse 1000-variable instances run hours to days and may never certify the optimum</a:t>
+            </a:r>
+            <a:endParaRPr lang="en-US" sz="1100" dirty="0"/>
+          </a:p>
+          <a:p>
+            <a:pPr marL="342900" indent="-342900">
+              <a:spcAft>
+                <a:spcPts val="600"/>
+              </a:spcAft>
+              <a:buSzPct val="100000"/>
+              <a:buChar char="▸"/>
+            </a:pPr>
+            <a:r>
+              <a:rPr lang="en-US" sz="1100" dirty="0">
+                <a:solidFill>
+                  <a:srgbClr val="F5F7FF"/>
+                </a:solidFill>
+                <a:latin typeface="Calibri" pitchFamily="34" charset="0"/>
+                <a:ea typeface="Calibri" pitchFamily="34" charset="-122"/>
+                <a:cs typeface="Calibri" pitchFamily="34" charset="-120"/>
+              </a:rPr>
+              <a:t>Heuristics (simulated annealing, tabu, D-Wave 4 400-qubit annealer): minutes, good plan, no guarantee. This is the real competitor (1.833 vs 1.838 on the toy benchmark)</a:t>
+            </a:r>
+            <a:endParaRPr lang="en-US" sz="1100" dirty="0"/>
+          </a:p>
+        </p:txBody>
+      </p:sp>
+      <p:sp>
+        <p:nvSpPr>
+          <p:cNvPr id="20" name="Shape 18"/>
+          <p:cNvSpPr/>
+          <p:nvPr/>
+        </p:nvSpPr>
+        <p:spPr>
+          <a:xfrm>
+            <a:off x="6263640" y="2834640"/>
+            <a:ext cx="5532120" cy="2697480"/>
+          </a:xfrm>
+          <a:prstGeom prst="roundRect">
+            <a:avLst>
+              <a:gd name="adj" fmla="val 2712"/>
+            </a:avLst>
+          </a:prstGeom>
+          <a:solidFill>
+            <a:srgbClr val="141B33"/>
+          </a:solidFill>
+          <a:ln w="12700">
+            <a:solidFill>
+              <a:srgbClr val="141B33"/>
+            </a:solidFill>
+            <a:prstDash val="solid"/>
+          </a:ln>
+        </p:spPr>
+      </p:sp>
+      <p:sp>
+        <p:nvSpPr>
+          <p:cNvPr id="21" name="Text 19"/>
+          <p:cNvSpPr/>
+          <p:nvPr/>
+        </p:nvSpPr>
+        <p:spPr>
+          <a:xfrm>
+            <a:off x="6400800" y="2880360"/>
+            <a:ext cx="5303520" cy="320040"/>
+          </a:xfrm>
+          <a:prstGeom prst="rect">
+            <a:avLst/>
+          </a:prstGeom>
+          <a:noFill/>
+          <a:ln/>
+        </p:spPr>
+        <p:txBody>
+          <a:bodyPr wrap="square" lIns="0" tIns="0" rIns="0" bIns="0" rtlCol="0" anchor="ctr"/>
+          <a:lstStyle/>
+          <a:p>
+            <a:pPr indent="0" marL="0">
+              <a:buNone/>
+            </a:pPr>
+            <a:r>
+              <a:rPr lang="en-US" sz="1400" b="1" dirty="0">
+                <a:solidFill>
+                  <a:srgbClr val="2BD4C2"/>
+                </a:solidFill>
+                <a:latin typeface="Calibri" pitchFamily="34" charset="0"/>
+                <a:ea typeface="Calibri" pitchFamily="34" charset="-122"/>
+                <a:cs typeface="Calibri" pitchFamily="34" charset="-120"/>
+              </a:rPr>
+              <a:t>A real 1000-qubit gate-based quantum computer</a:t>
+            </a:r>
+            <a:endParaRPr lang="en-US" sz="1400" dirty="0"/>
+          </a:p>
+        </p:txBody>
+      </p:sp>
+      <p:sp>
+        <p:nvSpPr>
+          <p:cNvPr id="22" name="Text 20"/>
+          <p:cNvSpPr/>
+          <p:nvPr/>
+        </p:nvSpPr>
+        <p:spPr>
+          <a:xfrm>
+            <a:off x="6355080" y="3200400"/>
+            <a:ext cx="5394960" cy="2286000"/>
+          </a:xfrm>
+          <a:prstGeom prst="rect">
+            <a:avLst/>
+          </a:prstGeom>
+          <a:noFill/>
+          <a:ln/>
+        </p:spPr>
+        <p:txBody>
+          <a:bodyPr wrap="square" lIns="635" tIns="635" rIns="635" bIns="635" rtlCol="0" anchor="t"/>
+          <a:lstStyle/>
+          <a:p>
+            <a:pPr marL="342900" indent="-342900">
+              <a:spcAft>
+                <a:spcPts val="600"/>
+              </a:spcAft>
+              <a:buSzPct val="100000"/>
+              <a:buChar char="▸"/>
+            </a:pPr>
+            <a:r>
+              <a:rPr lang="en-US" sz="1100" dirty="0">
+                <a:solidFill>
+                  <a:srgbClr val="F5F7FF"/>
+                </a:solidFill>
+                <a:latin typeface="Calibri" pitchFamily="34" charset="0"/>
+                <a:ea typeface="Calibri" pitchFamily="34" charset="-122"/>
+                <a:cs typeface="Calibri" pitchFamily="34" charset="-120"/>
+              </a:rPr>
+              <a:t>Physical qubits exist (Sep 2026): IBM Condor 1 121, Atom Computing 1 200, Infleqtion 1 600; best 2-qubit fidelity 99.92% (Quantinuum Helios, 98 q)</a:t>
+            </a:r>
+            <a:endParaRPr lang="en-US" sz="1100" dirty="0"/>
+          </a:p>
+          <a:p>
+            <a:pPr marL="342900" indent="-342900">
+              <a:spcAft>
+                <a:spcPts val="600"/>
+              </a:spcAft>
+              <a:buSzPct val="100000"/>
+              <a:buChar char="▸"/>
+            </a:pPr>
+            <a:r>
+              <a:rPr lang="en-US" sz="1100" dirty="0">
+                <a:solidFill>
+                  <a:srgbClr val="F5F7FF"/>
+                </a:solidFill>
+                <a:latin typeface="Calibri" pitchFamily="34" charset="0"/>
+                <a:ea typeface="Calibri" pitchFamily="34" charset="-122"/>
+                <a:cs typeface="Calibri" pitchFamily="34" charset="-120"/>
+              </a:rPr>
+              <a:t>13 000 CX at 99.9% = ≈ 13 errors per shot, so the run must be error-corrected: 1000 logical qubits = 2 000 (2:1 colour code) to 100 000 (surface code) physical. Record today: 96 logical (QuEra). Roadmaps: 2028–2030</a:t>
+            </a:r>
+            <a:endParaRPr lang="en-US" sz="1100" dirty="0"/>
+          </a:p>
+          <a:p>
+            <a:pPr marL="342900" indent="-342900">
+              <a:spcAft>
+                <a:spcPts val="600"/>
+              </a:spcAft>
+              <a:buSzPct val="100000"/>
+              <a:buChar char="▸"/>
+            </a:pPr>
+            <a:r>
+              <a:rPr lang="en-US" sz="1100" dirty="0">
+                <a:solidFill>
+                  <a:srgbClr val="F5F7FF"/>
+                </a:solidFill>
+                <a:latin typeface="Calibri" pitchFamily="34" charset="0"/>
+                <a:ea typeface="Calibri" pitchFamily="34" charset="-122"/>
+                <a:cs typeface="Calibri" pitchFamily="34" charset="-120"/>
+              </a:rPr>
+              <a:t>Runtime once available: depth ~10² per layer, 1 shot ≈ 0.1 ms (superconducting) to 10 ms (ions); 10⁴ shots × 20 iterations = seconds to minutes; Wolfram warm start cuts the iterations</a:t>
+            </a:r>
+            <a:endParaRPr lang="en-US" sz="1100" dirty="0"/>
+          </a:p>
+          <a:p>
+            <a:pPr marL="342900" indent="-342900">
+              <a:spcAft>
+                <a:spcPts val="600"/>
+              </a:spcAft>
+              <a:buSzPct val="100000"/>
+              <a:buChar char="▸"/>
+            </a:pPr>
+            <a:r>
+              <a:rPr lang="en-US" sz="1100" dirty="0">
+                <a:solidFill>
+                  <a:srgbClr val="F5F7FF"/>
+                </a:solidFill>
+                <a:latin typeface="Calibri" pitchFamily="34" charset="0"/>
+                <a:ea typeface="Calibri" pitchFamily="34" charset="-122"/>
+                <a:cs typeface="Calibri" pitchFamily="34" charset="-120"/>
+              </a:rPr>
+              <a:t>Same Qmod program: Classiq synthesises for the target, simulator today, hardware backend tomorrow. No code change but the backend</a:t>
+            </a:r>
+            <a:endParaRPr lang="en-US" sz="1100" dirty="0"/>
+          </a:p>
+        </p:txBody>
+      </p:sp>
+      <p:sp>
+        <p:nvSpPr>
+          <p:cNvPr id="23" name="Shape 21"/>
+          <p:cNvSpPr/>
+          <p:nvPr/>
+        </p:nvSpPr>
+        <p:spPr>
+          <a:xfrm>
+            <a:off x="548640" y="5623560"/>
+            <a:ext cx="9692640" cy="685800"/>
+          </a:xfrm>
+          <a:prstGeom prst="roundRect">
+            <a:avLst>
+              <a:gd name="adj" fmla="val 8000"/>
+            </a:avLst>
+          </a:prstGeom>
+          <a:solidFill>
+            <a:srgbClr val="7C5CFF"/>
+          </a:solidFill>
+          <a:ln w="12700">
+            <a:solidFill>
+              <a:srgbClr val="7C5CFF"/>
+            </a:solidFill>
+            <a:prstDash val="solid"/>
+          </a:ln>
+        </p:spPr>
+      </p:sp>
+      <p:sp>
+        <p:nvSpPr>
+          <p:cNvPr id="24" name="Text 22"/>
+          <p:cNvSpPr/>
+          <p:nvPr/>
+        </p:nvSpPr>
+        <p:spPr>
+          <a:xfrm>
+            <a:off x="640080" y="5623560"/>
+            <a:ext cx="9509760" cy="685800"/>
+          </a:xfrm>
+          <a:prstGeom prst="rect">
+            <a:avLst/>
+          </a:prstGeom>
+          <a:noFill/>
+          <a:ln/>
+        </p:spPr>
+        <p:txBody>
+          <a:bodyPr wrap="square" lIns="381" tIns="381" rIns="381" bIns="381" rtlCol="0" anchor="ctr"/>
+          <a:lstStyle/>
+          <a:p>
+            <a:pPr indent="0" marL="0">
+              <a:buNone/>
+            </a:pPr>
+            <a:r>
+              <a:rPr lang="en-US" sz="1100" dirty="0">
+                <a:solidFill>
+                  <a:srgbClr val="F5F7FF"/>
+                </a:solidFill>
+                <a:latin typeface="Calibri" pitchFamily="34" charset="0"/>
+                <a:ea typeface="Calibri" pitchFamily="34" charset="-122"/>
+                <a:cs typeface="Calibri" pitchFamily="34" charset="-120"/>
+              </a:rPr>
+              <a:t>Classical tools give a good plan and stop there. At 12 qubits we measured 27× amplification and P(cost&lt;0) 2.4% → 53% → 67% with p; whether that persists at 1000 qubits cannot be checked classically. The only instrument that can run the algorithm at this size is the quantum computer itself.</a:t>
+            </a:r>
+            <a:endParaRPr lang="en-US" sz="1100" dirty="0"/>
+          </a:p>
+        </p:txBody>
+      </p:sp>
+    </p:spTree>
+  </p:cSld>
+  <p:clrMapOvr>
+    <a:masterClrMapping/>
+  </p:clrMapOvr>
+</p:sld>
+</file>
+
+<file path=ppt/slides/slide14.xml><?xml version="1.0" encoding="utf-8"?>
+<p:sld xmlns:a="http://schemas.openxmlformats.org/drawingml/2006/main" xmlns:r="http://schemas.openxmlformats.org/officeDocument/2006/relationships" xmlns:p="http://schemas.openxmlformats.org/presentationml/2006/main">
+  <p:cSld name="Slide 14">
+    <p:bg>
+      <p:bgPr>
+        <a:solidFill>
+          <a:srgbClr val="0B1020"/>
+        </a:solidFill>
+      </p:bgPr>
+    </p:bg>
+    <p:spTree>
+      <p:nvGrpSpPr>
+        <p:cNvPr id="1" name=""/>
+        <p:cNvGrpSpPr/>
+        <p:nvPr/>
+      </p:nvGrpSpPr>
+      <p:grpSpPr>
+        <a:xfrm>
+          <a:off x="0" y="0"/>
+          <a:ext cx="0" cy="0"/>
+          <a:chOff x="0" y="0"/>
+          <a:chExt cx="0" cy="0"/>
+        </a:xfrm>
+      </p:grpSpPr>
+      <p:sp>
+        <p:nvSpPr>
+          <p:cNvPr id="2" name="Shape 0"/>
+          <p:cNvSpPr/>
+          <p:nvPr/>
+        </p:nvSpPr>
+        <p:spPr>
+          <a:xfrm>
+            <a:off x="10378440" y="6035040"/>
+            <a:ext cx="1600200" cy="640080"/>
+          </a:xfrm>
+          <a:prstGeom prst="roundRect">
+            <a:avLst>
+              <a:gd name="adj" fmla="val 14286"/>
+            </a:avLst>
+          </a:prstGeom>
+          <a:solidFill>
+            <a:srgbClr val="7C5CFF"/>
+          </a:solidFill>
+          <a:ln w="12700">
+            <a:solidFill>
+              <a:srgbClr val="7C5CFF"/>
+            </a:solidFill>
+            <a:prstDash val="solid"/>
+          </a:ln>
+        </p:spPr>
+      </p:sp>
+      <p:sp>
+        <p:nvSpPr>
+          <p:cNvPr id="3" name="Text 1"/>
+          <p:cNvSpPr/>
+          <p:nvPr/>
+        </p:nvSpPr>
+        <p:spPr>
+          <a:xfrm>
+            <a:off x="10378440" y="6035040"/>
+            <a:ext cx="1600200" cy="640080"/>
+          </a:xfrm>
+          <a:prstGeom prst="rect">
+            <a:avLst/>
+          </a:prstGeom>
+          <a:noFill/>
+          <a:ln/>
+        </p:spPr>
+        <p:txBody>
+          <a:bodyPr wrap="square" lIns="0" tIns="0" rIns="0" bIns="0" rtlCol="0" anchor="ctr"/>
+          <a:lstStyle/>
+          <a:p>
+            <a:pPr algn="ctr" indent="0" marL="0">
+              <a:buNone/>
+            </a:pPr>
+            <a:r>
+              <a:rPr lang="en-US" sz="2800" b="1" dirty="0">
+                <a:solidFill>
+                  <a:srgbClr val="F5F7FF"/>
+                </a:solidFill>
+                <a:latin typeface="Calibri" pitchFamily="34" charset="0"/>
+                <a:ea typeface="Calibri" pitchFamily="34" charset="-122"/>
+                <a:cs typeface="Calibri" pitchFamily="34" charset="-120"/>
+              </a:rPr>
+              <a:t>14 / 14</a:t>
+            </a:r>
+            <a:endParaRPr lang="en-US" sz="2800" dirty="0"/>
+          </a:p>
+        </p:txBody>
+      </p:sp>
+      <p:sp>
+        <p:nvSpPr>
+          <p:cNvPr id="4" name="Shape 2"/>
+          <p:cNvSpPr/>
+          <p:nvPr/>
+        </p:nvSpPr>
+        <p:spPr>
+          <a:xfrm>
+            <a:off x="0" y="0"/>
+            <a:ext cx="164592" cy="6858000"/>
+          </a:xfrm>
+          <a:prstGeom prst="rect">
+            <a:avLst/>
+          </a:prstGeom>
+          <a:solidFill>
+            <a:srgbClr val="7C5CFF"/>
+          </a:solidFill>
+          <a:ln/>
+        </p:spPr>
+      </p:sp>
+      <p:sp>
+        <p:nvSpPr>
+          <p:cNvPr id="5" name="Text 3"/>
+          <p:cNvSpPr/>
+          <p:nvPr/>
+        </p:nvSpPr>
+        <p:spPr>
+          <a:xfrm>
+            <a:off x="548640" y="320040"/>
+            <a:ext cx="10972800" cy="274320"/>
+          </a:xfrm>
+          <a:prstGeom prst="rect">
+            <a:avLst/>
+          </a:prstGeom>
+          <a:noFill/>
+          <a:ln/>
+        </p:spPr>
+        <p:txBody>
+          <a:bodyPr wrap="square" lIns="0" tIns="0" rIns="0" bIns="0" rtlCol="0" anchor="ctr"/>
+          <a:lstStyle/>
+          <a:p>
+            <a:pPr indent="0" marL="0">
+              <a:buNone/>
+            </a:pPr>
+            <a:r>
+              <a:rPr lang="en-US" sz="1100" b="1" spc="200" kern="0" dirty="0">
+                <a:solidFill>
+                  <a:srgbClr val="2BD4C2"/>
+                </a:solidFill>
+                <a:latin typeface="Calibri" pitchFamily="34" charset="0"/>
+                <a:ea typeface="Calibri" pitchFamily="34" charset="-122"/>
+                <a:cs typeface="Calibri" pitchFamily="34" charset="-120"/>
+              </a:rPr>
+              <a:t>SLIDE 14 / 14   |   BENCHMARK</a:t>
             </a:r>
             <a:endParaRPr lang="en-US" sz="1100" dirty="0"/>
           </a:p>
@@ -5117,7 +6166,7 @@
                 <a:ea typeface="Calibri" pitchFamily="34" charset="-122"/>
                 <a:cs typeface="Calibri" pitchFamily="34" charset="-120"/>
               </a:rPr>
-              <a:t>2 / 13</a:t>
+              <a:t>2 / 14</a:t>
             </a:r>
             <a:endParaRPr lang="en-US" sz="2800" dirty="0"/>
           </a:p>
@@ -5176,7 +6225,7 @@
                 <a:ea typeface="Calibri" pitchFamily="34" charset="-122"/>
                 <a:cs typeface="Calibri" pitchFamily="34" charset="-120"/>
               </a:rPr>
-              <a:t>SLIDE 2 / 13   |   MOTIVATION</a:t>
+              <a:t>SLIDE 2 / 14   |   MOTIVATION</a:t>
             </a:r>
             <a:endParaRPr lang="en-US" sz="1100" dirty="0"/>
           </a:p>
@@ -5621,7 +6670,7 @@
                 <a:ea typeface="Calibri" pitchFamily="34" charset="-122"/>
                 <a:cs typeface="Calibri" pitchFamily="34" charset="-120"/>
               </a:rPr>
-              <a:t>3 / 13</a:t>
+              <a:t>3 / 14</a:t>
             </a:r>
             <a:endParaRPr lang="en-US" sz="2800" dirty="0"/>
           </a:p>
@@ -5680,7 +6729,7 @@
                 <a:ea typeface="Calibri" pitchFamily="34" charset="-122"/>
                 <a:cs typeface="Calibri" pitchFamily="34" charset="-120"/>
               </a:rPr>
-              <a:t>SLIDE 3 / 13   |   ARCHITECTURE</a:t>
+              <a:t>SLIDE 3 / 14   |   ARCHITECTURE</a:t>
             </a:r>
             <a:endParaRPr lang="en-US" sz="1100" dirty="0"/>
           </a:p>
@@ -6727,7 +7776,7 @@
                 <a:ea typeface="Calibri" pitchFamily="34" charset="-122"/>
                 <a:cs typeface="Calibri" pitchFamily="34" charset="-120"/>
               </a:rPr>
-              <a:t>4 / 13</a:t>
+              <a:t>4 / 14</a:t>
             </a:r>
             <a:endParaRPr lang="en-US" sz="2800" dirty="0"/>
           </a:p>
@@ -6786,7 +7835,7 @@
                 <a:ea typeface="Calibri" pitchFamily="34" charset="-122"/>
                 <a:cs typeface="Calibri" pitchFamily="34" charset="-120"/>
               </a:rPr>
-              <a:t>SLIDE 4 / 13   |   LEAF PROBLEM</a:t>
+              <a:t>SLIDE 4 / 14   |   LEAF PROBLEM</a:t>
             </a:r>
             <a:endParaRPr lang="en-US" sz="1100" dirty="0"/>
           </a:p>
@@ -7152,7 +8201,7 @@
                 <a:ea typeface="Calibri" pitchFamily="34" charset="-122"/>
                 <a:cs typeface="Calibri" pitchFamily="34" charset="-120"/>
               </a:rPr>
-              <a:t>5 / 13</a:t>
+              <a:t>5 / 14</a:t>
             </a:r>
             <a:endParaRPr lang="en-US" sz="2800" dirty="0"/>
           </a:p>
@@ -7211,7 +8260,7 @@
                 <a:ea typeface="Calibri" pitchFamily="34" charset="-122"/>
                 <a:cs typeface="Calibri" pitchFamily="34" charset="-120"/>
               </a:rPr>
-              <a:t>SLIDE 5 / 13   |   MODEL</a:t>
+              <a:t>SLIDE 5 / 14   |   MODEL</a:t>
             </a:r>
             <a:endParaRPr lang="en-US" sz="1100" dirty="0"/>
           </a:p>
@@ -7946,7 +8995,7 @@
                 <a:ea typeface="Calibri" pitchFamily="34" charset="-122"/>
                 <a:cs typeface="Calibri" pitchFamily="34" charset="-120"/>
               </a:rPr>
-              <a:t>6 / 13</a:t>
+              <a:t>6 / 14</a:t>
             </a:r>
             <a:endParaRPr lang="en-US" sz="2800" dirty="0"/>
           </a:p>
@@ -8005,7 +9054,7 @@
                 <a:ea typeface="Calibri" pitchFamily="34" charset="-122"/>
                 <a:cs typeface="Calibri" pitchFamily="34" charset="-120"/>
               </a:rPr>
-              <a:t>SLIDE 6 / 13   |   GATES</a:t>
+              <a:t>SLIDE 6 / 14   |   GATES</a:t>
             </a:r>
             <a:endParaRPr lang="en-US" sz="1100" dirty="0"/>
           </a:p>
@@ -8710,7 +9759,7 @@
                 <a:ea typeface="Calibri" pitchFamily="34" charset="-122"/>
                 <a:cs typeface="Calibri" pitchFamily="34" charset="-120"/>
               </a:rPr>
-              <a:t>7 / 13</a:t>
+              <a:t>7 / 14</a:t>
             </a:r>
             <a:endParaRPr lang="en-US" sz="2800" dirty="0"/>
           </a:p>
@@ -8769,7 +9818,7 @@
                 <a:ea typeface="Calibri" pitchFamily="34" charset="-122"/>
                 <a:cs typeface="Calibri" pitchFamily="34" charset="-120"/>
               </a:rPr>
-              <a:t>SLIDE 7 / 13   |   SIMULATION</a:t>
+              <a:t>SLIDE 7 / 14   |   SIMULATION</a:t>
             </a:r>
             <a:endParaRPr lang="en-US" sz="1100" dirty="0"/>
           </a:p>
@@ -9534,7 +10583,7 @@
                 <a:ea typeface="Calibri" pitchFamily="34" charset="-122"/>
                 <a:cs typeface="Calibri" pitchFamily="34" charset="-120"/>
               </a:rPr>
-              <a:t>8 / 13</a:t>
+              <a:t>8 / 14</a:t>
             </a:r>
             <a:endParaRPr lang="en-US" sz="2800" dirty="0"/>
           </a:p>
@@ -9593,7 +10642,7 @@
                 <a:ea typeface="Calibri" pitchFamily="34" charset="-122"/>
                 <a:cs typeface="Calibri" pitchFamily="34" charset="-120"/>
               </a:rPr>
-              <a:t>SLIDE 8 / 13   |   RESULT</a:t>
+              <a:t>SLIDE 8 / 14   |   RESULT</a:t>
             </a:r>
             <a:endParaRPr lang="en-US" sz="1100" dirty="0"/>
           </a:p>
@@ -10301,7 +11350,7 @@
                 <a:ea typeface="Calibri" pitchFamily="34" charset="-122"/>
                 <a:cs typeface="Calibri" pitchFamily="34" charset="-120"/>
               </a:rPr>
-              <a:t>9 / 13</a:t>
+              <a:t>9 / 14</a:t>
             </a:r>
             <a:endParaRPr lang="en-US" sz="2800" dirty="0"/>
           </a:p>
@@ -10360,7 +11409,7 @@
                 <a:ea typeface="Calibri" pitchFamily="34" charset="-122"/>
                 <a:cs typeface="Calibri" pitchFamily="34" charset="-120"/>
               </a:rPr>
-              <a:t>SLIDE 9 / 13   |   VIDEO</a:t>
+              <a:t>SLIDE 9 / 14   |   VIDEO</a:t>
             </a:r>
             <a:endParaRPr lang="en-US" sz="1100" dirty="0"/>
           </a:p>
